--- a/docs/public/course-assets/course-pptx/em-005.pptx
+++ b/docs/public/course-assets/course-pptx/em-005.pptx
@@ -2,25 +2,25 @@
 <file path=ppt/presentation.xml><?xml version="1.0" encoding="utf-8"?>
 <p:presentation xmlns:p="http://schemas.openxmlformats.org/presentationml/2006/main">
   <p:sldMasterIdLst>
-    <p:sldMasterId xmlns:r="http://schemas.openxmlformats.org/officeDocument/2006/relationships" id="2147483648" r:id="Rf46917a2041a4a70"/>
+    <p:sldMasterId xmlns:r="http://schemas.openxmlformats.org/officeDocument/2006/relationships" id="2147483648" r:id="Reb4eb99ec3354943"/>
   </p:sldMasterIdLst>
   <p:notesMasterIdLst>
-    <p:notesMasterId xmlns:r="http://schemas.openxmlformats.org/officeDocument/2006/relationships" r:id="Rc952e97b89ee45bf"/>
+    <p:notesMasterId xmlns:r="http://schemas.openxmlformats.org/officeDocument/2006/relationships" r:id="R2d12a45e45364188"/>
   </p:notesMasterIdLst>
   <p:sldIdLst>
-    <p:sldId xmlns:r="http://schemas.openxmlformats.org/officeDocument/2006/relationships" id="256" r:id="Rd99bfcaaccfb4a4a"/>
-    <p:sldId xmlns:r="http://schemas.openxmlformats.org/officeDocument/2006/relationships" id="257" r:id="Rc90a3cc611454209"/>
-    <p:sldId xmlns:r="http://schemas.openxmlformats.org/officeDocument/2006/relationships" id="258" r:id="Rafafef610a434db9"/>
-    <p:sldId xmlns:r="http://schemas.openxmlformats.org/officeDocument/2006/relationships" id="259" r:id="R44231197ae7940cc"/>
-    <p:sldId xmlns:r="http://schemas.openxmlformats.org/officeDocument/2006/relationships" id="260" r:id="R6352f44eb1a14cb5"/>
-    <p:sldId xmlns:r="http://schemas.openxmlformats.org/officeDocument/2006/relationships" id="261" r:id="Re39e22b33c444209"/>
-    <p:sldId xmlns:r="http://schemas.openxmlformats.org/officeDocument/2006/relationships" id="262" r:id="R8ab30ad63afe48c3"/>
-    <p:sldId xmlns:r="http://schemas.openxmlformats.org/officeDocument/2006/relationships" id="263" r:id="R21d0b38038234093"/>
-    <p:sldId xmlns:r="http://schemas.openxmlformats.org/officeDocument/2006/relationships" id="264" r:id="R7a78a61b39434de1"/>
-    <p:sldId xmlns:r="http://schemas.openxmlformats.org/officeDocument/2006/relationships" id="265" r:id="Re5a925f3311045f9"/>
-    <p:sldId xmlns:r="http://schemas.openxmlformats.org/officeDocument/2006/relationships" id="266" r:id="Ref44daaa8e874888"/>
-    <p:sldId xmlns:r="http://schemas.openxmlformats.org/officeDocument/2006/relationships" id="267" r:id="Rf21938bd0b084ad7"/>
-    <p:sldId xmlns:r="http://schemas.openxmlformats.org/officeDocument/2006/relationships" id="268" r:id="R86450a6445da44c2"/>
+    <p:sldId xmlns:r="http://schemas.openxmlformats.org/officeDocument/2006/relationships" id="256" r:id="R96e1192eb695434d"/>
+    <p:sldId xmlns:r="http://schemas.openxmlformats.org/officeDocument/2006/relationships" id="257" r:id="R18e1d39c9e3e4e85"/>
+    <p:sldId xmlns:r="http://schemas.openxmlformats.org/officeDocument/2006/relationships" id="258" r:id="R1976f723c1d0421d"/>
+    <p:sldId xmlns:r="http://schemas.openxmlformats.org/officeDocument/2006/relationships" id="259" r:id="Rf9b089b30aca4e76"/>
+    <p:sldId xmlns:r="http://schemas.openxmlformats.org/officeDocument/2006/relationships" id="260" r:id="R5579700cdd394729"/>
+    <p:sldId xmlns:r="http://schemas.openxmlformats.org/officeDocument/2006/relationships" id="261" r:id="Rfe474b3c1dc14e2d"/>
+    <p:sldId xmlns:r="http://schemas.openxmlformats.org/officeDocument/2006/relationships" id="262" r:id="Rf170b4f7fbf04250"/>
+    <p:sldId xmlns:r="http://schemas.openxmlformats.org/officeDocument/2006/relationships" id="263" r:id="Re4a1fae39d724251"/>
+    <p:sldId xmlns:r="http://schemas.openxmlformats.org/officeDocument/2006/relationships" id="264" r:id="Rc7f6ff94015c49c9"/>
+    <p:sldId xmlns:r="http://schemas.openxmlformats.org/officeDocument/2006/relationships" id="265" r:id="R3e8da4488fc64711"/>
+    <p:sldId xmlns:r="http://schemas.openxmlformats.org/officeDocument/2006/relationships" id="266" r:id="R182ed07fdc324129"/>
+    <p:sldId xmlns:r="http://schemas.openxmlformats.org/officeDocument/2006/relationships" id="267" r:id="R34eb72756d844468"/>
+    <p:sldId xmlns:r="http://schemas.openxmlformats.org/officeDocument/2006/relationships" id="268" r:id="R8aaba6773d244679"/>
   </p:sldIdLst>
   <p:sldSz cx="12192000" cy="6858000"/>
   <p:notesSz cx="6858000" cy="9144000"/>
@@ -1405,7 +1405,7 @@
   </p:cSld>
   <p:clrMap bg1="lt1" tx1="dk1" bg2="lt2" tx2="dk2" accent1="accent1" accent2="accent2" accent3="accent3" accent4="accent4" accent5="accent5" accent6="accent6" hlink="hlink" folHlink="folHlink"/>
   <p:sldLayoutIdLst>
-    <p:sldLayoutId xmlns:r="http://schemas.openxmlformats.org/officeDocument/2006/relationships" id="2147483649" r:id="Rbd886af26c084397"/>
+    <p:sldLayoutId xmlns:r="http://schemas.openxmlformats.org/officeDocument/2006/relationships" id="2147483649" r:id="R56c5b1e450e54c92"/>
   </p:sldLayoutIdLst>
   <p:txStyles>
     <p:titleStyle>
@@ -1956,7 +1956,7 @@
           <p:cNvPr id="1" name="cover-rule">
             <a:extLst xmlns:a="http://schemas.openxmlformats.org/drawingml/2006/main">
               <a:ext uri="{FF2B5EF4-FFF2-40B4-BE49-F238E27FC236}">
-                <a16:creationId xmlns:a16="http://schemas.microsoft.com/office/drawing/2014/main" id="{9E1BBCF4-DD19-4FA4-B9CF-58203B4614BA}"/>
+                <a16:creationId xmlns:a16="http://schemas.microsoft.com/office/drawing/2014/main" id="{5E118CF3-9B2C-4DC5-AA4F-4D4DA2E4410D}"/>
               </a:ext>
             </a:extLst>
           </p:cNvPr>
@@ -1989,7 +1989,7 @@
           <p:cNvPr id="2" name="cover-ring-1">
             <a:extLst xmlns:a="http://schemas.openxmlformats.org/drawingml/2006/main">
               <a:ext uri="{FF2B5EF4-FFF2-40B4-BE49-F238E27FC236}">
-                <a16:creationId xmlns:a16="http://schemas.microsoft.com/office/drawing/2014/main" id="{8EEFF8A4-1D67-43AB-8396-06EA72AC35FD}"/>
+                <a16:creationId xmlns:a16="http://schemas.microsoft.com/office/drawing/2014/main" id="{E1C584C5-8DF2-4FD1-BB9A-72773A54F5F6}"/>
               </a:ext>
             </a:extLst>
           </p:cNvPr>
@@ -2020,7 +2020,7 @@
           <p:cNvPr id="3" name="cover-ring-2">
             <a:extLst xmlns:a="http://schemas.openxmlformats.org/drawingml/2006/main">
               <a:ext uri="{FF2B5EF4-FFF2-40B4-BE49-F238E27FC236}">
-                <a16:creationId xmlns:a16="http://schemas.microsoft.com/office/drawing/2014/main" id="{0A6CC1A6-5C4B-426E-B3FB-A80A9D2A58E1}"/>
+                <a16:creationId xmlns:a16="http://schemas.microsoft.com/office/drawing/2014/main" id="{C2A6AB45-0535-48BA-8749-A4AE90E23072}"/>
               </a:ext>
             </a:extLst>
           </p:cNvPr>
@@ -2051,7 +2051,7 @@
           <p:cNvPr id="4" name="cover-core">
             <a:extLst xmlns:a="http://schemas.openxmlformats.org/drawingml/2006/main">
               <a:ext uri="{FF2B5EF4-FFF2-40B4-BE49-F238E27FC236}">
-                <a16:creationId xmlns:a16="http://schemas.microsoft.com/office/drawing/2014/main" id="{181AC954-0F5C-484D-B1A1-166BD9EF744F}"/>
+                <a16:creationId xmlns:a16="http://schemas.microsoft.com/office/drawing/2014/main" id="{FC65BD32-E66D-42EC-81B5-995B2064FECB}"/>
               </a:ext>
             </a:extLst>
           </p:cNvPr>
@@ -2084,7 +2084,7 @@
           <p:cNvPr id="5" name="cover-line-1">
             <a:extLst xmlns:a="http://schemas.openxmlformats.org/drawingml/2006/main">
               <a:ext uri="{FF2B5EF4-FFF2-40B4-BE49-F238E27FC236}">
-                <a16:creationId xmlns:a16="http://schemas.microsoft.com/office/drawing/2014/main" id="{229D2B00-25D0-48EC-B937-AE2405454196}"/>
+                <a16:creationId xmlns:a16="http://schemas.microsoft.com/office/drawing/2014/main" id="{9028EF61-F180-4649-95A6-46264F20F8D8}"/>
               </a:ext>
             </a:extLst>
           </p:cNvPr>
@@ -2115,7 +2115,7 @@
           <p:cNvPr id="6" name="cover-line-2">
             <a:extLst xmlns:a="http://schemas.openxmlformats.org/drawingml/2006/main">
               <a:ext uri="{FF2B5EF4-FFF2-40B4-BE49-F238E27FC236}">
-                <a16:creationId xmlns:a16="http://schemas.microsoft.com/office/drawing/2014/main" id="{011E38CA-CC35-4C7D-9768-A7ED42E0B54C}"/>
+                <a16:creationId xmlns:a16="http://schemas.microsoft.com/office/drawing/2014/main" id="{9BAEA58A-6427-4152-8088-C13CC0254FD9}"/>
               </a:ext>
             </a:extLst>
           </p:cNvPr>
@@ -2146,7 +2146,7 @@
           <p:cNvPr id="7" name="cover-eyebrow">
             <a:extLst xmlns:a="http://schemas.openxmlformats.org/drawingml/2006/main">
               <a:ext uri="{FF2B5EF4-FFF2-40B4-BE49-F238E27FC236}">
-                <a16:creationId xmlns:a16="http://schemas.microsoft.com/office/drawing/2014/main" id="{6C205FDC-43C0-4A6A-B000-0E3C063B062A}"/>
+                <a16:creationId xmlns:a16="http://schemas.microsoft.com/office/drawing/2014/main" id="{007827BC-5580-4888-A9BC-A41AEFF116BC}"/>
               </a:ext>
             </a:extLst>
           </p:cNvPr>
@@ -2204,7 +2204,7 @@
           <p:cNvPr id="8" name="cover-title">
             <a:extLst xmlns:a="http://schemas.openxmlformats.org/drawingml/2006/main">
               <a:ext uri="{FF2B5EF4-FFF2-40B4-BE49-F238E27FC236}">
-                <a16:creationId xmlns:a16="http://schemas.microsoft.com/office/drawing/2014/main" id="{6957A068-7CB7-4D7D-BC89-4182E1389FBE}"/>
+                <a16:creationId xmlns:a16="http://schemas.microsoft.com/office/drawing/2014/main" id="{3A2BA079-1081-4098-B138-3972DCA81300}"/>
               </a:ext>
             </a:extLst>
           </p:cNvPr>
@@ -2262,7 +2262,7 @@
           <p:cNvPr id="9" name="cover-subtitle">
             <a:extLst xmlns:a="http://schemas.openxmlformats.org/drawingml/2006/main">
               <a:ext uri="{FF2B5EF4-FFF2-40B4-BE49-F238E27FC236}">
-                <a16:creationId xmlns:a16="http://schemas.microsoft.com/office/drawing/2014/main" id="{1C766CE0-5115-49AF-834B-B3B7DDD7CE94}"/>
+                <a16:creationId xmlns:a16="http://schemas.microsoft.com/office/drawing/2014/main" id="{D57040BF-B95C-4A50-BB8B-053DE65013E9}"/>
               </a:ext>
             </a:extLst>
           </p:cNvPr>
@@ -2324,7 +2324,7 @@
           <p:cNvPr id="10" name="cover-lead">
             <a:extLst xmlns:a="http://schemas.openxmlformats.org/drawingml/2006/main">
               <a:ext uri="{FF2B5EF4-FFF2-40B4-BE49-F238E27FC236}">
-                <a16:creationId xmlns:a16="http://schemas.microsoft.com/office/drawing/2014/main" id="{9CA3E149-6E5B-407D-9418-86749C69269C}"/>
+                <a16:creationId xmlns:a16="http://schemas.microsoft.com/office/drawing/2014/main" id="{C4220F1E-17F6-4FAB-AB1D-9ED72F209995}"/>
               </a:ext>
             </a:extLst>
           </p:cNvPr>
@@ -2349,7 +2349,7 @@
         </p:spPr>
         <p:txBody>
           <a:bodyPr xmlns:a="http://schemas.openxmlformats.org/drawingml/2006/main" lIns="0" tIns="0" rIns="0" bIns="0" anchor="t">
-            <a:normAutofit fontScale="89917"/>
+            <a:normAutofit fontScale="100000"/>
           </a:bodyPr>
           <a:lstStyle xmlns:a="http://schemas.openxmlformats.org/drawingml/2006/main"/>
           <a:p xmlns:a="http://schemas.openxmlformats.org/drawingml/2006/main">
@@ -2372,7 +2372,7 @@
                 <a:ea typeface="PingFang SC"/>
                 <a:cs typeface="PingFang SC"/>
               </a:rPr>
-              <a:t>ROS2 让传感器、控制器、可视化和应用程序通过明确接口协作，但“节点都启动了”并不代表机器人适合动作。真实设备还受到电量、网络时延、地面摩擦、关节温度…</a:t>
+              <a:t>ROS2 让传感器、控制器、可视化和应用程序通过明确接口协作；但“节点都启动了”并不代表机器人适合动作</a:t>
             </a:r>
           </a:p>
         </p:txBody>
@@ -2382,7 +2382,7 @@
           <p:cNvPr id="11" name="cover-course">
             <a:extLst xmlns:a="http://schemas.openxmlformats.org/drawingml/2006/main">
               <a:ext uri="{FF2B5EF4-FFF2-40B4-BE49-F238E27FC236}">
-                <a16:creationId xmlns:a16="http://schemas.microsoft.com/office/drawing/2014/main" id="{D368684A-9B25-46CA-9047-846107C9CECD}"/>
+                <a16:creationId xmlns:a16="http://schemas.microsoft.com/office/drawing/2014/main" id="{E829237A-069F-4C0A-B9DB-DCDA7B729A33}"/>
               </a:ext>
             </a:extLst>
           </p:cNvPr>
@@ -2440,7 +2440,7 @@
           <p:cNvPr id="12" name="cover-id">
             <a:extLst xmlns:a="http://schemas.openxmlformats.org/drawingml/2006/main">
               <a:ext uri="{FF2B5EF4-FFF2-40B4-BE49-F238E27FC236}">
-                <a16:creationId xmlns:a16="http://schemas.microsoft.com/office/drawing/2014/main" id="{06D9CA73-C119-4117-A12A-104F9B14DAF5}"/>
+                <a16:creationId xmlns:a16="http://schemas.microsoft.com/office/drawing/2014/main" id="{0CE33854-FC2A-4E5D-A4B3-94780B6CDD8B}"/>
               </a:ext>
             </a:extLst>
           </p:cNvPr>
@@ -2496,7 +2496,7 @@
     </p:spTree>
     <p:extLst>
       <p:ext uri="{BB962C8B-B14F-4D97-AF65-F5344CB8AC3E}">
-        <p14:creationId xmlns:p14="http://schemas.microsoft.com/office/powerpoint/2010/main" val="1184075410"/>
+        <p14:creationId xmlns:p14="http://schemas.microsoft.com/office/powerpoint/2010/main" val="2122014573"/>
       </p:ext>
     </p:extLst>
   </p:cSld>
@@ -2527,7 +2527,7 @@
           <p:cNvPr id="1" name="s10-rule">
             <a:extLst xmlns:a="http://schemas.openxmlformats.org/drawingml/2006/main">
               <a:ext uri="{FF2B5EF4-FFF2-40B4-BE49-F238E27FC236}">
-                <a16:creationId xmlns:a16="http://schemas.microsoft.com/office/drawing/2014/main" id="{B9FBF629-550D-40F4-8425-DC75CC27EAF6}"/>
+                <a16:creationId xmlns:a16="http://schemas.microsoft.com/office/drawing/2014/main" id="{7DC5BAC7-3099-4C43-AE63-ED591F464B9E}"/>
               </a:ext>
             </a:extLst>
           </p:cNvPr>
@@ -2560,7 +2560,7 @@
           <p:cNvPr id="2" name="s10-eyebrow">
             <a:extLst xmlns:a="http://schemas.openxmlformats.org/drawingml/2006/main">
               <a:ext uri="{FF2B5EF4-FFF2-40B4-BE49-F238E27FC236}">
-                <a16:creationId xmlns:a16="http://schemas.microsoft.com/office/drawing/2014/main" id="{24003627-F80A-462C-BB6E-D1E587085FD0}"/>
+                <a16:creationId xmlns:a16="http://schemas.microsoft.com/office/drawing/2014/main" id="{3B9A877A-AC02-4FED-8C67-253DB3EF244F}"/>
               </a:ext>
             </a:extLst>
           </p:cNvPr>
@@ -2618,7 +2618,7 @@
           <p:cNvPr id="3" name="s10-title">
             <a:extLst xmlns:a="http://schemas.openxmlformats.org/drawingml/2006/main">
               <a:ext uri="{FF2B5EF4-FFF2-40B4-BE49-F238E27FC236}">
-                <a16:creationId xmlns:a16="http://schemas.microsoft.com/office/drawing/2014/main" id="{AEBDA760-DFDB-4E89-8D57-709E3789A39D}"/>
+                <a16:creationId xmlns:a16="http://schemas.microsoft.com/office/drawing/2014/main" id="{5EFFD97D-D220-4BD8-8854-786168BCEFAF}"/>
               </a:ext>
             </a:extLst>
           </p:cNvPr>
@@ -2666,7 +2666,7 @@
                 <a:ea typeface="PingFang SC"/>
                 <a:cs typeface="PingFang SC"/>
               </a:rPr>
-              <a:t>无需真机的固定 trace 验收必须经过边界验证</a:t>
+              <a:t>固定 trace 先验证控制契约，再谈真机能力</a:t>
             </a:r>
           </a:p>
         </p:txBody>
@@ -2676,7 +2676,7 @@
           <p:cNvPr id="4" name="s10-footer">
             <a:extLst xmlns:a="http://schemas.openxmlformats.org/drawingml/2006/main">
               <a:ext uri="{FF2B5EF4-FFF2-40B4-BE49-F238E27FC236}">
-                <a16:creationId xmlns:a16="http://schemas.microsoft.com/office/drawing/2014/main" id="{329C9B07-9BFD-4DDE-A885-74A3036B4C66}"/>
+                <a16:creationId xmlns:a16="http://schemas.microsoft.com/office/drawing/2014/main" id="{DD141B5C-1A9E-4557-944E-00455D4A0520}"/>
               </a:ext>
             </a:extLst>
           </p:cNvPr>
@@ -2707,7 +2707,7 @@
           <p:cNvPr id="5" name="s10-identity">
             <a:extLst xmlns:a="http://schemas.openxmlformats.org/drawingml/2006/main">
               <a:ext uri="{FF2B5EF4-FFF2-40B4-BE49-F238E27FC236}">
-                <a16:creationId xmlns:a16="http://schemas.microsoft.com/office/drawing/2014/main" id="{40581EE3-996E-42ED-9B0E-E2FCDE50ECC8}"/>
+                <a16:creationId xmlns:a16="http://schemas.microsoft.com/office/drawing/2014/main" id="{106DF7D4-258A-493D-9B81-0B4ED3571FCC}"/>
               </a:ext>
             </a:extLst>
           </p:cNvPr>
@@ -2765,7 +2765,7 @@
           <p:cNvPr id="6" name="case-title">
             <a:extLst xmlns:a="http://schemas.openxmlformats.org/drawingml/2006/main">
               <a:ext uri="{FF2B5EF4-FFF2-40B4-BE49-F238E27FC236}">
-                <a16:creationId xmlns:a16="http://schemas.microsoft.com/office/drawing/2014/main" id="{263B734A-E206-4966-9E78-A09548160645}"/>
+                <a16:creationId xmlns:a16="http://schemas.microsoft.com/office/drawing/2014/main" id="{B126914C-B3CB-4D63-89C3-B643FA712F1E}"/>
               </a:ext>
             </a:extLst>
           </p:cNvPr>
@@ -2829,23 +2829,23 @@
           <p:cNvPr id="7" name="case-row-0">
             <a:extLst xmlns:a="http://schemas.openxmlformats.org/drawingml/2006/main">
               <a:ext uri="{FF2B5EF4-FFF2-40B4-BE49-F238E27FC236}">
-                <a16:creationId xmlns:a16="http://schemas.microsoft.com/office/drawing/2014/main" id="{A18BA073-44D8-455D-A811-F4288003D124}"/>
-              </a:ext>
-            </a:extLst>
-          </p:cNvPr>
-          <p:cNvSpPr>
-            <a:spLocks xmlns:a="http://schemas.openxmlformats.org/drawingml/2006/main" noGrp="1"/>
-          </p:cNvSpPr>
-          <p:nvPr/>
-        </p:nvSpPr>
-        <p:spPr>
-          <a:xfrm xmlns:a="http://schemas.openxmlformats.org/drawingml/2006/main">
-            <a:off x="4286250" y="2228850"/>
-            <a:ext cx="6534150" cy="1238250"/>
+                <a16:creationId xmlns:a16="http://schemas.microsoft.com/office/drawing/2014/main" id="{88EF6F69-7A7A-4F05-93E3-E84433197643}"/>
+              </a:ext>
+            </a:extLst>
+          </p:cNvPr>
+          <p:cNvSpPr>
+            <a:spLocks xmlns:a="http://schemas.openxmlformats.org/drawingml/2006/main" noGrp="1"/>
+          </p:cNvSpPr>
+          <p:nvPr/>
+        </p:nvSpPr>
+        <p:spPr>
+          <a:xfrm xmlns:a="http://schemas.openxmlformats.org/drawingml/2006/main">
+            <a:off x="4286250" y="2057400"/>
+            <a:ext cx="6534150" cy="838200"/>
           </a:xfrm>
           <a:prstGeom xmlns:a="http://schemas.openxmlformats.org/drawingml/2006/main" prst="roundRect">
             <a:avLst>
-              <a:gd name="adj" fmla="val 10000"/>
+              <a:gd name="adj" fmla="val 14773"/>
             </a:avLst>
           </a:prstGeom>
           <a:solidFill xmlns:a="http://schemas.openxmlformats.org/drawingml/2006/main">
@@ -2883,7 +2883,7 @@
                 <a:ea typeface="PingFang SC"/>
                 <a:cs typeface="PingFang SC"/>
               </a:rPr>
-              <a:t>场景｜按上面的契约判断以下记录，预期结果是唯一的</a:t>
+              <a:t>结果｜按上面的契约判断以下记录，预期结果是唯一的</a:t>
             </a:r>
           </a:p>
         </p:txBody>
@@ -2893,23 +2893,87 @@
           <p:cNvPr id="8" name="case-row-1">
             <a:extLst xmlns:a="http://schemas.openxmlformats.org/drawingml/2006/main">
               <a:ext uri="{FF2B5EF4-FFF2-40B4-BE49-F238E27FC236}">
-                <a16:creationId xmlns:a16="http://schemas.microsoft.com/office/drawing/2014/main" id="{79874DB6-D8FA-46A9-B936-624BE0236581}"/>
-              </a:ext>
-            </a:extLst>
-          </p:cNvPr>
-          <p:cNvSpPr>
-            <a:spLocks xmlns:a="http://schemas.openxmlformats.org/drawingml/2006/main" noGrp="1"/>
-          </p:cNvSpPr>
-          <p:nvPr/>
-        </p:nvSpPr>
-        <p:spPr>
-          <a:xfrm xmlns:a="http://schemas.openxmlformats.org/drawingml/2006/main">
-            <a:off x="4286250" y="3714750"/>
-            <a:ext cx="6534150" cy="1238250"/>
+                <a16:creationId xmlns:a16="http://schemas.microsoft.com/office/drawing/2014/main" id="{209F506A-A288-4B56-B5AA-96E70737FD6C}"/>
+              </a:ext>
+            </a:extLst>
+          </p:cNvPr>
+          <p:cNvSpPr>
+            <a:spLocks xmlns:a="http://schemas.openxmlformats.org/drawingml/2006/main" noGrp="1"/>
+          </p:cNvSpPr>
+          <p:nvPr/>
+        </p:nvSpPr>
+        <p:spPr>
+          <a:xfrm xmlns:a="http://schemas.openxmlformats.org/drawingml/2006/main">
+            <a:off x="4286250" y="3086100"/>
+            <a:ext cx="6534150" cy="838200"/>
           </a:xfrm>
           <a:prstGeom xmlns:a="http://schemas.openxmlformats.org/drawingml/2006/main" prst="roundRect">
             <a:avLst>
-              <a:gd name="adj" fmla="val 10000"/>
+              <a:gd name="adj" fmla="val 14773"/>
+            </a:avLst>
+          </a:prstGeom>
+          <a:solidFill xmlns:a="http://schemas.openxmlformats.org/drawingml/2006/main">
+            <a:srgbClr val="FFFFFF"/>
+          </a:solidFill>
+          <a:ln xmlns:a="http://schemas.openxmlformats.org/drawingml/2006/main" w="9525">
+            <a:solidFill>
+              <a:srgbClr val="D8E0E8"/>
+            </a:solidFill>
+            <a:prstDash val="solid"/>
+          </a:ln>
+        </p:spPr>
+        <p:txBody>
+          <a:bodyPr xmlns:a="http://schemas.openxmlformats.org/drawingml/2006/main" lIns="152400" tIns="133350" rIns="152400" bIns="133350" anchor="ctr">
+            <a:normAutofit fontScale="100000"/>
+          </a:bodyPr>
+          <a:lstStyle xmlns:a="http://schemas.openxmlformats.org/drawingml/2006/main"/>
+          <a:p xmlns:a="http://schemas.openxmlformats.org/drawingml/2006/main">
+            <a:pPr algn="l">
+              <a:defRPr sz="1575" b="0">
+                <a:solidFill>
+                  <a:srgbClr val="10233F"/>
+                </a:solidFill>
+                <a:latin typeface="PingFang SC"/>
+                <a:ea typeface="PingFang SC"/>
+                <a:cs typeface="PingFang SC"/>
+              </a:defRPr>
+            </a:pPr>
+            <a:r>
+              <a:rPr sz="1575" b="0">
+                <a:solidFill>
+                  <a:srgbClr val="10233F"/>
+                </a:solidFill>
+                <a:latin typeface="PingFang SC"/>
+                <a:ea typeface="PingFang SC"/>
+                <a:cs typeface="PingFang SC"/>
+              </a:rPr>
+              <a:t>边界｜如果学习者在 0.81 秒或 1.10 秒仍输出非零命令，说明安全桥接不合格</a:t>
+            </a:r>
+          </a:p>
+        </p:txBody>
+      </p:sp>
+      <p:sp>
+        <p:nvSpPr>
+          <p:cNvPr id="9" name="case-row-2">
+            <a:extLst xmlns:a="http://schemas.openxmlformats.org/drawingml/2006/main">
+              <a:ext uri="{FF2B5EF4-FFF2-40B4-BE49-F238E27FC236}">
+                <a16:creationId xmlns:a16="http://schemas.microsoft.com/office/drawing/2014/main" id="{0AF65BD3-1BA4-4136-A2C7-964EC5C92E32}"/>
+              </a:ext>
+            </a:extLst>
+          </p:cNvPr>
+          <p:cNvSpPr>
+            <a:spLocks xmlns:a="http://schemas.openxmlformats.org/drawingml/2006/main" noGrp="1"/>
+          </p:cNvSpPr>
+          <p:nvPr/>
+        </p:nvSpPr>
+        <p:spPr>
+          <a:xfrm xmlns:a="http://schemas.openxmlformats.org/drawingml/2006/main">
+            <a:off x="4286250" y="4114800"/>
+            <a:ext cx="6534150" cy="838200"/>
+          </a:xfrm>
+          <a:prstGeom xmlns:a="http://schemas.openxmlformats.org/drawingml/2006/main" prst="roundRect">
+            <a:avLst>
+              <a:gd name="adj" fmla="val 14773"/>
             </a:avLst>
           </a:prstGeom>
           <a:solidFill xmlns:a="http://schemas.openxmlformats.org/drawingml/2006/main">
@@ -2917,7 +2981,7 @@
           </a:solidFill>
           <a:ln xmlns:a="http://schemas.openxmlformats.org/drawingml/2006/main" w="9525">
             <a:solidFill>
-              <a:srgbClr val="2D9B72"/>
+              <a:srgbClr val="0B6B4F"/>
             </a:solidFill>
             <a:prstDash val="solid"/>
           </a:ln>
@@ -2947,17 +3011,17 @@
                 <a:ea typeface="PingFang SC"/>
                 <a:cs typeface="PingFang SC"/>
               </a:rPr>
-              <a:t>机制｜如果学习者在 0.81 秒或 1.10 秒仍输出非零命令，说明安全桥接不合格。这个演练验证的是控制契约和停止逻辑，不表示任何真实机器人已通过安全测试</a:t>
-            </a:r>
-          </a:p>
-        </p:txBody>
-      </p:sp>
-      <p:sp>
-        <p:nvSpPr>
-          <p:cNvPr id="9" name="s10-takeaway-rule">
-            <a:extLst xmlns:a="http://schemas.openxmlformats.org/drawingml/2006/main">
-              <a:ext uri="{FF2B5EF4-FFF2-40B4-BE49-F238E27FC236}">
-                <a16:creationId xmlns:a16="http://schemas.microsoft.com/office/drawing/2014/main" id="{777F023E-0C0E-49F6-8210-5E0D0D423EB5}"/>
+              <a:t>边界｜这个演练验证的是控制契约和停止逻辑，不表示任何真实机器人已通过安全测试</a:t>
+            </a:r>
+          </a:p>
+        </p:txBody>
+      </p:sp>
+      <p:sp>
+        <p:nvSpPr>
+          <p:cNvPr id="10" name="s10-takeaway-rule">
+            <a:extLst xmlns:a="http://schemas.openxmlformats.org/drawingml/2006/main">
+              <a:ext uri="{FF2B5EF4-FFF2-40B4-BE49-F238E27FC236}">
+                <a16:creationId xmlns:a16="http://schemas.microsoft.com/office/drawing/2014/main" id="{9BC24072-61EC-4C25-8BD3-00583A8D6FB6}"/>
               </a:ext>
             </a:extLst>
           </p:cNvPr>
@@ -2987,10 +3051,10 @@
       </p:sp>
       <p:sp>
         <p:nvSpPr>
-          <p:cNvPr id="10" name="s10-takeaway">
-            <a:extLst xmlns:a="http://schemas.openxmlformats.org/drawingml/2006/main">
-              <a:ext uri="{FF2B5EF4-FFF2-40B4-BE49-F238E27FC236}">
-                <a16:creationId xmlns:a16="http://schemas.microsoft.com/office/drawing/2014/main" id="{3110BF89-575E-4F92-87C4-577123F69709}"/>
+          <p:cNvPr id="11" name="s10-takeaway">
+            <a:extLst xmlns:a="http://schemas.openxmlformats.org/drawingml/2006/main">
+              <a:ext uri="{FF2B5EF4-FFF2-40B4-BE49-F238E27FC236}">
+                <a16:creationId xmlns:a16="http://schemas.microsoft.com/office/drawing/2014/main" id="{B0D70AF0-7452-4CEB-B025-639D2004940C}"/>
               </a:ext>
             </a:extLst>
           </p:cNvPr>
@@ -3038,7 +3102,7 @@
                 <a:ea typeface="PingFang SC"/>
                 <a:cs typeface="PingFang SC"/>
               </a:rPr>
-              <a:t>无需真机的固定 trace 验收必须经过边界验证</a:t>
+              <a:t>固定 trace 先验证控制契约，再谈真机能力</a:t>
             </a:r>
           </a:p>
         </p:txBody>
@@ -3046,7 +3110,7 @@
     </p:spTree>
     <p:extLst>
       <p:ext uri="{BB962C8B-B14F-4D97-AF65-F5344CB8AC3E}">
-        <p14:creationId xmlns:p14="http://schemas.microsoft.com/office/powerpoint/2010/main" val="866175777"/>
+        <p14:creationId xmlns:p14="http://schemas.microsoft.com/office/powerpoint/2010/main" val="1086974831"/>
       </p:ext>
     </p:extLst>
   </p:cSld>
@@ -3077,7 +3141,7 @@
           <p:cNvPr id="1" name="s11-rule">
             <a:extLst xmlns:a="http://schemas.openxmlformats.org/drawingml/2006/main">
               <a:ext uri="{FF2B5EF4-FFF2-40B4-BE49-F238E27FC236}">
-                <a16:creationId xmlns:a16="http://schemas.microsoft.com/office/drawing/2014/main" id="{31313CF4-4677-4750-864F-DEDE04FBFCD4}"/>
+                <a16:creationId xmlns:a16="http://schemas.microsoft.com/office/drawing/2014/main" id="{10D21411-A053-485E-985D-424A52C100EE}"/>
               </a:ext>
             </a:extLst>
           </p:cNvPr>
@@ -3110,7 +3174,7 @@
           <p:cNvPr id="2" name="s11-eyebrow">
             <a:extLst xmlns:a="http://schemas.openxmlformats.org/drawingml/2006/main">
               <a:ext uri="{FF2B5EF4-FFF2-40B4-BE49-F238E27FC236}">
-                <a16:creationId xmlns:a16="http://schemas.microsoft.com/office/drawing/2014/main" id="{EEB4896C-FB4E-4944-B2F1-D5DD2F3AAF91}"/>
+                <a16:creationId xmlns:a16="http://schemas.microsoft.com/office/drawing/2014/main" id="{EA3F55A7-4AD6-4B4A-BBFD-B947834B07CF}"/>
               </a:ext>
             </a:extLst>
           </p:cNvPr>
@@ -3168,7 +3232,7 @@
           <p:cNvPr id="3" name="s11-title">
             <a:extLst xmlns:a="http://schemas.openxmlformats.org/drawingml/2006/main">
               <a:ext uri="{FF2B5EF4-FFF2-40B4-BE49-F238E27FC236}">
-                <a16:creationId xmlns:a16="http://schemas.microsoft.com/office/drawing/2014/main" id="{23F8C8C4-7335-4168-8775-6B298B03AB77}"/>
+                <a16:creationId xmlns:a16="http://schemas.microsoft.com/office/drawing/2014/main" id="{2A8A49A6-D076-4F1C-A408-328F8EA0EE83}"/>
               </a:ext>
             </a:extLst>
           </p:cNvPr>
@@ -3216,7 +3280,7 @@
                 <a:ea typeface="PingFang SC"/>
                 <a:cs typeface="PingFang SC"/>
               </a:rPr>
-              <a:t>把方法落实为可验证的行动</a:t>
+              <a:t>G1、Go2 与 ROS2 实训：一次可验收练习</a:t>
             </a:r>
           </a:p>
         </p:txBody>
@@ -3226,7 +3290,7 @@
           <p:cNvPr id="4" name="s11-footer">
             <a:extLst xmlns:a="http://schemas.openxmlformats.org/drawingml/2006/main">
               <a:ext uri="{FF2B5EF4-FFF2-40B4-BE49-F238E27FC236}">
-                <a16:creationId xmlns:a16="http://schemas.microsoft.com/office/drawing/2014/main" id="{2B947862-F55F-4821-9E51-97D5DE6264DD}"/>
+                <a16:creationId xmlns:a16="http://schemas.microsoft.com/office/drawing/2014/main" id="{C71FDC9A-4C5D-497F-A676-79691882473B}"/>
               </a:ext>
             </a:extLst>
           </p:cNvPr>
@@ -3257,7 +3321,7 @@
           <p:cNvPr id="5" name="s11-identity">
             <a:extLst xmlns:a="http://schemas.openxmlformats.org/drawingml/2006/main">
               <a:ext uri="{FF2B5EF4-FFF2-40B4-BE49-F238E27FC236}">
-                <a16:creationId xmlns:a16="http://schemas.microsoft.com/office/drawing/2014/main" id="{923A3335-9398-4A77-87CF-10D8108744AF}"/>
+                <a16:creationId xmlns:a16="http://schemas.microsoft.com/office/drawing/2014/main" id="{BB012438-578B-4375-973F-AC42ADEFBA49}"/>
               </a:ext>
             </a:extLst>
           </p:cNvPr>
@@ -3315,7 +3379,7 @@
           <p:cNvPr id="6" name="practice-circle-0">
             <a:extLst xmlns:a="http://schemas.openxmlformats.org/drawingml/2006/main">
               <a:ext uri="{FF2B5EF4-FFF2-40B4-BE49-F238E27FC236}">
-                <a16:creationId xmlns:a16="http://schemas.microsoft.com/office/drawing/2014/main" id="{A8ABB7C0-142D-4FEB-8CA9-746B9E2F2BBF}"/>
+                <a16:creationId xmlns:a16="http://schemas.microsoft.com/office/drawing/2014/main" id="{F5DE884F-39DD-4D99-B54A-9752499476F3}"/>
               </a:ext>
             </a:extLst>
           </p:cNvPr>
@@ -3348,7 +3412,7 @@
           <p:cNvPr id="7" name="practice-number-0">
             <a:extLst xmlns:a="http://schemas.openxmlformats.org/drawingml/2006/main">
               <a:ext uri="{FF2B5EF4-FFF2-40B4-BE49-F238E27FC236}">
-                <a16:creationId xmlns:a16="http://schemas.microsoft.com/office/drawing/2014/main" id="{694F77BD-DB3A-4349-9209-FF12BA5F10CF}"/>
+                <a16:creationId xmlns:a16="http://schemas.microsoft.com/office/drawing/2014/main" id="{D70B2ADC-6543-4001-8CF8-E7E0A5E83C92}"/>
               </a:ext>
             </a:extLst>
           </p:cNvPr>
@@ -3406,7 +3470,7 @@
           <p:cNvPr id="8" name="practice-item-0">
             <a:extLst xmlns:a="http://schemas.openxmlformats.org/drawingml/2006/main">
               <a:ext uri="{FF2B5EF4-FFF2-40B4-BE49-F238E27FC236}">
-                <a16:creationId xmlns:a16="http://schemas.microsoft.com/office/drawing/2014/main" id="{D335541E-DCB6-42B9-8994-B620DE4D4A70}"/>
+                <a16:creationId xmlns:a16="http://schemas.microsoft.com/office/drawing/2014/main" id="{32A97F81-02E8-4442-9634-8C1F4CC9BC12}"/>
               </a:ext>
             </a:extLst>
           </p:cNvPr>
@@ -3460,7 +3524,7 @@
                 <a:ea typeface="PingFang SC"/>
                 <a:cs typeface="PingFang SC"/>
               </a:rPr>
-              <a:t>根据固定图谱，画出四个节点与三个话题的方向，并标出哪一处拥有最终放行权。；独立计算固定 trace 的六行预期输出，再与表格答案比较；任何一行不一致都要写出错误原因</a:t>
+              <a:t>根据固定图谱，画出四个节点与三个话题的方向，并标出哪一处拥有最终放行权；独立计算固定 trace 的六行预期输出，再与表格答案比较；任何一行不一致都要写出错误原因</a:t>
             </a:r>
           </a:p>
         </p:txBody>
@@ -3470,7 +3534,7 @@
           <p:cNvPr id="9" name="practice-connector-0">
             <a:extLst xmlns:a="http://schemas.openxmlformats.org/drawingml/2006/main">
               <a:ext uri="{FF2B5EF4-FFF2-40B4-BE49-F238E27FC236}">
-                <a16:creationId xmlns:a16="http://schemas.microsoft.com/office/drawing/2014/main" id="{74985B17-A44A-4CB6-941B-DCCFF1BF7395}"/>
+                <a16:creationId xmlns:a16="http://schemas.microsoft.com/office/drawing/2014/main" id="{BA3984CD-DB54-4074-A169-AB59892A5D27}"/>
               </a:ext>
             </a:extLst>
           </p:cNvPr>
@@ -3490,7 +3554,7 @@
           <a:noFill xmlns:a="http://schemas.openxmlformats.org/drawingml/2006/main"/>
           <a:ln xmlns:a="http://schemas.openxmlformats.org/drawingml/2006/main" w="28575">
             <a:solidFill>
-              <a:srgbClr val="2D9B72"/>
+              <a:srgbClr val="0B6B4F"/>
             </a:solidFill>
             <a:prstDash val="solid"/>
           </a:ln>
@@ -3501,7 +3565,7 @@
           <p:cNvPr id="10" name="practice-circle-1">
             <a:extLst xmlns:a="http://schemas.openxmlformats.org/drawingml/2006/main">
               <a:ext uri="{FF2B5EF4-FFF2-40B4-BE49-F238E27FC236}">
-                <a16:creationId xmlns:a16="http://schemas.microsoft.com/office/drawing/2014/main" id="{242CE42E-4655-439D-B9C6-0553A953D3A8}"/>
+                <a16:creationId xmlns:a16="http://schemas.microsoft.com/office/drawing/2014/main" id="{DC5841F5-7DF3-4179-B529-29A190CE708C}"/>
               </a:ext>
             </a:extLst>
           </p:cNvPr>
@@ -3534,7 +3598,7 @@
           <p:cNvPr id="11" name="practice-number-1">
             <a:extLst xmlns:a="http://schemas.openxmlformats.org/drawingml/2006/main">
               <a:ext uri="{FF2B5EF4-FFF2-40B4-BE49-F238E27FC236}">
-                <a16:creationId xmlns:a16="http://schemas.microsoft.com/office/drawing/2014/main" id="{270DE1FD-B2F0-48BA-95AD-0B0A4DE29D03}"/>
+                <a16:creationId xmlns:a16="http://schemas.microsoft.com/office/drawing/2014/main" id="{11CB70E9-0466-4E3D-9C03-FBFC66B294BD}"/>
               </a:ext>
             </a:extLst>
           </p:cNvPr>
@@ -3592,7 +3656,7 @@
           <p:cNvPr id="12" name="practice-item-1">
             <a:extLst xmlns:a="http://schemas.openxmlformats.org/drawingml/2006/main">
               <a:ext uri="{FF2B5EF4-FFF2-40B4-BE49-F238E27FC236}">
-                <a16:creationId xmlns:a16="http://schemas.microsoft.com/office/drawing/2014/main" id="{01E41D96-F1EE-4B55-A850-325C2548D24A}"/>
+                <a16:creationId xmlns:a16="http://schemas.microsoft.com/office/drawing/2014/main" id="{A6FA8EA4-5B88-4E17-B332-5A4E27A6A39F}"/>
               </a:ext>
             </a:extLst>
           </p:cNvPr>
@@ -3656,7 +3720,7 @@
           <p:cNvPr id="13" name="practice-connector-1">
             <a:extLst xmlns:a="http://schemas.openxmlformats.org/drawingml/2006/main">
               <a:ext uri="{FF2B5EF4-FFF2-40B4-BE49-F238E27FC236}">
-                <a16:creationId xmlns:a16="http://schemas.microsoft.com/office/drawing/2014/main" id="{054FDC4A-FD71-467A-9E3A-AE3660AFD21E}"/>
+                <a16:creationId xmlns:a16="http://schemas.microsoft.com/office/drawing/2014/main" id="{99D31253-53C2-4603-81C9-0C33C5BE9C85}"/>
               </a:ext>
             </a:extLst>
           </p:cNvPr>
@@ -3676,7 +3740,7 @@
           <a:noFill xmlns:a="http://schemas.openxmlformats.org/drawingml/2006/main"/>
           <a:ln xmlns:a="http://schemas.openxmlformats.org/drawingml/2006/main" w="28575">
             <a:solidFill>
-              <a:srgbClr val="2D9B72"/>
+              <a:srgbClr val="0B6B4F"/>
             </a:solidFill>
             <a:prstDash val="solid"/>
           </a:ln>
@@ -3687,7 +3751,7 @@
           <p:cNvPr id="14" name="practice-circle-2">
             <a:extLst xmlns:a="http://schemas.openxmlformats.org/drawingml/2006/main">
               <a:ext uri="{FF2B5EF4-FFF2-40B4-BE49-F238E27FC236}">
-                <a16:creationId xmlns:a16="http://schemas.microsoft.com/office/drawing/2014/main" id="{068BC325-50F7-46A2-BFD0-D445D843E843}"/>
+                <a16:creationId xmlns:a16="http://schemas.microsoft.com/office/drawing/2014/main" id="{1804C37F-F0A7-4877-916C-6F0F6277F82A}"/>
               </a:ext>
             </a:extLst>
           </p:cNvPr>
@@ -3705,7 +3769,7 @@
             <a:avLst/>
           </a:prstGeom>
           <a:solidFill xmlns:a="http://schemas.openxmlformats.org/drawingml/2006/main">
-            <a:srgbClr val="2D9B72"/>
+            <a:srgbClr val="0B6B4F"/>
           </a:solidFill>
           <a:ln xmlns:a="http://schemas.openxmlformats.org/drawingml/2006/main" w="28575">
             <a:solidFill>
@@ -3720,7 +3784,7 @@
           <p:cNvPr id="15" name="practice-number-2">
             <a:extLst xmlns:a="http://schemas.openxmlformats.org/drawingml/2006/main">
               <a:ext uri="{FF2B5EF4-FFF2-40B4-BE49-F238E27FC236}">
-                <a16:creationId xmlns:a16="http://schemas.microsoft.com/office/drawing/2014/main" id="{56A7F4D9-674A-456D-871F-C9613D439901}"/>
+                <a16:creationId xmlns:a16="http://schemas.microsoft.com/office/drawing/2014/main" id="{9B88C4F3-56C2-404C-8576-CDE9C65C4B1E}"/>
               </a:ext>
             </a:extLst>
           </p:cNvPr>
@@ -3778,7 +3842,7 @@
           <p:cNvPr id="16" name="practice-item-2">
             <a:extLst xmlns:a="http://schemas.openxmlformats.org/drawingml/2006/main">
               <a:ext uri="{FF2B5EF4-FFF2-40B4-BE49-F238E27FC236}">
-                <a16:creationId xmlns:a16="http://schemas.microsoft.com/office/drawing/2014/main" id="{5EAB8ED2-1D64-497D-AF90-E4B9ADA67F28}"/>
+                <a16:creationId xmlns:a16="http://schemas.microsoft.com/office/drawing/2014/main" id="{4747917A-AC6A-450C-8251-C727AFCB2C94}"/>
               </a:ext>
             </a:extLst>
           </p:cNvPr>
@@ -3802,7 +3866,7 @@
           </a:solidFill>
           <a:ln xmlns:a="http://schemas.openxmlformats.org/drawingml/2006/main" w="19050">
             <a:solidFill>
-              <a:srgbClr val="2D9B72"/>
+              <a:srgbClr val="0B6B4F"/>
             </a:solidFill>
             <a:prstDash val="solid"/>
           </a:ln>
@@ -3840,7 +3904,7 @@
     </p:spTree>
     <p:extLst>
       <p:ext uri="{BB962C8B-B14F-4D97-AF65-F5344CB8AC3E}">
-        <p14:creationId xmlns:p14="http://schemas.microsoft.com/office/powerpoint/2010/main" val="1708449897"/>
+        <p14:creationId xmlns:p14="http://schemas.microsoft.com/office/powerpoint/2010/main" val="1098678340"/>
       </p:ext>
     </p:extLst>
   </p:cSld>
@@ -3871,7 +3935,7 @@
           <p:cNvPr id="1" name="s12-rule">
             <a:extLst xmlns:a="http://schemas.openxmlformats.org/drawingml/2006/main">
               <a:ext uri="{FF2B5EF4-FFF2-40B4-BE49-F238E27FC236}">
-                <a16:creationId xmlns:a16="http://schemas.microsoft.com/office/drawing/2014/main" id="{07E809E1-CF4F-42AB-8C8F-6C8F715B923C}"/>
+                <a16:creationId xmlns:a16="http://schemas.microsoft.com/office/drawing/2014/main" id="{A884AD20-15B7-41BC-A382-A7DB990E6341}"/>
               </a:ext>
             </a:extLst>
           </p:cNvPr>
@@ -3904,7 +3968,7 @@
           <p:cNvPr id="2" name="s12-eyebrow">
             <a:extLst xmlns:a="http://schemas.openxmlformats.org/drawingml/2006/main">
               <a:ext uri="{FF2B5EF4-FFF2-40B4-BE49-F238E27FC236}">
-                <a16:creationId xmlns:a16="http://schemas.microsoft.com/office/drawing/2014/main" id="{31AACD41-AEAD-4B84-A655-6437592D170D}"/>
+                <a16:creationId xmlns:a16="http://schemas.microsoft.com/office/drawing/2014/main" id="{1022B4D6-302B-4F99-AFA8-46CC4B4C7C3C}"/>
               </a:ext>
             </a:extLst>
           </p:cNvPr>
@@ -3962,7 +4026,7 @@
           <p:cNvPr id="3" name="s12-title">
             <a:extLst xmlns:a="http://schemas.openxmlformats.org/drawingml/2006/main">
               <a:ext uri="{FF2B5EF4-FFF2-40B4-BE49-F238E27FC236}">
-                <a16:creationId xmlns:a16="http://schemas.microsoft.com/office/drawing/2014/main" id="{37434E2C-8249-4031-A309-F37A590C0F42}"/>
+                <a16:creationId xmlns:a16="http://schemas.microsoft.com/office/drawing/2014/main" id="{DDDD5CAE-05B4-46C3-B4FC-A8B6A92E87C5}"/>
               </a:ext>
             </a:extLst>
           </p:cNvPr>
@@ -4010,7 +4074,7 @@
                 <a:ea typeface="PingFang SC"/>
                 <a:cs typeface="PingFang SC"/>
               </a:rPr>
-              <a:t>带走三条可复用的判断原则</a:t>
+              <a:t>G1、Go2 与 ROS2 实训：判断时先抓住三点</a:t>
             </a:r>
           </a:p>
         </p:txBody>
@@ -4020,7 +4084,7 @@
           <p:cNvPr id="4" name="s12-footer">
             <a:extLst xmlns:a="http://schemas.openxmlformats.org/drawingml/2006/main">
               <a:ext uri="{FF2B5EF4-FFF2-40B4-BE49-F238E27FC236}">
-                <a16:creationId xmlns:a16="http://schemas.microsoft.com/office/drawing/2014/main" id="{FDFAB2CD-B8BE-40C0-B37E-C3FFE02F5EED}"/>
+                <a16:creationId xmlns:a16="http://schemas.microsoft.com/office/drawing/2014/main" id="{BC5C106F-BD25-42D3-805A-49EFF45A28BE}"/>
               </a:ext>
             </a:extLst>
           </p:cNvPr>
@@ -4051,7 +4115,7 @@
           <p:cNvPr id="5" name="s12-identity">
             <a:extLst xmlns:a="http://schemas.openxmlformats.org/drawingml/2006/main">
               <a:ext uri="{FF2B5EF4-FFF2-40B4-BE49-F238E27FC236}">
-                <a16:creationId xmlns:a16="http://schemas.microsoft.com/office/drawing/2014/main" id="{64AA99AF-C30A-4036-9399-2144E5772B02}"/>
+                <a16:creationId xmlns:a16="http://schemas.microsoft.com/office/drawing/2014/main" id="{38448B4C-B8B7-49B7-AC58-DFE4EA380820}"/>
               </a:ext>
             </a:extLst>
           </p:cNvPr>
@@ -4109,7 +4173,7 @@
           <p:cNvPr id="6" name="recap-circle-0">
             <a:extLst xmlns:a="http://schemas.openxmlformats.org/drawingml/2006/main">
               <a:ext uri="{FF2B5EF4-FFF2-40B4-BE49-F238E27FC236}">
-                <a16:creationId xmlns:a16="http://schemas.microsoft.com/office/drawing/2014/main" id="{91DB7B15-70F1-4EBB-A9A7-4D5097475566}"/>
+                <a16:creationId xmlns:a16="http://schemas.microsoft.com/office/drawing/2014/main" id="{A0A86159-6EF0-4D3F-B760-CC515E742828}"/>
               </a:ext>
             </a:extLst>
           </p:cNvPr>
@@ -4142,7 +4206,7 @@
           <p:cNvPr id="7" name="recap-number-0">
             <a:extLst xmlns:a="http://schemas.openxmlformats.org/drawingml/2006/main">
               <a:ext uri="{FF2B5EF4-FFF2-40B4-BE49-F238E27FC236}">
-                <a16:creationId xmlns:a16="http://schemas.microsoft.com/office/drawing/2014/main" id="{48876E00-25AD-4ECE-A6FE-5DFE9FBBA0B7}"/>
+                <a16:creationId xmlns:a16="http://schemas.microsoft.com/office/drawing/2014/main" id="{E0400183-BEC8-4E0E-B0A9-3257714614F7}"/>
               </a:ext>
             </a:extLst>
           </p:cNvPr>
@@ -4200,7 +4264,7 @@
           <p:cNvPr id="8" name="recap-item-0">
             <a:extLst xmlns:a="http://schemas.openxmlformats.org/drawingml/2006/main">
               <a:ext uri="{FF2B5EF4-FFF2-40B4-BE49-F238E27FC236}">
-                <a16:creationId xmlns:a16="http://schemas.microsoft.com/office/drawing/2014/main" id="{8FD96E8C-6197-4864-B3FD-C8DC4AF8D156}"/>
+                <a16:creationId xmlns:a16="http://schemas.microsoft.com/office/drawing/2014/main" id="{2A1E5CCA-6AF8-46A0-87C0-60AEB26611E1}"/>
               </a:ext>
             </a:extLst>
           </p:cNvPr>
@@ -4264,7 +4328,7 @@
           <p:cNvPr id="9" name="recap-connector-0">
             <a:extLst xmlns:a="http://schemas.openxmlformats.org/drawingml/2006/main">
               <a:ext uri="{FF2B5EF4-FFF2-40B4-BE49-F238E27FC236}">
-                <a16:creationId xmlns:a16="http://schemas.microsoft.com/office/drawing/2014/main" id="{0B2A3637-7456-453C-AA1B-FC36D55100B6}"/>
+                <a16:creationId xmlns:a16="http://schemas.microsoft.com/office/drawing/2014/main" id="{9D68DE0F-DADB-4311-8C42-9C9B3AFDBF3C}"/>
               </a:ext>
             </a:extLst>
           </p:cNvPr>
@@ -4284,7 +4348,7 @@
           <a:noFill xmlns:a="http://schemas.openxmlformats.org/drawingml/2006/main"/>
           <a:ln xmlns:a="http://schemas.openxmlformats.org/drawingml/2006/main" w="28575">
             <a:solidFill>
-              <a:srgbClr val="2D9B72"/>
+              <a:srgbClr val="0B6B4F"/>
             </a:solidFill>
             <a:prstDash val="solid"/>
           </a:ln>
@@ -4295,7 +4359,7 @@
           <p:cNvPr id="10" name="recap-circle-1">
             <a:extLst xmlns:a="http://schemas.openxmlformats.org/drawingml/2006/main">
               <a:ext uri="{FF2B5EF4-FFF2-40B4-BE49-F238E27FC236}">
-                <a16:creationId xmlns:a16="http://schemas.microsoft.com/office/drawing/2014/main" id="{867ED8A8-4ACC-4E66-B57B-2B2399538180}"/>
+                <a16:creationId xmlns:a16="http://schemas.microsoft.com/office/drawing/2014/main" id="{68D72DBD-3D1C-4369-9770-BB34D7393423}"/>
               </a:ext>
             </a:extLst>
           </p:cNvPr>
@@ -4328,7 +4392,7 @@
           <p:cNvPr id="11" name="recap-number-1">
             <a:extLst xmlns:a="http://schemas.openxmlformats.org/drawingml/2006/main">
               <a:ext uri="{FF2B5EF4-FFF2-40B4-BE49-F238E27FC236}">
-                <a16:creationId xmlns:a16="http://schemas.microsoft.com/office/drawing/2014/main" id="{5719C8DD-BDDE-4B9C-9451-5FB96DAB4F48}"/>
+                <a16:creationId xmlns:a16="http://schemas.microsoft.com/office/drawing/2014/main" id="{18FBCCF3-E26B-4B07-9B9C-5ED0ED5C45AB}"/>
               </a:ext>
             </a:extLst>
           </p:cNvPr>
@@ -4386,7 +4450,7 @@
           <p:cNvPr id="12" name="recap-item-1">
             <a:extLst xmlns:a="http://schemas.openxmlformats.org/drawingml/2006/main">
               <a:ext uri="{FF2B5EF4-FFF2-40B4-BE49-F238E27FC236}">
-                <a16:creationId xmlns:a16="http://schemas.microsoft.com/office/drawing/2014/main" id="{894B6E92-79A2-44F3-9EAC-B713999248F1}"/>
+                <a16:creationId xmlns:a16="http://schemas.microsoft.com/office/drawing/2014/main" id="{48841A86-A03B-4EBF-95B5-BE9216C80434}"/>
               </a:ext>
             </a:extLst>
           </p:cNvPr>
@@ -4440,7 +4504,7 @@
                 <a:ea typeface="PingFang SC"/>
                 <a:cs typeface="PingFang SC"/>
               </a:rPr>
-              <a:t>导航与键盘工具常发布 geometry msgs/msg/Twist</a:t>
+              <a:t>Twist 用通用速度指令连接导航与设备接口</a:t>
             </a:r>
           </a:p>
         </p:txBody>
@@ -4450,7 +4514,7 @@
           <p:cNvPr id="13" name="recap-connector-1">
             <a:extLst xmlns:a="http://schemas.openxmlformats.org/drawingml/2006/main">
               <a:ext uri="{FF2B5EF4-FFF2-40B4-BE49-F238E27FC236}">
-                <a16:creationId xmlns:a16="http://schemas.microsoft.com/office/drawing/2014/main" id="{A7B87C23-19BA-4B35-9E3F-3D5B2EB7C980}"/>
+                <a16:creationId xmlns:a16="http://schemas.microsoft.com/office/drawing/2014/main" id="{EEE2EC1D-3972-418D-95C6-94B3A3F82148}"/>
               </a:ext>
             </a:extLst>
           </p:cNvPr>
@@ -4470,7 +4534,7 @@
           <a:noFill xmlns:a="http://schemas.openxmlformats.org/drawingml/2006/main"/>
           <a:ln xmlns:a="http://schemas.openxmlformats.org/drawingml/2006/main" w="28575">
             <a:solidFill>
-              <a:srgbClr val="2D9B72"/>
+              <a:srgbClr val="0B6B4F"/>
             </a:solidFill>
             <a:prstDash val="solid"/>
           </a:ln>
@@ -4481,7 +4545,7 @@
           <p:cNvPr id="14" name="recap-circle-2">
             <a:extLst xmlns:a="http://schemas.openxmlformats.org/drawingml/2006/main">
               <a:ext uri="{FF2B5EF4-FFF2-40B4-BE49-F238E27FC236}">
-                <a16:creationId xmlns:a16="http://schemas.microsoft.com/office/drawing/2014/main" id="{D9BBE442-C21C-4618-8C67-59AE4DCB1CB5}"/>
+                <a16:creationId xmlns:a16="http://schemas.microsoft.com/office/drawing/2014/main" id="{03E4DB05-44A7-4103-8E53-73D92E6CE947}"/>
               </a:ext>
             </a:extLst>
           </p:cNvPr>
@@ -4499,7 +4563,7 @@
             <a:avLst/>
           </a:prstGeom>
           <a:solidFill xmlns:a="http://schemas.openxmlformats.org/drawingml/2006/main">
-            <a:srgbClr val="2D9B72"/>
+            <a:srgbClr val="0B6B4F"/>
           </a:solidFill>
           <a:ln xmlns:a="http://schemas.openxmlformats.org/drawingml/2006/main" w="28575">
             <a:solidFill>
@@ -4514,7 +4578,7 @@
           <p:cNvPr id="15" name="recap-number-2">
             <a:extLst xmlns:a="http://schemas.openxmlformats.org/drawingml/2006/main">
               <a:ext uri="{FF2B5EF4-FFF2-40B4-BE49-F238E27FC236}">
-                <a16:creationId xmlns:a16="http://schemas.microsoft.com/office/drawing/2014/main" id="{49BE79D1-2439-44FC-8A85-052FA0242377}"/>
+                <a16:creationId xmlns:a16="http://schemas.microsoft.com/office/drawing/2014/main" id="{99A671AB-4072-4BA3-B932-99E00FCBB7AA}"/>
               </a:ext>
             </a:extLst>
           </p:cNvPr>
@@ -4572,7 +4636,7 @@
           <p:cNvPr id="16" name="recap-item-2">
             <a:extLst xmlns:a="http://schemas.openxmlformats.org/drawingml/2006/main">
               <a:ext uri="{FF2B5EF4-FFF2-40B4-BE49-F238E27FC236}">
-                <a16:creationId xmlns:a16="http://schemas.microsoft.com/office/drawing/2014/main" id="{64B14F8F-E282-48CC-9B1D-34249DE96ECC}"/>
+                <a16:creationId xmlns:a16="http://schemas.microsoft.com/office/drawing/2014/main" id="{74A8A5BB-07E5-403A-9080-C13D4054ABA6}"/>
               </a:ext>
             </a:extLst>
           </p:cNvPr>
@@ -4596,7 +4660,7 @@
           </a:solidFill>
           <a:ln xmlns:a="http://schemas.openxmlformats.org/drawingml/2006/main" w="19050">
             <a:solidFill>
-              <a:srgbClr val="2D9B72"/>
+              <a:srgbClr val="0B6B4F"/>
             </a:solidFill>
             <a:prstDash val="solid"/>
           </a:ln>
@@ -4634,7 +4698,7 @@
     </p:spTree>
     <p:extLst>
       <p:ext uri="{BB962C8B-B14F-4D97-AF65-F5344CB8AC3E}">
-        <p14:creationId xmlns:p14="http://schemas.microsoft.com/office/powerpoint/2010/main" val="2025198746"/>
+        <p14:creationId xmlns:p14="http://schemas.microsoft.com/office/powerpoint/2010/main" val="1404583505"/>
       </p:ext>
     </p:extLst>
   </p:cSld>
@@ -4665,7 +4729,7 @@
           <p:cNvPr id="1" name="s13-rule">
             <a:extLst xmlns:a="http://schemas.openxmlformats.org/drawingml/2006/main">
               <a:ext uri="{FF2B5EF4-FFF2-40B4-BE49-F238E27FC236}">
-                <a16:creationId xmlns:a16="http://schemas.microsoft.com/office/drawing/2014/main" id="{53D1FE9A-89E3-4250-AD5C-3C50868B2389}"/>
+                <a16:creationId xmlns:a16="http://schemas.microsoft.com/office/drawing/2014/main" id="{2C5E8C2D-3080-4CEF-8458-3911FC83C1B8}"/>
               </a:ext>
             </a:extLst>
           </p:cNvPr>
@@ -4698,7 +4762,7 @@
           <p:cNvPr id="2" name="s13-eyebrow">
             <a:extLst xmlns:a="http://schemas.openxmlformats.org/drawingml/2006/main">
               <a:ext uri="{FF2B5EF4-FFF2-40B4-BE49-F238E27FC236}">
-                <a16:creationId xmlns:a16="http://schemas.microsoft.com/office/drawing/2014/main" id="{63A77B4E-F396-4A47-B6D0-99CD1A03CFDF}"/>
+                <a16:creationId xmlns:a16="http://schemas.microsoft.com/office/drawing/2014/main" id="{7EFFC6FE-1C58-49C6-AE35-AD2B18998253}"/>
               </a:ext>
             </a:extLst>
           </p:cNvPr>
@@ -4756,7 +4820,7 @@
           <p:cNvPr id="3" name="s13-title">
             <a:extLst xmlns:a="http://schemas.openxmlformats.org/drawingml/2006/main">
               <a:ext uri="{FF2B5EF4-FFF2-40B4-BE49-F238E27FC236}">
-                <a16:creationId xmlns:a16="http://schemas.microsoft.com/office/drawing/2014/main" id="{5400F37F-8338-46B4-A436-72998EFAAAEC}"/>
+                <a16:creationId xmlns:a16="http://schemas.microsoft.com/office/drawing/2014/main" id="{258B0712-AB10-4887-9A10-92A39B57D9AA}"/>
               </a:ext>
             </a:extLst>
           </p:cNvPr>
@@ -4804,7 +4868,7 @@
                 <a:ea typeface="PingFang SC"/>
                 <a:cs typeface="PingFang SC"/>
               </a:rPr>
-              <a:t>从公开重制课件回到可核对的学习资料</a:t>
+              <a:t>G1、Go2 与 ROS2 实训：依据、边界与延伸</a:t>
             </a:r>
           </a:p>
         </p:txBody>
@@ -4814,7 +4878,7 @@
           <p:cNvPr id="4" name="s13-footer">
             <a:extLst xmlns:a="http://schemas.openxmlformats.org/drawingml/2006/main">
               <a:ext uri="{FF2B5EF4-FFF2-40B4-BE49-F238E27FC236}">
-                <a16:creationId xmlns:a16="http://schemas.microsoft.com/office/drawing/2014/main" id="{A1FF1B7D-DA4A-41CA-A244-82C3A59DDA32}"/>
+                <a16:creationId xmlns:a16="http://schemas.microsoft.com/office/drawing/2014/main" id="{F898828F-FC7E-4E59-A3EF-422E29151E30}"/>
               </a:ext>
             </a:extLst>
           </p:cNvPr>
@@ -4845,7 +4909,7 @@
           <p:cNvPr id="5" name="s13-identity">
             <a:extLst xmlns:a="http://schemas.openxmlformats.org/drawingml/2006/main">
               <a:ext uri="{FF2B5EF4-FFF2-40B4-BE49-F238E27FC236}">
-                <a16:creationId xmlns:a16="http://schemas.microsoft.com/office/drawing/2014/main" id="{378280A7-B5E0-467A-902D-967C40E3FED4}"/>
+                <a16:creationId xmlns:a16="http://schemas.microsoft.com/office/drawing/2014/main" id="{A85C5D70-5D45-43AA-943D-DAB145CB0899}"/>
               </a:ext>
             </a:extLst>
           </p:cNvPr>
@@ -4903,7 +4967,7 @@
           <p:cNvPr id="6" name="source-0">
             <a:extLst xmlns:a="http://schemas.openxmlformats.org/drawingml/2006/main">
               <a:ext uri="{FF2B5EF4-FFF2-40B4-BE49-F238E27FC236}">
-                <a16:creationId xmlns:a16="http://schemas.microsoft.com/office/drawing/2014/main" id="{743F62F5-694B-4DCF-A0C4-C68F4F915AF9}"/>
+                <a16:creationId xmlns:a16="http://schemas.microsoft.com/office/drawing/2014/main" id="{3EE816A9-DD36-47E2-83DE-DF99DB6F4463}"/>
               </a:ext>
             </a:extLst>
           </p:cNvPr>
@@ -4927,7 +4991,7 @@
           </a:solidFill>
           <a:ln xmlns:a="http://schemas.openxmlformats.org/drawingml/2006/main" w="9525">
             <a:solidFill>
-              <a:srgbClr val="2D9B72"/>
+              <a:srgbClr val="0B6B4F"/>
             </a:solidFill>
             <a:prstDash val="solid"/>
           </a:ln>
@@ -4967,7 +5031,7 @@
           <p:cNvPr id="7" name="source-1">
             <a:extLst xmlns:a="http://schemas.openxmlformats.org/drawingml/2006/main">
               <a:ext uri="{FF2B5EF4-FFF2-40B4-BE49-F238E27FC236}">
-                <a16:creationId xmlns:a16="http://schemas.microsoft.com/office/drawing/2014/main" id="{AD7C72BF-2173-4E69-A27D-3A4E3D7F2D5D}"/>
+                <a16:creationId xmlns:a16="http://schemas.microsoft.com/office/drawing/2014/main" id="{CF4636DB-5B83-41D3-A152-BBAC370842AB}"/>
               </a:ext>
             </a:extLst>
           </p:cNvPr>
@@ -5031,7 +5095,7 @@
           <p:cNvPr id="8" name="source-2">
             <a:extLst xmlns:a="http://schemas.openxmlformats.org/drawingml/2006/main">
               <a:ext uri="{FF2B5EF4-FFF2-40B4-BE49-F238E27FC236}">
-                <a16:creationId xmlns:a16="http://schemas.microsoft.com/office/drawing/2014/main" id="{82367557-7DBC-4187-8AE6-C25F438B8815}"/>
+                <a16:creationId xmlns:a16="http://schemas.microsoft.com/office/drawing/2014/main" id="{2A758021-57D5-413C-9552-58897E8687A1}"/>
               </a:ext>
             </a:extLst>
           </p:cNvPr>
@@ -5085,7 +5149,7 @@
                 <a:ea typeface="PingFang SC"/>
                 <a:cs typeface="PingFang SC"/>
               </a:rPr>
-              <a:t>03  ROS 2 geometry msgs/msg/Twist ：本节离线消息契约所用类型的官方定义</a:t>
+              <a:t>03  ROS 2 geometry_msgs/msg/Twist ：本节离线消息契约所用类型的官方定义</a:t>
             </a:r>
           </a:p>
         </p:txBody>
@@ -5095,7 +5159,7 @@
           <p:cNvPr id="9" name="source-3">
             <a:extLst xmlns:a="http://schemas.openxmlformats.org/drawingml/2006/main">
               <a:ext uri="{FF2B5EF4-FFF2-40B4-BE49-F238E27FC236}">
-                <a16:creationId xmlns:a16="http://schemas.microsoft.com/office/drawing/2014/main" id="{5C957FBA-7BFB-462D-9108-010799F99082}"/>
+                <a16:creationId xmlns:a16="http://schemas.microsoft.com/office/drawing/2014/main" id="{38843761-566A-4B99-8296-A0C81713562B}"/>
               </a:ext>
             </a:extLst>
           </p:cNvPr>
@@ -5159,7 +5223,7 @@
           <p:cNvPr id="10" name="s13-takeaway-rule">
             <a:extLst xmlns:a="http://schemas.openxmlformats.org/drawingml/2006/main">
               <a:ext uri="{FF2B5EF4-FFF2-40B4-BE49-F238E27FC236}">
-                <a16:creationId xmlns:a16="http://schemas.microsoft.com/office/drawing/2014/main" id="{BCC92AED-F3A9-4F7C-B2C2-D5784F6FC1A3}"/>
+                <a16:creationId xmlns:a16="http://schemas.microsoft.com/office/drawing/2014/main" id="{647B9EA0-6E37-4132-8313-756401637AEE}"/>
               </a:ext>
             </a:extLst>
           </p:cNvPr>
@@ -5192,7 +5256,7 @@
           <p:cNvPr id="11" name="s13-takeaway">
             <a:extLst xmlns:a="http://schemas.openxmlformats.org/drawingml/2006/main">
               <a:ext uri="{FF2B5EF4-FFF2-40B4-BE49-F238E27FC236}">
-                <a16:creationId xmlns:a16="http://schemas.microsoft.com/office/drawing/2014/main" id="{E4368F8D-0556-4E35-A347-E8471DDFD353}"/>
+                <a16:creationId xmlns:a16="http://schemas.microsoft.com/office/drawing/2014/main" id="{09786DC6-4BD7-4662-A741-57760A01A999}"/>
               </a:ext>
             </a:extLst>
           </p:cNvPr>
@@ -5248,7 +5312,7 @@
     </p:spTree>
     <p:extLst>
       <p:ext uri="{BB962C8B-B14F-4D97-AF65-F5344CB8AC3E}">
-        <p14:creationId xmlns:p14="http://schemas.microsoft.com/office/powerpoint/2010/main" val="630817722"/>
+        <p14:creationId xmlns:p14="http://schemas.microsoft.com/office/powerpoint/2010/main" val="313435644"/>
       </p:ext>
     </p:extLst>
   </p:cSld>
@@ -5279,7 +5343,7 @@
           <p:cNvPr id="1" name="s2-rule">
             <a:extLst xmlns:a="http://schemas.openxmlformats.org/drawingml/2006/main">
               <a:ext uri="{FF2B5EF4-FFF2-40B4-BE49-F238E27FC236}">
-                <a16:creationId xmlns:a16="http://schemas.microsoft.com/office/drawing/2014/main" id="{143611CA-AE12-4AB3-8451-5A696A51F74C}"/>
+                <a16:creationId xmlns:a16="http://schemas.microsoft.com/office/drawing/2014/main" id="{AB23E424-9411-460B-9C14-1CC9753C8405}"/>
               </a:ext>
             </a:extLst>
           </p:cNvPr>
@@ -5312,7 +5376,7 @@
           <p:cNvPr id="2" name="s2-eyebrow">
             <a:extLst xmlns:a="http://schemas.openxmlformats.org/drawingml/2006/main">
               <a:ext uri="{FF2B5EF4-FFF2-40B4-BE49-F238E27FC236}">
-                <a16:creationId xmlns:a16="http://schemas.microsoft.com/office/drawing/2014/main" id="{B0F519A6-D593-47AC-B801-663CF39B36D3}"/>
+                <a16:creationId xmlns:a16="http://schemas.microsoft.com/office/drawing/2014/main" id="{94E2F918-E3D9-4E2E-8EA0-53F6A7EBB514}"/>
               </a:ext>
             </a:extLst>
           </p:cNvPr>
@@ -5370,7 +5434,7 @@
           <p:cNvPr id="3" name="s2-title">
             <a:extLst xmlns:a="http://schemas.openxmlformats.org/drawingml/2006/main">
               <a:ext uri="{FF2B5EF4-FFF2-40B4-BE49-F238E27FC236}">
-                <a16:creationId xmlns:a16="http://schemas.microsoft.com/office/drawing/2014/main" id="{813B2830-16D2-4168-8279-F482AC2F0BE7}"/>
+                <a16:creationId xmlns:a16="http://schemas.microsoft.com/office/drawing/2014/main" id="{6134F328-72AC-4944-BCAE-A62DF8112246}"/>
               </a:ext>
             </a:extLst>
           </p:cNvPr>
@@ -5418,7 +5482,7 @@
                 <a:ea typeface="PingFang SC"/>
                 <a:cs typeface="PingFang SC"/>
               </a:rPr>
-              <a:t>学完这一节，你能完成这些判断与行动</a:t>
+              <a:t>G1、Go2 与 ROS2 实训：4项学习结果</a:t>
             </a:r>
           </a:p>
         </p:txBody>
@@ -5428,7 +5492,7 @@
           <p:cNvPr id="4" name="s2-footer">
             <a:extLst xmlns:a="http://schemas.openxmlformats.org/drawingml/2006/main">
               <a:ext uri="{FF2B5EF4-FFF2-40B4-BE49-F238E27FC236}">
-                <a16:creationId xmlns:a16="http://schemas.microsoft.com/office/drawing/2014/main" id="{5A88E3DA-49BA-4236-BEB7-32532F1FA585}"/>
+                <a16:creationId xmlns:a16="http://schemas.microsoft.com/office/drawing/2014/main" id="{8804E7AC-65FD-47BA-809E-5FDA39C5E11D}"/>
               </a:ext>
             </a:extLst>
           </p:cNvPr>
@@ -5459,7 +5523,7 @@
           <p:cNvPr id="5" name="s2-identity">
             <a:extLst xmlns:a="http://schemas.openxmlformats.org/drawingml/2006/main">
               <a:ext uri="{FF2B5EF4-FFF2-40B4-BE49-F238E27FC236}">
-                <a16:creationId xmlns:a16="http://schemas.microsoft.com/office/drawing/2014/main" id="{3A370FA9-6E5F-4359-AFB4-5ABED56C5206}"/>
+                <a16:creationId xmlns:a16="http://schemas.microsoft.com/office/drawing/2014/main" id="{87B81E16-6E72-4143-858C-14D42AF5D763}"/>
               </a:ext>
             </a:extLst>
           </p:cNvPr>
@@ -5517,7 +5581,7 @@
           <p:cNvPr id="6" name="objective-1">
             <a:extLst xmlns:a="http://schemas.openxmlformats.org/drawingml/2006/main">
               <a:ext uri="{FF2B5EF4-FFF2-40B4-BE49-F238E27FC236}">
-                <a16:creationId xmlns:a16="http://schemas.microsoft.com/office/drawing/2014/main" id="{34CC2B22-9814-4A97-9909-13286C95418C}"/>
+                <a16:creationId xmlns:a16="http://schemas.microsoft.com/office/drawing/2014/main" id="{F268E47A-C499-4404-9B69-5BAF8F0040EC}"/>
               </a:ext>
             </a:extLst>
           </p:cNvPr>
@@ -5604,7 +5668,7 @@
           <p:cNvPr id="7" name="objective-2">
             <a:extLst xmlns:a="http://schemas.openxmlformats.org/drawingml/2006/main">
               <a:ext uri="{FF2B5EF4-FFF2-40B4-BE49-F238E27FC236}">
-                <a16:creationId xmlns:a16="http://schemas.microsoft.com/office/drawing/2014/main" id="{ED49C6F2-D9E0-401D-8DA3-6D386EDF6E80}"/>
+                <a16:creationId xmlns:a16="http://schemas.microsoft.com/office/drawing/2014/main" id="{436162EE-E69B-4D1A-82CE-837392AB640C}"/>
               </a:ext>
             </a:extLst>
           </p:cNvPr>
@@ -5691,7 +5755,7 @@
           <p:cNvPr id="8" name="objective-3">
             <a:extLst xmlns:a="http://schemas.openxmlformats.org/drawingml/2006/main">
               <a:ext uri="{FF2B5EF4-FFF2-40B4-BE49-F238E27FC236}">
-                <a16:creationId xmlns:a16="http://schemas.microsoft.com/office/drawing/2014/main" id="{31617302-72FA-40D9-A9A7-CC20A3CC0089}"/>
+                <a16:creationId xmlns:a16="http://schemas.microsoft.com/office/drawing/2014/main" id="{158204CB-2D6D-4CC3-8D04-A4B9661E163F}"/>
               </a:ext>
             </a:extLst>
           </p:cNvPr>
@@ -5778,7 +5842,7 @@
           <p:cNvPr id="9" name="objective-4">
             <a:extLst xmlns:a="http://schemas.openxmlformats.org/drawingml/2006/main">
               <a:ext uri="{FF2B5EF4-FFF2-40B4-BE49-F238E27FC236}">
-                <a16:creationId xmlns:a16="http://schemas.microsoft.com/office/drawing/2014/main" id="{BFFC4CF6-5E1B-4503-8DC5-8D036A95A574}"/>
+                <a16:creationId xmlns:a16="http://schemas.microsoft.com/office/drawing/2014/main" id="{1D94F769-D0AC-4E97-B21A-7BA281989D98}"/>
               </a:ext>
             </a:extLst>
           </p:cNvPr>
@@ -5802,7 +5866,7 @@
           </a:solidFill>
           <a:ln xmlns:a="http://schemas.openxmlformats.org/drawingml/2006/main" w="19050">
             <a:solidFill>
-              <a:srgbClr val="2D9B72"/>
+              <a:srgbClr val="0B6B4F"/>
             </a:solidFill>
             <a:prstDash val="solid"/>
           </a:ln>
@@ -5863,7 +5927,7 @@
     </p:spTree>
     <p:extLst>
       <p:ext uri="{BB962C8B-B14F-4D97-AF65-F5344CB8AC3E}">
-        <p14:creationId xmlns:p14="http://schemas.microsoft.com/office/powerpoint/2010/main" val="1889385810"/>
+        <p14:creationId xmlns:p14="http://schemas.microsoft.com/office/powerpoint/2010/main" val="964870051"/>
       </p:ext>
     </p:extLst>
   </p:cSld>
@@ -5894,7 +5958,7 @@
           <p:cNvPr id="1" name="s3-rule">
             <a:extLst xmlns:a="http://schemas.openxmlformats.org/drawingml/2006/main">
               <a:ext uri="{FF2B5EF4-FFF2-40B4-BE49-F238E27FC236}">
-                <a16:creationId xmlns:a16="http://schemas.microsoft.com/office/drawing/2014/main" id="{9BD4A7DA-82C8-4D25-82D9-17B44C61BECF}"/>
+                <a16:creationId xmlns:a16="http://schemas.microsoft.com/office/drawing/2014/main" id="{70661F96-58DD-4AEF-8990-10FE4C13F959}"/>
               </a:ext>
             </a:extLst>
           </p:cNvPr>
@@ -5927,7 +5991,7 @@
           <p:cNvPr id="2" name="s3-eyebrow">
             <a:extLst xmlns:a="http://schemas.openxmlformats.org/drawingml/2006/main">
               <a:ext uri="{FF2B5EF4-FFF2-40B4-BE49-F238E27FC236}">
-                <a16:creationId xmlns:a16="http://schemas.microsoft.com/office/drawing/2014/main" id="{A10A4C42-25E3-40E7-9A7F-66F6B99F12D6}"/>
+                <a16:creationId xmlns:a16="http://schemas.microsoft.com/office/drawing/2014/main" id="{6C708981-3CB9-459A-BB8D-943E7A1B1788}"/>
               </a:ext>
             </a:extLst>
           </p:cNvPr>
@@ -5985,7 +6049,7 @@
           <p:cNvPr id="3" name="s3-title">
             <a:extLst xmlns:a="http://schemas.openxmlformats.org/drawingml/2006/main">
               <a:ext uri="{FF2B5EF4-FFF2-40B4-BE49-F238E27FC236}">
-                <a16:creationId xmlns:a16="http://schemas.microsoft.com/office/drawing/2014/main" id="{4A9B305B-0367-4B6E-9D12-50C8244357DF}"/>
+                <a16:creationId xmlns:a16="http://schemas.microsoft.com/office/drawing/2014/main" id="{9DE997B2-11FD-47AA-BF98-7B50CE751D0C}"/>
               </a:ext>
             </a:extLst>
           </p:cNvPr>
@@ -6043,7 +6107,7 @@
           <p:cNvPr id="4" name="s3-footer">
             <a:extLst xmlns:a="http://schemas.openxmlformats.org/drawingml/2006/main">
               <a:ext uri="{FF2B5EF4-FFF2-40B4-BE49-F238E27FC236}">
-                <a16:creationId xmlns:a16="http://schemas.microsoft.com/office/drawing/2014/main" id="{3304465A-8A90-46E7-81AE-5295EEB123F3}"/>
+                <a16:creationId xmlns:a16="http://schemas.microsoft.com/office/drawing/2014/main" id="{168554AA-2B4B-4EB8-91EE-ABF495D2CECE}"/>
               </a:ext>
             </a:extLst>
           </p:cNvPr>
@@ -6074,7 +6138,7 @@
           <p:cNvPr id="5" name="s3-identity">
             <a:extLst xmlns:a="http://schemas.openxmlformats.org/drawingml/2006/main">
               <a:ext uri="{FF2B5EF4-FFF2-40B4-BE49-F238E27FC236}">
-                <a16:creationId xmlns:a16="http://schemas.microsoft.com/office/drawing/2014/main" id="{3E0EE8D2-B06E-48C8-8399-C7B029FBA5DF}"/>
+                <a16:creationId xmlns:a16="http://schemas.microsoft.com/office/drawing/2014/main" id="{AED7CA84-7E49-40BF-907D-5B7F2C57762F}"/>
               </a:ext>
             </a:extLst>
           </p:cNvPr>
@@ -6132,7 +6196,7 @@
           <p:cNvPr id="6" name="core-no-0">
             <a:extLst xmlns:a="http://schemas.openxmlformats.org/drawingml/2006/main">
               <a:ext uri="{FF2B5EF4-FFF2-40B4-BE49-F238E27FC236}">
-                <a16:creationId xmlns:a16="http://schemas.microsoft.com/office/drawing/2014/main" id="{038D0090-C8CA-4970-810A-0F227619BFCD}"/>
+                <a16:creationId xmlns:a16="http://schemas.microsoft.com/office/drawing/2014/main" id="{55775E45-B5D7-4373-A10D-9A1C1C03F3EB}"/>
               </a:ext>
             </a:extLst>
           </p:cNvPr>
@@ -6164,7 +6228,7 @@
             <a:pPr algn="l">
               <a:defRPr sz="2250" b="1">
                 <a:solidFill>
-                  <a:srgbClr val="2D9B72"/>
+                  <a:srgbClr val="0B6B4F"/>
                 </a:solidFill>
                 <a:latin typeface="PingFang SC"/>
                 <a:ea typeface="PingFang SC"/>
@@ -6174,7 +6238,7 @@
             <a:r>
               <a:rPr sz="2250" b="1">
                 <a:solidFill>
-                  <a:srgbClr val="2D9B72"/>
+                  <a:srgbClr val="0B6B4F"/>
                 </a:solidFill>
                 <a:latin typeface="PingFang SC"/>
                 <a:ea typeface="PingFang SC"/>
@@ -6190,7 +6254,7 @@
           <p:cNvPr id="7" name="core-label-0">
             <a:extLst xmlns:a="http://schemas.openxmlformats.org/drawingml/2006/main">
               <a:ext uri="{FF2B5EF4-FFF2-40B4-BE49-F238E27FC236}">
-                <a16:creationId xmlns:a16="http://schemas.microsoft.com/office/drawing/2014/main" id="{48D61F21-5BDC-4AE1-BB2F-9399FA34C7BF}"/>
+                <a16:creationId xmlns:a16="http://schemas.microsoft.com/office/drawing/2014/main" id="{4D109CF9-16A8-4713-A3AB-BD67F4372CB1}"/>
               </a:ext>
             </a:extLst>
           </p:cNvPr>
@@ -6248,7 +6312,7 @@
           <p:cNvPr id="8" name="core-body-0">
             <a:extLst xmlns:a="http://schemas.openxmlformats.org/drawingml/2006/main">
               <a:ext uri="{FF2B5EF4-FFF2-40B4-BE49-F238E27FC236}">
-                <a16:creationId xmlns:a16="http://schemas.microsoft.com/office/drawing/2014/main" id="{A63BF5F4-8680-4AEA-94C0-0D93DC632D63}"/>
+                <a16:creationId xmlns:a16="http://schemas.microsoft.com/office/drawing/2014/main" id="{0CB3365A-38D0-4B19-871E-3A86B38A67FA}"/>
               </a:ext>
             </a:extLst>
           </p:cNvPr>
@@ -6272,7 +6336,7 @@
           </a:solidFill>
           <a:ln xmlns:a="http://schemas.openxmlformats.org/drawingml/2006/main" w="19050">
             <a:solidFill>
-              <a:srgbClr val="2D9B72"/>
+              <a:srgbClr val="0B6B4F"/>
             </a:solidFill>
             <a:prstDash val="solid"/>
           </a:ln>
@@ -6302,7 +6366,7 @@
                 <a:ea typeface="PingFang SC"/>
                 <a:cs typeface="PingFang SC"/>
               </a:rPr>
-              <a:t>上电前清空活动区域，检查地面、关节外观、电池锁定、遥控器或急停、无线与有线网络。指定一名操作员负责命令，一名安全观察员负责急停；两人都要知道失联、异常姿态、异响、过热和人员进入安全区时如何停止…</a:t>
+              <a:t>上电前清空活动区域；检查地面、关节外观、电池锁定、遥控器或急停、无线与有线网络；指定一名操作员负责命令；一名安全观察员负责急停；两人都要知道失联、异常姿态、异响、过热和人员进入安全区时如何停止</a:t>
             </a:r>
           </a:p>
         </p:txBody>
@@ -6312,7 +6376,7 @@
           <p:cNvPr id="9" name="core-no-1">
             <a:extLst xmlns:a="http://schemas.openxmlformats.org/drawingml/2006/main">
               <a:ext uri="{FF2B5EF4-FFF2-40B4-BE49-F238E27FC236}">
-                <a16:creationId xmlns:a16="http://schemas.microsoft.com/office/drawing/2014/main" id="{3C8B3F1D-9C3C-4F92-B628-FBF2923AF820}"/>
+                <a16:creationId xmlns:a16="http://schemas.microsoft.com/office/drawing/2014/main" id="{D3347DE5-20B5-4A33-965A-477CEE7A4AC2}"/>
               </a:ext>
             </a:extLst>
           </p:cNvPr>
@@ -6344,7 +6408,7 @@
             <a:pPr algn="l">
               <a:defRPr sz="2250" b="1">
                 <a:solidFill>
-                  <a:srgbClr val="2D9B72"/>
+                  <a:srgbClr val="0B6B4F"/>
                 </a:solidFill>
                 <a:latin typeface="PingFang SC"/>
                 <a:ea typeface="PingFang SC"/>
@@ -6354,7 +6418,7 @@
             <a:r>
               <a:rPr sz="2250" b="1">
                 <a:solidFill>
-                  <a:srgbClr val="2D9B72"/>
+                  <a:srgbClr val="0B6B4F"/>
                 </a:solidFill>
                 <a:latin typeface="PingFang SC"/>
                 <a:ea typeface="PingFang SC"/>
@@ -6370,7 +6434,7 @@
           <p:cNvPr id="10" name="core-body-1">
             <a:extLst xmlns:a="http://schemas.openxmlformats.org/drawingml/2006/main">
               <a:ext uri="{FF2B5EF4-FFF2-40B4-BE49-F238E27FC236}">
-                <a16:creationId xmlns:a16="http://schemas.microsoft.com/office/drawing/2014/main" id="{8F566371-FDCF-4457-8C9E-1C1BC7B25A1F}"/>
+                <a16:creationId xmlns:a16="http://schemas.microsoft.com/office/drawing/2014/main" id="{BD30F9B1-A492-4C02-BF63-1618CA7055B5}"/>
               </a:ext>
             </a:extLst>
           </p:cNvPr>
@@ -6424,7 +6488,7 @@
                 <a:ea typeface="PingFang SC"/>
                 <a:cs typeface="PingFang SC"/>
               </a:rPr>
-              <a:t>软件环境记录操作系统、ROS2 发行版、工作区版本、机器人型号、固件和网络配置。不同版本的包名、话题名和参数可能变化；任何真机课程都应在开始前发布可访问的版本清单、接口表和急停说明…</a:t>
+              <a:t>软件环境记录操作系统、ROS2 发行版、工作区版本、机器人型号、固件和网络配置；不同版本的包名、话题名和参数可能变化；任何真机课程都应在开始前发布可访问的版本清单、接口表和急停说明</a:t>
             </a:r>
           </a:p>
         </p:txBody>
@@ -6434,7 +6498,7 @@
           <p:cNvPr id="11" name="s3-takeaway-rule">
             <a:extLst xmlns:a="http://schemas.openxmlformats.org/drawingml/2006/main">
               <a:ext uri="{FF2B5EF4-FFF2-40B4-BE49-F238E27FC236}">
-                <a16:creationId xmlns:a16="http://schemas.microsoft.com/office/drawing/2014/main" id="{4FBD4F2E-05DA-4AF4-9AF7-07431C2F65F9}"/>
+                <a16:creationId xmlns:a16="http://schemas.microsoft.com/office/drawing/2014/main" id="{08837E53-1C3A-4970-B32B-043E412BB8A4}"/>
               </a:ext>
             </a:extLst>
           </p:cNvPr>
@@ -6467,7 +6531,7 @@
           <p:cNvPr id="12" name="s3-takeaway">
             <a:extLst xmlns:a="http://schemas.openxmlformats.org/drawingml/2006/main">
               <a:ext uri="{FF2B5EF4-FFF2-40B4-BE49-F238E27FC236}">
-                <a16:creationId xmlns:a16="http://schemas.microsoft.com/office/drawing/2014/main" id="{62A606CF-4B86-4412-9CB6-F8A19D5ABE1C}"/>
+                <a16:creationId xmlns:a16="http://schemas.microsoft.com/office/drawing/2014/main" id="{A3042C9E-C51F-4BEA-8B9D-D81B16BB0A82}"/>
               </a:ext>
             </a:extLst>
           </p:cNvPr>
@@ -6523,7 +6587,7 @@
     </p:spTree>
     <p:extLst>
       <p:ext uri="{BB962C8B-B14F-4D97-AF65-F5344CB8AC3E}">
-        <p14:creationId xmlns:p14="http://schemas.microsoft.com/office/powerpoint/2010/main" val="186164669"/>
+        <p14:creationId xmlns:p14="http://schemas.microsoft.com/office/powerpoint/2010/main" val="921424391"/>
       </p:ext>
     </p:extLst>
   </p:cSld>
@@ -6554,7 +6618,7 @@
           <p:cNvPr id="1" name="s4-rule">
             <a:extLst xmlns:a="http://schemas.openxmlformats.org/drawingml/2006/main">
               <a:ext uri="{FF2B5EF4-FFF2-40B4-BE49-F238E27FC236}">
-                <a16:creationId xmlns:a16="http://schemas.microsoft.com/office/drawing/2014/main" id="{154FAF02-9B45-4AC0-91F1-7E2545CDE1C5}"/>
+                <a16:creationId xmlns:a16="http://schemas.microsoft.com/office/drawing/2014/main" id="{39BBF01C-07C7-444D-805D-C14BCED40828}"/>
               </a:ext>
             </a:extLst>
           </p:cNvPr>
@@ -6587,7 +6651,7 @@
           <p:cNvPr id="2" name="s4-eyebrow">
             <a:extLst xmlns:a="http://schemas.openxmlformats.org/drawingml/2006/main">
               <a:ext uri="{FF2B5EF4-FFF2-40B4-BE49-F238E27FC236}">
-                <a16:creationId xmlns:a16="http://schemas.microsoft.com/office/drawing/2014/main" id="{BAA6DA11-516B-46DA-860D-E0FEFA1C8B56}"/>
+                <a16:creationId xmlns:a16="http://schemas.microsoft.com/office/drawing/2014/main" id="{6F7C48C8-733F-4514-8F3B-2019AA0857BF}"/>
               </a:ext>
             </a:extLst>
           </p:cNvPr>
@@ -6645,7 +6709,7 @@
           <p:cNvPr id="3" name="s4-title">
             <a:extLst xmlns:a="http://schemas.openxmlformats.org/drawingml/2006/main">
               <a:ext uri="{FF2B5EF4-FFF2-40B4-BE49-F238E27FC236}">
-                <a16:creationId xmlns:a16="http://schemas.microsoft.com/office/drawing/2014/main" id="{FDB3E4CB-EC45-4BF2-8752-1F99ADCEBA87}"/>
+                <a16:creationId xmlns:a16="http://schemas.microsoft.com/office/drawing/2014/main" id="{5E1E0596-AEB5-4229-A29F-912F89319293}"/>
               </a:ext>
             </a:extLst>
           </p:cNvPr>
@@ -6703,7 +6767,7 @@
           <p:cNvPr id="4" name="s4-footer">
             <a:extLst xmlns:a="http://schemas.openxmlformats.org/drawingml/2006/main">
               <a:ext uri="{FF2B5EF4-FFF2-40B4-BE49-F238E27FC236}">
-                <a16:creationId xmlns:a16="http://schemas.microsoft.com/office/drawing/2014/main" id="{922D6225-6E64-4136-85B2-4810FB4F30D1}"/>
+                <a16:creationId xmlns:a16="http://schemas.microsoft.com/office/drawing/2014/main" id="{F44513F3-A37F-40D7-8565-91D2D09192A6}"/>
               </a:ext>
             </a:extLst>
           </p:cNvPr>
@@ -6734,7 +6798,7 @@
           <p:cNvPr id="5" name="s4-identity">
             <a:extLst xmlns:a="http://schemas.openxmlformats.org/drawingml/2006/main">
               <a:ext uri="{FF2B5EF4-FFF2-40B4-BE49-F238E27FC236}">
-                <a16:creationId xmlns:a16="http://schemas.microsoft.com/office/drawing/2014/main" id="{EED1A9FA-D279-486A-B8B4-8E7DD00862C2}"/>
+                <a16:creationId xmlns:a16="http://schemas.microsoft.com/office/drawing/2014/main" id="{3016E300-886F-4477-9F89-0F4669E0E79B}"/>
               </a:ext>
             </a:extLst>
           </p:cNvPr>
@@ -6792,7 +6856,7 @@
           <p:cNvPr id="6" name="core-no-0">
             <a:extLst xmlns:a="http://schemas.openxmlformats.org/drawingml/2006/main">
               <a:ext uri="{FF2B5EF4-FFF2-40B4-BE49-F238E27FC236}">
-                <a16:creationId xmlns:a16="http://schemas.microsoft.com/office/drawing/2014/main" id="{19AD1D68-714C-44ED-A5A1-A803D8FB6066}"/>
+                <a16:creationId xmlns:a16="http://schemas.microsoft.com/office/drawing/2014/main" id="{DE3E887C-E144-4854-AC6E-C4AEABD481D6}"/>
               </a:ext>
             </a:extLst>
           </p:cNvPr>
@@ -6824,7 +6888,7 @@
             <a:pPr algn="l">
               <a:defRPr sz="2250" b="1">
                 <a:solidFill>
-                  <a:srgbClr val="2D9B72"/>
+                  <a:srgbClr val="0B6B4F"/>
                 </a:solidFill>
                 <a:latin typeface="PingFang SC"/>
                 <a:ea typeface="PingFang SC"/>
@@ -6834,7 +6898,7 @@
             <a:r>
               <a:rPr sz="2250" b="1">
                 <a:solidFill>
-                  <a:srgbClr val="2D9B72"/>
+                  <a:srgbClr val="0B6B4F"/>
                 </a:solidFill>
                 <a:latin typeface="PingFang SC"/>
                 <a:ea typeface="PingFang SC"/>
@@ -6850,7 +6914,7 @@
           <p:cNvPr id="7" name="core-label-0">
             <a:extLst xmlns:a="http://schemas.openxmlformats.org/drawingml/2006/main">
               <a:ext uri="{FF2B5EF4-FFF2-40B4-BE49-F238E27FC236}">
-                <a16:creationId xmlns:a16="http://schemas.microsoft.com/office/drawing/2014/main" id="{C5493E24-D7E9-4D13-A421-07A6548FF9D2}"/>
+                <a16:creationId xmlns:a16="http://schemas.microsoft.com/office/drawing/2014/main" id="{354365D6-E060-48CB-9EB3-6F4A02992D6B}"/>
               </a:ext>
             </a:extLst>
           </p:cNvPr>
@@ -6908,7 +6972,7 @@
           <p:cNvPr id="8" name="core-body-0">
             <a:extLst xmlns:a="http://schemas.openxmlformats.org/drawingml/2006/main">
               <a:ext uri="{FF2B5EF4-FFF2-40B4-BE49-F238E27FC236}">
-                <a16:creationId xmlns:a16="http://schemas.microsoft.com/office/drawing/2014/main" id="{ED1EE296-D278-4E89-B893-2981EE27EC4E}"/>
+                <a16:creationId xmlns:a16="http://schemas.microsoft.com/office/drawing/2014/main" id="{B2B5BA8A-BC32-42BC-85B1-8FAA42173748}"/>
               </a:ext>
             </a:extLst>
           </p:cNvPr>
@@ -6932,14 +6996,14 @@
           </a:solidFill>
           <a:ln xmlns:a="http://schemas.openxmlformats.org/drawingml/2006/main" w="19050">
             <a:solidFill>
-              <a:srgbClr val="2D9B72"/>
+              <a:srgbClr val="0B6B4F"/>
             </a:solidFill>
             <a:prstDash val="solid"/>
           </a:ln>
         </p:spPr>
         <p:txBody>
           <a:bodyPr xmlns:a="http://schemas.openxmlformats.org/drawingml/2006/main" lIns="152400" tIns="133350" rIns="152400" bIns="133350" anchor="ctr">
-            <a:normAutofit fontScale="98233"/>
+            <a:normAutofit fontScale="95010"/>
           </a:bodyPr>
           <a:lstStyle xmlns:a="http://schemas.openxmlformats.org/drawingml/2006/main"/>
           <a:p xmlns:a="http://schemas.openxmlformats.org/drawingml/2006/main">
@@ -6962,7 +7026,7 @@
                 <a:ea typeface="PingFang SC"/>
                 <a:cs typeface="PingFang SC"/>
               </a:rPr>
-              <a:t>ROS2 节点 承担功能， 话题 传递连续消息， 服务 处理一次请求与响应， 参数 配置节点行为， launch 文件把多个节点按依赖启动。为了让没有设备和 ROS2 环境的学习者也能完成练习…</a:t>
+              <a:t>ROS2 节点 承担功能；话题 传递连续消息；服务 处理一次请求与响应；参数 配置节点行为；launch 文件把多个节点按依赖启动；为了让没有设备和 ROS2 环境的学习者也能完成练习</a:t>
             </a:r>
           </a:p>
         </p:txBody>
@@ -6972,7 +7036,7 @@
           <p:cNvPr id="9" name="core-no-1">
             <a:extLst xmlns:a="http://schemas.openxmlformats.org/drawingml/2006/main">
               <a:ext uri="{FF2B5EF4-FFF2-40B4-BE49-F238E27FC236}">
-                <a16:creationId xmlns:a16="http://schemas.microsoft.com/office/drawing/2014/main" id="{47F1B019-7653-45DA-B24A-A6E610C75274}"/>
+                <a16:creationId xmlns:a16="http://schemas.microsoft.com/office/drawing/2014/main" id="{0CD694BE-4EA7-45BC-92CB-EC0FF50C0743}"/>
               </a:ext>
             </a:extLst>
           </p:cNvPr>
@@ -7004,7 +7068,7 @@
             <a:pPr algn="l">
               <a:defRPr sz="2250" b="1">
                 <a:solidFill>
-                  <a:srgbClr val="2D9B72"/>
+                  <a:srgbClr val="0B6B4F"/>
                 </a:solidFill>
                 <a:latin typeface="PingFang SC"/>
                 <a:ea typeface="PingFang SC"/>
@@ -7014,7 +7078,7 @@
             <a:r>
               <a:rPr sz="2250" b="1">
                 <a:solidFill>
-                  <a:srgbClr val="2D9B72"/>
+                  <a:srgbClr val="0B6B4F"/>
                 </a:solidFill>
                 <a:latin typeface="PingFang SC"/>
                 <a:ea typeface="PingFang SC"/>
@@ -7030,7 +7094,7 @@
           <p:cNvPr id="10" name="core-body-1">
             <a:extLst xmlns:a="http://schemas.openxmlformats.org/drawingml/2006/main">
               <a:ext uri="{FF2B5EF4-FFF2-40B4-BE49-F238E27FC236}">
-                <a16:creationId xmlns:a16="http://schemas.microsoft.com/office/drawing/2014/main" id="{2A0CF551-FFE5-4289-897E-A3EC67A05A57}"/>
+                <a16:creationId xmlns:a16="http://schemas.microsoft.com/office/drawing/2014/main" id="{AC1135FE-C297-4CED-A39C-E039DCF54929}"/>
               </a:ext>
             </a:extLst>
           </p:cNvPr>
@@ -7094,7 +7158,7 @@
           <p:cNvPr id="11" name="s4-takeaway-rule">
             <a:extLst xmlns:a="http://schemas.openxmlformats.org/drawingml/2006/main">
               <a:ext uri="{FF2B5EF4-FFF2-40B4-BE49-F238E27FC236}">
-                <a16:creationId xmlns:a16="http://schemas.microsoft.com/office/drawing/2014/main" id="{63A4D102-0578-4743-8D76-7DC4217E5887}"/>
+                <a16:creationId xmlns:a16="http://schemas.microsoft.com/office/drawing/2014/main" id="{2999D2F9-ADDE-498D-A04B-ADE6B22483B8}"/>
               </a:ext>
             </a:extLst>
           </p:cNvPr>
@@ -7127,7 +7191,7 @@
           <p:cNvPr id="12" name="s4-takeaway">
             <a:extLst xmlns:a="http://schemas.openxmlformats.org/drawingml/2006/main">
               <a:ext uri="{FF2B5EF4-FFF2-40B4-BE49-F238E27FC236}">
-                <a16:creationId xmlns:a16="http://schemas.microsoft.com/office/drawing/2014/main" id="{D844136B-0557-47F3-8089-398A254A9A87}"/>
+                <a16:creationId xmlns:a16="http://schemas.microsoft.com/office/drawing/2014/main" id="{ADFDDAF0-4BF3-4226-99D9-11B0E40AD036}"/>
               </a:ext>
             </a:extLst>
           </p:cNvPr>
@@ -7183,7 +7247,7 @@
     </p:spTree>
     <p:extLst>
       <p:ext uri="{BB962C8B-B14F-4D97-AF65-F5344CB8AC3E}">
-        <p14:creationId xmlns:p14="http://schemas.microsoft.com/office/powerpoint/2010/main" val="1991601975"/>
+        <p14:creationId xmlns:p14="http://schemas.microsoft.com/office/powerpoint/2010/main" val="1574832066"/>
       </p:ext>
     </p:extLst>
   </p:cSld>
@@ -7214,7 +7278,7 @@
           <p:cNvPr id="1" name="s5-rule">
             <a:extLst xmlns:a="http://schemas.openxmlformats.org/drawingml/2006/main">
               <a:ext uri="{FF2B5EF4-FFF2-40B4-BE49-F238E27FC236}">
-                <a16:creationId xmlns:a16="http://schemas.microsoft.com/office/drawing/2014/main" id="{0249F3C4-2850-4012-9C8D-DCFC8FDE748B}"/>
+                <a16:creationId xmlns:a16="http://schemas.microsoft.com/office/drawing/2014/main" id="{BFF56E9A-12D5-4B24-9815-3A52FBE55623}"/>
               </a:ext>
             </a:extLst>
           </p:cNvPr>
@@ -7247,7 +7311,7 @@
           <p:cNvPr id="2" name="s5-eyebrow">
             <a:extLst xmlns:a="http://schemas.openxmlformats.org/drawingml/2006/main">
               <a:ext uri="{FF2B5EF4-FFF2-40B4-BE49-F238E27FC236}">
-                <a16:creationId xmlns:a16="http://schemas.microsoft.com/office/drawing/2014/main" id="{85842D29-AE5B-4FC0-AA81-B99BB6330475}"/>
+                <a16:creationId xmlns:a16="http://schemas.microsoft.com/office/drawing/2014/main" id="{2B32D541-6F47-47BE-AF93-88176CA86169}"/>
               </a:ext>
             </a:extLst>
           </p:cNvPr>
@@ -7305,7 +7369,7 @@
           <p:cNvPr id="3" name="s5-title">
             <a:extLst xmlns:a="http://schemas.openxmlformats.org/drawingml/2006/main">
               <a:ext uri="{FF2B5EF4-FFF2-40B4-BE49-F238E27FC236}">
-                <a16:creationId xmlns:a16="http://schemas.microsoft.com/office/drawing/2014/main" id="{105B3D86-8C8E-40D2-AE1C-8C2CB563A056}"/>
+                <a16:creationId xmlns:a16="http://schemas.microsoft.com/office/drawing/2014/main" id="{472025C0-0C60-44A9-B1B1-AAEC759C133D}"/>
               </a:ext>
             </a:extLst>
           </p:cNvPr>
@@ -7330,7 +7394,7 @@
         </p:spPr>
         <p:txBody>
           <a:bodyPr xmlns:a="http://schemas.openxmlformats.org/drawingml/2006/main" lIns="0" tIns="0" rIns="0" bIns="0" anchor="ctr">
-            <a:normAutofit fontScale="81381"/>
+            <a:normAutofit fontScale="100000"/>
           </a:bodyPr>
           <a:lstStyle xmlns:a="http://schemas.openxmlformats.org/drawingml/2006/main"/>
           <a:p xmlns:a="http://schemas.openxmlformats.org/drawingml/2006/main">
@@ -7353,7 +7417,7 @@
                 <a:ea typeface="PingFang SC"/>
                 <a:cs typeface="PingFang SC"/>
               </a:rPr>
-              <a:t>键盘控制节点读取按键，把前进、后退、转向和停止映射为机器人命令</a:t>
+              <a:t>键盘控制先把动作意图写成可验证消息</a:t>
             </a:r>
           </a:p>
         </p:txBody>
@@ -7363,7 +7427,7 @@
           <p:cNvPr id="4" name="s5-footer">
             <a:extLst xmlns:a="http://schemas.openxmlformats.org/drawingml/2006/main">
               <a:ext uri="{FF2B5EF4-FFF2-40B4-BE49-F238E27FC236}">
-                <a16:creationId xmlns:a16="http://schemas.microsoft.com/office/drawing/2014/main" id="{0B6389E9-3C4D-4157-AF51-6A4F61E268CB}"/>
+                <a16:creationId xmlns:a16="http://schemas.microsoft.com/office/drawing/2014/main" id="{F8D98AE1-2140-46FE-A1DD-B470B9B0860C}"/>
               </a:ext>
             </a:extLst>
           </p:cNvPr>
@@ -7394,7 +7458,7 @@
           <p:cNvPr id="5" name="s5-identity">
             <a:extLst xmlns:a="http://schemas.openxmlformats.org/drawingml/2006/main">
               <a:ext uri="{FF2B5EF4-FFF2-40B4-BE49-F238E27FC236}">
-                <a16:creationId xmlns:a16="http://schemas.microsoft.com/office/drawing/2014/main" id="{CE7BDFE8-4F92-4151-A577-AC25797BD73F}"/>
+                <a16:creationId xmlns:a16="http://schemas.microsoft.com/office/drawing/2014/main" id="{646A5885-05AA-4C65-8433-CD59D08222A4}"/>
               </a:ext>
             </a:extLst>
           </p:cNvPr>
@@ -7452,7 +7516,7 @@
           <p:cNvPr id="6" name="core-no-0">
             <a:extLst xmlns:a="http://schemas.openxmlformats.org/drawingml/2006/main">
               <a:ext uri="{FF2B5EF4-FFF2-40B4-BE49-F238E27FC236}">
-                <a16:creationId xmlns:a16="http://schemas.microsoft.com/office/drawing/2014/main" id="{8DDFB95F-33C8-4948-8E46-C046F905590D}"/>
+                <a16:creationId xmlns:a16="http://schemas.microsoft.com/office/drawing/2014/main" id="{394437DF-E3A6-40D2-939F-0241B3860ED3}"/>
               </a:ext>
             </a:extLst>
           </p:cNvPr>
@@ -7484,7 +7548,7 @@
             <a:pPr algn="l">
               <a:defRPr sz="2250" b="1">
                 <a:solidFill>
-                  <a:srgbClr val="2D9B72"/>
+                  <a:srgbClr val="0B6B4F"/>
                 </a:solidFill>
                 <a:latin typeface="PingFang SC"/>
                 <a:ea typeface="PingFang SC"/>
@@ -7494,7 +7558,7 @@
             <a:r>
               <a:rPr sz="2250" b="1">
                 <a:solidFill>
-                  <a:srgbClr val="2D9B72"/>
+                  <a:srgbClr val="0B6B4F"/>
                 </a:solidFill>
                 <a:latin typeface="PingFang SC"/>
                 <a:ea typeface="PingFang SC"/>
@@ -7510,7 +7574,7 @@
           <p:cNvPr id="7" name="core-label-0">
             <a:extLst xmlns:a="http://schemas.openxmlformats.org/drawingml/2006/main">
               <a:ext uri="{FF2B5EF4-FFF2-40B4-BE49-F238E27FC236}">
-                <a16:creationId xmlns:a16="http://schemas.microsoft.com/office/drawing/2014/main" id="{B6F29A14-AAA1-405F-BC00-7A4F5E7709EE}"/>
+                <a16:creationId xmlns:a16="http://schemas.microsoft.com/office/drawing/2014/main" id="{3D4DF689-9F92-46E2-9FF3-6D9715D21178}"/>
               </a:ext>
             </a:extLst>
           </p:cNvPr>
@@ -7568,7 +7632,7 @@
           <p:cNvPr id="8" name="core-body-0">
             <a:extLst xmlns:a="http://schemas.openxmlformats.org/drawingml/2006/main">
               <a:ext uri="{FF2B5EF4-FFF2-40B4-BE49-F238E27FC236}">
-                <a16:creationId xmlns:a16="http://schemas.microsoft.com/office/drawing/2014/main" id="{7C1BEFF0-CE08-434D-BF31-206EFE163E42}"/>
+                <a16:creationId xmlns:a16="http://schemas.microsoft.com/office/drawing/2014/main" id="{0BC453A1-1E5D-4472-9A06-679D1ECAE9F3}"/>
               </a:ext>
             </a:extLst>
           </p:cNvPr>
@@ -7592,7 +7656,7 @@
           </a:solidFill>
           <a:ln xmlns:a="http://schemas.openxmlformats.org/drawingml/2006/main" w="19050">
             <a:solidFill>
-              <a:srgbClr val="2D9B72"/>
+              <a:srgbClr val="0B6B4F"/>
             </a:solidFill>
             <a:prstDash val="solid"/>
           </a:ln>
@@ -7632,7 +7696,7 @@
           <p:cNvPr id="9" name="core-no-1">
             <a:extLst xmlns:a="http://schemas.openxmlformats.org/drawingml/2006/main">
               <a:ext uri="{FF2B5EF4-FFF2-40B4-BE49-F238E27FC236}">
-                <a16:creationId xmlns:a16="http://schemas.microsoft.com/office/drawing/2014/main" id="{43388C42-86B6-4752-B078-15B5E6692326}"/>
+                <a16:creationId xmlns:a16="http://schemas.microsoft.com/office/drawing/2014/main" id="{E49CAA6D-E476-422D-B671-00821BEE4E77}"/>
               </a:ext>
             </a:extLst>
           </p:cNvPr>
@@ -7664,7 +7728,7 @@
             <a:pPr algn="l">
               <a:defRPr sz="2250" b="1">
                 <a:solidFill>
-                  <a:srgbClr val="2D9B72"/>
+                  <a:srgbClr val="0B6B4F"/>
                 </a:solidFill>
                 <a:latin typeface="PingFang SC"/>
                 <a:ea typeface="PingFang SC"/>
@@ -7674,7 +7738,7 @@
             <a:r>
               <a:rPr sz="2250" b="1">
                 <a:solidFill>
-                  <a:srgbClr val="2D9B72"/>
+                  <a:srgbClr val="0B6B4F"/>
                 </a:solidFill>
                 <a:latin typeface="PingFang SC"/>
                 <a:ea typeface="PingFang SC"/>
@@ -7690,7 +7754,7 @@
           <p:cNvPr id="10" name="core-body-1">
             <a:extLst xmlns:a="http://schemas.openxmlformats.org/drawingml/2006/main">
               <a:ext uri="{FF2B5EF4-FFF2-40B4-BE49-F238E27FC236}">
-                <a16:creationId xmlns:a16="http://schemas.microsoft.com/office/drawing/2014/main" id="{1F5F77E2-5DF2-4011-99FB-E4884498635C}"/>
+                <a16:creationId xmlns:a16="http://schemas.microsoft.com/office/drawing/2014/main" id="{35A4FBF9-5B06-480A-9E24-72E249BB9BE5}"/>
               </a:ext>
             </a:extLst>
           </p:cNvPr>
@@ -7744,7 +7808,7 @@
                 <a:ea typeface="PingFang SC"/>
                 <a:cs typeface="PingFang SC"/>
               </a:rPr>
-              <a:t>本节离线演练采用固定契约：前进命令为 linear.x = 0.05 ，左右转向只使用 angular.z 且绝对值不超过 0.10 ，其余分量始终为零；连续 0.50 秒没有新命令时…</a:t>
+              <a:t>本节离线演练采用固定契约；前进命令为 linear.x = 0.05；左右转向只使用 angular.z 且绝对值不超过 0.10；其余分量始终为零，连续 0.50 秒没有新命令时</a:t>
             </a:r>
           </a:p>
         </p:txBody>
@@ -7754,7 +7818,7 @@
           <p:cNvPr id="11" name="core-no-2">
             <a:extLst xmlns:a="http://schemas.openxmlformats.org/drawingml/2006/main">
               <a:ext uri="{FF2B5EF4-FFF2-40B4-BE49-F238E27FC236}">
-                <a16:creationId xmlns:a16="http://schemas.microsoft.com/office/drawing/2014/main" id="{034175D8-4813-45D6-BDF4-0E359EFCFE4D}"/>
+                <a16:creationId xmlns:a16="http://schemas.microsoft.com/office/drawing/2014/main" id="{8FF32285-9856-4CB6-BCC2-151296957439}"/>
               </a:ext>
             </a:extLst>
           </p:cNvPr>
@@ -7786,7 +7850,7 @@
             <a:pPr algn="l">
               <a:defRPr sz="2250" b="1">
                 <a:solidFill>
-                  <a:srgbClr val="2D9B72"/>
+                  <a:srgbClr val="0B6B4F"/>
                 </a:solidFill>
                 <a:latin typeface="PingFang SC"/>
                 <a:ea typeface="PingFang SC"/>
@@ -7796,7 +7860,7 @@
             <a:r>
               <a:rPr sz="2250" b="1">
                 <a:solidFill>
-                  <a:srgbClr val="2D9B72"/>
+                  <a:srgbClr val="0B6B4F"/>
                 </a:solidFill>
                 <a:latin typeface="PingFang SC"/>
                 <a:ea typeface="PingFang SC"/>
@@ -7812,7 +7876,7 @@
           <p:cNvPr id="12" name="core-body-2">
             <a:extLst xmlns:a="http://schemas.openxmlformats.org/drawingml/2006/main">
               <a:ext uri="{FF2B5EF4-FFF2-40B4-BE49-F238E27FC236}">
-                <a16:creationId xmlns:a16="http://schemas.microsoft.com/office/drawing/2014/main" id="{7589EDFB-29D4-4263-8EDA-3580BA4C852D}"/>
+                <a16:creationId xmlns:a16="http://schemas.microsoft.com/office/drawing/2014/main" id="{9975B65D-6F91-48BC-85EE-924FB7ACBABA}"/>
               </a:ext>
             </a:extLst>
           </p:cNvPr>
@@ -7876,7 +7940,7 @@
           <p:cNvPr id="13" name="s5-takeaway-rule">
             <a:extLst xmlns:a="http://schemas.openxmlformats.org/drawingml/2006/main">
               <a:ext uri="{FF2B5EF4-FFF2-40B4-BE49-F238E27FC236}">
-                <a16:creationId xmlns:a16="http://schemas.microsoft.com/office/drawing/2014/main" id="{23E0F7A5-BA68-444D-9675-E8A0D90EEB0C}"/>
+                <a16:creationId xmlns:a16="http://schemas.microsoft.com/office/drawing/2014/main" id="{5CA28838-8D9D-4AD9-801A-C4C1F56D57A9}"/>
               </a:ext>
             </a:extLst>
           </p:cNvPr>
@@ -7909,7 +7973,7 @@
           <p:cNvPr id="14" name="s5-takeaway">
             <a:extLst xmlns:a="http://schemas.openxmlformats.org/drawingml/2006/main">
               <a:ext uri="{FF2B5EF4-FFF2-40B4-BE49-F238E27FC236}">
-                <a16:creationId xmlns:a16="http://schemas.microsoft.com/office/drawing/2014/main" id="{8BC2E38F-A14E-4C32-BE36-9502A231B21B}"/>
+                <a16:creationId xmlns:a16="http://schemas.microsoft.com/office/drawing/2014/main" id="{7B109492-D3B8-4A71-962B-E9BF60453501}"/>
               </a:ext>
             </a:extLst>
           </p:cNvPr>
@@ -7957,7 +8021,7 @@
                 <a:ea typeface="PingFang SC"/>
                 <a:cs typeface="PingFang SC"/>
               </a:rPr>
-              <a:t>键盘控制节点读取按键，把前进、后退、转向和停止映射为机器人命令</a:t>
+              <a:t>键盘控制先把动作意图写成可验证消息</a:t>
             </a:r>
           </a:p>
         </p:txBody>
@@ -7965,7 +8029,7 @@
     </p:spTree>
     <p:extLst>
       <p:ext uri="{BB962C8B-B14F-4D97-AF65-F5344CB8AC3E}">
-        <p14:creationId xmlns:p14="http://schemas.microsoft.com/office/powerpoint/2010/main" val="1097212499"/>
+        <p14:creationId xmlns:p14="http://schemas.microsoft.com/office/powerpoint/2010/main" val="1455180319"/>
       </p:ext>
     </p:extLst>
   </p:cSld>
@@ -7996,7 +8060,7 @@
           <p:cNvPr id="1" name="s6-rule">
             <a:extLst xmlns:a="http://schemas.openxmlformats.org/drawingml/2006/main">
               <a:ext uri="{FF2B5EF4-FFF2-40B4-BE49-F238E27FC236}">
-                <a16:creationId xmlns:a16="http://schemas.microsoft.com/office/drawing/2014/main" id="{E93BDE9B-A4CA-48EF-8171-962F5662ACC3}"/>
+                <a16:creationId xmlns:a16="http://schemas.microsoft.com/office/drawing/2014/main" id="{E0087599-CFD0-4615-8F41-F602C0AD0CB2}"/>
               </a:ext>
             </a:extLst>
           </p:cNvPr>
@@ -8029,7 +8093,7 @@
           <p:cNvPr id="2" name="s6-eyebrow">
             <a:extLst xmlns:a="http://schemas.openxmlformats.org/drawingml/2006/main">
               <a:ext uri="{FF2B5EF4-FFF2-40B4-BE49-F238E27FC236}">
-                <a16:creationId xmlns:a16="http://schemas.microsoft.com/office/drawing/2014/main" id="{34FC4E45-C1B9-4CDC-98F8-A071C2F557A4}"/>
+                <a16:creationId xmlns:a16="http://schemas.microsoft.com/office/drawing/2014/main" id="{EE732733-5499-46A9-A253-7CA5ECFE2E9F}"/>
               </a:ext>
             </a:extLst>
           </p:cNvPr>
@@ -8087,7 +8151,7 @@
           <p:cNvPr id="3" name="s6-title">
             <a:extLst xmlns:a="http://schemas.openxmlformats.org/drawingml/2006/main">
               <a:ext uri="{FF2B5EF4-FFF2-40B4-BE49-F238E27FC236}">
-                <a16:creationId xmlns:a16="http://schemas.microsoft.com/office/drawing/2014/main" id="{E0EE36BA-7959-4BEA-9FD6-CC5D401B48C6}"/>
+                <a16:creationId xmlns:a16="http://schemas.microsoft.com/office/drawing/2014/main" id="{F566D55D-73E2-47B2-8484-1A808B6A75EF}"/>
               </a:ext>
             </a:extLst>
           </p:cNvPr>
@@ -8135,7 +8199,7 @@
                 <a:ea typeface="PingFang SC"/>
                 <a:cs typeface="PingFang SC"/>
               </a:rPr>
-              <a:t>导航与键盘工具常发布 geometry msgs/msg/Twist</a:t>
+              <a:t>Twist 用通用速度指令连接导航与设备接口</a:t>
             </a:r>
           </a:p>
         </p:txBody>
@@ -8145,7 +8209,7 @@
           <p:cNvPr id="4" name="s6-footer">
             <a:extLst xmlns:a="http://schemas.openxmlformats.org/drawingml/2006/main">
               <a:ext uri="{FF2B5EF4-FFF2-40B4-BE49-F238E27FC236}">
-                <a16:creationId xmlns:a16="http://schemas.microsoft.com/office/drawing/2014/main" id="{EFC55A04-F507-4AF9-BB8C-05E50B36DEB9}"/>
+                <a16:creationId xmlns:a16="http://schemas.microsoft.com/office/drawing/2014/main" id="{A1D2170D-11FD-4A8A-9BFA-7A4C2D4100D4}"/>
               </a:ext>
             </a:extLst>
           </p:cNvPr>
@@ -8176,7 +8240,7 @@
           <p:cNvPr id="5" name="s6-identity">
             <a:extLst xmlns:a="http://schemas.openxmlformats.org/drawingml/2006/main">
               <a:ext uri="{FF2B5EF4-FFF2-40B4-BE49-F238E27FC236}">
-                <a16:creationId xmlns:a16="http://schemas.microsoft.com/office/drawing/2014/main" id="{BC9DF053-D4FA-4D6B-AA19-C2BA251DEE4C}"/>
+                <a16:creationId xmlns:a16="http://schemas.microsoft.com/office/drawing/2014/main" id="{DF331934-37BB-4D1F-96A8-3830641CDA15}"/>
               </a:ext>
             </a:extLst>
           </p:cNvPr>
@@ -8234,7 +8298,7 @@
           <p:cNvPr id="6" name="core-no-0">
             <a:extLst xmlns:a="http://schemas.openxmlformats.org/drawingml/2006/main">
               <a:ext uri="{FF2B5EF4-FFF2-40B4-BE49-F238E27FC236}">
-                <a16:creationId xmlns:a16="http://schemas.microsoft.com/office/drawing/2014/main" id="{F463080C-C0CE-4F9C-A69A-581CD0409379}"/>
+                <a16:creationId xmlns:a16="http://schemas.microsoft.com/office/drawing/2014/main" id="{5C772D87-84CC-4007-A6D0-296C5C834900}"/>
               </a:ext>
             </a:extLst>
           </p:cNvPr>
@@ -8266,7 +8330,7 @@
             <a:pPr algn="l">
               <a:defRPr sz="2250" b="1">
                 <a:solidFill>
-                  <a:srgbClr val="2D9B72"/>
+                  <a:srgbClr val="0B6B4F"/>
                 </a:solidFill>
                 <a:latin typeface="PingFang SC"/>
                 <a:ea typeface="PingFang SC"/>
@@ -8276,7 +8340,7 @@
             <a:r>
               <a:rPr sz="2250" b="1">
                 <a:solidFill>
-                  <a:srgbClr val="2D9B72"/>
+                  <a:srgbClr val="0B6B4F"/>
                 </a:solidFill>
                 <a:latin typeface="PingFang SC"/>
                 <a:ea typeface="PingFang SC"/>
@@ -8292,7 +8356,7 @@
           <p:cNvPr id="7" name="core-label-0">
             <a:extLst xmlns:a="http://schemas.openxmlformats.org/drawingml/2006/main">
               <a:ext uri="{FF2B5EF4-FFF2-40B4-BE49-F238E27FC236}">
-                <a16:creationId xmlns:a16="http://schemas.microsoft.com/office/drawing/2014/main" id="{F43FD3E6-DEA9-4407-9767-7EBCDBB85A27}"/>
+                <a16:creationId xmlns:a16="http://schemas.microsoft.com/office/drawing/2014/main" id="{4B512D6A-F0F6-42E7-8390-341E4ABA125F}"/>
               </a:ext>
             </a:extLst>
           </p:cNvPr>
@@ -8350,7 +8414,7 @@
           <p:cNvPr id="8" name="core-body-0">
             <a:extLst xmlns:a="http://schemas.openxmlformats.org/drawingml/2006/main">
               <a:ext uri="{FF2B5EF4-FFF2-40B4-BE49-F238E27FC236}">
-                <a16:creationId xmlns:a16="http://schemas.microsoft.com/office/drawing/2014/main" id="{FA288E65-5985-42CC-AC00-64B6C31EAD32}"/>
+                <a16:creationId xmlns:a16="http://schemas.microsoft.com/office/drawing/2014/main" id="{5E64B8DA-E04F-465E-8BD9-96B67C64F72A}"/>
               </a:ext>
             </a:extLst>
           </p:cNvPr>
@@ -8374,14 +8438,14 @@
           </a:solidFill>
           <a:ln xmlns:a="http://schemas.openxmlformats.org/drawingml/2006/main" w="19050">
             <a:solidFill>
-              <a:srgbClr val="2D9B72"/>
+              <a:srgbClr val="0B6B4F"/>
             </a:solidFill>
             <a:prstDash val="solid"/>
           </a:ln>
         </p:spPr>
         <p:txBody>
           <a:bodyPr xmlns:a="http://schemas.openxmlformats.org/drawingml/2006/main" lIns="152400" tIns="133350" rIns="152400" bIns="133350" anchor="ctr">
-            <a:normAutofit fontScale="98233"/>
+            <a:normAutofit fontScale="100000"/>
           </a:bodyPr>
           <a:lstStyle xmlns:a="http://schemas.openxmlformats.org/drawingml/2006/main"/>
           <a:p xmlns:a="http://schemas.openxmlformats.org/drawingml/2006/main">
@@ -8404,7 +8468,7 @@
                 <a:ea typeface="PingFang SC"/>
                 <a:cs typeface="PingFang SC"/>
               </a:rPr>
-              <a:t>导航与键盘工具常发布 geometry msgs/msg/Twist ，其中线速度和角速度使用通用字段；设备驱动可能使用厂商消息或专用 API。桥接节点订阅 Twist ，做限幅…</a:t>
+              <a:t>导航与键盘工具常发布 geometry_msgs/msg/Twist；其中线速度和角速度使用通用字段；设备驱动可能使用厂商消息或专用 API；桥接节点订阅 Twist</a:t>
             </a:r>
           </a:p>
         </p:txBody>
@@ -8414,7 +8478,7 @@
           <p:cNvPr id="9" name="core-no-1">
             <a:extLst xmlns:a="http://schemas.openxmlformats.org/drawingml/2006/main">
               <a:ext uri="{FF2B5EF4-FFF2-40B4-BE49-F238E27FC236}">
-                <a16:creationId xmlns:a16="http://schemas.microsoft.com/office/drawing/2014/main" id="{8078F488-56D0-4CD2-B874-7F2983F4EA38}"/>
+                <a16:creationId xmlns:a16="http://schemas.microsoft.com/office/drawing/2014/main" id="{9FA9EAE0-3C69-4DF1-8CA4-96E6F2C0F815}"/>
               </a:ext>
             </a:extLst>
           </p:cNvPr>
@@ -8446,7 +8510,7 @@
             <a:pPr algn="l">
               <a:defRPr sz="2250" b="1">
                 <a:solidFill>
-                  <a:srgbClr val="2D9B72"/>
+                  <a:srgbClr val="0B6B4F"/>
                 </a:solidFill>
                 <a:latin typeface="PingFang SC"/>
                 <a:ea typeface="PingFang SC"/>
@@ -8456,7 +8520,7 @@
             <a:r>
               <a:rPr sz="2250" b="1">
                 <a:solidFill>
-                  <a:srgbClr val="2D9B72"/>
+                  <a:srgbClr val="0B6B4F"/>
                 </a:solidFill>
                 <a:latin typeface="PingFang SC"/>
                 <a:ea typeface="PingFang SC"/>
@@ -8472,7 +8536,7 @@
           <p:cNvPr id="10" name="core-body-1">
             <a:extLst xmlns:a="http://schemas.openxmlformats.org/drawingml/2006/main">
               <a:ext uri="{FF2B5EF4-FFF2-40B4-BE49-F238E27FC236}">
-                <a16:creationId xmlns:a16="http://schemas.microsoft.com/office/drawing/2014/main" id="{F6E35E97-0D2F-40B4-BB2B-AE33ACCBD0ED}"/>
+                <a16:creationId xmlns:a16="http://schemas.microsoft.com/office/drawing/2014/main" id="{CFA7692F-A8D4-406A-9B85-CCE8DF8EF9F8}"/>
               </a:ext>
             </a:extLst>
           </p:cNvPr>
@@ -8536,7 +8600,7 @@
           <p:cNvPr id="11" name="s6-takeaway-rule">
             <a:extLst xmlns:a="http://schemas.openxmlformats.org/drawingml/2006/main">
               <a:ext uri="{FF2B5EF4-FFF2-40B4-BE49-F238E27FC236}">
-                <a16:creationId xmlns:a16="http://schemas.microsoft.com/office/drawing/2014/main" id="{C1402973-6B50-4AD5-8A61-C3A18A4F9B91}"/>
+                <a16:creationId xmlns:a16="http://schemas.microsoft.com/office/drawing/2014/main" id="{1EDCB515-7318-47DC-95F4-13B40D0DA6DB}"/>
               </a:ext>
             </a:extLst>
           </p:cNvPr>
@@ -8569,7 +8633,7 @@
           <p:cNvPr id="12" name="s6-takeaway">
             <a:extLst xmlns:a="http://schemas.openxmlformats.org/drawingml/2006/main">
               <a:ext uri="{FF2B5EF4-FFF2-40B4-BE49-F238E27FC236}">
-                <a16:creationId xmlns:a16="http://schemas.microsoft.com/office/drawing/2014/main" id="{56E24C2B-589A-4502-937E-C4D96CC057DA}"/>
+                <a16:creationId xmlns:a16="http://schemas.microsoft.com/office/drawing/2014/main" id="{7BDB4A7C-91DF-45A7-A028-4172EA33790B}"/>
               </a:ext>
             </a:extLst>
           </p:cNvPr>
@@ -8617,7 +8681,7 @@
                 <a:ea typeface="PingFang SC"/>
                 <a:cs typeface="PingFang SC"/>
               </a:rPr>
-              <a:t>导航与键盘工具常发布 geometry msgs/msg/Twist</a:t>
+              <a:t>Twist 用通用速度指令连接导航与设备接口</a:t>
             </a:r>
           </a:p>
         </p:txBody>
@@ -8625,7 +8689,7 @@
     </p:spTree>
     <p:extLst>
       <p:ext uri="{BB962C8B-B14F-4D97-AF65-F5344CB8AC3E}">
-        <p14:creationId xmlns:p14="http://schemas.microsoft.com/office/powerpoint/2010/main" val="1440422121"/>
+        <p14:creationId xmlns:p14="http://schemas.microsoft.com/office/powerpoint/2010/main" val="472400444"/>
       </p:ext>
     </p:extLst>
   </p:cSld>
@@ -8656,7 +8720,7 @@
           <p:cNvPr id="1" name="s7-rule">
             <a:extLst xmlns:a="http://schemas.openxmlformats.org/drawingml/2006/main">
               <a:ext uri="{FF2B5EF4-FFF2-40B4-BE49-F238E27FC236}">
-                <a16:creationId xmlns:a16="http://schemas.microsoft.com/office/drawing/2014/main" id="{113ECA55-CB7D-4E72-9C1A-6430CC690EE4}"/>
+                <a16:creationId xmlns:a16="http://schemas.microsoft.com/office/drawing/2014/main" id="{B7C16597-BB29-4781-9032-26F1591D8734}"/>
               </a:ext>
             </a:extLst>
           </p:cNvPr>
@@ -8689,7 +8753,7 @@
           <p:cNvPr id="2" name="s7-eyebrow">
             <a:extLst xmlns:a="http://schemas.openxmlformats.org/drawingml/2006/main">
               <a:ext uri="{FF2B5EF4-FFF2-40B4-BE49-F238E27FC236}">
-                <a16:creationId xmlns:a16="http://schemas.microsoft.com/office/drawing/2014/main" id="{1F6F8AF2-6BF6-4B9F-89AA-6253C77D57DE}"/>
+                <a16:creationId xmlns:a16="http://schemas.microsoft.com/office/drawing/2014/main" id="{247DB5F6-9CBC-45B6-9DF4-46152E7A81F0}"/>
               </a:ext>
             </a:extLst>
           </p:cNvPr>
@@ -8747,7 +8811,7 @@
           <p:cNvPr id="3" name="s7-title">
             <a:extLst xmlns:a="http://schemas.openxmlformats.org/drawingml/2006/main">
               <a:ext uri="{FF2B5EF4-FFF2-40B4-BE49-F238E27FC236}">
-                <a16:creationId xmlns:a16="http://schemas.microsoft.com/office/drawing/2014/main" id="{EEC510F2-21B5-4037-9ABD-300B00E650A1}"/>
+                <a16:creationId xmlns:a16="http://schemas.microsoft.com/office/drawing/2014/main" id="{703571EF-7144-46E7-894B-5BEC773962A7}"/>
               </a:ext>
             </a:extLst>
           </p:cNvPr>
@@ -8805,7 +8869,7 @@
           <p:cNvPr id="4" name="s7-footer">
             <a:extLst xmlns:a="http://schemas.openxmlformats.org/drawingml/2006/main">
               <a:ext uri="{FF2B5EF4-FFF2-40B4-BE49-F238E27FC236}">
-                <a16:creationId xmlns:a16="http://schemas.microsoft.com/office/drawing/2014/main" id="{13BD4C2A-2A1F-45F9-9509-5C6B98E4892A}"/>
+                <a16:creationId xmlns:a16="http://schemas.microsoft.com/office/drawing/2014/main" id="{A3E1B01E-F3E5-4B31-865C-AE03559F77BF}"/>
               </a:ext>
             </a:extLst>
           </p:cNvPr>
@@ -8836,7 +8900,7 @@
           <p:cNvPr id="5" name="s7-identity">
             <a:extLst xmlns:a="http://schemas.openxmlformats.org/drawingml/2006/main">
               <a:ext uri="{FF2B5EF4-FFF2-40B4-BE49-F238E27FC236}">
-                <a16:creationId xmlns:a16="http://schemas.microsoft.com/office/drawing/2014/main" id="{F5457C8A-E81F-4FA9-9D77-4AC1E895E3C9}"/>
+                <a16:creationId xmlns:a16="http://schemas.microsoft.com/office/drawing/2014/main" id="{31D180C1-0DEF-4C89-94DA-C65346421802}"/>
               </a:ext>
             </a:extLst>
           </p:cNvPr>
@@ -8894,7 +8958,7 @@
           <p:cNvPr id="6" name="core-no-0">
             <a:extLst xmlns:a="http://schemas.openxmlformats.org/drawingml/2006/main">
               <a:ext uri="{FF2B5EF4-FFF2-40B4-BE49-F238E27FC236}">
-                <a16:creationId xmlns:a16="http://schemas.microsoft.com/office/drawing/2014/main" id="{D9741771-2F67-4D24-A8EC-3137BC4541C2}"/>
+                <a16:creationId xmlns:a16="http://schemas.microsoft.com/office/drawing/2014/main" id="{E086909F-E8ED-467A-861B-94F26790DE98}"/>
               </a:ext>
             </a:extLst>
           </p:cNvPr>
@@ -8926,7 +8990,7 @@
             <a:pPr algn="l">
               <a:defRPr sz="2250" b="1">
                 <a:solidFill>
-                  <a:srgbClr val="2D9B72"/>
+                  <a:srgbClr val="0B6B4F"/>
                 </a:solidFill>
                 <a:latin typeface="PingFang SC"/>
                 <a:ea typeface="PingFang SC"/>
@@ -8936,7 +9000,7 @@
             <a:r>
               <a:rPr sz="2250" b="1">
                 <a:solidFill>
-                  <a:srgbClr val="2D9B72"/>
+                  <a:srgbClr val="0B6B4F"/>
                 </a:solidFill>
                 <a:latin typeface="PingFang SC"/>
                 <a:ea typeface="PingFang SC"/>
@@ -8952,7 +9016,7 @@
           <p:cNvPr id="7" name="core-label-0">
             <a:extLst xmlns:a="http://schemas.openxmlformats.org/drawingml/2006/main">
               <a:ext uri="{FF2B5EF4-FFF2-40B4-BE49-F238E27FC236}">
-                <a16:creationId xmlns:a16="http://schemas.microsoft.com/office/drawing/2014/main" id="{EF0AE32A-5142-467A-BE10-FFCB32DAE3AA}"/>
+                <a16:creationId xmlns:a16="http://schemas.microsoft.com/office/drawing/2014/main" id="{948B8C53-DD0C-4C0D-B399-96E5808FD003}"/>
               </a:ext>
             </a:extLst>
           </p:cNvPr>
@@ -9010,7 +9074,7 @@
           <p:cNvPr id="8" name="core-body-0">
             <a:extLst xmlns:a="http://schemas.openxmlformats.org/drawingml/2006/main">
               <a:ext uri="{FF2B5EF4-FFF2-40B4-BE49-F238E27FC236}">
-                <a16:creationId xmlns:a16="http://schemas.microsoft.com/office/drawing/2014/main" id="{F16E82D5-B676-4E4E-95EA-685DC5355F69}"/>
+                <a16:creationId xmlns:a16="http://schemas.microsoft.com/office/drawing/2014/main" id="{1C09F8BC-8528-47FE-A841-4AD822B6CC47}"/>
               </a:ext>
             </a:extLst>
           </p:cNvPr>
@@ -9034,7 +9098,7 @@
           </a:solidFill>
           <a:ln xmlns:a="http://schemas.openxmlformats.org/drawingml/2006/main" w="19050">
             <a:solidFill>
-              <a:srgbClr val="2D9B72"/>
+              <a:srgbClr val="0B6B4F"/>
             </a:solidFill>
             <a:prstDash val="solid"/>
           </a:ln>
@@ -9064,7 +9128,7 @@
                 <a:ea typeface="PingFang SC"/>
                 <a:cs typeface="PingFang SC"/>
               </a:rPr>
-              <a:t>URDF 描述连杆、关节、惯性和视觉模型， robot state publisher 根据关节状态发布 TF，RViz 用来检查模型姿态与坐标关系。模型可视化通过不等于真机状态正确…</a:t>
+              <a:t>URDF 描述连杆、关节、惯性和视觉模型；robot_state_publisher 根据关节状态发布 TF；RViz 用来检查模型姿态与坐标关系；模型可视化通过不等于真机状态正确</a:t>
             </a:r>
           </a:p>
         </p:txBody>
@@ -9074,7 +9138,7 @@
           <p:cNvPr id="9" name="core-no-1">
             <a:extLst xmlns:a="http://schemas.openxmlformats.org/drawingml/2006/main">
               <a:ext uri="{FF2B5EF4-FFF2-40B4-BE49-F238E27FC236}">
-                <a16:creationId xmlns:a16="http://schemas.microsoft.com/office/drawing/2014/main" id="{5A712B63-6149-4A99-8E18-9AFD2D9F9C77}"/>
+                <a16:creationId xmlns:a16="http://schemas.microsoft.com/office/drawing/2014/main" id="{7CEE3082-D9C4-43CE-8125-319DE162659D}"/>
               </a:ext>
             </a:extLst>
           </p:cNvPr>
@@ -9106,7 +9170,7 @@
             <a:pPr algn="l">
               <a:defRPr sz="2250" b="1">
                 <a:solidFill>
-                  <a:srgbClr val="2D9B72"/>
+                  <a:srgbClr val="0B6B4F"/>
                 </a:solidFill>
                 <a:latin typeface="PingFang SC"/>
                 <a:ea typeface="PingFang SC"/>
@@ -9116,7 +9180,7 @@
             <a:r>
               <a:rPr sz="2250" b="1">
                 <a:solidFill>
-                  <a:srgbClr val="2D9B72"/>
+                  <a:srgbClr val="0B6B4F"/>
                 </a:solidFill>
                 <a:latin typeface="PingFang SC"/>
                 <a:ea typeface="PingFang SC"/>
@@ -9132,7 +9196,7 @@
           <p:cNvPr id="10" name="core-body-1">
             <a:extLst xmlns:a="http://schemas.openxmlformats.org/drawingml/2006/main">
               <a:ext uri="{FF2B5EF4-FFF2-40B4-BE49-F238E27FC236}">
-                <a16:creationId xmlns:a16="http://schemas.microsoft.com/office/drawing/2014/main" id="{77938360-C691-4EDB-9354-FC7FEC6CC354}"/>
+                <a16:creationId xmlns:a16="http://schemas.microsoft.com/office/drawing/2014/main" id="{7A24D6E2-779B-461E-921F-218213099F46}"/>
               </a:ext>
             </a:extLst>
           </p:cNvPr>
@@ -9186,7 +9250,7 @@
                 <a:ea typeface="PingFang SC"/>
                 <a:cs typeface="PingFang SC"/>
               </a:rPr>
-              <a:t>检查固定姿态时各关节是否方向一致，移动后模型是否跟随， base 、里程计与世界坐标是否形成连通 TF 树。不要为了“画面看起来对”而在 RViz 中临时补错坐标，应回到 URDF…</a:t>
+              <a:t>检查固定姿态时各关节是否方向一致；移动后模型是否跟随；base 、里程计与世界坐标是否形成连通 TF 树；不要为了“画面看起来对”而在 RViz 中临时补错坐标</a:t>
             </a:r>
           </a:p>
         </p:txBody>
@@ -9196,7 +9260,7 @@
           <p:cNvPr id="11" name="s7-takeaway-rule">
             <a:extLst xmlns:a="http://schemas.openxmlformats.org/drawingml/2006/main">
               <a:ext uri="{FF2B5EF4-FFF2-40B4-BE49-F238E27FC236}">
-                <a16:creationId xmlns:a16="http://schemas.microsoft.com/office/drawing/2014/main" id="{2A0F36D6-8C03-4FAC-BD74-B08419F0D9DF}"/>
+                <a16:creationId xmlns:a16="http://schemas.microsoft.com/office/drawing/2014/main" id="{6B3284F5-3AE7-4867-B36D-4915FEBD8B91}"/>
               </a:ext>
             </a:extLst>
           </p:cNvPr>
@@ -9229,7 +9293,7 @@
           <p:cNvPr id="12" name="s7-takeaway">
             <a:extLst xmlns:a="http://schemas.openxmlformats.org/drawingml/2006/main">
               <a:ext uri="{FF2B5EF4-FFF2-40B4-BE49-F238E27FC236}">
-                <a16:creationId xmlns:a16="http://schemas.microsoft.com/office/drawing/2014/main" id="{2D004E3C-D6BA-4055-80FC-F366F141BA6C}"/>
+                <a16:creationId xmlns:a16="http://schemas.microsoft.com/office/drawing/2014/main" id="{1DDC210B-A0FB-40D7-AE7F-6FFC8F9A9FE5}"/>
               </a:ext>
             </a:extLst>
           </p:cNvPr>
@@ -9285,7 +9349,7 @@
     </p:spTree>
     <p:extLst>
       <p:ext uri="{BB962C8B-B14F-4D97-AF65-F5344CB8AC3E}">
-        <p14:creationId xmlns:p14="http://schemas.microsoft.com/office/powerpoint/2010/main" val="1121640546"/>
+        <p14:creationId xmlns:p14="http://schemas.microsoft.com/office/powerpoint/2010/main" val="1150590721"/>
       </p:ext>
     </p:extLst>
   </p:cSld>
@@ -9316,7 +9380,7 @@
           <p:cNvPr id="1" name="s8-rule">
             <a:extLst xmlns:a="http://schemas.openxmlformats.org/drawingml/2006/main">
               <a:ext uri="{FF2B5EF4-FFF2-40B4-BE49-F238E27FC236}">
-                <a16:creationId xmlns:a16="http://schemas.microsoft.com/office/drawing/2014/main" id="{F4B073CC-9502-4301-8634-414AEFDB5C4A}"/>
+                <a16:creationId xmlns:a16="http://schemas.microsoft.com/office/drawing/2014/main" id="{D6C621D2-8523-4995-8056-C515CD9AED68}"/>
               </a:ext>
             </a:extLst>
           </p:cNvPr>
@@ -9349,7 +9413,7 @@
           <p:cNvPr id="2" name="s8-eyebrow">
             <a:extLst xmlns:a="http://schemas.openxmlformats.org/drawingml/2006/main">
               <a:ext uri="{FF2B5EF4-FFF2-40B4-BE49-F238E27FC236}">
-                <a16:creationId xmlns:a16="http://schemas.microsoft.com/office/drawing/2014/main" id="{BEBACF1B-2613-4C65-8F1C-7916873C49C1}"/>
+                <a16:creationId xmlns:a16="http://schemas.microsoft.com/office/drawing/2014/main" id="{DDBEC0D8-6CEE-4556-B59E-F7501AE628D5}"/>
               </a:ext>
             </a:extLst>
           </p:cNvPr>
@@ -9407,7 +9471,7 @@
           <p:cNvPr id="3" name="s8-title">
             <a:extLst xmlns:a="http://schemas.openxmlformats.org/drawingml/2006/main">
               <a:ext uri="{FF2B5EF4-FFF2-40B4-BE49-F238E27FC236}">
-                <a16:creationId xmlns:a16="http://schemas.microsoft.com/office/drawing/2014/main" id="{704377A7-9A48-4203-872A-A8CD1141557A}"/>
+                <a16:creationId xmlns:a16="http://schemas.microsoft.com/office/drawing/2014/main" id="{405DF7DB-C253-490B-9C1E-AE2DAA5BE85F}"/>
               </a:ext>
             </a:extLst>
           </p:cNvPr>
@@ -9465,7 +9529,7 @@
           <p:cNvPr id="4" name="s8-footer">
             <a:extLst xmlns:a="http://schemas.openxmlformats.org/drawingml/2006/main">
               <a:ext uri="{FF2B5EF4-FFF2-40B4-BE49-F238E27FC236}">
-                <a16:creationId xmlns:a16="http://schemas.microsoft.com/office/drawing/2014/main" id="{1C037C6C-CE84-46BD-8BCA-10CD442A093C}"/>
+                <a16:creationId xmlns:a16="http://schemas.microsoft.com/office/drawing/2014/main" id="{41045879-D374-4A85-99A0-2EB34532EE24}"/>
               </a:ext>
             </a:extLst>
           </p:cNvPr>
@@ -9496,7 +9560,7 @@
           <p:cNvPr id="5" name="s8-identity">
             <a:extLst xmlns:a="http://schemas.openxmlformats.org/drawingml/2006/main">
               <a:ext uri="{FF2B5EF4-FFF2-40B4-BE49-F238E27FC236}">
-                <a16:creationId xmlns:a16="http://schemas.microsoft.com/office/drawing/2014/main" id="{690F629F-DE78-44BB-971A-62680E790F50}"/>
+                <a16:creationId xmlns:a16="http://schemas.microsoft.com/office/drawing/2014/main" id="{128266F5-3220-43D1-85A5-E738E07FCC60}"/>
               </a:ext>
             </a:extLst>
           </p:cNvPr>
@@ -9554,7 +9618,7 @@
           <p:cNvPr id="6" name="core-no-0">
             <a:extLst xmlns:a="http://schemas.openxmlformats.org/drawingml/2006/main">
               <a:ext uri="{FF2B5EF4-FFF2-40B4-BE49-F238E27FC236}">
-                <a16:creationId xmlns:a16="http://schemas.microsoft.com/office/drawing/2014/main" id="{58310F0A-C022-4A0A-A6B9-887CAC2BF28A}"/>
+                <a16:creationId xmlns:a16="http://schemas.microsoft.com/office/drawing/2014/main" id="{0A387CEB-74FC-4BC0-B676-4C16967F1EE7}"/>
               </a:ext>
             </a:extLst>
           </p:cNvPr>
@@ -9586,7 +9650,7 @@
             <a:pPr algn="l">
               <a:defRPr sz="2250" b="1">
                 <a:solidFill>
-                  <a:srgbClr val="2D9B72"/>
+                  <a:srgbClr val="0B6B4F"/>
                 </a:solidFill>
                 <a:latin typeface="PingFang SC"/>
                 <a:ea typeface="PingFang SC"/>
@@ -9596,7 +9660,7 @@
             <a:r>
               <a:rPr sz="2250" b="1">
                 <a:solidFill>
-                  <a:srgbClr val="2D9B72"/>
+                  <a:srgbClr val="0B6B4F"/>
                 </a:solidFill>
                 <a:latin typeface="PingFang SC"/>
                 <a:ea typeface="PingFang SC"/>
@@ -9612,7 +9676,7 @@
           <p:cNvPr id="7" name="core-label-0">
             <a:extLst xmlns:a="http://schemas.openxmlformats.org/drawingml/2006/main">
               <a:ext uri="{FF2B5EF4-FFF2-40B4-BE49-F238E27FC236}">
-                <a16:creationId xmlns:a16="http://schemas.microsoft.com/office/drawing/2014/main" id="{224C6BDB-5945-4A20-B8EE-7980DF1EBB5E}"/>
+                <a16:creationId xmlns:a16="http://schemas.microsoft.com/office/drawing/2014/main" id="{E179C624-7273-41EC-B691-36BDC1D21555}"/>
               </a:ext>
             </a:extLst>
           </p:cNvPr>
@@ -9670,7 +9734,7 @@
           <p:cNvPr id="8" name="core-body-0">
             <a:extLst xmlns:a="http://schemas.openxmlformats.org/drawingml/2006/main">
               <a:ext uri="{FF2B5EF4-FFF2-40B4-BE49-F238E27FC236}">
-                <a16:creationId xmlns:a16="http://schemas.microsoft.com/office/drawing/2014/main" id="{A8B99B37-4DFB-45FA-86A9-D6811C173B02}"/>
+                <a16:creationId xmlns:a16="http://schemas.microsoft.com/office/drawing/2014/main" id="{8F16F5A3-9529-44AB-889E-C2B3596933E6}"/>
               </a:ext>
             </a:extLst>
           </p:cNvPr>
@@ -9694,7 +9758,7 @@
           </a:solidFill>
           <a:ln xmlns:a="http://schemas.openxmlformats.org/drawingml/2006/main" w="19050">
             <a:solidFill>
-              <a:srgbClr val="2D9B72"/>
+              <a:srgbClr val="0B6B4F"/>
             </a:solidFill>
             <a:prstDash val="solid"/>
           </a:ln>
@@ -9724,7 +9788,7 @@
                 <a:ea typeface="PingFang SC"/>
                 <a:cs typeface="PingFang SC"/>
               </a:rPr>
-              <a:t>Go2 四足结构支撑面较稳定，适合教学中从速度命令、状态读取和导航接口入门；G1 人形平台的关节数、质心高度和接触切换更复杂，跌倒可能伤及设备和周围人员。两者可共享 ROS2 的观测…</a:t>
+              <a:t>Go2 四足结构支撑面较稳定；适合教学中从速度命令、状态读取和导航接口入门；G1 人形平台的关节数、质心高度和接触切换更复杂；跌倒可能伤及设备和周围人员</a:t>
             </a:r>
           </a:p>
         </p:txBody>
@@ -9734,7 +9798,7 @@
           <p:cNvPr id="9" name="s8-takeaway-rule">
             <a:extLst xmlns:a="http://schemas.openxmlformats.org/drawingml/2006/main">
               <a:ext uri="{FF2B5EF4-FFF2-40B4-BE49-F238E27FC236}">
-                <a16:creationId xmlns:a16="http://schemas.microsoft.com/office/drawing/2014/main" id="{6F200BBD-F801-414C-A50A-7F25181F44B6}"/>
+                <a16:creationId xmlns:a16="http://schemas.microsoft.com/office/drawing/2014/main" id="{76D4C3C8-4908-41C7-A09E-3AD519280A06}"/>
               </a:ext>
             </a:extLst>
           </p:cNvPr>
@@ -9767,7 +9831,7 @@
           <p:cNvPr id="10" name="s8-takeaway">
             <a:extLst xmlns:a="http://schemas.openxmlformats.org/drawingml/2006/main">
               <a:ext uri="{FF2B5EF4-FFF2-40B4-BE49-F238E27FC236}">
-                <a16:creationId xmlns:a16="http://schemas.microsoft.com/office/drawing/2014/main" id="{A4F5E5BE-1587-4404-A34D-56C708BBB06B}"/>
+                <a16:creationId xmlns:a16="http://schemas.microsoft.com/office/drawing/2014/main" id="{B4625EDA-3A98-4837-8C4D-8C33A509C4D4}"/>
               </a:ext>
             </a:extLst>
           </p:cNvPr>
@@ -9823,7 +9887,7 @@
     </p:spTree>
     <p:extLst>
       <p:ext uri="{BB962C8B-B14F-4D97-AF65-F5344CB8AC3E}">
-        <p14:creationId xmlns:p14="http://schemas.microsoft.com/office/powerpoint/2010/main" val="1503499321"/>
+        <p14:creationId xmlns:p14="http://schemas.microsoft.com/office/powerpoint/2010/main" val="1946714999"/>
       </p:ext>
     </p:extLst>
   </p:cSld>
@@ -9854,7 +9918,7 @@
           <p:cNvPr id="1" name="s9-rule">
             <a:extLst xmlns:a="http://schemas.openxmlformats.org/drawingml/2006/main">
               <a:ext uri="{FF2B5EF4-FFF2-40B4-BE49-F238E27FC236}">
-                <a16:creationId xmlns:a16="http://schemas.microsoft.com/office/drawing/2014/main" id="{B6E6E390-77BC-49FA-B6D9-B45B7E9E16C2}"/>
+                <a16:creationId xmlns:a16="http://schemas.microsoft.com/office/drawing/2014/main" id="{064F3A94-481D-494E-B64F-813288D43FCD}"/>
               </a:ext>
             </a:extLst>
           </p:cNvPr>
@@ -9887,7 +9951,7 @@
           <p:cNvPr id="2" name="s9-eyebrow">
             <a:extLst xmlns:a="http://schemas.openxmlformats.org/drawingml/2006/main">
               <a:ext uri="{FF2B5EF4-FFF2-40B4-BE49-F238E27FC236}">
-                <a16:creationId xmlns:a16="http://schemas.microsoft.com/office/drawing/2014/main" id="{39109778-7264-452F-B3B1-806A3A92A132}"/>
+                <a16:creationId xmlns:a16="http://schemas.microsoft.com/office/drawing/2014/main" id="{7B11D5DD-60CC-4EF1-828D-9DF2E0FB904A}"/>
               </a:ext>
             </a:extLst>
           </p:cNvPr>
@@ -9945,7 +10009,7 @@
           <p:cNvPr id="3" name="s9-title">
             <a:extLst xmlns:a="http://schemas.openxmlformats.org/drawingml/2006/main">
               <a:ext uri="{FF2B5EF4-FFF2-40B4-BE49-F238E27FC236}">
-                <a16:creationId xmlns:a16="http://schemas.microsoft.com/office/drawing/2014/main" id="{915B125B-1FBF-4EDD-8DF4-F688AE2C7A28}"/>
+                <a16:creationId xmlns:a16="http://schemas.microsoft.com/office/drawing/2014/main" id="{765CDFB7-1536-4D6E-97D5-11E528F10C37}"/>
               </a:ext>
             </a:extLst>
           </p:cNvPr>
@@ -10003,7 +10067,7 @@
           <p:cNvPr id="4" name="s9-footer">
             <a:extLst xmlns:a="http://schemas.openxmlformats.org/drawingml/2006/main">
               <a:ext uri="{FF2B5EF4-FFF2-40B4-BE49-F238E27FC236}">
-                <a16:creationId xmlns:a16="http://schemas.microsoft.com/office/drawing/2014/main" id="{A753404E-68B6-4782-B67B-7EF9B2989A70}"/>
+                <a16:creationId xmlns:a16="http://schemas.microsoft.com/office/drawing/2014/main" id="{2424879E-CF6E-4675-9D73-0E74BD9BD2F4}"/>
               </a:ext>
             </a:extLst>
           </p:cNvPr>
@@ -10034,7 +10098,7 @@
           <p:cNvPr id="5" name="s9-identity">
             <a:extLst xmlns:a="http://schemas.openxmlformats.org/drawingml/2006/main">
               <a:ext uri="{FF2B5EF4-FFF2-40B4-BE49-F238E27FC236}">
-                <a16:creationId xmlns:a16="http://schemas.microsoft.com/office/drawing/2014/main" id="{346E2A43-B61E-40E3-9219-DE7A2A48425C}"/>
+                <a16:creationId xmlns:a16="http://schemas.microsoft.com/office/drawing/2014/main" id="{6FAEAFB5-181B-4D8A-A8B9-380E3A3F936C}"/>
               </a:ext>
             </a:extLst>
           </p:cNvPr>
@@ -10092,7 +10156,7 @@
           <p:cNvPr id="6" name="core-no-0">
             <a:extLst xmlns:a="http://schemas.openxmlformats.org/drawingml/2006/main">
               <a:ext uri="{FF2B5EF4-FFF2-40B4-BE49-F238E27FC236}">
-                <a16:creationId xmlns:a16="http://schemas.microsoft.com/office/drawing/2014/main" id="{8CEBA172-89E2-441A-A720-A101F7542AAF}"/>
+                <a16:creationId xmlns:a16="http://schemas.microsoft.com/office/drawing/2014/main" id="{33FEE11B-5C02-40F9-9693-61BD76EFD66C}"/>
               </a:ext>
             </a:extLst>
           </p:cNvPr>
@@ -10124,7 +10188,7 @@
             <a:pPr algn="l">
               <a:defRPr sz="2250" b="1">
                 <a:solidFill>
-                  <a:srgbClr val="2D9B72"/>
+                  <a:srgbClr val="0B6B4F"/>
                 </a:solidFill>
                 <a:latin typeface="PingFang SC"/>
                 <a:ea typeface="PingFang SC"/>
@@ -10134,7 +10198,7 @@
             <a:r>
               <a:rPr sz="2250" b="1">
                 <a:solidFill>
-                  <a:srgbClr val="2D9B72"/>
+                  <a:srgbClr val="0B6B4F"/>
                 </a:solidFill>
                 <a:latin typeface="PingFang SC"/>
                 <a:ea typeface="PingFang SC"/>
@@ -10150,7 +10214,7 @@
           <p:cNvPr id="7" name="core-label-0">
             <a:extLst xmlns:a="http://schemas.openxmlformats.org/drawingml/2006/main">
               <a:ext uri="{FF2B5EF4-FFF2-40B4-BE49-F238E27FC236}">
-                <a16:creationId xmlns:a16="http://schemas.microsoft.com/office/drawing/2014/main" id="{4FAE8BC6-B724-477E-B668-4E65DE355ECB}"/>
+                <a16:creationId xmlns:a16="http://schemas.microsoft.com/office/drawing/2014/main" id="{CCF0B365-8702-4E7D-92DF-AF4162CD6F56}"/>
               </a:ext>
             </a:extLst>
           </p:cNvPr>
@@ -10208,7 +10272,7 @@
           <p:cNvPr id="8" name="core-body-0">
             <a:extLst xmlns:a="http://schemas.openxmlformats.org/drawingml/2006/main">
               <a:ext uri="{FF2B5EF4-FFF2-40B4-BE49-F238E27FC236}">
-                <a16:creationId xmlns:a16="http://schemas.microsoft.com/office/drawing/2014/main" id="{F147231D-7766-4855-8803-AA1D6BBD7330}"/>
+                <a16:creationId xmlns:a16="http://schemas.microsoft.com/office/drawing/2014/main" id="{AC8F74C1-ADC8-4F24-95DC-102955E6A181}"/>
               </a:ext>
             </a:extLst>
           </p:cNvPr>
@@ -10232,7 +10296,7 @@
           </a:solidFill>
           <a:ln xmlns:a="http://schemas.openxmlformats.org/drawingml/2006/main" w="19050">
             <a:solidFill>
-              <a:srgbClr val="2D9B72"/>
+              <a:srgbClr val="0B6B4F"/>
             </a:solidFill>
             <a:prstDash val="solid"/>
           </a:ln>
@@ -10262,7 +10326,7 @@
                 <a:ea typeface="PingFang SC"/>
                 <a:cs typeface="PingFang SC"/>
               </a:rPr>
-              <a:t>出现异常时先停止动作并保持现场安全，然后按“电源与急停—物理网络—设备可达—驱动进程—节点—话题类型与频率—TF 与参数—应用逻辑—硬件故障”逐层排查。每层都留下可观察证据，避免同时改网络…</a:t>
+              <a:t>出现异常时先停止动作并保持现场安全；然后按“电源与急停—物理网络—设备可达—驱动进程—节点—话题类型与频率—TF 与参数—应用逻辑—硬件故障”逐层排查；每层都留下可观察证据</a:t>
             </a:r>
           </a:p>
         </p:txBody>
@@ -10272,7 +10336,7 @@
           <p:cNvPr id="9" name="s9-takeaway-rule">
             <a:extLst xmlns:a="http://schemas.openxmlformats.org/drawingml/2006/main">
               <a:ext uri="{FF2B5EF4-FFF2-40B4-BE49-F238E27FC236}">
-                <a16:creationId xmlns:a16="http://schemas.microsoft.com/office/drawing/2014/main" id="{D4ACFE34-271D-4393-8661-838B879A11AF}"/>
+                <a16:creationId xmlns:a16="http://schemas.microsoft.com/office/drawing/2014/main" id="{8FC686A8-28B9-449E-A671-B9576BE585C0}"/>
               </a:ext>
             </a:extLst>
           </p:cNvPr>
@@ -10305,7 +10369,7 @@
           <p:cNvPr id="10" name="s9-takeaway">
             <a:extLst xmlns:a="http://schemas.openxmlformats.org/drawingml/2006/main">
               <a:ext uri="{FF2B5EF4-FFF2-40B4-BE49-F238E27FC236}">
-                <a16:creationId xmlns:a16="http://schemas.microsoft.com/office/drawing/2014/main" id="{F549387E-31CE-4467-A391-DA771ADB4F82}"/>
+                <a16:creationId xmlns:a16="http://schemas.microsoft.com/office/drawing/2014/main" id="{765B0944-E6A5-48EA-9C0C-343CFD67D408}"/>
               </a:ext>
             </a:extLst>
           </p:cNvPr>
@@ -10361,7 +10425,7 @@
     </p:spTree>
     <p:extLst>
       <p:ext uri="{BB962C8B-B14F-4D97-AF65-F5344CB8AC3E}">
-        <p14:creationId xmlns:p14="http://schemas.microsoft.com/office/powerpoint/2010/main" val="538796820"/>
+        <p14:creationId xmlns:p14="http://schemas.microsoft.com/office/powerpoint/2010/main" val="1557947508"/>
       </p:ext>
     </p:extLst>
   </p:cSld>

--- a/docs/public/course-assets/course-pptx/em-005.pptx
+++ b/docs/public/course-assets/course-pptx/em-005.pptx
@@ -2,25 +2,25 @@
 <file path=ppt/presentation.xml><?xml version="1.0" encoding="utf-8"?>
 <p:presentation xmlns:p="http://schemas.openxmlformats.org/presentationml/2006/main">
   <p:sldMasterIdLst>
-    <p:sldMasterId xmlns:r="http://schemas.openxmlformats.org/officeDocument/2006/relationships" id="2147483648" r:id="Reb4eb99ec3354943"/>
+    <p:sldMasterId xmlns:r="http://schemas.openxmlformats.org/officeDocument/2006/relationships" id="2147483648" r:id="Reedc51be592342d0"/>
   </p:sldMasterIdLst>
   <p:notesMasterIdLst>
-    <p:notesMasterId xmlns:r="http://schemas.openxmlformats.org/officeDocument/2006/relationships" r:id="R2d12a45e45364188"/>
+    <p:notesMasterId xmlns:r="http://schemas.openxmlformats.org/officeDocument/2006/relationships" r:id="R9f9c251b23b54361"/>
   </p:notesMasterIdLst>
   <p:sldIdLst>
-    <p:sldId xmlns:r="http://schemas.openxmlformats.org/officeDocument/2006/relationships" id="256" r:id="R96e1192eb695434d"/>
-    <p:sldId xmlns:r="http://schemas.openxmlformats.org/officeDocument/2006/relationships" id="257" r:id="R18e1d39c9e3e4e85"/>
-    <p:sldId xmlns:r="http://schemas.openxmlformats.org/officeDocument/2006/relationships" id="258" r:id="R1976f723c1d0421d"/>
-    <p:sldId xmlns:r="http://schemas.openxmlformats.org/officeDocument/2006/relationships" id="259" r:id="Rf9b089b30aca4e76"/>
-    <p:sldId xmlns:r="http://schemas.openxmlformats.org/officeDocument/2006/relationships" id="260" r:id="R5579700cdd394729"/>
-    <p:sldId xmlns:r="http://schemas.openxmlformats.org/officeDocument/2006/relationships" id="261" r:id="Rfe474b3c1dc14e2d"/>
-    <p:sldId xmlns:r="http://schemas.openxmlformats.org/officeDocument/2006/relationships" id="262" r:id="Rf170b4f7fbf04250"/>
-    <p:sldId xmlns:r="http://schemas.openxmlformats.org/officeDocument/2006/relationships" id="263" r:id="Re4a1fae39d724251"/>
-    <p:sldId xmlns:r="http://schemas.openxmlformats.org/officeDocument/2006/relationships" id="264" r:id="Rc7f6ff94015c49c9"/>
-    <p:sldId xmlns:r="http://schemas.openxmlformats.org/officeDocument/2006/relationships" id="265" r:id="R3e8da4488fc64711"/>
-    <p:sldId xmlns:r="http://schemas.openxmlformats.org/officeDocument/2006/relationships" id="266" r:id="R182ed07fdc324129"/>
-    <p:sldId xmlns:r="http://schemas.openxmlformats.org/officeDocument/2006/relationships" id="267" r:id="R34eb72756d844468"/>
-    <p:sldId xmlns:r="http://schemas.openxmlformats.org/officeDocument/2006/relationships" id="268" r:id="R8aaba6773d244679"/>
+    <p:sldId xmlns:r="http://schemas.openxmlformats.org/officeDocument/2006/relationships" id="256" r:id="R4ae6be37808f4fd9"/>
+    <p:sldId xmlns:r="http://schemas.openxmlformats.org/officeDocument/2006/relationships" id="257" r:id="R01ad425f337b4bc9"/>
+    <p:sldId xmlns:r="http://schemas.openxmlformats.org/officeDocument/2006/relationships" id="258" r:id="R9aac595c31eb4816"/>
+    <p:sldId xmlns:r="http://schemas.openxmlformats.org/officeDocument/2006/relationships" id="259" r:id="R0bd5c7d84ba0425d"/>
+    <p:sldId xmlns:r="http://schemas.openxmlformats.org/officeDocument/2006/relationships" id="260" r:id="R820d0878725f4dac"/>
+    <p:sldId xmlns:r="http://schemas.openxmlformats.org/officeDocument/2006/relationships" id="261" r:id="Re2594071654644ab"/>
+    <p:sldId xmlns:r="http://schemas.openxmlformats.org/officeDocument/2006/relationships" id="262" r:id="R7f5d14fe816d49f6"/>
+    <p:sldId xmlns:r="http://schemas.openxmlformats.org/officeDocument/2006/relationships" id="263" r:id="R8c8ddb2876f24d34"/>
+    <p:sldId xmlns:r="http://schemas.openxmlformats.org/officeDocument/2006/relationships" id="264" r:id="Re76faabe6af04e61"/>
+    <p:sldId xmlns:r="http://schemas.openxmlformats.org/officeDocument/2006/relationships" id="265" r:id="Rcc9124a4762a4a30"/>
+    <p:sldId xmlns:r="http://schemas.openxmlformats.org/officeDocument/2006/relationships" id="266" r:id="R4026cf0a2178489a"/>
+    <p:sldId xmlns:r="http://schemas.openxmlformats.org/officeDocument/2006/relationships" id="267" r:id="Re14c5f7f0f554eb7"/>
+    <p:sldId xmlns:r="http://schemas.openxmlformats.org/officeDocument/2006/relationships" id="268" r:id="Rfb11499316d341e7"/>
   </p:sldIdLst>
   <p:sldSz cx="12192000" cy="6858000"/>
   <p:notesSz cx="6858000" cy="9144000"/>
@@ -1405,7 +1405,7 @@
   </p:cSld>
   <p:clrMap bg1="lt1" tx1="dk1" bg2="lt2" tx2="dk2" accent1="accent1" accent2="accent2" accent3="accent3" accent4="accent4" accent5="accent5" accent6="accent6" hlink="hlink" folHlink="folHlink"/>
   <p:sldLayoutIdLst>
-    <p:sldLayoutId xmlns:r="http://schemas.openxmlformats.org/officeDocument/2006/relationships" id="2147483649" r:id="R56c5b1e450e54c92"/>
+    <p:sldLayoutId xmlns:r="http://schemas.openxmlformats.org/officeDocument/2006/relationships" id="2147483649" r:id="Rda63c60988354c56"/>
   </p:sldLayoutIdLst>
   <p:txStyles>
     <p:titleStyle>
@@ -1956,7 +1956,7 @@
           <p:cNvPr id="1" name="cover-rule">
             <a:extLst xmlns:a="http://schemas.openxmlformats.org/drawingml/2006/main">
               <a:ext uri="{FF2B5EF4-FFF2-40B4-BE49-F238E27FC236}">
-                <a16:creationId xmlns:a16="http://schemas.microsoft.com/office/drawing/2014/main" id="{5E118CF3-9B2C-4DC5-AA4F-4D4DA2E4410D}"/>
+                <a16:creationId xmlns:a16="http://schemas.microsoft.com/office/drawing/2014/main" id="{E7A2E26B-046B-41FE-9AFB-2313E841B882}"/>
               </a:ext>
             </a:extLst>
           </p:cNvPr>
@@ -1989,7 +1989,7 @@
           <p:cNvPr id="2" name="cover-ring-1">
             <a:extLst xmlns:a="http://schemas.openxmlformats.org/drawingml/2006/main">
               <a:ext uri="{FF2B5EF4-FFF2-40B4-BE49-F238E27FC236}">
-                <a16:creationId xmlns:a16="http://schemas.microsoft.com/office/drawing/2014/main" id="{E1C584C5-8DF2-4FD1-BB9A-72773A54F5F6}"/>
+                <a16:creationId xmlns:a16="http://schemas.microsoft.com/office/drawing/2014/main" id="{4F839A07-8BB0-4579-BB30-58835F5C2C20}"/>
               </a:ext>
             </a:extLst>
           </p:cNvPr>
@@ -2020,7 +2020,7 @@
           <p:cNvPr id="3" name="cover-ring-2">
             <a:extLst xmlns:a="http://schemas.openxmlformats.org/drawingml/2006/main">
               <a:ext uri="{FF2B5EF4-FFF2-40B4-BE49-F238E27FC236}">
-                <a16:creationId xmlns:a16="http://schemas.microsoft.com/office/drawing/2014/main" id="{C2A6AB45-0535-48BA-8749-A4AE90E23072}"/>
+                <a16:creationId xmlns:a16="http://schemas.microsoft.com/office/drawing/2014/main" id="{9F71CF0E-226B-41E4-957C-52E0DE1F0B73}"/>
               </a:ext>
             </a:extLst>
           </p:cNvPr>
@@ -2051,7 +2051,7 @@
           <p:cNvPr id="4" name="cover-core">
             <a:extLst xmlns:a="http://schemas.openxmlformats.org/drawingml/2006/main">
               <a:ext uri="{FF2B5EF4-FFF2-40B4-BE49-F238E27FC236}">
-                <a16:creationId xmlns:a16="http://schemas.microsoft.com/office/drawing/2014/main" id="{FC65BD32-E66D-42EC-81B5-995B2064FECB}"/>
+                <a16:creationId xmlns:a16="http://schemas.microsoft.com/office/drawing/2014/main" id="{35D02033-3FBC-4909-9379-B6D155AD0F5E}"/>
               </a:ext>
             </a:extLst>
           </p:cNvPr>
@@ -2084,7 +2084,7 @@
           <p:cNvPr id="5" name="cover-line-1">
             <a:extLst xmlns:a="http://schemas.openxmlformats.org/drawingml/2006/main">
               <a:ext uri="{FF2B5EF4-FFF2-40B4-BE49-F238E27FC236}">
-                <a16:creationId xmlns:a16="http://schemas.microsoft.com/office/drawing/2014/main" id="{9028EF61-F180-4649-95A6-46264F20F8D8}"/>
+                <a16:creationId xmlns:a16="http://schemas.microsoft.com/office/drawing/2014/main" id="{21E8BD76-A187-4B5A-9982-645175EF36A0}"/>
               </a:ext>
             </a:extLst>
           </p:cNvPr>
@@ -2115,7 +2115,7 @@
           <p:cNvPr id="6" name="cover-line-2">
             <a:extLst xmlns:a="http://schemas.openxmlformats.org/drawingml/2006/main">
               <a:ext uri="{FF2B5EF4-FFF2-40B4-BE49-F238E27FC236}">
-                <a16:creationId xmlns:a16="http://schemas.microsoft.com/office/drawing/2014/main" id="{9BAEA58A-6427-4152-8088-C13CC0254FD9}"/>
+                <a16:creationId xmlns:a16="http://schemas.microsoft.com/office/drawing/2014/main" id="{C498AD64-873A-4682-AE77-E135732FF186}"/>
               </a:ext>
             </a:extLst>
           </p:cNvPr>
@@ -2146,7 +2146,7 @@
           <p:cNvPr id="7" name="cover-eyebrow">
             <a:extLst xmlns:a="http://schemas.openxmlformats.org/drawingml/2006/main">
               <a:ext uri="{FF2B5EF4-FFF2-40B4-BE49-F238E27FC236}">
-                <a16:creationId xmlns:a16="http://schemas.microsoft.com/office/drawing/2014/main" id="{007827BC-5580-4888-A9BC-A41AEFF116BC}"/>
+                <a16:creationId xmlns:a16="http://schemas.microsoft.com/office/drawing/2014/main" id="{2F2C4BA7-2232-4000-9A79-34BFC8118242}"/>
               </a:ext>
             </a:extLst>
           </p:cNvPr>
@@ -2204,7 +2204,7 @@
           <p:cNvPr id="8" name="cover-title">
             <a:extLst xmlns:a="http://schemas.openxmlformats.org/drawingml/2006/main">
               <a:ext uri="{FF2B5EF4-FFF2-40B4-BE49-F238E27FC236}">
-                <a16:creationId xmlns:a16="http://schemas.microsoft.com/office/drawing/2014/main" id="{3A2BA079-1081-4098-B138-3972DCA81300}"/>
+                <a16:creationId xmlns:a16="http://schemas.microsoft.com/office/drawing/2014/main" id="{087256A5-3144-4837-B0B3-3048E2999872}"/>
               </a:ext>
             </a:extLst>
           </p:cNvPr>
@@ -2262,7 +2262,7 @@
           <p:cNvPr id="9" name="cover-subtitle">
             <a:extLst xmlns:a="http://schemas.openxmlformats.org/drawingml/2006/main">
               <a:ext uri="{FF2B5EF4-FFF2-40B4-BE49-F238E27FC236}">
-                <a16:creationId xmlns:a16="http://schemas.microsoft.com/office/drawing/2014/main" id="{D57040BF-B95C-4A50-BB8B-053DE65013E9}"/>
+                <a16:creationId xmlns:a16="http://schemas.microsoft.com/office/drawing/2014/main" id="{89217CE0-EE1C-4963-B755-4ABE5B49B1D1}"/>
               </a:ext>
             </a:extLst>
           </p:cNvPr>
@@ -2324,7 +2324,7 @@
           <p:cNvPr id="10" name="cover-lead">
             <a:extLst xmlns:a="http://schemas.openxmlformats.org/drawingml/2006/main">
               <a:ext uri="{FF2B5EF4-FFF2-40B4-BE49-F238E27FC236}">
-                <a16:creationId xmlns:a16="http://schemas.microsoft.com/office/drawing/2014/main" id="{C4220F1E-17F6-4FAB-AB1D-9ED72F209995}"/>
+                <a16:creationId xmlns:a16="http://schemas.microsoft.com/office/drawing/2014/main" id="{6A650DAB-9056-470C-A3FC-762B1E3779F9}"/>
               </a:ext>
             </a:extLst>
           </p:cNvPr>
@@ -2382,7 +2382,7 @@
           <p:cNvPr id="11" name="cover-course">
             <a:extLst xmlns:a="http://schemas.openxmlformats.org/drawingml/2006/main">
               <a:ext uri="{FF2B5EF4-FFF2-40B4-BE49-F238E27FC236}">
-                <a16:creationId xmlns:a16="http://schemas.microsoft.com/office/drawing/2014/main" id="{E829237A-069F-4C0A-B9DB-DCDA7B729A33}"/>
+                <a16:creationId xmlns:a16="http://schemas.microsoft.com/office/drawing/2014/main" id="{0A96A277-6CA9-427B-9C76-04444438B883}"/>
               </a:ext>
             </a:extLst>
           </p:cNvPr>
@@ -2440,7 +2440,7 @@
           <p:cNvPr id="12" name="cover-id">
             <a:extLst xmlns:a="http://schemas.openxmlformats.org/drawingml/2006/main">
               <a:ext uri="{FF2B5EF4-FFF2-40B4-BE49-F238E27FC236}">
-                <a16:creationId xmlns:a16="http://schemas.microsoft.com/office/drawing/2014/main" id="{0CE33854-FC2A-4E5D-A4B3-94780B6CDD8B}"/>
+                <a16:creationId xmlns:a16="http://schemas.microsoft.com/office/drawing/2014/main" id="{29E6A5ED-8389-4F8E-8E0C-E25F7D316B89}"/>
               </a:ext>
             </a:extLst>
           </p:cNvPr>
@@ -2496,7 +2496,7 @@
     </p:spTree>
     <p:extLst>
       <p:ext uri="{BB962C8B-B14F-4D97-AF65-F5344CB8AC3E}">
-        <p14:creationId xmlns:p14="http://schemas.microsoft.com/office/powerpoint/2010/main" val="2122014573"/>
+        <p14:creationId xmlns:p14="http://schemas.microsoft.com/office/powerpoint/2010/main" val="1399394481"/>
       </p:ext>
     </p:extLst>
   </p:cSld>
@@ -2527,7 +2527,7 @@
           <p:cNvPr id="1" name="s10-rule">
             <a:extLst xmlns:a="http://schemas.openxmlformats.org/drawingml/2006/main">
               <a:ext uri="{FF2B5EF4-FFF2-40B4-BE49-F238E27FC236}">
-                <a16:creationId xmlns:a16="http://schemas.microsoft.com/office/drawing/2014/main" id="{7DC5BAC7-3099-4C43-AE63-ED591F464B9E}"/>
+                <a16:creationId xmlns:a16="http://schemas.microsoft.com/office/drawing/2014/main" id="{C8AC33C3-8936-4839-A8BF-916C609622E0}"/>
               </a:ext>
             </a:extLst>
           </p:cNvPr>
@@ -2560,7 +2560,7 @@
           <p:cNvPr id="2" name="s10-eyebrow">
             <a:extLst xmlns:a="http://schemas.openxmlformats.org/drawingml/2006/main">
               <a:ext uri="{FF2B5EF4-FFF2-40B4-BE49-F238E27FC236}">
-                <a16:creationId xmlns:a16="http://schemas.microsoft.com/office/drawing/2014/main" id="{3B9A877A-AC02-4FED-8C67-253DB3EF244F}"/>
+                <a16:creationId xmlns:a16="http://schemas.microsoft.com/office/drawing/2014/main" id="{AFF0402E-1870-425B-9E84-66C06AEA814E}"/>
               </a:ext>
             </a:extLst>
           </p:cNvPr>
@@ -2618,7 +2618,7 @@
           <p:cNvPr id="3" name="s10-title">
             <a:extLst xmlns:a="http://schemas.openxmlformats.org/drawingml/2006/main">
               <a:ext uri="{FF2B5EF4-FFF2-40B4-BE49-F238E27FC236}">
-                <a16:creationId xmlns:a16="http://schemas.microsoft.com/office/drawing/2014/main" id="{5EFFD97D-D220-4BD8-8854-786168BCEFAF}"/>
+                <a16:creationId xmlns:a16="http://schemas.microsoft.com/office/drawing/2014/main" id="{1F9762B3-2864-493E-A684-6EB1CD7372DB}"/>
               </a:ext>
             </a:extLst>
           </p:cNvPr>
@@ -2676,7 +2676,7 @@
           <p:cNvPr id="4" name="s10-footer">
             <a:extLst xmlns:a="http://schemas.openxmlformats.org/drawingml/2006/main">
               <a:ext uri="{FF2B5EF4-FFF2-40B4-BE49-F238E27FC236}">
-                <a16:creationId xmlns:a16="http://schemas.microsoft.com/office/drawing/2014/main" id="{DD141B5C-1A9E-4557-944E-00455D4A0520}"/>
+                <a16:creationId xmlns:a16="http://schemas.microsoft.com/office/drawing/2014/main" id="{BDF1B011-B956-4D52-92CC-926DD1AFE753}"/>
               </a:ext>
             </a:extLst>
           </p:cNvPr>
@@ -2707,7 +2707,7 @@
           <p:cNvPr id="5" name="s10-identity">
             <a:extLst xmlns:a="http://schemas.openxmlformats.org/drawingml/2006/main">
               <a:ext uri="{FF2B5EF4-FFF2-40B4-BE49-F238E27FC236}">
-                <a16:creationId xmlns:a16="http://schemas.microsoft.com/office/drawing/2014/main" id="{106DF7D4-258A-493D-9B81-0B4ED3571FCC}"/>
+                <a16:creationId xmlns:a16="http://schemas.microsoft.com/office/drawing/2014/main" id="{F8FEE9E5-295C-4961-9FEA-5643FB654627}"/>
               </a:ext>
             </a:extLst>
           </p:cNvPr>
@@ -2765,7 +2765,7 @@
           <p:cNvPr id="6" name="case-title">
             <a:extLst xmlns:a="http://schemas.openxmlformats.org/drawingml/2006/main">
               <a:ext uri="{FF2B5EF4-FFF2-40B4-BE49-F238E27FC236}">
-                <a16:creationId xmlns:a16="http://schemas.microsoft.com/office/drawing/2014/main" id="{B126914C-B3CB-4D63-89C3-B643FA712F1E}"/>
+                <a16:creationId xmlns:a16="http://schemas.microsoft.com/office/drawing/2014/main" id="{EE324E25-AAA6-4D6C-8414-6016641CD15B}"/>
               </a:ext>
             </a:extLst>
           </p:cNvPr>
@@ -2829,7 +2829,7 @@
           <p:cNvPr id="7" name="case-row-0">
             <a:extLst xmlns:a="http://schemas.openxmlformats.org/drawingml/2006/main">
               <a:ext uri="{FF2B5EF4-FFF2-40B4-BE49-F238E27FC236}">
-                <a16:creationId xmlns:a16="http://schemas.microsoft.com/office/drawing/2014/main" id="{88EF6F69-7A7A-4F05-93E3-E84433197643}"/>
+                <a16:creationId xmlns:a16="http://schemas.microsoft.com/office/drawing/2014/main" id="{094615A2-F513-4DB3-A301-931A6FBF7FF9}"/>
               </a:ext>
             </a:extLst>
           </p:cNvPr>
@@ -2893,7 +2893,7 @@
           <p:cNvPr id="8" name="case-row-1">
             <a:extLst xmlns:a="http://schemas.openxmlformats.org/drawingml/2006/main">
               <a:ext uri="{FF2B5EF4-FFF2-40B4-BE49-F238E27FC236}">
-                <a16:creationId xmlns:a16="http://schemas.microsoft.com/office/drawing/2014/main" id="{209F506A-A288-4B56-B5AA-96E70737FD6C}"/>
+                <a16:creationId xmlns:a16="http://schemas.microsoft.com/office/drawing/2014/main" id="{27B9E5E2-185B-4A57-BC0B-8D34FBD3678E}"/>
               </a:ext>
             </a:extLst>
           </p:cNvPr>
@@ -2957,7 +2957,7 @@
           <p:cNvPr id="9" name="case-row-2">
             <a:extLst xmlns:a="http://schemas.openxmlformats.org/drawingml/2006/main">
               <a:ext uri="{FF2B5EF4-FFF2-40B4-BE49-F238E27FC236}">
-                <a16:creationId xmlns:a16="http://schemas.microsoft.com/office/drawing/2014/main" id="{0AF65BD3-1BA4-4136-A2C7-964EC5C92E32}"/>
+                <a16:creationId xmlns:a16="http://schemas.microsoft.com/office/drawing/2014/main" id="{D028F343-8AE9-469B-A01E-0DC68E0130BD}"/>
               </a:ext>
             </a:extLst>
           </p:cNvPr>
@@ -3021,7 +3021,7 @@
           <p:cNvPr id="10" name="s10-takeaway-rule">
             <a:extLst xmlns:a="http://schemas.openxmlformats.org/drawingml/2006/main">
               <a:ext uri="{FF2B5EF4-FFF2-40B4-BE49-F238E27FC236}">
-                <a16:creationId xmlns:a16="http://schemas.microsoft.com/office/drawing/2014/main" id="{9BC24072-61EC-4C25-8BD3-00583A8D6FB6}"/>
+                <a16:creationId xmlns:a16="http://schemas.microsoft.com/office/drawing/2014/main" id="{2189DD6C-D10D-4245-BB6C-80919D9EFEB0}"/>
               </a:ext>
             </a:extLst>
           </p:cNvPr>
@@ -3054,7 +3054,7 @@
           <p:cNvPr id="11" name="s10-takeaway">
             <a:extLst xmlns:a="http://schemas.openxmlformats.org/drawingml/2006/main">
               <a:ext uri="{FF2B5EF4-FFF2-40B4-BE49-F238E27FC236}">
-                <a16:creationId xmlns:a16="http://schemas.microsoft.com/office/drawing/2014/main" id="{B0D70AF0-7452-4CEB-B025-639D2004940C}"/>
+                <a16:creationId xmlns:a16="http://schemas.microsoft.com/office/drawing/2014/main" id="{76CF6D2E-092E-405F-9141-296B3D226530}"/>
               </a:ext>
             </a:extLst>
           </p:cNvPr>
@@ -3110,7 +3110,7 @@
     </p:spTree>
     <p:extLst>
       <p:ext uri="{BB962C8B-B14F-4D97-AF65-F5344CB8AC3E}">
-        <p14:creationId xmlns:p14="http://schemas.microsoft.com/office/powerpoint/2010/main" val="1086974831"/>
+        <p14:creationId xmlns:p14="http://schemas.microsoft.com/office/powerpoint/2010/main" val="970449018"/>
       </p:ext>
     </p:extLst>
   </p:cSld>
@@ -3141,7 +3141,7 @@
           <p:cNvPr id="1" name="s11-rule">
             <a:extLst xmlns:a="http://schemas.openxmlformats.org/drawingml/2006/main">
               <a:ext uri="{FF2B5EF4-FFF2-40B4-BE49-F238E27FC236}">
-                <a16:creationId xmlns:a16="http://schemas.microsoft.com/office/drawing/2014/main" id="{10D21411-A053-485E-985D-424A52C100EE}"/>
+                <a16:creationId xmlns:a16="http://schemas.microsoft.com/office/drawing/2014/main" id="{F6E583D7-12F1-472C-A5C6-B3A4A6E09AB8}"/>
               </a:ext>
             </a:extLst>
           </p:cNvPr>
@@ -3174,7 +3174,7 @@
           <p:cNvPr id="2" name="s11-eyebrow">
             <a:extLst xmlns:a="http://schemas.openxmlformats.org/drawingml/2006/main">
               <a:ext uri="{FF2B5EF4-FFF2-40B4-BE49-F238E27FC236}">
-                <a16:creationId xmlns:a16="http://schemas.microsoft.com/office/drawing/2014/main" id="{EA3F55A7-4AD6-4B4A-BBFD-B947834B07CF}"/>
+                <a16:creationId xmlns:a16="http://schemas.microsoft.com/office/drawing/2014/main" id="{01C6157D-7B6B-452C-B6CF-BB3FEB84A22A}"/>
               </a:ext>
             </a:extLst>
           </p:cNvPr>
@@ -3232,7 +3232,7 @@
           <p:cNvPr id="3" name="s11-title">
             <a:extLst xmlns:a="http://schemas.openxmlformats.org/drawingml/2006/main">
               <a:ext uri="{FF2B5EF4-FFF2-40B4-BE49-F238E27FC236}">
-                <a16:creationId xmlns:a16="http://schemas.microsoft.com/office/drawing/2014/main" id="{2A8A49A6-D076-4F1C-A408-328F8EA0EE83}"/>
+                <a16:creationId xmlns:a16="http://schemas.microsoft.com/office/drawing/2014/main" id="{B8884378-DDCA-4CC0-B28C-360772CA3055}"/>
               </a:ext>
             </a:extLst>
           </p:cNvPr>
@@ -3290,7 +3290,7 @@
           <p:cNvPr id="4" name="s11-footer">
             <a:extLst xmlns:a="http://schemas.openxmlformats.org/drawingml/2006/main">
               <a:ext uri="{FF2B5EF4-FFF2-40B4-BE49-F238E27FC236}">
-                <a16:creationId xmlns:a16="http://schemas.microsoft.com/office/drawing/2014/main" id="{C71FDC9A-4C5D-497F-A676-79691882473B}"/>
+                <a16:creationId xmlns:a16="http://schemas.microsoft.com/office/drawing/2014/main" id="{57EB051D-EBB1-40FD-8959-C72C30697033}"/>
               </a:ext>
             </a:extLst>
           </p:cNvPr>
@@ -3321,7 +3321,7 @@
           <p:cNvPr id="5" name="s11-identity">
             <a:extLst xmlns:a="http://schemas.openxmlformats.org/drawingml/2006/main">
               <a:ext uri="{FF2B5EF4-FFF2-40B4-BE49-F238E27FC236}">
-                <a16:creationId xmlns:a16="http://schemas.microsoft.com/office/drawing/2014/main" id="{BB012438-578B-4375-973F-AC42ADEFBA49}"/>
+                <a16:creationId xmlns:a16="http://schemas.microsoft.com/office/drawing/2014/main" id="{BC6FFF90-AA96-4F04-ABC3-B6D76D56C1E5}"/>
               </a:ext>
             </a:extLst>
           </p:cNvPr>
@@ -3379,7 +3379,7 @@
           <p:cNvPr id="6" name="practice-circle-0">
             <a:extLst xmlns:a="http://schemas.openxmlformats.org/drawingml/2006/main">
               <a:ext uri="{FF2B5EF4-FFF2-40B4-BE49-F238E27FC236}">
-                <a16:creationId xmlns:a16="http://schemas.microsoft.com/office/drawing/2014/main" id="{F5DE884F-39DD-4D99-B54A-9752499476F3}"/>
+                <a16:creationId xmlns:a16="http://schemas.microsoft.com/office/drawing/2014/main" id="{7796E756-4F3E-44C9-9713-751CA7C55D5D}"/>
               </a:ext>
             </a:extLst>
           </p:cNvPr>
@@ -3412,7 +3412,7 @@
           <p:cNvPr id="7" name="practice-number-0">
             <a:extLst xmlns:a="http://schemas.openxmlformats.org/drawingml/2006/main">
               <a:ext uri="{FF2B5EF4-FFF2-40B4-BE49-F238E27FC236}">
-                <a16:creationId xmlns:a16="http://schemas.microsoft.com/office/drawing/2014/main" id="{D70B2ADC-6543-4001-8CF8-E7E0A5E83C92}"/>
+                <a16:creationId xmlns:a16="http://schemas.microsoft.com/office/drawing/2014/main" id="{1D74B6DE-0BBB-40D1-934E-2B729623470F}"/>
               </a:ext>
             </a:extLst>
           </p:cNvPr>
@@ -3470,7 +3470,7 @@
           <p:cNvPr id="8" name="practice-item-0">
             <a:extLst xmlns:a="http://schemas.openxmlformats.org/drawingml/2006/main">
               <a:ext uri="{FF2B5EF4-FFF2-40B4-BE49-F238E27FC236}">
-                <a16:creationId xmlns:a16="http://schemas.microsoft.com/office/drawing/2014/main" id="{32A97F81-02E8-4442-9634-8C1F4CC9BC12}"/>
+                <a16:creationId xmlns:a16="http://schemas.microsoft.com/office/drawing/2014/main" id="{284474A1-70A9-46C8-B64D-91E91F3F01BF}"/>
               </a:ext>
             </a:extLst>
           </p:cNvPr>
@@ -3534,7 +3534,7 @@
           <p:cNvPr id="9" name="practice-connector-0">
             <a:extLst xmlns:a="http://schemas.openxmlformats.org/drawingml/2006/main">
               <a:ext uri="{FF2B5EF4-FFF2-40B4-BE49-F238E27FC236}">
-                <a16:creationId xmlns:a16="http://schemas.microsoft.com/office/drawing/2014/main" id="{BA3984CD-DB54-4074-A169-AB59892A5D27}"/>
+                <a16:creationId xmlns:a16="http://schemas.microsoft.com/office/drawing/2014/main" id="{BBB9BBDA-85E0-4401-8704-3EDA9450D2B6}"/>
               </a:ext>
             </a:extLst>
           </p:cNvPr>
@@ -3565,7 +3565,7 @@
           <p:cNvPr id="10" name="practice-circle-1">
             <a:extLst xmlns:a="http://schemas.openxmlformats.org/drawingml/2006/main">
               <a:ext uri="{FF2B5EF4-FFF2-40B4-BE49-F238E27FC236}">
-                <a16:creationId xmlns:a16="http://schemas.microsoft.com/office/drawing/2014/main" id="{DC5841F5-7DF3-4179-B529-29A190CE708C}"/>
+                <a16:creationId xmlns:a16="http://schemas.microsoft.com/office/drawing/2014/main" id="{A512BD07-C2E6-424E-A223-A411C39DFE7C}"/>
               </a:ext>
             </a:extLst>
           </p:cNvPr>
@@ -3598,7 +3598,7 @@
           <p:cNvPr id="11" name="practice-number-1">
             <a:extLst xmlns:a="http://schemas.openxmlformats.org/drawingml/2006/main">
               <a:ext uri="{FF2B5EF4-FFF2-40B4-BE49-F238E27FC236}">
-                <a16:creationId xmlns:a16="http://schemas.microsoft.com/office/drawing/2014/main" id="{11CB70E9-0466-4E3D-9C03-FBFC66B294BD}"/>
+                <a16:creationId xmlns:a16="http://schemas.microsoft.com/office/drawing/2014/main" id="{488B4641-6D02-4441-AE6D-A1D5089E9C15}"/>
               </a:ext>
             </a:extLst>
           </p:cNvPr>
@@ -3656,7 +3656,7 @@
           <p:cNvPr id="12" name="practice-item-1">
             <a:extLst xmlns:a="http://schemas.openxmlformats.org/drawingml/2006/main">
               <a:ext uri="{FF2B5EF4-FFF2-40B4-BE49-F238E27FC236}">
-                <a16:creationId xmlns:a16="http://schemas.microsoft.com/office/drawing/2014/main" id="{A6FA8EA4-5B88-4E17-B332-5A4E27A6A39F}"/>
+                <a16:creationId xmlns:a16="http://schemas.microsoft.com/office/drawing/2014/main" id="{E404B4B3-41F7-4111-9AFD-1B66E0D59569}"/>
               </a:ext>
             </a:extLst>
           </p:cNvPr>
@@ -3720,7 +3720,7 @@
           <p:cNvPr id="13" name="practice-connector-1">
             <a:extLst xmlns:a="http://schemas.openxmlformats.org/drawingml/2006/main">
               <a:ext uri="{FF2B5EF4-FFF2-40B4-BE49-F238E27FC236}">
-                <a16:creationId xmlns:a16="http://schemas.microsoft.com/office/drawing/2014/main" id="{99D31253-53C2-4603-81C9-0C33C5BE9C85}"/>
+                <a16:creationId xmlns:a16="http://schemas.microsoft.com/office/drawing/2014/main" id="{31F21779-1FD3-4D25-985F-FC71BE606EEF}"/>
               </a:ext>
             </a:extLst>
           </p:cNvPr>
@@ -3751,7 +3751,7 @@
           <p:cNvPr id="14" name="practice-circle-2">
             <a:extLst xmlns:a="http://schemas.openxmlformats.org/drawingml/2006/main">
               <a:ext uri="{FF2B5EF4-FFF2-40B4-BE49-F238E27FC236}">
-                <a16:creationId xmlns:a16="http://schemas.microsoft.com/office/drawing/2014/main" id="{1804C37F-F0A7-4877-916C-6F0F6277F82A}"/>
+                <a16:creationId xmlns:a16="http://schemas.microsoft.com/office/drawing/2014/main" id="{A238C429-003A-4E7E-81F4-CC469A49B0BD}"/>
               </a:ext>
             </a:extLst>
           </p:cNvPr>
@@ -3784,7 +3784,7 @@
           <p:cNvPr id="15" name="practice-number-2">
             <a:extLst xmlns:a="http://schemas.openxmlformats.org/drawingml/2006/main">
               <a:ext uri="{FF2B5EF4-FFF2-40B4-BE49-F238E27FC236}">
-                <a16:creationId xmlns:a16="http://schemas.microsoft.com/office/drawing/2014/main" id="{9B88C4F3-56C2-404C-8576-CDE9C65C4B1E}"/>
+                <a16:creationId xmlns:a16="http://schemas.microsoft.com/office/drawing/2014/main" id="{40555A57-DE5A-4132-8063-2D56F3EF178F}"/>
               </a:ext>
             </a:extLst>
           </p:cNvPr>
@@ -3842,7 +3842,7 @@
           <p:cNvPr id="16" name="practice-item-2">
             <a:extLst xmlns:a="http://schemas.openxmlformats.org/drawingml/2006/main">
               <a:ext uri="{FF2B5EF4-FFF2-40B4-BE49-F238E27FC236}">
-                <a16:creationId xmlns:a16="http://schemas.microsoft.com/office/drawing/2014/main" id="{4747917A-AC6A-450C-8251-C727AFCB2C94}"/>
+                <a16:creationId xmlns:a16="http://schemas.microsoft.com/office/drawing/2014/main" id="{44E4B866-49B3-4D8A-AAA8-251532D20C64}"/>
               </a:ext>
             </a:extLst>
           </p:cNvPr>
@@ -3904,7 +3904,7 @@
     </p:spTree>
     <p:extLst>
       <p:ext uri="{BB962C8B-B14F-4D97-AF65-F5344CB8AC3E}">
-        <p14:creationId xmlns:p14="http://schemas.microsoft.com/office/powerpoint/2010/main" val="1098678340"/>
+        <p14:creationId xmlns:p14="http://schemas.microsoft.com/office/powerpoint/2010/main" val="1055524155"/>
       </p:ext>
     </p:extLst>
   </p:cSld>
@@ -3935,7 +3935,7 @@
           <p:cNvPr id="1" name="s12-rule">
             <a:extLst xmlns:a="http://schemas.openxmlformats.org/drawingml/2006/main">
               <a:ext uri="{FF2B5EF4-FFF2-40B4-BE49-F238E27FC236}">
-                <a16:creationId xmlns:a16="http://schemas.microsoft.com/office/drawing/2014/main" id="{A884AD20-15B7-41BC-A382-A7DB990E6341}"/>
+                <a16:creationId xmlns:a16="http://schemas.microsoft.com/office/drawing/2014/main" id="{B89BF93D-6EC4-4896-9F03-9C11D4458095}"/>
               </a:ext>
             </a:extLst>
           </p:cNvPr>
@@ -3968,7 +3968,7 @@
           <p:cNvPr id="2" name="s12-eyebrow">
             <a:extLst xmlns:a="http://schemas.openxmlformats.org/drawingml/2006/main">
               <a:ext uri="{FF2B5EF4-FFF2-40B4-BE49-F238E27FC236}">
-                <a16:creationId xmlns:a16="http://schemas.microsoft.com/office/drawing/2014/main" id="{1022B4D6-302B-4F99-AFA8-46CC4B4C7C3C}"/>
+                <a16:creationId xmlns:a16="http://schemas.microsoft.com/office/drawing/2014/main" id="{711CF3EB-B234-481D-A81B-E47081AFB977}"/>
               </a:ext>
             </a:extLst>
           </p:cNvPr>
@@ -4026,7 +4026,7 @@
           <p:cNvPr id="3" name="s12-title">
             <a:extLst xmlns:a="http://schemas.openxmlformats.org/drawingml/2006/main">
               <a:ext uri="{FF2B5EF4-FFF2-40B4-BE49-F238E27FC236}">
-                <a16:creationId xmlns:a16="http://schemas.microsoft.com/office/drawing/2014/main" id="{DDDD5CAE-05B4-46C3-B4FC-A8B6A92E87C5}"/>
+                <a16:creationId xmlns:a16="http://schemas.microsoft.com/office/drawing/2014/main" id="{C3E03820-E3E7-4995-A13A-D02A8EDE911B}"/>
               </a:ext>
             </a:extLst>
           </p:cNvPr>
@@ -4084,7 +4084,7 @@
           <p:cNvPr id="4" name="s12-footer">
             <a:extLst xmlns:a="http://schemas.openxmlformats.org/drawingml/2006/main">
               <a:ext uri="{FF2B5EF4-FFF2-40B4-BE49-F238E27FC236}">
-                <a16:creationId xmlns:a16="http://schemas.microsoft.com/office/drawing/2014/main" id="{BC5C106F-BD25-42D3-805A-49EFF45A28BE}"/>
+                <a16:creationId xmlns:a16="http://schemas.microsoft.com/office/drawing/2014/main" id="{1940A635-1E47-4E7C-A303-BA44DC75B86F}"/>
               </a:ext>
             </a:extLst>
           </p:cNvPr>
@@ -4115,7 +4115,7 @@
           <p:cNvPr id="5" name="s12-identity">
             <a:extLst xmlns:a="http://schemas.openxmlformats.org/drawingml/2006/main">
               <a:ext uri="{FF2B5EF4-FFF2-40B4-BE49-F238E27FC236}">
-                <a16:creationId xmlns:a16="http://schemas.microsoft.com/office/drawing/2014/main" id="{38448B4C-B8B7-49B7-AC58-DFE4EA380820}"/>
+                <a16:creationId xmlns:a16="http://schemas.microsoft.com/office/drawing/2014/main" id="{8805EAB5-5892-4ECE-B803-4B87282EC46F}"/>
               </a:ext>
             </a:extLst>
           </p:cNvPr>
@@ -4173,7 +4173,7 @@
           <p:cNvPr id="6" name="recap-circle-0">
             <a:extLst xmlns:a="http://schemas.openxmlformats.org/drawingml/2006/main">
               <a:ext uri="{FF2B5EF4-FFF2-40B4-BE49-F238E27FC236}">
-                <a16:creationId xmlns:a16="http://schemas.microsoft.com/office/drawing/2014/main" id="{A0A86159-6EF0-4D3F-B760-CC515E742828}"/>
+                <a16:creationId xmlns:a16="http://schemas.microsoft.com/office/drawing/2014/main" id="{7B6BD92C-5C04-44DA-94BD-2C6DBBDD1A30}"/>
               </a:ext>
             </a:extLst>
           </p:cNvPr>
@@ -4206,7 +4206,7 @@
           <p:cNvPr id="7" name="recap-number-0">
             <a:extLst xmlns:a="http://schemas.openxmlformats.org/drawingml/2006/main">
               <a:ext uri="{FF2B5EF4-FFF2-40B4-BE49-F238E27FC236}">
-                <a16:creationId xmlns:a16="http://schemas.microsoft.com/office/drawing/2014/main" id="{E0400183-BEC8-4E0E-B0A9-3257714614F7}"/>
+                <a16:creationId xmlns:a16="http://schemas.microsoft.com/office/drawing/2014/main" id="{D1A67BEA-FD74-48FF-8E4A-4A9855FC7C05}"/>
               </a:ext>
             </a:extLst>
           </p:cNvPr>
@@ -4264,7 +4264,7 @@
           <p:cNvPr id="8" name="recap-item-0">
             <a:extLst xmlns:a="http://schemas.openxmlformats.org/drawingml/2006/main">
               <a:ext uri="{FF2B5EF4-FFF2-40B4-BE49-F238E27FC236}">
-                <a16:creationId xmlns:a16="http://schemas.microsoft.com/office/drawing/2014/main" id="{2A1E5CCA-6AF8-46A0-87C0-60AEB26611E1}"/>
+                <a16:creationId xmlns:a16="http://schemas.microsoft.com/office/drawing/2014/main" id="{594AE429-A856-452A-85DF-B79674D52D52}"/>
               </a:ext>
             </a:extLst>
           </p:cNvPr>
@@ -4328,7 +4328,7 @@
           <p:cNvPr id="9" name="recap-connector-0">
             <a:extLst xmlns:a="http://schemas.openxmlformats.org/drawingml/2006/main">
               <a:ext uri="{FF2B5EF4-FFF2-40B4-BE49-F238E27FC236}">
-                <a16:creationId xmlns:a16="http://schemas.microsoft.com/office/drawing/2014/main" id="{9D68DE0F-DADB-4311-8C42-9C9B3AFDBF3C}"/>
+                <a16:creationId xmlns:a16="http://schemas.microsoft.com/office/drawing/2014/main" id="{84F7970C-E057-4857-B4BC-82FBD1FFC7F4}"/>
               </a:ext>
             </a:extLst>
           </p:cNvPr>
@@ -4359,7 +4359,7 @@
           <p:cNvPr id="10" name="recap-circle-1">
             <a:extLst xmlns:a="http://schemas.openxmlformats.org/drawingml/2006/main">
               <a:ext uri="{FF2B5EF4-FFF2-40B4-BE49-F238E27FC236}">
-                <a16:creationId xmlns:a16="http://schemas.microsoft.com/office/drawing/2014/main" id="{68D72DBD-3D1C-4369-9770-BB34D7393423}"/>
+                <a16:creationId xmlns:a16="http://schemas.microsoft.com/office/drawing/2014/main" id="{950CB2EC-C2AA-439D-AEBE-02A9B7144EBE}"/>
               </a:ext>
             </a:extLst>
           </p:cNvPr>
@@ -4392,7 +4392,7 @@
           <p:cNvPr id="11" name="recap-number-1">
             <a:extLst xmlns:a="http://schemas.openxmlformats.org/drawingml/2006/main">
               <a:ext uri="{FF2B5EF4-FFF2-40B4-BE49-F238E27FC236}">
-                <a16:creationId xmlns:a16="http://schemas.microsoft.com/office/drawing/2014/main" id="{18FBCCF3-E26B-4B07-9B9C-5ED0ED5C45AB}"/>
+                <a16:creationId xmlns:a16="http://schemas.microsoft.com/office/drawing/2014/main" id="{9CAD36F8-4DCE-4F29-8AE6-4FEAC63F5B99}"/>
               </a:ext>
             </a:extLst>
           </p:cNvPr>
@@ -4450,7 +4450,7 @@
           <p:cNvPr id="12" name="recap-item-1">
             <a:extLst xmlns:a="http://schemas.openxmlformats.org/drawingml/2006/main">
               <a:ext uri="{FF2B5EF4-FFF2-40B4-BE49-F238E27FC236}">
-                <a16:creationId xmlns:a16="http://schemas.microsoft.com/office/drawing/2014/main" id="{48841A86-A03B-4EBF-95B5-BE9216C80434}"/>
+                <a16:creationId xmlns:a16="http://schemas.microsoft.com/office/drawing/2014/main" id="{DF869685-92A4-4455-9322-1AF4DCCB31B3}"/>
               </a:ext>
             </a:extLst>
           </p:cNvPr>
@@ -4514,7 +4514,7 @@
           <p:cNvPr id="13" name="recap-connector-1">
             <a:extLst xmlns:a="http://schemas.openxmlformats.org/drawingml/2006/main">
               <a:ext uri="{FF2B5EF4-FFF2-40B4-BE49-F238E27FC236}">
-                <a16:creationId xmlns:a16="http://schemas.microsoft.com/office/drawing/2014/main" id="{EEE2EC1D-3972-418D-95C6-94B3A3F82148}"/>
+                <a16:creationId xmlns:a16="http://schemas.microsoft.com/office/drawing/2014/main" id="{12BFA7BA-B570-4934-973D-D2EF1AA034CF}"/>
               </a:ext>
             </a:extLst>
           </p:cNvPr>
@@ -4545,7 +4545,7 @@
           <p:cNvPr id="14" name="recap-circle-2">
             <a:extLst xmlns:a="http://schemas.openxmlformats.org/drawingml/2006/main">
               <a:ext uri="{FF2B5EF4-FFF2-40B4-BE49-F238E27FC236}">
-                <a16:creationId xmlns:a16="http://schemas.microsoft.com/office/drawing/2014/main" id="{03E4DB05-44A7-4103-8E53-73D92E6CE947}"/>
+                <a16:creationId xmlns:a16="http://schemas.microsoft.com/office/drawing/2014/main" id="{67ADAE38-8F47-4133-BDCD-5E418CC465C9}"/>
               </a:ext>
             </a:extLst>
           </p:cNvPr>
@@ -4578,7 +4578,7 @@
           <p:cNvPr id="15" name="recap-number-2">
             <a:extLst xmlns:a="http://schemas.openxmlformats.org/drawingml/2006/main">
               <a:ext uri="{FF2B5EF4-FFF2-40B4-BE49-F238E27FC236}">
-                <a16:creationId xmlns:a16="http://schemas.microsoft.com/office/drawing/2014/main" id="{99A671AB-4072-4BA3-B932-99E00FCBB7AA}"/>
+                <a16:creationId xmlns:a16="http://schemas.microsoft.com/office/drawing/2014/main" id="{5E012FEE-A9B3-41CE-9CE1-96876EE01020}"/>
               </a:ext>
             </a:extLst>
           </p:cNvPr>
@@ -4636,7 +4636,7 @@
           <p:cNvPr id="16" name="recap-item-2">
             <a:extLst xmlns:a="http://schemas.openxmlformats.org/drawingml/2006/main">
               <a:ext uri="{FF2B5EF4-FFF2-40B4-BE49-F238E27FC236}">
-                <a16:creationId xmlns:a16="http://schemas.microsoft.com/office/drawing/2014/main" id="{74A8A5BB-07E5-403A-9080-C13D4054ABA6}"/>
+                <a16:creationId xmlns:a16="http://schemas.microsoft.com/office/drawing/2014/main" id="{164CD4A8-AD0A-4CBC-A940-D99AB4544317}"/>
               </a:ext>
             </a:extLst>
           </p:cNvPr>
@@ -4698,7 +4698,7 @@
     </p:spTree>
     <p:extLst>
       <p:ext uri="{BB962C8B-B14F-4D97-AF65-F5344CB8AC3E}">
-        <p14:creationId xmlns:p14="http://schemas.microsoft.com/office/powerpoint/2010/main" val="1404583505"/>
+        <p14:creationId xmlns:p14="http://schemas.microsoft.com/office/powerpoint/2010/main" val="521714611"/>
       </p:ext>
     </p:extLst>
   </p:cSld>
@@ -4729,7 +4729,7 @@
           <p:cNvPr id="1" name="s13-rule">
             <a:extLst xmlns:a="http://schemas.openxmlformats.org/drawingml/2006/main">
               <a:ext uri="{FF2B5EF4-FFF2-40B4-BE49-F238E27FC236}">
-                <a16:creationId xmlns:a16="http://schemas.microsoft.com/office/drawing/2014/main" id="{2C5E8C2D-3080-4CEF-8458-3911FC83C1B8}"/>
+                <a16:creationId xmlns:a16="http://schemas.microsoft.com/office/drawing/2014/main" id="{C2A561B6-4BA3-47A1-B077-038EF79ADFD7}"/>
               </a:ext>
             </a:extLst>
           </p:cNvPr>
@@ -4762,7 +4762,7 @@
           <p:cNvPr id="2" name="s13-eyebrow">
             <a:extLst xmlns:a="http://schemas.openxmlformats.org/drawingml/2006/main">
               <a:ext uri="{FF2B5EF4-FFF2-40B4-BE49-F238E27FC236}">
-                <a16:creationId xmlns:a16="http://schemas.microsoft.com/office/drawing/2014/main" id="{7EFFC6FE-1C58-49C6-AE35-AD2B18998253}"/>
+                <a16:creationId xmlns:a16="http://schemas.microsoft.com/office/drawing/2014/main" id="{8EE29890-3343-4B4A-98D7-10F6176E4811}"/>
               </a:ext>
             </a:extLst>
           </p:cNvPr>
@@ -4820,7 +4820,7 @@
           <p:cNvPr id="3" name="s13-title">
             <a:extLst xmlns:a="http://schemas.openxmlformats.org/drawingml/2006/main">
               <a:ext uri="{FF2B5EF4-FFF2-40B4-BE49-F238E27FC236}">
-                <a16:creationId xmlns:a16="http://schemas.microsoft.com/office/drawing/2014/main" id="{258B0712-AB10-4887-9A10-92A39B57D9AA}"/>
+                <a16:creationId xmlns:a16="http://schemas.microsoft.com/office/drawing/2014/main" id="{FCF9920D-DA4F-4C24-8A41-FD9C9CDBE1F6}"/>
               </a:ext>
             </a:extLst>
           </p:cNvPr>
@@ -4878,7 +4878,7 @@
           <p:cNvPr id="4" name="s13-footer">
             <a:extLst xmlns:a="http://schemas.openxmlformats.org/drawingml/2006/main">
               <a:ext uri="{FF2B5EF4-FFF2-40B4-BE49-F238E27FC236}">
-                <a16:creationId xmlns:a16="http://schemas.microsoft.com/office/drawing/2014/main" id="{F898828F-FC7E-4E59-A3EF-422E29151E30}"/>
+                <a16:creationId xmlns:a16="http://schemas.microsoft.com/office/drawing/2014/main" id="{6181C450-770C-4B46-952D-77540837EA90}"/>
               </a:ext>
             </a:extLst>
           </p:cNvPr>
@@ -4909,7 +4909,7 @@
           <p:cNvPr id="5" name="s13-identity">
             <a:extLst xmlns:a="http://schemas.openxmlformats.org/drawingml/2006/main">
               <a:ext uri="{FF2B5EF4-FFF2-40B4-BE49-F238E27FC236}">
-                <a16:creationId xmlns:a16="http://schemas.microsoft.com/office/drawing/2014/main" id="{A85C5D70-5D45-43AA-943D-DAB145CB0899}"/>
+                <a16:creationId xmlns:a16="http://schemas.microsoft.com/office/drawing/2014/main" id="{5FBFB5B2-92D2-493F-BAE8-34D40387EEE8}"/>
               </a:ext>
             </a:extLst>
           </p:cNvPr>
@@ -4967,7 +4967,7 @@
           <p:cNvPr id="6" name="source-0">
             <a:extLst xmlns:a="http://schemas.openxmlformats.org/drawingml/2006/main">
               <a:ext uri="{FF2B5EF4-FFF2-40B4-BE49-F238E27FC236}">
-                <a16:creationId xmlns:a16="http://schemas.microsoft.com/office/drawing/2014/main" id="{3EE816A9-DD36-47E2-83DE-DF99DB6F4463}"/>
+                <a16:creationId xmlns:a16="http://schemas.microsoft.com/office/drawing/2014/main" id="{EDC80A9D-60CD-404E-8888-6D326DDC9191}"/>
               </a:ext>
             </a:extLst>
           </p:cNvPr>
@@ -5031,7 +5031,7 @@
           <p:cNvPr id="7" name="source-1">
             <a:extLst xmlns:a="http://schemas.openxmlformats.org/drawingml/2006/main">
               <a:ext uri="{FF2B5EF4-FFF2-40B4-BE49-F238E27FC236}">
-                <a16:creationId xmlns:a16="http://schemas.microsoft.com/office/drawing/2014/main" id="{CF4636DB-5B83-41D3-A152-BBAC370842AB}"/>
+                <a16:creationId xmlns:a16="http://schemas.microsoft.com/office/drawing/2014/main" id="{C4A7F756-4B4A-4A50-8B92-221546459141}"/>
               </a:ext>
             </a:extLst>
           </p:cNvPr>
@@ -5095,7 +5095,7 @@
           <p:cNvPr id="8" name="source-2">
             <a:extLst xmlns:a="http://schemas.openxmlformats.org/drawingml/2006/main">
               <a:ext uri="{FF2B5EF4-FFF2-40B4-BE49-F238E27FC236}">
-                <a16:creationId xmlns:a16="http://schemas.microsoft.com/office/drawing/2014/main" id="{2A758021-57D5-413C-9552-58897E8687A1}"/>
+                <a16:creationId xmlns:a16="http://schemas.microsoft.com/office/drawing/2014/main" id="{7A52A203-A8BA-4D92-BEC6-063ED40E2A2F}"/>
               </a:ext>
             </a:extLst>
           </p:cNvPr>
@@ -5159,7 +5159,7 @@
           <p:cNvPr id="9" name="source-3">
             <a:extLst xmlns:a="http://schemas.openxmlformats.org/drawingml/2006/main">
               <a:ext uri="{FF2B5EF4-FFF2-40B4-BE49-F238E27FC236}">
-                <a16:creationId xmlns:a16="http://schemas.microsoft.com/office/drawing/2014/main" id="{38843761-566A-4B99-8296-A0C81713562B}"/>
+                <a16:creationId xmlns:a16="http://schemas.microsoft.com/office/drawing/2014/main" id="{AB89420C-0D5C-46C1-A8F2-8BBE42702B2D}"/>
               </a:ext>
             </a:extLst>
           </p:cNvPr>
@@ -5223,7 +5223,7 @@
           <p:cNvPr id="10" name="s13-takeaway-rule">
             <a:extLst xmlns:a="http://schemas.openxmlformats.org/drawingml/2006/main">
               <a:ext uri="{FF2B5EF4-FFF2-40B4-BE49-F238E27FC236}">
-                <a16:creationId xmlns:a16="http://schemas.microsoft.com/office/drawing/2014/main" id="{647B9EA0-6E37-4132-8313-756401637AEE}"/>
+                <a16:creationId xmlns:a16="http://schemas.microsoft.com/office/drawing/2014/main" id="{C7F173BC-8D29-4B62-BF0D-065232D70ED6}"/>
               </a:ext>
             </a:extLst>
           </p:cNvPr>
@@ -5256,7 +5256,7 @@
           <p:cNvPr id="11" name="s13-takeaway">
             <a:extLst xmlns:a="http://schemas.openxmlformats.org/drawingml/2006/main">
               <a:ext uri="{FF2B5EF4-FFF2-40B4-BE49-F238E27FC236}">
-                <a16:creationId xmlns:a16="http://schemas.microsoft.com/office/drawing/2014/main" id="{09786DC6-4BD7-4662-A741-57760A01A999}"/>
+                <a16:creationId xmlns:a16="http://schemas.microsoft.com/office/drawing/2014/main" id="{0EE4AAD2-79D2-4733-BEF8-5201852B8E2B}"/>
               </a:ext>
             </a:extLst>
           </p:cNvPr>
@@ -5281,7 +5281,7 @@
         </p:spPr>
         <p:txBody>
           <a:bodyPr xmlns:a="http://schemas.openxmlformats.org/drawingml/2006/main" lIns="0" tIns="0" rIns="0" bIns="0" anchor="ctr">
-            <a:normAutofit fontScale="100000"/>
+            <a:normAutofit fontScale="95911"/>
           </a:bodyPr>
           <a:lstStyle xmlns:a="http://schemas.openxmlformats.org/drawingml/2006/main"/>
           <a:p xmlns:a="http://schemas.openxmlformats.org/drawingml/2006/main">
@@ -5304,7 +5304,7 @@
                 <a:ea typeface="PingFang SC"/>
                 <a:cs typeface="PingFang SC"/>
               </a:rPr>
-              <a:t>公开幻灯片只使用课程原创文字与原生图形；完整论证、链接和事实边界请见本节讲义。</a:t>
+              <a:t>课程精编页用于讲授主线；播放器中的“原课件”模式保留团队 PowerPoint 精选页、真实图片和可播放视频。</a:t>
             </a:r>
           </a:p>
         </p:txBody>
@@ -5312,7 +5312,7 @@
     </p:spTree>
     <p:extLst>
       <p:ext uri="{BB962C8B-B14F-4D97-AF65-F5344CB8AC3E}">
-        <p14:creationId xmlns:p14="http://schemas.microsoft.com/office/powerpoint/2010/main" val="313435644"/>
+        <p14:creationId xmlns:p14="http://schemas.microsoft.com/office/powerpoint/2010/main" val="538842492"/>
       </p:ext>
     </p:extLst>
   </p:cSld>
@@ -5343,7 +5343,7 @@
           <p:cNvPr id="1" name="s2-rule">
             <a:extLst xmlns:a="http://schemas.openxmlformats.org/drawingml/2006/main">
               <a:ext uri="{FF2B5EF4-FFF2-40B4-BE49-F238E27FC236}">
-                <a16:creationId xmlns:a16="http://schemas.microsoft.com/office/drawing/2014/main" id="{AB23E424-9411-460B-9C14-1CC9753C8405}"/>
+                <a16:creationId xmlns:a16="http://schemas.microsoft.com/office/drawing/2014/main" id="{0548851F-A81D-462B-8F09-A561A4757A88}"/>
               </a:ext>
             </a:extLst>
           </p:cNvPr>
@@ -5376,7 +5376,7 @@
           <p:cNvPr id="2" name="s2-eyebrow">
             <a:extLst xmlns:a="http://schemas.openxmlformats.org/drawingml/2006/main">
               <a:ext uri="{FF2B5EF4-FFF2-40B4-BE49-F238E27FC236}">
-                <a16:creationId xmlns:a16="http://schemas.microsoft.com/office/drawing/2014/main" id="{94E2F918-E3D9-4E2E-8EA0-53F6A7EBB514}"/>
+                <a16:creationId xmlns:a16="http://schemas.microsoft.com/office/drawing/2014/main" id="{8D8C21DA-683A-4507-B9F4-758B037653DC}"/>
               </a:ext>
             </a:extLst>
           </p:cNvPr>
@@ -5434,7 +5434,7 @@
           <p:cNvPr id="3" name="s2-title">
             <a:extLst xmlns:a="http://schemas.openxmlformats.org/drawingml/2006/main">
               <a:ext uri="{FF2B5EF4-FFF2-40B4-BE49-F238E27FC236}">
-                <a16:creationId xmlns:a16="http://schemas.microsoft.com/office/drawing/2014/main" id="{6134F328-72AC-4944-BCAE-A62DF8112246}"/>
+                <a16:creationId xmlns:a16="http://schemas.microsoft.com/office/drawing/2014/main" id="{322CAA00-8655-4DE5-8766-BBE6586C81BC}"/>
               </a:ext>
             </a:extLst>
           </p:cNvPr>
@@ -5492,7 +5492,7 @@
           <p:cNvPr id="4" name="s2-footer">
             <a:extLst xmlns:a="http://schemas.openxmlformats.org/drawingml/2006/main">
               <a:ext uri="{FF2B5EF4-FFF2-40B4-BE49-F238E27FC236}">
-                <a16:creationId xmlns:a16="http://schemas.microsoft.com/office/drawing/2014/main" id="{8804E7AC-65FD-47BA-809E-5FDA39C5E11D}"/>
+                <a16:creationId xmlns:a16="http://schemas.microsoft.com/office/drawing/2014/main" id="{6194E8AC-4D86-44CF-97F4-C2E23CCD4FC2}"/>
               </a:ext>
             </a:extLst>
           </p:cNvPr>
@@ -5523,7 +5523,7 @@
           <p:cNvPr id="5" name="s2-identity">
             <a:extLst xmlns:a="http://schemas.openxmlformats.org/drawingml/2006/main">
               <a:ext uri="{FF2B5EF4-FFF2-40B4-BE49-F238E27FC236}">
-                <a16:creationId xmlns:a16="http://schemas.microsoft.com/office/drawing/2014/main" id="{87B81E16-6E72-4143-858C-14D42AF5D763}"/>
+                <a16:creationId xmlns:a16="http://schemas.microsoft.com/office/drawing/2014/main" id="{A23FE737-4704-4D32-92FD-0DE7F2590DC2}"/>
               </a:ext>
             </a:extLst>
           </p:cNvPr>
@@ -5581,7 +5581,7 @@
           <p:cNvPr id="6" name="objective-1">
             <a:extLst xmlns:a="http://schemas.openxmlformats.org/drawingml/2006/main">
               <a:ext uri="{FF2B5EF4-FFF2-40B4-BE49-F238E27FC236}">
-                <a16:creationId xmlns:a16="http://schemas.microsoft.com/office/drawing/2014/main" id="{F268E47A-C499-4404-9B69-5BAF8F0040EC}"/>
+                <a16:creationId xmlns:a16="http://schemas.microsoft.com/office/drawing/2014/main" id="{487830A9-45B9-4E40-9150-778D81CB9F7E}"/>
               </a:ext>
             </a:extLst>
           </p:cNvPr>
@@ -5668,7 +5668,7 @@
           <p:cNvPr id="7" name="objective-2">
             <a:extLst xmlns:a="http://schemas.openxmlformats.org/drawingml/2006/main">
               <a:ext uri="{FF2B5EF4-FFF2-40B4-BE49-F238E27FC236}">
-                <a16:creationId xmlns:a16="http://schemas.microsoft.com/office/drawing/2014/main" id="{436162EE-E69B-4D1A-82CE-837392AB640C}"/>
+                <a16:creationId xmlns:a16="http://schemas.microsoft.com/office/drawing/2014/main" id="{19C328BC-ECBC-453A-A57E-BE618435B6DE}"/>
               </a:ext>
             </a:extLst>
           </p:cNvPr>
@@ -5755,7 +5755,7 @@
           <p:cNvPr id="8" name="objective-3">
             <a:extLst xmlns:a="http://schemas.openxmlformats.org/drawingml/2006/main">
               <a:ext uri="{FF2B5EF4-FFF2-40B4-BE49-F238E27FC236}">
-                <a16:creationId xmlns:a16="http://schemas.microsoft.com/office/drawing/2014/main" id="{158204CB-2D6D-4CC3-8D04-A4B9661E163F}"/>
+                <a16:creationId xmlns:a16="http://schemas.microsoft.com/office/drawing/2014/main" id="{9E7F9E6D-1865-4D45-85BF-8BA39E43548C}"/>
               </a:ext>
             </a:extLst>
           </p:cNvPr>
@@ -5842,7 +5842,7 @@
           <p:cNvPr id="9" name="objective-4">
             <a:extLst xmlns:a="http://schemas.openxmlformats.org/drawingml/2006/main">
               <a:ext uri="{FF2B5EF4-FFF2-40B4-BE49-F238E27FC236}">
-                <a16:creationId xmlns:a16="http://schemas.microsoft.com/office/drawing/2014/main" id="{1D94F769-D0AC-4E97-B21A-7BA281989D98}"/>
+                <a16:creationId xmlns:a16="http://schemas.microsoft.com/office/drawing/2014/main" id="{577F1869-983D-4B80-B768-334972AE9DFD}"/>
               </a:ext>
             </a:extLst>
           </p:cNvPr>
@@ -5927,7 +5927,7 @@
     </p:spTree>
     <p:extLst>
       <p:ext uri="{BB962C8B-B14F-4D97-AF65-F5344CB8AC3E}">
-        <p14:creationId xmlns:p14="http://schemas.microsoft.com/office/powerpoint/2010/main" val="964870051"/>
+        <p14:creationId xmlns:p14="http://schemas.microsoft.com/office/powerpoint/2010/main" val="975319337"/>
       </p:ext>
     </p:extLst>
   </p:cSld>
@@ -5958,7 +5958,7 @@
           <p:cNvPr id="1" name="s3-rule">
             <a:extLst xmlns:a="http://schemas.openxmlformats.org/drawingml/2006/main">
               <a:ext uri="{FF2B5EF4-FFF2-40B4-BE49-F238E27FC236}">
-                <a16:creationId xmlns:a16="http://schemas.microsoft.com/office/drawing/2014/main" id="{70661F96-58DD-4AEF-8990-10FE4C13F959}"/>
+                <a16:creationId xmlns:a16="http://schemas.microsoft.com/office/drawing/2014/main" id="{89F78DCB-564A-4396-9242-B713FD0D2A47}"/>
               </a:ext>
             </a:extLst>
           </p:cNvPr>
@@ -5991,7 +5991,7 @@
           <p:cNvPr id="2" name="s3-eyebrow">
             <a:extLst xmlns:a="http://schemas.openxmlformats.org/drawingml/2006/main">
               <a:ext uri="{FF2B5EF4-FFF2-40B4-BE49-F238E27FC236}">
-                <a16:creationId xmlns:a16="http://schemas.microsoft.com/office/drawing/2014/main" id="{6C708981-3CB9-459A-BB8D-943E7A1B1788}"/>
+                <a16:creationId xmlns:a16="http://schemas.microsoft.com/office/drawing/2014/main" id="{08688BBA-9211-4049-B061-BA509FAA6665}"/>
               </a:ext>
             </a:extLst>
           </p:cNvPr>
@@ -6049,7 +6049,7 @@
           <p:cNvPr id="3" name="s3-title">
             <a:extLst xmlns:a="http://schemas.openxmlformats.org/drawingml/2006/main">
               <a:ext uri="{FF2B5EF4-FFF2-40B4-BE49-F238E27FC236}">
-                <a16:creationId xmlns:a16="http://schemas.microsoft.com/office/drawing/2014/main" id="{9DE997B2-11FD-47AA-BF98-7B50CE751D0C}"/>
+                <a16:creationId xmlns:a16="http://schemas.microsoft.com/office/drawing/2014/main" id="{7600D2D2-9274-466A-B071-FA6DC461EB12}"/>
               </a:ext>
             </a:extLst>
           </p:cNvPr>
@@ -6107,7 +6107,7 @@
           <p:cNvPr id="4" name="s3-footer">
             <a:extLst xmlns:a="http://schemas.openxmlformats.org/drawingml/2006/main">
               <a:ext uri="{FF2B5EF4-FFF2-40B4-BE49-F238E27FC236}">
-                <a16:creationId xmlns:a16="http://schemas.microsoft.com/office/drawing/2014/main" id="{168554AA-2B4B-4EB8-91EE-ABF495D2CECE}"/>
+                <a16:creationId xmlns:a16="http://schemas.microsoft.com/office/drawing/2014/main" id="{D27FC8C7-E00B-4AFF-B7B2-704A77E88DA9}"/>
               </a:ext>
             </a:extLst>
           </p:cNvPr>
@@ -6138,7 +6138,7 @@
           <p:cNvPr id="5" name="s3-identity">
             <a:extLst xmlns:a="http://schemas.openxmlformats.org/drawingml/2006/main">
               <a:ext uri="{FF2B5EF4-FFF2-40B4-BE49-F238E27FC236}">
-                <a16:creationId xmlns:a16="http://schemas.microsoft.com/office/drawing/2014/main" id="{AED7CA84-7E49-40BF-907D-5B7F2C57762F}"/>
+                <a16:creationId xmlns:a16="http://schemas.microsoft.com/office/drawing/2014/main" id="{120B0B7F-6C3C-4C28-950A-2FDEAC9FC685}"/>
               </a:ext>
             </a:extLst>
           </p:cNvPr>
@@ -6196,7 +6196,7 @@
           <p:cNvPr id="6" name="core-no-0">
             <a:extLst xmlns:a="http://schemas.openxmlformats.org/drawingml/2006/main">
               <a:ext uri="{FF2B5EF4-FFF2-40B4-BE49-F238E27FC236}">
-                <a16:creationId xmlns:a16="http://schemas.microsoft.com/office/drawing/2014/main" id="{55775E45-B5D7-4373-A10D-9A1C1C03F3EB}"/>
+                <a16:creationId xmlns:a16="http://schemas.microsoft.com/office/drawing/2014/main" id="{968980C1-FB68-4CE0-9C20-DC8A225021AF}"/>
               </a:ext>
             </a:extLst>
           </p:cNvPr>
@@ -6254,7 +6254,7 @@
           <p:cNvPr id="7" name="core-label-0">
             <a:extLst xmlns:a="http://schemas.openxmlformats.org/drawingml/2006/main">
               <a:ext uri="{FF2B5EF4-FFF2-40B4-BE49-F238E27FC236}">
-                <a16:creationId xmlns:a16="http://schemas.microsoft.com/office/drawing/2014/main" id="{4D109CF9-16A8-4713-A3AB-BD67F4372CB1}"/>
+                <a16:creationId xmlns:a16="http://schemas.microsoft.com/office/drawing/2014/main" id="{6A8C401A-63FE-49B4-BD4F-3E60845AF634}"/>
               </a:ext>
             </a:extLst>
           </p:cNvPr>
@@ -6312,7 +6312,7 @@
           <p:cNvPr id="8" name="core-body-0">
             <a:extLst xmlns:a="http://schemas.openxmlformats.org/drawingml/2006/main">
               <a:ext uri="{FF2B5EF4-FFF2-40B4-BE49-F238E27FC236}">
-                <a16:creationId xmlns:a16="http://schemas.microsoft.com/office/drawing/2014/main" id="{0CB3365A-38D0-4B19-871E-3A86B38A67FA}"/>
+                <a16:creationId xmlns:a16="http://schemas.microsoft.com/office/drawing/2014/main" id="{8DC69874-13DB-453B-BAAB-30E56F1F0FB1}"/>
               </a:ext>
             </a:extLst>
           </p:cNvPr>
@@ -6376,7 +6376,7 @@
           <p:cNvPr id="9" name="core-no-1">
             <a:extLst xmlns:a="http://schemas.openxmlformats.org/drawingml/2006/main">
               <a:ext uri="{FF2B5EF4-FFF2-40B4-BE49-F238E27FC236}">
-                <a16:creationId xmlns:a16="http://schemas.microsoft.com/office/drawing/2014/main" id="{D3347DE5-20B5-4A33-965A-477CEE7A4AC2}"/>
+                <a16:creationId xmlns:a16="http://schemas.microsoft.com/office/drawing/2014/main" id="{3641169C-D30E-4705-8C97-C180E9A55A8E}"/>
               </a:ext>
             </a:extLst>
           </p:cNvPr>
@@ -6434,7 +6434,7 @@
           <p:cNvPr id="10" name="core-body-1">
             <a:extLst xmlns:a="http://schemas.openxmlformats.org/drawingml/2006/main">
               <a:ext uri="{FF2B5EF4-FFF2-40B4-BE49-F238E27FC236}">
-                <a16:creationId xmlns:a16="http://schemas.microsoft.com/office/drawing/2014/main" id="{BD30F9B1-A492-4C02-BF63-1618CA7055B5}"/>
+                <a16:creationId xmlns:a16="http://schemas.microsoft.com/office/drawing/2014/main" id="{E4878E2A-D166-4F60-81EC-25BBA31DF32C}"/>
               </a:ext>
             </a:extLst>
           </p:cNvPr>
@@ -6498,7 +6498,7 @@
           <p:cNvPr id="11" name="s3-takeaway-rule">
             <a:extLst xmlns:a="http://schemas.openxmlformats.org/drawingml/2006/main">
               <a:ext uri="{FF2B5EF4-FFF2-40B4-BE49-F238E27FC236}">
-                <a16:creationId xmlns:a16="http://schemas.microsoft.com/office/drawing/2014/main" id="{08837E53-1C3A-4970-B32B-043E412BB8A4}"/>
+                <a16:creationId xmlns:a16="http://schemas.microsoft.com/office/drawing/2014/main" id="{0610A459-8F0F-4C36-B5D6-777C46885DA8}"/>
               </a:ext>
             </a:extLst>
           </p:cNvPr>
@@ -6531,7 +6531,7 @@
           <p:cNvPr id="12" name="s3-takeaway">
             <a:extLst xmlns:a="http://schemas.openxmlformats.org/drawingml/2006/main">
               <a:ext uri="{FF2B5EF4-FFF2-40B4-BE49-F238E27FC236}">
-                <a16:creationId xmlns:a16="http://schemas.microsoft.com/office/drawing/2014/main" id="{A3042C9E-C51F-4BEA-8B9D-D81B16BB0A82}"/>
+                <a16:creationId xmlns:a16="http://schemas.microsoft.com/office/drawing/2014/main" id="{7BA5144C-F0D0-49BC-8C79-10498594073F}"/>
               </a:ext>
             </a:extLst>
           </p:cNvPr>
@@ -6587,7 +6587,7 @@
     </p:spTree>
     <p:extLst>
       <p:ext uri="{BB962C8B-B14F-4D97-AF65-F5344CB8AC3E}">
-        <p14:creationId xmlns:p14="http://schemas.microsoft.com/office/powerpoint/2010/main" val="921424391"/>
+        <p14:creationId xmlns:p14="http://schemas.microsoft.com/office/powerpoint/2010/main" val="2141806245"/>
       </p:ext>
     </p:extLst>
   </p:cSld>
@@ -6618,7 +6618,7 @@
           <p:cNvPr id="1" name="s4-rule">
             <a:extLst xmlns:a="http://schemas.openxmlformats.org/drawingml/2006/main">
               <a:ext uri="{FF2B5EF4-FFF2-40B4-BE49-F238E27FC236}">
-                <a16:creationId xmlns:a16="http://schemas.microsoft.com/office/drawing/2014/main" id="{39BBF01C-07C7-444D-805D-C14BCED40828}"/>
+                <a16:creationId xmlns:a16="http://schemas.microsoft.com/office/drawing/2014/main" id="{1DEB1145-1CBF-4F38-82CF-5FFB750405EC}"/>
               </a:ext>
             </a:extLst>
           </p:cNvPr>
@@ -6651,7 +6651,7 @@
           <p:cNvPr id="2" name="s4-eyebrow">
             <a:extLst xmlns:a="http://schemas.openxmlformats.org/drawingml/2006/main">
               <a:ext uri="{FF2B5EF4-FFF2-40B4-BE49-F238E27FC236}">
-                <a16:creationId xmlns:a16="http://schemas.microsoft.com/office/drawing/2014/main" id="{6F7C48C8-733F-4514-8F3B-2019AA0857BF}"/>
+                <a16:creationId xmlns:a16="http://schemas.microsoft.com/office/drawing/2014/main" id="{6D209EF8-9405-47BE-A7E6-B84919D62456}"/>
               </a:ext>
             </a:extLst>
           </p:cNvPr>
@@ -6709,7 +6709,7 @@
           <p:cNvPr id="3" name="s4-title">
             <a:extLst xmlns:a="http://schemas.openxmlformats.org/drawingml/2006/main">
               <a:ext uri="{FF2B5EF4-FFF2-40B4-BE49-F238E27FC236}">
-                <a16:creationId xmlns:a16="http://schemas.microsoft.com/office/drawing/2014/main" id="{5E1E0596-AEB5-4229-A29F-912F89319293}"/>
+                <a16:creationId xmlns:a16="http://schemas.microsoft.com/office/drawing/2014/main" id="{5F38D56F-7D0A-4FB2-BB1F-18666D7731C5}"/>
               </a:ext>
             </a:extLst>
           </p:cNvPr>
@@ -6767,7 +6767,7 @@
           <p:cNvPr id="4" name="s4-footer">
             <a:extLst xmlns:a="http://schemas.openxmlformats.org/drawingml/2006/main">
               <a:ext uri="{FF2B5EF4-FFF2-40B4-BE49-F238E27FC236}">
-                <a16:creationId xmlns:a16="http://schemas.microsoft.com/office/drawing/2014/main" id="{F44513F3-A37F-40D7-8565-91D2D09192A6}"/>
+                <a16:creationId xmlns:a16="http://schemas.microsoft.com/office/drawing/2014/main" id="{8F5F8684-621F-4D89-A3D6-05B04082A274}"/>
               </a:ext>
             </a:extLst>
           </p:cNvPr>
@@ -6798,7 +6798,7 @@
           <p:cNvPr id="5" name="s4-identity">
             <a:extLst xmlns:a="http://schemas.openxmlformats.org/drawingml/2006/main">
               <a:ext uri="{FF2B5EF4-FFF2-40B4-BE49-F238E27FC236}">
-                <a16:creationId xmlns:a16="http://schemas.microsoft.com/office/drawing/2014/main" id="{3016E300-886F-4477-9F89-0F4669E0E79B}"/>
+                <a16:creationId xmlns:a16="http://schemas.microsoft.com/office/drawing/2014/main" id="{4FD12D06-A64E-448A-B1C9-EB44440651EB}"/>
               </a:ext>
             </a:extLst>
           </p:cNvPr>
@@ -6856,7 +6856,7 @@
           <p:cNvPr id="6" name="core-no-0">
             <a:extLst xmlns:a="http://schemas.openxmlformats.org/drawingml/2006/main">
               <a:ext uri="{FF2B5EF4-FFF2-40B4-BE49-F238E27FC236}">
-                <a16:creationId xmlns:a16="http://schemas.microsoft.com/office/drawing/2014/main" id="{DE3E887C-E144-4854-AC6E-C4AEABD481D6}"/>
+                <a16:creationId xmlns:a16="http://schemas.microsoft.com/office/drawing/2014/main" id="{4FB5C7AE-9A28-40AB-9774-4CE41B2FBAE3}"/>
               </a:ext>
             </a:extLst>
           </p:cNvPr>
@@ -6914,7 +6914,7 @@
           <p:cNvPr id="7" name="core-label-0">
             <a:extLst xmlns:a="http://schemas.openxmlformats.org/drawingml/2006/main">
               <a:ext uri="{FF2B5EF4-FFF2-40B4-BE49-F238E27FC236}">
-                <a16:creationId xmlns:a16="http://schemas.microsoft.com/office/drawing/2014/main" id="{354365D6-E060-48CB-9EB3-6F4A02992D6B}"/>
+                <a16:creationId xmlns:a16="http://schemas.microsoft.com/office/drawing/2014/main" id="{02BDB138-1812-4B26-9A1F-B7FBFCD00A00}"/>
               </a:ext>
             </a:extLst>
           </p:cNvPr>
@@ -6972,7 +6972,7 @@
           <p:cNvPr id="8" name="core-body-0">
             <a:extLst xmlns:a="http://schemas.openxmlformats.org/drawingml/2006/main">
               <a:ext uri="{FF2B5EF4-FFF2-40B4-BE49-F238E27FC236}">
-                <a16:creationId xmlns:a16="http://schemas.microsoft.com/office/drawing/2014/main" id="{B2B5BA8A-BC32-42BC-85B1-8FAA42173748}"/>
+                <a16:creationId xmlns:a16="http://schemas.microsoft.com/office/drawing/2014/main" id="{68E58914-787F-4234-B3E5-D00DEC44690C}"/>
               </a:ext>
             </a:extLst>
           </p:cNvPr>
@@ -7036,7 +7036,7 @@
           <p:cNvPr id="9" name="core-no-1">
             <a:extLst xmlns:a="http://schemas.openxmlformats.org/drawingml/2006/main">
               <a:ext uri="{FF2B5EF4-FFF2-40B4-BE49-F238E27FC236}">
-                <a16:creationId xmlns:a16="http://schemas.microsoft.com/office/drawing/2014/main" id="{0CD694BE-4EA7-45BC-92CB-EC0FF50C0743}"/>
+                <a16:creationId xmlns:a16="http://schemas.microsoft.com/office/drawing/2014/main" id="{E469A710-9B6A-4999-AAE3-3941D7EABFDE}"/>
               </a:ext>
             </a:extLst>
           </p:cNvPr>
@@ -7094,7 +7094,7 @@
           <p:cNvPr id="10" name="core-body-1">
             <a:extLst xmlns:a="http://schemas.openxmlformats.org/drawingml/2006/main">
               <a:ext uri="{FF2B5EF4-FFF2-40B4-BE49-F238E27FC236}">
-                <a16:creationId xmlns:a16="http://schemas.microsoft.com/office/drawing/2014/main" id="{AC1135FE-C297-4CED-A39C-E039DCF54929}"/>
+                <a16:creationId xmlns:a16="http://schemas.microsoft.com/office/drawing/2014/main" id="{1EDD4959-9551-472F-AD03-CBDB63649224}"/>
               </a:ext>
             </a:extLst>
           </p:cNvPr>
@@ -7158,7 +7158,7 @@
           <p:cNvPr id="11" name="s4-takeaway-rule">
             <a:extLst xmlns:a="http://schemas.openxmlformats.org/drawingml/2006/main">
               <a:ext uri="{FF2B5EF4-FFF2-40B4-BE49-F238E27FC236}">
-                <a16:creationId xmlns:a16="http://schemas.microsoft.com/office/drawing/2014/main" id="{2999D2F9-ADDE-498D-A04B-ADE6B22483B8}"/>
+                <a16:creationId xmlns:a16="http://schemas.microsoft.com/office/drawing/2014/main" id="{E9A55846-AE6B-412B-99E4-AA244382423B}"/>
               </a:ext>
             </a:extLst>
           </p:cNvPr>
@@ -7191,7 +7191,7 @@
           <p:cNvPr id="12" name="s4-takeaway">
             <a:extLst xmlns:a="http://schemas.openxmlformats.org/drawingml/2006/main">
               <a:ext uri="{FF2B5EF4-FFF2-40B4-BE49-F238E27FC236}">
-                <a16:creationId xmlns:a16="http://schemas.microsoft.com/office/drawing/2014/main" id="{ADFDDAF0-4BF3-4226-99D9-11B0E40AD036}"/>
+                <a16:creationId xmlns:a16="http://schemas.microsoft.com/office/drawing/2014/main" id="{1B1E0C4A-DDEA-4022-8E0D-227257BEF2E2}"/>
               </a:ext>
             </a:extLst>
           </p:cNvPr>
@@ -7247,7 +7247,7 @@
     </p:spTree>
     <p:extLst>
       <p:ext uri="{BB962C8B-B14F-4D97-AF65-F5344CB8AC3E}">
-        <p14:creationId xmlns:p14="http://schemas.microsoft.com/office/powerpoint/2010/main" val="1574832066"/>
+        <p14:creationId xmlns:p14="http://schemas.microsoft.com/office/powerpoint/2010/main" val="98935678"/>
       </p:ext>
     </p:extLst>
   </p:cSld>
@@ -7278,7 +7278,7 @@
           <p:cNvPr id="1" name="s5-rule">
             <a:extLst xmlns:a="http://schemas.openxmlformats.org/drawingml/2006/main">
               <a:ext uri="{FF2B5EF4-FFF2-40B4-BE49-F238E27FC236}">
-                <a16:creationId xmlns:a16="http://schemas.microsoft.com/office/drawing/2014/main" id="{BFF56E9A-12D5-4B24-9815-3A52FBE55623}"/>
+                <a16:creationId xmlns:a16="http://schemas.microsoft.com/office/drawing/2014/main" id="{D3DC6940-E4D9-4561-90E2-7C3FCB127B4F}"/>
               </a:ext>
             </a:extLst>
           </p:cNvPr>
@@ -7311,7 +7311,7 @@
           <p:cNvPr id="2" name="s5-eyebrow">
             <a:extLst xmlns:a="http://schemas.openxmlformats.org/drawingml/2006/main">
               <a:ext uri="{FF2B5EF4-FFF2-40B4-BE49-F238E27FC236}">
-                <a16:creationId xmlns:a16="http://schemas.microsoft.com/office/drawing/2014/main" id="{2B32D541-6F47-47BE-AF93-88176CA86169}"/>
+                <a16:creationId xmlns:a16="http://schemas.microsoft.com/office/drawing/2014/main" id="{384E1A62-1CB6-47B6-9EC3-5F534D336730}"/>
               </a:ext>
             </a:extLst>
           </p:cNvPr>
@@ -7369,7 +7369,7 @@
           <p:cNvPr id="3" name="s5-title">
             <a:extLst xmlns:a="http://schemas.openxmlformats.org/drawingml/2006/main">
               <a:ext uri="{FF2B5EF4-FFF2-40B4-BE49-F238E27FC236}">
-                <a16:creationId xmlns:a16="http://schemas.microsoft.com/office/drawing/2014/main" id="{472025C0-0C60-44A9-B1B1-AAEC759C133D}"/>
+                <a16:creationId xmlns:a16="http://schemas.microsoft.com/office/drawing/2014/main" id="{90BFA100-EF06-40C5-AAC4-E335CCC13A23}"/>
               </a:ext>
             </a:extLst>
           </p:cNvPr>
@@ -7427,7 +7427,7 @@
           <p:cNvPr id="4" name="s5-footer">
             <a:extLst xmlns:a="http://schemas.openxmlformats.org/drawingml/2006/main">
               <a:ext uri="{FF2B5EF4-FFF2-40B4-BE49-F238E27FC236}">
-                <a16:creationId xmlns:a16="http://schemas.microsoft.com/office/drawing/2014/main" id="{F8D98AE1-2140-46FE-A1DD-B470B9B0860C}"/>
+                <a16:creationId xmlns:a16="http://schemas.microsoft.com/office/drawing/2014/main" id="{652C903B-5B3C-4A02-846E-8DF7A97CE89A}"/>
               </a:ext>
             </a:extLst>
           </p:cNvPr>
@@ -7458,7 +7458,7 @@
           <p:cNvPr id="5" name="s5-identity">
             <a:extLst xmlns:a="http://schemas.openxmlformats.org/drawingml/2006/main">
               <a:ext uri="{FF2B5EF4-FFF2-40B4-BE49-F238E27FC236}">
-                <a16:creationId xmlns:a16="http://schemas.microsoft.com/office/drawing/2014/main" id="{646A5885-05AA-4C65-8433-CD59D08222A4}"/>
+                <a16:creationId xmlns:a16="http://schemas.microsoft.com/office/drawing/2014/main" id="{BBFE3492-78BF-464A-81F3-EAFD66837AB5}"/>
               </a:ext>
             </a:extLst>
           </p:cNvPr>
@@ -7516,7 +7516,7 @@
           <p:cNvPr id="6" name="core-no-0">
             <a:extLst xmlns:a="http://schemas.openxmlformats.org/drawingml/2006/main">
               <a:ext uri="{FF2B5EF4-FFF2-40B4-BE49-F238E27FC236}">
-                <a16:creationId xmlns:a16="http://schemas.microsoft.com/office/drawing/2014/main" id="{394437DF-E3A6-40D2-939F-0241B3860ED3}"/>
+                <a16:creationId xmlns:a16="http://schemas.microsoft.com/office/drawing/2014/main" id="{57036919-DAC7-4E59-9804-D3BEB7837FB5}"/>
               </a:ext>
             </a:extLst>
           </p:cNvPr>
@@ -7574,7 +7574,7 @@
           <p:cNvPr id="7" name="core-label-0">
             <a:extLst xmlns:a="http://schemas.openxmlformats.org/drawingml/2006/main">
               <a:ext uri="{FF2B5EF4-FFF2-40B4-BE49-F238E27FC236}">
-                <a16:creationId xmlns:a16="http://schemas.microsoft.com/office/drawing/2014/main" id="{3D4DF689-9F92-46E2-9FF3-6D9715D21178}"/>
+                <a16:creationId xmlns:a16="http://schemas.microsoft.com/office/drawing/2014/main" id="{8B7DECCD-8B5B-460F-B50B-EAC9DC5FF6E3}"/>
               </a:ext>
             </a:extLst>
           </p:cNvPr>
@@ -7632,7 +7632,7 @@
           <p:cNvPr id="8" name="core-body-0">
             <a:extLst xmlns:a="http://schemas.openxmlformats.org/drawingml/2006/main">
               <a:ext uri="{FF2B5EF4-FFF2-40B4-BE49-F238E27FC236}">
-                <a16:creationId xmlns:a16="http://schemas.microsoft.com/office/drawing/2014/main" id="{0BC453A1-1E5D-4472-9A06-679D1ECAE9F3}"/>
+                <a16:creationId xmlns:a16="http://schemas.microsoft.com/office/drawing/2014/main" id="{E8E77A50-7373-4DD9-A2A4-D635C9284398}"/>
               </a:ext>
             </a:extLst>
           </p:cNvPr>
@@ -7696,7 +7696,7 @@
           <p:cNvPr id="9" name="core-no-1">
             <a:extLst xmlns:a="http://schemas.openxmlformats.org/drawingml/2006/main">
               <a:ext uri="{FF2B5EF4-FFF2-40B4-BE49-F238E27FC236}">
-                <a16:creationId xmlns:a16="http://schemas.microsoft.com/office/drawing/2014/main" id="{E49CAA6D-E476-422D-B671-00821BEE4E77}"/>
+                <a16:creationId xmlns:a16="http://schemas.microsoft.com/office/drawing/2014/main" id="{4594FB73-CB24-44E9-93CF-3E4B21F60406}"/>
               </a:ext>
             </a:extLst>
           </p:cNvPr>
@@ -7754,7 +7754,7 @@
           <p:cNvPr id="10" name="core-body-1">
             <a:extLst xmlns:a="http://schemas.openxmlformats.org/drawingml/2006/main">
               <a:ext uri="{FF2B5EF4-FFF2-40B4-BE49-F238E27FC236}">
-                <a16:creationId xmlns:a16="http://schemas.microsoft.com/office/drawing/2014/main" id="{35A4FBF9-5B06-480A-9E24-72E249BB9BE5}"/>
+                <a16:creationId xmlns:a16="http://schemas.microsoft.com/office/drawing/2014/main" id="{D330C9B7-CF30-490D-A782-4D6A7F449DA7}"/>
               </a:ext>
             </a:extLst>
           </p:cNvPr>
@@ -7818,7 +7818,7 @@
           <p:cNvPr id="11" name="core-no-2">
             <a:extLst xmlns:a="http://schemas.openxmlformats.org/drawingml/2006/main">
               <a:ext uri="{FF2B5EF4-FFF2-40B4-BE49-F238E27FC236}">
-                <a16:creationId xmlns:a16="http://schemas.microsoft.com/office/drawing/2014/main" id="{8FF32285-9856-4CB6-BCC2-151296957439}"/>
+                <a16:creationId xmlns:a16="http://schemas.microsoft.com/office/drawing/2014/main" id="{9A8B1AC2-B475-42DD-9F3D-9EEFA392FCDA}"/>
               </a:ext>
             </a:extLst>
           </p:cNvPr>
@@ -7876,7 +7876,7 @@
           <p:cNvPr id="12" name="core-body-2">
             <a:extLst xmlns:a="http://schemas.openxmlformats.org/drawingml/2006/main">
               <a:ext uri="{FF2B5EF4-FFF2-40B4-BE49-F238E27FC236}">
-                <a16:creationId xmlns:a16="http://schemas.microsoft.com/office/drawing/2014/main" id="{9975B65D-6F91-48BC-85EE-924FB7ACBABA}"/>
+                <a16:creationId xmlns:a16="http://schemas.microsoft.com/office/drawing/2014/main" id="{01F3A46F-E433-4580-8BAB-A71E28D04ECD}"/>
               </a:ext>
             </a:extLst>
           </p:cNvPr>
@@ -7940,7 +7940,7 @@
           <p:cNvPr id="13" name="s5-takeaway-rule">
             <a:extLst xmlns:a="http://schemas.openxmlformats.org/drawingml/2006/main">
               <a:ext uri="{FF2B5EF4-FFF2-40B4-BE49-F238E27FC236}">
-                <a16:creationId xmlns:a16="http://schemas.microsoft.com/office/drawing/2014/main" id="{5CA28838-8D9D-4AD9-801A-C4C1F56D57A9}"/>
+                <a16:creationId xmlns:a16="http://schemas.microsoft.com/office/drawing/2014/main" id="{F5CDF90F-D5D1-4823-80E9-E64D3D124720}"/>
               </a:ext>
             </a:extLst>
           </p:cNvPr>
@@ -7973,7 +7973,7 @@
           <p:cNvPr id="14" name="s5-takeaway">
             <a:extLst xmlns:a="http://schemas.openxmlformats.org/drawingml/2006/main">
               <a:ext uri="{FF2B5EF4-FFF2-40B4-BE49-F238E27FC236}">
-                <a16:creationId xmlns:a16="http://schemas.microsoft.com/office/drawing/2014/main" id="{7B109492-D3B8-4A71-962B-E9BF60453501}"/>
+                <a16:creationId xmlns:a16="http://schemas.microsoft.com/office/drawing/2014/main" id="{FC7CC3C3-B798-4860-AB34-B16FBE285BEF}"/>
               </a:ext>
             </a:extLst>
           </p:cNvPr>
@@ -8029,7 +8029,7 @@
     </p:spTree>
     <p:extLst>
       <p:ext uri="{BB962C8B-B14F-4D97-AF65-F5344CB8AC3E}">
-        <p14:creationId xmlns:p14="http://schemas.microsoft.com/office/powerpoint/2010/main" val="1455180319"/>
+        <p14:creationId xmlns:p14="http://schemas.microsoft.com/office/powerpoint/2010/main" val="553362354"/>
       </p:ext>
     </p:extLst>
   </p:cSld>
@@ -8060,7 +8060,7 @@
           <p:cNvPr id="1" name="s6-rule">
             <a:extLst xmlns:a="http://schemas.openxmlformats.org/drawingml/2006/main">
               <a:ext uri="{FF2B5EF4-FFF2-40B4-BE49-F238E27FC236}">
-                <a16:creationId xmlns:a16="http://schemas.microsoft.com/office/drawing/2014/main" id="{E0087599-CFD0-4615-8F41-F602C0AD0CB2}"/>
+                <a16:creationId xmlns:a16="http://schemas.microsoft.com/office/drawing/2014/main" id="{B7C623CF-5CF1-4339-9BBF-653F81593116}"/>
               </a:ext>
             </a:extLst>
           </p:cNvPr>
@@ -8093,7 +8093,7 @@
           <p:cNvPr id="2" name="s6-eyebrow">
             <a:extLst xmlns:a="http://schemas.openxmlformats.org/drawingml/2006/main">
               <a:ext uri="{FF2B5EF4-FFF2-40B4-BE49-F238E27FC236}">
-                <a16:creationId xmlns:a16="http://schemas.microsoft.com/office/drawing/2014/main" id="{EE732733-5499-46A9-A253-7CA5ECFE2E9F}"/>
+                <a16:creationId xmlns:a16="http://schemas.microsoft.com/office/drawing/2014/main" id="{B3F2F033-432E-4E35-8960-097689251251}"/>
               </a:ext>
             </a:extLst>
           </p:cNvPr>
@@ -8151,7 +8151,7 @@
           <p:cNvPr id="3" name="s6-title">
             <a:extLst xmlns:a="http://schemas.openxmlformats.org/drawingml/2006/main">
               <a:ext uri="{FF2B5EF4-FFF2-40B4-BE49-F238E27FC236}">
-                <a16:creationId xmlns:a16="http://schemas.microsoft.com/office/drawing/2014/main" id="{F566D55D-73E2-47B2-8484-1A808B6A75EF}"/>
+                <a16:creationId xmlns:a16="http://schemas.microsoft.com/office/drawing/2014/main" id="{6584C980-594D-4261-A1E4-C025F8909AE2}"/>
               </a:ext>
             </a:extLst>
           </p:cNvPr>
@@ -8209,7 +8209,7 @@
           <p:cNvPr id="4" name="s6-footer">
             <a:extLst xmlns:a="http://schemas.openxmlformats.org/drawingml/2006/main">
               <a:ext uri="{FF2B5EF4-FFF2-40B4-BE49-F238E27FC236}">
-                <a16:creationId xmlns:a16="http://schemas.microsoft.com/office/drawing/2014/main" id="{A1D2170D-11FD-4A8A-9BFA-7A4C2D4100D4}"/>
+                <a16:creationId xmlns:a16="http://schemas.microsoft.com/office/drawing/2014/main" id="{1B5D09E1-B1FE-4475-B6C5-125033275984}"/>
               </a:ext>
             </a:extLst>
           </p:cNvPr>
@@ -8240,7 +8240,7 @@
           <p:cNvPr id="5" name="s6-identity">
             <a:extLst xmlns:a="http://schemas.openxmlformats.org/drawingml/2006/main">
               <a:ext uri="{FF2B5EF4-FFF2-40B4-BE49-F238E27FC236}">
-                <a16:creationId xmlns:a16="http://schemas.microsoft.com/office/drawing/2014/main" id="{DF331934-37BB-4D1F-96A8-3830641CDA15}"/>
+                <a16:creationId xmlns:a16="http://schemas.microsoft.com/office/drawing/2014/main" id="{46A7FDF2-BE67-47FD-A64E-6C174F1BBF5A}"/>
               </a:ext>
             </a:extLst>
           </p:cNvPr>
@@ -8298,7 +8298,7 @@
           <p:cNvPr id="6" name="core-no-0">
             <a:extLst xmlns:a="http://schemas.openxmlformats.org/drawingml/2006/main">
               <a:ext uri="{FF2B5EF4-FFF2-40B4-BE49-F238E27FC236}">
-                <a16:creationId xmlns:a16="http://schemas.microsoft.com/office/drawing/2014/main" id="{5C772D87-84CC-4007-A6D0-296C5C834900}"/>
+                <a16:creationId xmlns:a16="http://schemas.microsoft.com/office/drawing/2014/main" id="{3E4F414F-3170-48F9-9C93-6546DE4BFA61}"/>
               </a:ext>
             </a:extLst>
           </p:cNvPr>
@@ -8356,7 +8356,7 @@
           <p:cNvPr id="7" name="core-label-0">
             <a:extLst xmlns:a="http://schemas.openxmlformats.org/drawingml/2006/main">
               <a:ext uri="{FF2B5EF4-FFF2-40B4-BE49-F238E27FC236}">
-                <a16:creationId xmlns:a16="http://schemas.microsoft.com/office/drawing/2014/main" id="{4B512D6A-F0F6-42E7-8390-341E4ABA125F}"/>
+                <a16:creationId xmlns:a16="http://schemas.microsoft.com/office/drawing/2014/main" id="{7A4DAAF8-C9CC-4C55-B38B-6C5BD15D6C04}"/>
               </a:ext>
             </a:extLst>
           </p:cNvPr>
@@ -8414,7 +8414,7 @@
           <p:cNvPr id="8" name="core-body-0">
             <a:extLst xmlns:a="http://schemas.openxmlformats.org/drawingml/2006/main">
               <a:ext uri="{FF2B5EF4-FFF2-40B4-BE49-F238E27FC236}">
-                <a16:creationId xmlns:a16="http://schemas.microsoft.com/office/drawing/2014/main" id="{5E64B8DA-E04F-465E-8BD9-96B67C64F72A}"/>
+                <a16:creationId xmlns:a16="http://schemas.microsoft.com/office/drawing/2014/main" id="{BADECAD0-CE45-4C5A-9245-42C16832AA8F}"/>
               </a:ext>
             </a:extLst>
           </p:cNvPr>
@@ -8478,7 +8478,7 @@
           <p:cNvPr id="9" name="core-no-1">
             <a:extLst xmlns:a="http://schemas.openxmlformats.org/drawingml/2006/main">
               <a:ext uri="{FF2B5EF4-FFF2-40B4-BE49-F238E27FC236}">
-                <a16:creationId xmlns:a16="http://schemas.microsoft.com/office/drawing/2014/main" id="{9FA9EAE0-3C69-4DF1-8CA4-96E6F2C0F815}"/>
+                <a16:creationId xmlns:a16="http://schemas.microsoft.com/office/drawing/2014/main" id="{DB9A4C0A-4E01-4F9D-82F2-B0B50A2C7677}"/>
               </a:ext>
             </a:extLst>
           </p:cNvPr>
@@ -8536,7 +8536,7 @@
           <p:cNvPr id="10" name="core-body-1">
             <a:extLst xmlns:a="http://schemas.openxmlformats.org/drawingml/2006/main">
               <a:ext uri="{FF2B5EF4-FFF2-40B4-BE49-F238E27FC236}">
-                <a16:creationId xmlns:a16="http://schemas.microsoft.com/office/drawing/2014/main" id="{CFA7692F-A8D4-406A-9B85-CCE8DF8EF9F8}"/>
+                <a16:creationId xmlns:a16="http://schemas.microsoft.com/office/drawing/2014/main" id="{127E7179-908B-4ACF-A9B6-99E6F3426C4E}"/>
               </a:ext>
             </a:extLst>
           </p:cNvPr>
@@ -8600,7 +8600,7 @@
           <p:cNvPr id="11" name="s6-takeaway-rule">
             <a:extLst xmlns:a="http://schemas.openxmlformats.org/drawingml/2006/main">
               <a:ext uri="{FF2B5EF4-FFF2-40B4-BE49-F238E27FC236}">
-                <a16:creationId xmlns:a16="http://schemas.microsoft.com/office/drawing/2014/main" id="{1EDCB515-7318-47DC-95F4-13B40D0DA6DB}"/>
+                <a16:creationId xmlns:a16="http://schemas.microsoft.com/office/drawing/2014/main" id="{AF69B4AC-F52E-4B02-B8AB-B1F28E9FFE11}"/>
               </a:ext>
             </a:extLst>
           </p:cNvPr>
@@ -8633,7 +8633,7 @@
           <p:cNvPr id="12" name="s6-takeaway">
             <a:extLst xmlns:a="http://schemas.openxmlformats.org/drawingml/2006/main">
               <a:ext uri="{FF2B5EF4-FFF2-40B4-BE49-F238E27FC236}">
-                <a16:creationId xmlns:a16="http://schemas.microsoft.com/office/drawing/2014/main" id="{7BDB4A7C-91DF-45A7-A028-4172EA33790B}"/>
+                <a16:creationId xmlns:a16="http://schemas.microsoft.com/office/drawing/2014/main" id="{CBC4DB9D-6A56-44CD-ABB8-25162003392B}"/>
               </a:ext>
             </a:extLst>
           </p:cNvPr>
@@ -8689,7 +8689,7 @@
     </p:spTree>
     <p:extLst>
       <p:ext uri="{BB962C8B-B14F-4D97-AF65-F5344CB8AC3E}">
-        <p14:creationId xmlns:p14="http://schemas.microsoft.com/office/powerpoint/2010/main" val="472400444"/>
+        <p14:creationId xmlns:p14="http://schemas.microsoft.com/office/powerpoint/2010/main" val="247285912"/>
       </p:ext>
     </p:extLst>
   </p:cSld>
@@ -8720,7 +8720,7 @@
           <p:cNvPr id="1" name="s7-rule">
             <a:extLst xmlns:a="http://schemas.openxmlformats.org/drawingml/2006/main">
               <a:ext uri="{FF2B5EF4-FFF2-40B4-BE49-F238E27FC236}">
-                <a16:creationId xmlns:a16="http://schemas.microsoft.com/office/drawing/2014/main" id="{B7C16597-BB29-4781-9032-26F1591D8734}"/>
+                <a16:creationId xmlns:a16="http://schemas.microsoft.com/office/drawing/2014/main" id="{5EFAF569-2E40-4FE2-8811-0F85876A6DBF}"/>
               </a:ext>
             </a:extLst>
           </p:cNvPr>
@@ -8753,7 +8753,7 @@
           <p:cNvPr id="2" name="s7-eyebrow">
             <a:extLst xmlns:a="http://schemas.openxmlformats.org/drawingml/2006/main">
               <a:ext uri="{FF2B5EF4-FFF2-40B4-BE49-F238E27FC236}">
-                <a16:creationId xmlns:a16="http://schemas.microsoft.com/office/drawing/2014/main" id="{247DB5F6-9CBC-45B6-9DF4-46152E7A81F0}"/>
+                <a16:creationId xmlns:a16="http://schemas.microsoft.com/office/drawing/2014/main" id="{7D4F48E3-C77F-4343-BD32-E996415C092A}"/>
               </a:ext>
             </a:extLst>
           </p:cNvPr>
@@ -8811,7 +8811,7 @@
           <p:cNvPr id="3" name="s7-title">
             <a:extLst xmlns:a="http://schemas.openxmlformats.org/drawingml/2006/main">
               <a:ext uri="{FF2B5EF4-FFF2-40B4-BE49-F238E27FC236}">
-                <a16:creationId xmlns:a16="http://schemas.microsoft.com/office/drawing/2014/main" id="{703571EF-7144-46E7-894B-5BEC773962A7}"/>
+                <a16:creationId xmlns:a16="http://schemas.microsoft.com/office/drawing/2014/main" id="{EB16EB4E-7F87-411B-978E-509A05D244F8}"/>
               </a:ext>
             </a:extLst>
           </p:cNvPr>
@@ -8869,7 +8869,7 @@
           <p:cNvPr id="4" name="s7-footer">
             <a:extLst xmlns:a="http://schemas.openxmlformats.org/drawingml/2006/main">
               <a:ext uri="{FF2B5EF4-FFF2-40B4-BE49-F238E27FC236}">
-                <a16:creationId xmlns:a16="http://schemas.microsoft.com/office/drawing/2014/main" id="{A3E1B01E-F3E5-4B31-865C-AE03559F77BF}"/>
+                <a16:creationId xmlns:a16="http://schemas.microsoft.com/office/drawing/2014/main" id="{5AF2479F-C714-4900-AB25-DA18B3C7FAE0}"/>
               </a:ext>
             </a:extLst>
           </p:cNvPr>
@@ -8900,7 +8900,7 @@
           <p:cNvPr id="5" name="s7-identity">
             <a:extLst xmlns:a="http://schemas.openxmlformats.org/drawingml/2006/main">
               <a:ext uri="{FF2B5EF4-FFF2-40B4-BE49-F238E27FC236}">
-                <a16:creationId xmlns:a16="http://schemas.microsoft.com/office/drawing/2014/main" id="{31D180C1-0DEF-4C89-94DA-C65346421802}"/>
+                <a16:creationId xmlns:a16="http://schemas.microsoft.com/office/drawing/2014/main" id="{8EFEDD63-3748-4ED9-A65E-50E93C5C37AC}"/>
               </a:ext>
             </a:extLst>
           </p:cNvPr>
@@ -8958,7 +8958,7 @@
           <p:cNvPr id="6" name="core-no-0">
             <a:extLst xmlns:a="http://schemas.openxmlformats.org/drawingml/2006/main">
               <a:ext uri="{FF2B5EF4-FFF2-40B4-BE49-F238E27FC236}">
-                <a16:creationId xmlns:a16="http://schemas.microsoft.com/office/drawing/2014/main" id="{E086909F-E8ED-467A-861B-94F26790DE98}"/>
+                <a16:creationId xmlns:a16="http://schemas.microsoft.com/office/drawing/2014/main" id="{792BAA8B-CA29-4D42-A871-0E06856B2984}"/>
               </a:ext>
             </a:extLst>
           </p:cNvPr>
@@ -9016,7 +9016,7 @@
           <p:cNvPr id="7" name="core-label-0">
             <a:extLst xmlns:a="http://schemas.openxmlformats.org/drawingml/2006/main">
               <a:ext uri="{FF2B5EF4-FFF2-40B4-BE49-F238E27FC236}">
-                <a16:creationId xmlns:a16="http://schemas.microsoft.com/office/drawing/2014/main" id="{948B8C53-DD0C-4C0D-B399-96E5808FD003}"/>
+                <a16:creationId xmlns:a16="http://schemas.microsoft.com/office/drawing/2014/main" id="{D6CADCDF-5319-4120-A264-98851381C13A}"/>
               </a:ext>
             </a:extLst>
           </p:cNvPr>
@@ -9074,7 +9074,7 @@
           <p:cNvPr id="8" name="core-body-0">
             <a:extLst xmlns:a="http://schemas.openxmlformats.org/drawingml/2006/main">
               <a:ext uri="{FF2B5EF4-FFF2-40B4-BE49-F238E27FC236}">
-                <a16:creationId xmlns:a16="http://schemas.microsoft.com/office/drawing/2014/main" id="{1C09F8BC-8528-47FE-A841-4AD822B6CC47}"/>
+                <a16:creationId xmlns:a16="http://schemas.microsoft.com/office/drawing/2014/main" id="{7AC3B98D-8D2E-46DB-94EC-DEAFEEFB081D}"/>
               </a:ext>
             </a:extLst>
           </p:cNvPr>
@@ -9138,7 +9138,7 @@
           <p:cNvPr id="9" name="core-no-1">
             <a:extLst xmlns:a="http://schemas.openxmlformats.org/drawingml/2006/main">
               <a:ext uri="{FF2B5EF4-FFF2-40B4-BE49-F238E27FC236}">
-                <a16:creationId xmlns:a16="http://schemas.microsoft.com/office/drawing/2014/main" id="{7CEE3082-D9C4-43CE-8125-319DE162659D}"/>
+                <a16:creationId xmlns:a16="http://schemas.microsoft.com/office/drawing/2014/main" id="{052F6BEE-B4ED-4AA7-8A6D-3BB408DDF77B}"/>
               </a:ext>
             </a:extLst>
           </p:cNvPr>
@@ -9196,7 +9196,7 @@
           <p:cNvPr id="10" name="core-body-1">
             <a:extLst xmlns:a="http://schemas.openxmlformats.org/drawingml/2006/main">
               <a:ext uri="{FF2B5EF4-FFF2-40B4-BE49-F238E27FC236}">
-                <a16:creationId xmlns:a16="http://schemas.microsoft.com/office/drawing/2014/main" id="{7A24D6E2-779B-461E-921F-218213099F46}"/>
+                <a16:creationId xmlns:a16="http://schemas.microsoft.com/office/drawing/2014/main" id="{C8C671A7-CA92-4630-863C-04366B0A6310}"/>
               </a:ext>
             </a:extLst>
           </p:cNvPr>
@@ -9260,7 +9260,7 @@
           <p:cNvPr id="11" name="s7-takeaway-rule">
             <a:extLst xmlns:a="http://schemas.openxmlformats.org/drawingml/2006/main">
               <a:ext uri="{FF2B5EF4-FFF2-40B4-BE49-F238E27FC236}">
-                <a16:creationId xmlns:a16="http://schemas.microsoft.com/office/drawing/2014/main" id="{6B3284F5-3AE7-4867-B36D-4915FEBD8B91}"/>
+                <a16:creationId xmlns:a16="http://schemas.microsoft.com/office/drawing/2014/main" id="{DB12887F-D171-4A7C-94CF-A2ACBBBFBA0F}"/>
               </a:ext>
             </a:extLst>
           </p:cNvPr>
@@ -9293,7 +9293,7 @@
           <p:cNvPr id="12" name="s7-takeaway">
             <a:extLst xmlns:a="http://schemas.openxmlformats.org/drawingml/2006/main">
               <a:ext uri="{FF2B5EF4-FFF2-40B4-BE49-F238E27FC236}">
-                <a16:creationId xmlns:a16="http://schemas.microsoft.com/office/drawing/2014/main" id="{1DDC210B-A0FB-40D7-AE7F-6FFC8F9A9FE5}"/>
+                <a16:creationId xmlns:a16="http://schemas.microsoft.com/office/drawing/2014/main" id="{DD9C3D6A-A403-493D-8044-0B35187E815B}"/>
               </a:ext>
             </a:extLst>
           </p:cNvPr>
@@ -9349,7 +9349,7 @@
     </p:spTree>
     <p:extLst>
       <p:ext uri="{BB962C8B-B14F-4D97-AF65-F5344CB8AC3E}">
-        <p14:creationId xmlns:p14="http://schemas.microsoft.com/office/powerpoint/2010/main" val="1150590721"/>
+        <p14:creationId xmlns:p14="http://schemas.microsoft.com/office/powerpoint/2010/main" val="1325812801"/>
       </p:ext>
     </p:extLst>
   </p:cSld>
@@ -9380,7 +9380,7 @@
           <p:cNvPr id="1" name="s8-rule">
             <a:extLst xmlns:a="http://schemas.openxmlformats.org/drawingml/2006/main">
               <a:ext uri="{FF2B5EF4-FFF2-40B4-BE49-F238E27FC236}">
-                <a16:creationId xmlns:a16="http://schemas.microsoft.com/office/drawing/2014/main" id="{D6C621D2-8523-4995-8056-C515CD9AED68}"/>
+                <a16:creationId xmlns:a16="http://schemas.microsoft.com/office/drawing/2014/main" id="{BED04DF3-892D-44E1-989E-FD0ABC1AA950}"/>
               </a:ext>
             </a:extLst>
           </p:cNvPr>
@@ -9413,7 +9413,7 @@
           <p:cNvPr id="2" name="s8-eyebrow">
             <a:extLst xmlns:a="http://schemas.openxmlformats.org/drawingml/2006/main">
               <a:ext uri="{FF2B5EF4-FFF2-40B4-BE49-F238E27FC236}">
-                <a16:creationId xmlns:a16="http://schemas.microsoft.com/office/drawing/2014/main" id="{DDBEC0D8-6CEE-4556-B59E-F7501AE628D5}"/>
+                <a16:creationId xmlns:a16="http://schemas.microsoft.com/office/drawing/2014/main" id="{7A88C10C-531A-40F0-992F-411B6D7DD842}"/>
               </a:ext>
             </a:extLst>
           </p:cNvPr>
@@ -9471,7 +9471,7 @@
           <p:cNvPr id="3" name="s8-title">
             <a:extLst xmlns:a="http://schemas.openxmlformats.org/drawingml/2006/main">
               <a:ext uri="{FF2B5EF4-FFF2-40B4-BE49-F238E27FC236}">
-                <a16:creationId xmlns:a16="http://schemas.microsoft.com/office/drawing/2014/main" id="{405DF7DB-C253-490B-9C1E-AE2DAA5BE85F}"/>
+                <a16:creationId xmlns:a16="http://schemas.microsoft.com/office/drawing/2014/main" id="{24D4F147-8E8C-477B-ABC2-BBF065C24944}"/>
               </a:ext>
             </a:extLst>
           </p:cNvPr>
@@ -9529,7 +9529,7 @@
           <p:cNvPr id="4" name="s8-footer">
             <a:extLst xmlns:a="http://schemas.openxmlformats.org/drawingml/2006/main">
               <a:ext uri="{FF2B5EF4-FFF2-40B4-BE49-F238E27FC236}">
-                <a16:creationId xmlns:a16="http://schemas.microsoft.com/office/drawing/2014/main" id="{41045879-D374-4A85-99A0-2EB34532EE24}"/>
+                <a16:creationId xmlns:a16="http://schemas.microsoft.com/office/drawing/2014/main" id="{1EDE59A4-FD1A-41FC-831B-F67FDF3498DB}"/>
               </a:ext>
             </a:extLst>
           </p:cNvPr>
@@ -9560,7 +9560,7 @@
           <p:cNvPr id="5" name="s8-identity">
             <a:extLst xmlns:a="http://schemas.openxmlformats.org/drawingml/2006/main">
               <a:ext uri="{FF2B5EF4-FFF2-40B4-BE49-F238E27FC236}">
-                <a16:creationId xmlns:a16="http://schemas.microsoft.com/office/drawing/2014/main" id="{128266F5-3220-43D1-85A5-E738E07FCC60}"/>
+                <a16:creationId xmlns:a16="http://schemas.microsoft.com/office/drawing/2014/main" id="{9ED9E36F-6233-4636-B13E-1C224A98A739}"/>
               </a:ext>
             </a:extLst>
           </p:cNvPr>
@@ -9618,7 +9618,7 @@
           <p:cNvPr id="6" name="core-no-0">
             <a:extLst xmlns:a="http://schemas.openxmlformats.org/drawingml/2006/main">
               <a:ext uri="{FF2B5EF4-FFF2-40B4-BE49-F238E27FC236}">
-                <a16:creationId xmlns:a16="http://schemas.microsoft.com/office/drawing/2014/main" id="{0A387CEB-74FC-4BC0-B676-4C16967F1EE7}"/>
+                <a16:creationId xmlns:a16="http://schemas.microsoft.com/office/drawing/2014/main" id="{1F76C501-DD6B-4A65-9F66-48F67F9EB281}"/>
               </a:ext>
             </a:extLst>
           </p:cNvPr>
@@ -9676,7 +9676,7 @@
           <p:cNvPr id="7" name="core-label-0">
             <a:extLst xmlns:a="http://schemas.openxmlformats.org/drawingml/2006/main">
               <a:ext uri="{FF2B5EF4-FFF2-40B4-BE49-F238E27FC236}">
-                <a16:creationId xmlns:a16="http://schemas.microsoft.com/office/drawing/2014/main" id="{E179C624-7273-41EC-B691-36BDC1D21555}"/>
+                <a16:creationId xmlns:a16="http://schemas.microsoft.com/office/drawing/2014/main" id="{B0757CEB-0F88-4CCE-9C08-04CCAF2F09AB}"/>
               </a:ext>
             </a:extLst>
           </p:cNvPr>
@@ -9734,7 +9734,7 @@
           <p:cNvPr id="8" name="core-body-0">
             <a:extLst xmlns:a="http://schemas.openxmlformats.org/drawingml/2006/main">
               <a:ext uri="{FF2B5EF4-FFF2-40B4-BE49-F238E27FC236}">
-                <a16:creationId xmlns:a16="http://schemas.microsoft.com/office/drawing/2014/main" id="{8F16F5A3-9529-44AB-889E-C2B3596933E6}"/>
+                <a16:creationId xmlns:a16="http://schemas.microsoft.com/office/drawing/2014/main" id="{539ABF19-FE2B-466E-8382-6671CC361FF1}"/>
               </a:ext>
             </a:extLst>
           </p:cNvPr>
@@ -9798,7 +9798,7 @@
           <p:cNvPr id="9" name="s8-takeaway-rule">
             <a:extLst xmlns:a="http://schemas.openxmlformats.org/drawingml/2006/main">
               <a:ext uri="{FF2B5EF4-FFF2-40B4-BE49-F238E27FC236}">
-                <a16:creationId xmlns:a16="http://schemas.microsoft.com/office/drawing/2014/main" id="{76D4C3C8-4908-41C7-A09E-3AD519280A06}"/>
+                <a16:creationId xmlns:a16="http://schemas.microsoft.com/office/drawing/2014/main" id="{664218B8-9437-4FC4-B155-CD0712336C98}"/>
               </a:ext>
             </a:extLst>
           </p:cNvPr>
@@ -9831,7 +9831,7 @@
           <p:cNvPr id="10" name="s8-takeaway">
             <a:extLst xmlns:a="http://schemas.openxmlformats.org/drawingml/2006/main">
               <a:ext uri="{FF2B5EF4-FFF2-40B4-BE49-F238E27FC236}">
-                <a16:creationId xmlns:a16="http://schemas.microsoft.com/office/drawing/2014/main" id="{B4625EDA-3A98-4837-8C4D-8C33A509C4D4}"/>
+                <a16:creationId xmlns:a16="http://schemas.microsoft.com/office/drawing/2014/main" id="{AA8AB400-A74B-492E-A13E-44F5465668DC}"/>
               </a:ext>
             </a:extLst>
           </p:cNvPr>
@@ -9887,7 +9887,7 @@
     </p:spTree>
     <p:extLst>
       <p:ext uri="{BB962C8B-B14F-4D97-AF65-F5344CB8AC3E}">
-        <p14:creationId xmlns:p14="http://schemas.microsoft.com/office/powerpoint/2010/main" val="1946714999"/>
+        <p14:creationId xmlns:p14="http://schemas.microsoft.com/office/powerpoint/2010/main" val="1839236316"/>
       </p:ext>
     </p:extLst>
   </p:cSld>
@@ -9918,7 +9918,7 @@
           <p:cNvPr id="1" name="s9-rule">
             <a:extLst xmlns:a="http://schemas.openxmlformats.org/drawingml/2006/main">
               <a:ext uri="{FF2B5EF4-FFF2-40B4-BE49-F238E27FC236}">
-                <a16:creationId xmlns:a16="http://schemas.microsoft.com/office/drawing/2014/main" id="{064F3A94-481D-494E-B64F-813288D43FCD}"/>
+                <a16:creationId xmlns:a16="http://schemas.microsoft.com/office/drawing/2014/main" id="{22EAD110-C6FC-4493-A8EF-CC0B98CCEE25}"/>
               </a:ext>
             </a:extLst>
           </p:cNvPr>
@@ -9951,7 +9951,7 @@
           <p:cNvPr id="2" name="s9-eyebrow">
             <a:extLst xmlns:a="http://schemas.openxmlformats.org/drawingml/2006/main">
               <a:ext uri="{FF2B5EF4-FFF2-40B4-BE49-F238E27FC236}">
-                <a16:creationId xmlns:a16="http://schemas.microsoft.com/office/drawing/2014/main" id="{7B11D5DD-60CC-4EF1-828D-9DF2E0FB904A}"/>
+                <a16:creationId xmlns:a16="http://schemas.microsoft.com/office/drawing/2014/main" id="{906B52A8-43F6-4B8F-8D25-AE4FAED619AE}"/>
               </a:ext>
             </a:extLst>
           </p:cNvPr>
@@ -10009,7 +10009,7 @@
           <p:cNvPr id="3" name="s9-title">
             <a:extLst xmlns:a="http://schemas.openxmlformats.org/drawingml/2006/main">
               <a:ext uri="{FF2B5EF4-FFF2-40B4-BE49-F238E27FC236}">
-                <a16:creationId xmlns:a16="http://schemas.microsoft.com/office/drawing/2014/main" id="{765CDFB7-1536-4D6E-97D5-11E528F10C37}"/>
+                <a16:creationId xmlns:a16="http://schemas.microsoft.com/office/drawing/2014/main" id="{4370CC4F-5F50-40B0-8611-70CD7F5250EE}"/>
               </a:ext>
             </a:extLst>
           </p:cNvPr>
@@ -10067,7 +10067,7 @@
           <p:cNvPr id="4" name="s9-footer">
             <a:extLst xmlns:a="http://schemas.openxmlformats.org/drawingml/2006/main">
               <a:ext uri="{FF2B5EF4-FFF2-40B4-BE49-F238E27FC236}">
-                <a16:creationId xmlns:a16="http://schemas.microsoft.com/office/drawing/2014/main" id="{2424879E-CF6E-4675-9D73-0E74BD9BD2F4}"/>
+                <a16:creationId xmlns:a16="http://schemas.microsoft.com/office/drawing/2014/main" id="{FBFE360A-FE60-4742-A472-689204BF5B4A}"/>
               </a:ext>
             </a:extLst>
           </p:cNvPr>
@@ -10098,7 +10098,7 @@
           <p:cNvPr id="5" name="s9-identity">
             <a:extLst xmlns:a="http://schemas.openxmlformats.org/drawingml/2006/main">
               <a:ext uri="{FF2B5EF4-FFF2-40B4-BE49-F238E27FC236}">
-                <a16:creationId xmlns:a16="http://schemas.microsoft.com/office/drawing/2014/main" id="{6FAEAFB5-181B-4D8A-A8B9-380E3A3F936C}"/>
+                <a16:creationId xmlns:a16="http://schemas.microsoft.com/office/drawing/2014/main" id="{1CE246F5-F55B-4342-9F70-9676EC8D6341}"/>
               </a:ext>
             </a:extLst>
           </p:cNvPr>
@@ -10156,7 +10156,7 @@
           <p:cNvPr id="6" name="core-no-0">
             <a:extLst xmlns:a="http://schemas.openxmlformats.org/drawingml/2006/main">
               <a:ext uri="{FF2B5EF4-FFF2-40B4-BE49-F238E27FC236}">
-                <a16:creationId xmlns:a16="http://schemas.microsoft.com/office/drawing/2014/main" id="{33FEE11B-5C02-40F9-9693-61BD76EFD66C}"/>
+                <a16:creationId xmlns:a16="http://schemas.microsoft.com/office/drawing/2014/main" id="{A20E0541-BD18-4DED-B166-AF0020C4BCC9}"/>
               </a:ext>
             </a:extLst>
           </p:cNvPr>
@@ -10214,7 +10214,7 @@
           <p:cNvPr id="7" name="core-label-0">
             <a:extLst xmlns:a="http://schemas.openxmlformats.org/drawingml/2006/main">
               <a:ext uri="{FF2B5EF4-FFF2-40B4-BE49-F238E27FC236}">
-                <a16:creationId xmlns:a16="http://schemas.microsoft.com/office/drawing/2014/main" id="{CCF0B365-8702-4E7D-92DF-AF4162CD6F56}"/>
+                <a16:creationId xmlns:a16="http://schemas.microsoft.com/office/drawing/2014/main" id="{FC58D60F-253F-4468-B9F4-6BDB8FD91B9E}"/>
               </a:ext>
             </a:extLst>
           </p:cNvPr>
@@ -10272,7 +10272,7 @@
           <p:cNvPr id="8" name="core-body-0">
             <a:extLst xmlns:a="http://schemas.openxmlformats.org/drawingml/2006/main">
               <a:ext uri="{FF2B5EF4-FFF2-40B4-BE49-F238E27FC236}">
-                <a16:creationId xmlns:a16="http://schemas.microsoft.com/office/drawing/2014/main" id="{AC8F74C1-ADC8-4F24-95DC-102955E6A181}"/>
+                <a16:creationId xmlns:a16="http://schemas.microsoft.com/office/drawing/2014/main" id="{CBEFAC4D-F7D5-4987-BD83-DFCF9240C09E}"/>
               </a:ext>
             </a:extLst>
           </p:cNvPr>
@@ -10336,7 +10336,7 @@
           <p:cNvPr id="9" name="s9-takeaway-rule">
             <a:extLst xmlns:a="http://schemas.openxmlformats.org/drawingml/2006/main">
               <a:ext uri="{FF2B5EF4-FFF2-40B4-BE49-F238E27FC236}">
-                <a16:creationId xmlns:a16="http://schemas.microsoft.com/office/drawing/2014/main" id="{8FC686A8-28B9-449E-A671-B9576BE585C0}"/>
+                <a16:creationId xmlns:a16="http://schemas.microsoft.com/office/drawing/2014/main" id="{D95E68DE-948A-4BF5-9854-25DF123A87B6}"/>
               </a:ext>
             </a:extLst>
           </p:cNvPr>
@@ -10369,7 +10369,7 @@
           <p:cNvPr id="10" name="s9-takeaway">
             <a:extLst xmlns:a="http://schemas.openxmlformats.org/drawingml/2006/main">
               <a:ext uri="{FF2B5EF4-FFF2-40B4-BE49-F238E27FC236}">
-                <a16:creationId xmlns:a16="http://schemas.microsoft.com/office/drawing/2014/main" id="{765B0944-E6A5-48EA-9C0C-343CFD67D408}"/>
+                <a16:creationId xmlns:a16="http://schemas.microsoft.com/office/drawing/2014/main" id="{4879DF1B-8968-4539-AF84-145F4F66B18E}"/>
               </a:ext>
             </a:extLst>
           </p:cNvPr>
@@ -10425,7 +10425,7 @@
     </p:spTree>
     <p:extLst>
       <p:ext uri="{BB962C8B-B14F-4D97-AF65-F5344CB8AC3E}">
-        <p14:creationId xmlns:p14="http://schemas.microsoft.com/office/powerpoint/2010/main" val="1557947508"/>
+        <p14:creationId xmlns:p14="http://schemas.microsoft.com/office/powerpoint/2010/main" val="1628521347"/>
       </p:ext>
     </p:extLst>
   </p:cSld>

--- a/docs/public/course-assets/course-pptx/em-005.pptx
+++ b/docs/public/course-assets/course-pptx/em-005.pptx
@@ -2,25 +2,25 @@
 <file path=ppt/presentation.xml><?xml version="1.0" encoding="utf-8"?>
 <p:presentation xmlns:p="http://schemas.openxmlformats.org/presentationml/2006/main">
   <p:sldMasterIdLst>
-    <p:sldMasterId xmlns:r="http://schemas.openxmlformats.org/officeDocument/2006/relationships" id="2147483648" r:id="Reedc51be592342d0"/>
+    <p:sldMasterId xmlns:r="http://schemas.openxmlformats.org/officeDocument/2006/relationships" id="2147483648" r:id="R12f70720e9704f61"/>
   </p:sldMasterIdLst>
   <p:notesMasterIdLst>
-    <p:notesMasterId xmlns:r="http://schemas.openxmlformats.org/officeDocument/2006/relationships" r:id="R9f9c251b23b54361"/>
+    <p:notesMasterId xmlns:r="http://schemas.openxmlformats.org/officeDocument/2006/relationships" r:id="Ra42bc761a7e14f0d"/>
   </p:notesMasterIdLst>
   <p:sldIdLst>
-    <p:sldId xmlns:r="http://schemas.openxmlformats.org/officeDocument/2006/relationships" id="256" r:id="R4ae6be37808f4fd9"/>
-    <p:sldId xmlns:r="http://schemas.openxmlformats.org/officeDocument/2006/relationships" id="257" r:id="R01ad425f337b4bc9"/>
-    <p:sldId xmlns:r="http://schemas.openxmlformats.org/officeDocument/2006/relationships" id="258" r:id="R9aac595c31eb4816"/>
-    <p:sldId xmlns:r="http://schemas.openxmlformats.org/officeDocument/2006/relationships" id="259" r:id="R0bd5c7d84ba0425d"/>
-    <p:sldId xmlns:r="http://schemas.openxmlformats.org/officeDocument/2006/relationships" id="260" r:id="R820d0878725f4dac"/>
-    <p:sldId xmlns:r="http://schemas.openxmlformats.org/officeDocument/2006/relationships" id="261" r:id="Re2594071654644ab"/>
-    <p:sldId xmlns:r="http://schemas.openxmlformats.org/officeDocument/2006/relationships" id="262" r:id="R7f5d14fe816d49f6"/>
-    <p:sldId xmlns:r="http://schemas.openxmlformats.org/officeDocument/2006/relationships" id="263" r:id="R8c8ddb2876f24d34"/>
-    <p:sldId xmlns:r="http://schemas.openxmlformats.org/officeDocument/2006/relationships" id="264" r:id="Re76faabe6af04e61"/>
-    <p:sldId xmlns:r="http://schemas.openxmlformats.org/officeDocument/2006/relationships" id="265" r:id="Rcc9124a4762a4a30"/>
-    <p:sldId xmlns:r="http://schemas.openxmlformats.org/officeDocument/2006/relationships" id="266" r:id="R4026cf0a2178489a"/>
-    <p:sldId xmlns:r="http://schemas.openxmlformats.org/officeDocument/2006/relationships" id="267" r:id="Re14c5f7f0f554eb7"/>
-    <p:sldId xmlns:r="http://schemas.openxmlformats.org/officeDocument/2006/relationships" id="268" r:id="Rfb11499316d341e7"/>
+    <p:sldId xmlns:r="http://schemas.openxmlformats.org/officeDocument/2006/relationships" id="256" r:id="Ra57faf0e401e433c"/>
+    <p:sldId xmlns:r="http://schemas.openxmlformats.org/officeDocument/2006/relationships" id="257" r:id="R9385ab050da44166"/>
+    <p:sldId xmlns:r="http://schemas.openxmlformats.org/officeDocument/2006/relationships" id="258" r:id="R99cc9b8cadf14813"/>
+    <p:sldId xmlns:r="http://schemas.openxmlformats.org/officeDocument/2006/relationships" id="259" r:id="Red2db67509bd4414"/>
+    <p:sldId xmlns:r="http://schemas.openxmlformats.org/officeDocument/2006/relationships" id="260" r:id="R00562041ea2745aa"/>
+    <p:sldId xmlns:r="http://schemas.openxmlformats.org/officeDocument/2006/relationships" id="261" r:id="R2a03dcf6499644c5"/>
+    <p:sldId xmlns:r="http://schemas.openxmlformats.org/officeDocument/2006/relationships" id="262" r:id="Rc7db614e56bb4a99"/>
+    <p:sldId xmlns:r="http://schemas.openxmlformats.org/officeDocument/2006/relationships" id="263" r:id="R17f42cb279f9401d"/>
+    <p:sldId xmlns:r="http://schemas.openxmlformats.org/officeDocument/2006/relationships" id="264" r:id="R8e9988dac31640a7"/>
+    <p:sldId xmlns:r="http://schemas.openxmlformats.org/officeDocument/2006/relationships" id="265" r:id="R08c5f7dfb9a8403a"/>
+    <p:sldId xmlns:r="http://schemas.openxmlformats.org/officeDocument/2006/relationships" id="266" r:id="R51fbfa7425664eea"/>
+    <p:sldId xmlns:r="http://schemas.openxmlformats.org/officeDocument/2006/relationships" id="267" r:id="R132b476056994533"/>
+    <p:sldId xmlns:r="http://schemas.openxmlformats.org/officeDocument/2006/relationships" id="268" r:id="Reaf8917fa8704430"/>
   </p:sldIdLst>
   <p:sldSz cx="12192000" cy="6858000"/>
   <p:notesSz cx="6858000" cy="9144000"/>
@@ -1405,7 +1405,7 @@
   </p:cSld>
   <p:clrMap bg1="lt1" tx1="dk1" bg2="lt2" tx2="dk2" accent1="accent1" accent2="accent2" accent3="accent3" accent4="accent4" accent5="accent5" accent6="accent6" hlink="hlink" folHlink="folHlink"/>
   <p:sldLayoutIdLst>
-    <p:sldLayoutId xmlns:r="http://schemas.openxmlformats.org/officeDocument/2006/relationships" id="2147483649" r:id="Rda63c60988354c56"/>
+    <p:sldLayoutId xmlns:r="http://schemas.openxmlformats.org/officeDocument/2006/relationships" id="2147483649" r:id="Rb2574dc5993348d1"/>
   </p:sldLayoutIdLst>
   <p:txStyles>
     <p:titleStyle>
@@ -1956,7 +1956,7 @@
           <p:cNvPr id="1" name="cover-rule">
             <a:extLst xmlns:a="http://schemas.openxmlformats.org/drawingml/2006/main">
               <a:ext uri="{FF2B5EF4-FFF2-40B4-BE49-F238E27FC236}">
-                <a16:creationId xmlns:a16="http://schemas.microsoft.com/office/drawing/2014/main" id="{E7A2E26B-046B-41FE-9AFB-2313E841B882}"/>
+                <a16:creationId xmlns:a16="http://schemas.microsoft.com/office/drawing/2014/main" id="{5D101160-5F7D-4019-A478-749315E4067C}"/>
               </a:ext>
             </a:extLst>
           </p:cNvPr>
@@ -1989,7 +1989,7 @@
           <p:cNvPr id="2" name="cover-ring-1">
             <a:extLst xmlns:a="http://schemas.openxmlformats.org/drawingml/2006/main">
               <a:ext uri="{FF2B5EF4-FFF2-40B4-BE49-F238E27FC236}">
-                <a16:creationId xmlns:a16="http://schemas.microsoft.com/office/drawing/2014/main" id="{4F839A07-8BB0-4579-BB30-58835F5C2C20}"/>
+                <a16:creationId xmlns:a16="http://schemas.microsoft.com/office/drawing/2014/main" id="{782D24C6-1B55-41B7-8393-22BD7DC03DDF}"/>
               </a:ext>
             </a:extLst>
           </p:cNvPr>
@@ -2020,7 +2020,7 @@
           <p:cNvPr id="3" name="cover-ring-2">
             <a:extLst xmlns:a="http://schemas.openxmlformats.org/drawingml/2006/main">
               <a:ext uri="{FF2B5EF4-FFF2-40B4-BE49-F238E27FC236}">
-                <a16:creationId xmlns:a16="http://schemas.microsoft.com/office/drawing/2014/main" id="{9F71CF0E-226B-41E4-957C-52E0DE1F0B73}"/>
+                <a16:creationId xmlns:a16="http://schemas.microsoft.com/office/drawing/2014/main" id="{B9590A3A-9310-4AB8-932A-98B3A5C674EA}"/>
               </a:ext>
             </a:extLst>
           </p:cNvPr>
@@ -2051,7 +2051,7 @@
           <p:cNvPr id="4" name="cover-core">
             <a:extLst xmlns:a="http://schemas.openxmlformats.org/drawingml/2006/main">
               <a:ext uri="{FF2B5EF4-FFF2-40B4-BE49-F238E27FC236}">
-                <a16:creationId xmlns:a16="http://schemas.microsoft.com/office/drawing/2014/main" id="{35D02033-3FBC-4909-9379-B6D155AD0F5E}"/>
+                <a16:creationId xmlns:a16="http://schemas.microsoft.com/office/drawing/2014/main" id="{81BE3612-327D-4E93-9719-AA3DDE59D478}"/>
               </a:ext>
             </a:extLst>
           </p:cNvPr>
@@ -2084,7 +2084,7 @@
           <p:cNvPr id="5" name="cover-line-1">
             <a:extLst xmlns:a="http://schemas.openxmlformats.org/drawingml/2006/main">
               <a:ext uri="{FF2B5EF4-FFF2-40B4-BE49-F238E27FC236}">
-                <a16:creationId xmlns:a16="http://schemas.microsoft.com/office/drawing/2014/main" id="{21E8BD76-A187-4B5A-9982-645175EF36A0}"/>
+                <a16:creationId xmlns:a16="http://schemas.microsoft.com/office/drawing/2014/main" id="{E22574A3-0162-470B-BB8F-25B134A0CE8A}"/>
               </a:ext>
             </a:extLst>
           </p:cNvPr>
@@ -2115,7 +2115,7 @@
           <p:cNvPr id="6" name="cover-line-2">
             <a:extLst xmlns:a="http://schemas.openxmlformats.org/drawingml/2006/main">
               <a:ext uri="{FF2B5EF4-FFF2-40B4-BE49-F238E27FC236}">
-                <a16:creationId xmlns:a16="http://schemas.microsoft.com/office/drawing/2014/main" id="{C498AD64-873A-4682-AE77-E135732FF186}"/>
+                <a16:creationId xmlns:a16="http://schemas.microsoft.com/office/drawing/2014/main" id="{BE92FD6C-2573-4039-9C57-BF40C9E2A2D9}"/>
               </a:ext>
             </a:extLst>
           </p:cNvPr>
@@ -2146,7 +2146,7 @@
           <p:cNvPr id="7" name="cover-eyebrow">
             <a:extLst xmlns:a="http://schemas.openxmlformats.org/drawingml/2006/main">
               <a:ext uri="{FF2B5EF4-FFF2-40B4-BE49-F238E27FC236}">
-                <a16:creationId xmlns:a16="http://schemas.microsoft.com/office/drawing/2014/main" id="{2F2C4BA7-2232-4000-9A79-34BFC8118242}"/>
+                <a16:creationId xmlns:a16="http://schemas.microsoft.com/office/drawing/2014/main" id="{4C858E19-F50D-4B25-98D9-CDC5B64CEC2A}"/>
               </a:ext>
             </a:extLst>
           </p:cNvPr>
@@ -2204,7 +2204,7 @@
           <p:cNvPr id="8" name="cover-title">
             <a:extLst xmlns:a="http://schemas.openxmlformats.org/drawingml/2006/main">
               <a:ext uri="{FF2B5EF4-FFF2-40B4-BE49-F238E27FC236}">
-                <a16:creationId xmlns:a16="http://schemas.microsoft.com/office/drawing/2014/main" id="{087256A5-3144-4837-B0B3-3048E2999872}"/>
+                <a16:creationId xmlns:a16="http://schemas.microsoft.com/office/drawing/2014/main" id="{3E86A58F-0D94-4D88-AF2F-52213B9EF891}"/>
               </a:ext>
             </a:extLst>
           </p:cNvPr>
@@ -2262,7 +2262,7 @@
           <p:cNvPr id="9" name="cover-subtitle">
             <a:extLst xmlns:a="http://schemas.openxmlformats.org/drawingml/2006/main">
               <a:ext uri="{FF2B5EF4-FFF2-40B4-BE49-F238E27FC236}">
-                <a16:creationId xmlns:a16="http://schemas.microsoft.com/office/drawing/2014/main" id="{89217CE0-EE1C-4963-B755-4ABE5B49B1D1}"/>
+                <a16:creationId xmlns:a16="http://schemas.microsoft.com/office/drawing/2014/main" id="{F0A93368-9266-4730-A730-7A94445EE3F0}"/>
               </a:ext>
             </a:extLst>
           </p:cNvPr>
@@ -2324,7 +2324,7 @@
           <p:cNvPr id="10" name="cover-lead">
             <a:extLst xmlns:a="http://schemas.openxmlformats.org/drawingml/2006/main">
               <a:ext uri="{FF2B5EF4-FFF2-40B4-BE49-F238E27FC236}">
-                <a16:creationId xmlns:a16="http://schemas.microsoft.com/office/drawing/2014/main" id="{6A650DAB-9056-470C-A3FC-762B1E3779F9}"/>
+                <a16:creationId xmlns:a16="http://schemas.microsoft.com/office/drawing/2014/main" id="{E71EB828-65D9-4614-A79D-48D5A96F7632}"/>
               </a:ext>
             </a:extLst>
           </p:cNvPr>
@@ -2382,7 +2382,7 @@
           <p:cNvPr id="11" name="cover-course">
             <a:extLst xmlns:a="http://schemas.openxmlformats.org/drawingml/2006/main">
               <a:ext uri="{FF2B5EF4-FFF2-40B4-BE49-F238E27FC236}">
-                <a16:creationId xmlns:a16="http://schemas.microsoft.com/office/drawing/2014/main" id="{0A96A277-6CA9-427B-9C76-04444438B883}"/>
+                <a16:creationId xmlns:a16="http://schemas.microsoft.com/office/drawing/2014/main" id="{5BFA9DCE-13BD-4098-9169-421091442F59}"/>
               </a:ext>
             </a:extLst>
           </p:cNvPr>
@@ -2440,7 +2440,7 @@
           <p:cNvPr id="12" name="cover-id">
             <a:extLst xmlns:a="http://schemas.openxmlformats.org/drawingml/2006/main">
               <a:ext uri="{FF2B5EF4-FFF2-40B4-BE49-F238E27FC236}">
-                <a16:creationId xmlns:a16="http://schemas.microsoft.com/office/drawing/2014/main" id="{29E6A5ED-8389-4F8E-8E0C-E25F7D316B89}"/>
+                <a16:creationId xmlns:a16="http://schemas.microsoft.com/office/drawing/2014/main" id="{FD68DEDD-8F21-48A6-9BDD-32271FF30614}"/>
               </a:ext>
             </a:extLst>
           </p:cNvPr>
@@ -2496,7 +2496,7 @@
     </p:spTree>
     <p:extLst>
       <p:ext uri="{BB962C8B-B14F-4D97-AF65-F5344CB8AC3E}">
-        <p14:creationId xmlns:p14="http://schemas.microsoft.com/office/powerpoint/2010/main" val="1399394481"/>
+        <p14:creationId xmlns:p14="http://schemas.microsoft.com/office/powerpoint/2010/main" val="956620440"/>
       </p:ext>
     </p:extLst>
   </p:cSld>
@@ -2527,7 +2527,7 @@
           <p:cNvPr id="1" name="s10-rule">
             <a:extLst xmlns:a="http://schemas.openxmlformats.org/drawingml/2006/main">
               <a:ext uri="{FF2B5EF4-FFF2-40B4-BE49-F238E27FC236}">
-                <a16:creationId xmlns:a16="http://schemas.microsoft.com/office/drawing/2014/main" id="{C8AC33C3-8936-4839-A8BF-916C609622E0}"/>
+                <a16:creationId xmlns:a16="http://schemas.microsoft.com/office/drawing/2014/main" id="{DDBCEDCD-8835-483E-8179-E82A8D435C8E}"/>
               </a:ext>
             </a:extLst>
           </p:cNvPr>
@@ -2560,7 +2560,7 @@
           <p:cNvPr id="2" name="s10-eyebrow">
             <a:extLst xmlns:a="http://schemas.openxmlformats.org/drawingml/2006/main">
               <a:ext uri="{FF2B5EF4-FFF2-40B4-BE49-F238E27FC236}">
-                <a16:creationId xmlns:a16="http://schemas.microsoft.com/office/drawing/2014/main" id="{AFF0402E-1870-425B-9E84-66C06AEA814E}"/>
+                <a16:creationId xmlns:a16="http://schemas.microsoft.com/office/drawing/2014/main" id="{ACD68595-6FE7-484F-92AB-BE8F3C9A0FAC}"/>
               </a:ext>
             </a:extLst>
           </p:cNvPr>
@@ -2618,7 +2618,7 @@
           <p:cNvPr id="3" name="s10-title">
             <a:extLst xmlns:a="http://schemas.openxmlformats.org/drawingml/2006/main">
               <a:ext uri="{FF2B5EF4-FFF2-40B4-BE49-F238E27FC236}">
-                <a16:creationId xmlns:a16="http://schemas.microsoft.com/office/drawing/2014/main" id="{1F9762B3-2864-493E-A684-6EB1CD7372DB}"/>
+                <a16:creationId xmlns:a16="http://schemas.microsoft.com/office/drawing/2014/main" id="{F4DA9A7B-5A9F-4B9E-95C7-CF944612D565}"/>
               </a:ext>
             </a:extLst>
           </p:cNvPr>
@@ -2676,7 +2676,7 @@
           <p:cNvPr id="4" name="s10-footer">
             <a:extLst xmlns:a="http://schemas.openxmlformats.org/drawingml/2006/main">
               <a:ext uri="{FF2B5EF4-FFF2-40B4-BE49-F238E27FC236}">
-                <a16:creationId xmlns:a16="http://schemas.microsoft.com/office/drawing/2014/main" id="{BDF1B011-B956-4D52-92CC-926DD1AFE753}"/>
+                <a16:creationId xmlns:a16="http://schemas.microsoft.com/office/drawing/2014/main" id="{BD558B0D-E499-4283-85D4-D3B247CAA19E}"/>
               </a:ext>
             </a:extLst>
           </p:cNvPr>
@@ -2707,7 +2707,7 @@
           <p:cNvPr id="5" name="s10-identity">
             <a:extLst xmlns:a="http://schemas.openxmlformats.org/drawingml/2006/main">
               <a:ext uri="{FF2B5EF4-FFF2-40B4-BE49-F238E27FC236}">
-                <a16:creationId xmlns:a16="http://schemas.microsoft.com/office/drawing/2014/main" id="{F8FEE9E5-295C-4961-9FEA-5643FB654627}"/>
+                <a16:creationId xmlns:a16="http://schemas.microsoft.com/office/drawing/2014/main" id="{4FA602C8-E84F-4ED9-8858-A969F668A6CF}"/>
               </a:ext>
             </a:extLst>
           </p:cNvPr>
@@ -2765,7 +2765,7 @@
           <p:cNvPr id="6" name="case-title">
             <a:extLst xmlns:a="http://schemas.openxmlformats.org/drawingml/2006/main">
               <a:ext uri="{FF2B5EF4-FFF2-40B4-BE49-F238E27FC236}">
-                <a16:creationId xmlns:a16="http://schemas.microsoft.com/office/drawing/2014/main" id="{EE324E25-AAA6-4D6C-8414-6016641CD15B}"/>
+                <a16:creationId xmlns:a16="http://schemas.microsoft.com/office/drawing/2014/main" id="{6B553D1A-E06E-4DC9-AC83-C84753F36761}"/>
               </a:ext>
             </a:extLst>
           </p:cNvPr>
@@ -2829,7 +2829,7 @@
           <p:cNvPr id="7" name="case-row-0">
             <a:extLst xmlns:a="http://schemas.openxmlformats.org/drawingml/2006/main">
               <a:ext uri="{FF2B5EF4-FFF2-40B4-BE49-F238E27FC236}">
-                <a16:creationId xmlns:a16="http://schemas.microsoft.com/office/drawing/2014/main" id="{094615A2-F513-4DB3-A301-931A6FBF7FF9}"/>
+                <a16:creationId xmlns:a16="http://schemas.microsoft.com/office/drawing/2014/main" id="{BE7B6053-1081-4F4C-8D23-D8E8D9E19874}"/>
               </a:ext>
             </a:extLst>
           </p:cNvPr>
@@ -2893,7 +2893,7 @@
           <p:cNvPr id="8" name="case-row-1">
             <a:extLst xmlns:a="http://schemas.openxmlformats.org/drawingml/2006/main">
               <a:ext uri="{FF2B5EF4-FFF2-40B4-BE49-F238E27FC236}">
-                <a16:creationId xmlns:a16="http://schemas.microsoft.com/office/drawing/2014/main" id="{27B9E5E2-185B-4A57-BC0B-8D34FBD3678E}"/>
+                <a16:creationId xmlns:a16="http://schemas.microsoft.com/office/drawing/2014/main" id="{13B117AA-CFF4-4C26-AF00-2E6109FDD42A}"/>
               </a:ext>
             </a:extLst>
           </p:cNvPr>
@@ -2957,7 +2957,7 @@
           <p:cNvPr id="9" name="case-row-2">
             <a:extLst xmlns:a="http://schemas.openxmlformats.org/drawingml/2006/main">
               <a:ext uri="{FF2B5EF4-FFF2-40B4-BE49-F238E27FC236}">
-                <a16:creationId xmlns:a16="http://schemas.microsoft.com/office/drawing/2014/main" id="{D028F343-8AE9-469B-A01E-0DC68E0130BD}"/>
+                <a16:creationId xmlns:a16="http://schemas.microsoft.com/office/drawing/2014/main" id="{4C94EDC6-62C8-4E0F-8FB7-30D43F5580B9}"/>
               </a:ext>
             </a:extLst>
           </p:cNvPr>
@@ -3021,7 +3021,7 @@
           <p:cNvPr id="10" name="s10-takeaway-rule">
             <a:extLst xmlns:a="http://schemas.openxmlformats.org/drawingml/2006/main">
               <a:ext uri="{FF2B5EF4-FFF2-40B4-BE49-F238E27FC236}">
-                <a16:creationId xmlns:a16="http://schemas.microsoft.com/office/drawing/2014/main" id="{2189DD6C-D10D-4245-BB6C-80919D9EFEB0}"/>
+                <a16:creationId xmlns:a16="http://schemas.microsoft.com/office/drawing/2014/main" id="{8C1EC0A8-B661-4BCA-9799-51BF0E183FCA}"/>
               </a:ext>
             </a:extLst>
           </p:cNvPr>
@@ -3054,7 +3054,7 @@
           <p:cNvPr id="11" name="s10-takeaway">
             <a:extLst xmlns:a="http://schemas.openxmlformats.org/drawingml/2006/main">
               <a:ext uri="{FF2B5EF4-FFF2-40B4-BE49-F238E27FC236}">
-                <a16:creationId xmlns:a16="http://schemas.microsoft.com/office/drawing/2014/main" id="{76CF6D2E-092E-405F-9141-296B3D226530}"/>
+                <a16:creationId xmlns:a16="http://schemas.microsoft.com/office/drawing/2014/main" id="{0BD7CCD5-7C84-4442-B418-0E6B0E20E06C}"/>
               </a:ext>
             </a:extLst>
           </p:cNvPr>
@@ -3110,7 +3110,7 @@
     </p:spTree>
     <p:extLst>
       <p:ext uri="{BB962C8B-B14F-4D97-AF65-F5344CB8AC3E}">
-        <p14:creationId xmlns:p14="http://schemas.microsoft.com/office/powerpoint/2010/main" val="970449018"/>
+        <p14:creationId xmlns:p14="http://schemas.microsoft.com/office/powerpoint/2010/main" val="1361265092"/>
       </p:ext>
     </p:extLst>
   </p:cSld>
@@ -3141,7 +3141,7 @@
           <p:cNvPr id="1" name="s11-rule">
             <a:extLst xmlns:a="http://schemas.openxmlformats.org/drawingml/2006/main">
               <a:ext uri="{FF2B5EF4-FFF2-40B4-BE49-F238E27FC236}">
-                <a16:creationId xmlns:a16="http://schemas.microsoft.com/office/drawing/2014/main" id="{F6E583D7-12F1-472C-A5C6-B3A4A6E09AB8}"/>
+                <a16:creationId xmlns:a16="http://schemas.microsoft.com/office/drawing/2014/main" id="{5D74A01C-2596-45B7-98B3-306D90A5D114}"/>
               </a:ext>
             </a:extLst>
           </p:cNvPr>
@@ -3174,7 +3174,7 @@
           <p:cNvPr id="2" name="s11-eyebrow">
             <a:extLst xmlns:a="http://schemas.openxmlformats.org/drawingml/2006/main">
               <a:ext uri="{FF2B5EF4-FFF2-40B4-BE49-F238E27FC236}">
-                <a16:creationId xmlns:a16="http://schemas.microsoft.com/office/drawing/2014/main" id="{01C6157D-7B6B-452C-B6CF-BB3FEB84A22A}"/>
+                <a16:creationId xmlns:a16="http://schemas.microsoft.com/office/drawing/2014/main" id="{F940970F-17EE-407D-A764-ED370762A613}"/>
               </a:ext>
             </a:extLst>
           </p:cNvPr>
@@ -3232,7 +3232,7 @@
           <p:cNvPr id="3" name="s11-title">
             <a:extLst xmlns:a="http://schemas.openxmlformats.org/drawingml/2006/main">
               <a:ext uri="{FF2B5EF4-FFF2-40B4-BE49-F238E27FC236}">
-                <a16:creationId xmlns:a16="http://schemas.microsoft.com/office/drawing/2014/main" id="{B8884378-DDCA-4CC0-B28C-360772CA3055}"/>
+                <a16:creationId xmlns:a16="http://schemas.microsoft.com/office/drawing/2014/main" id="{A4A54166-1C60-4952-8AA2-3AB2FCF42A5F}"/>
               </a:ext>
             </a:extLst>
           </p:cNvPr>
@@ -3290,7 +3290,7 @@
           <p:cNvPr id="4" name="s11-footer">
             <a:extLst xmlns:a="http://schemas.openxmlformats.org/drawingml/2006/main">
               <a:ext uri="{FF2B5EF4-FFF2-40B4-BE49-F238E27FC236}">
-                <a16:creationId xmlns:a16="http://schemas.microsoft.com/office/drawing/2014/main" id="{57EB051D-EBB1-40FD-8959-C72C30697033}"/>
+                <a16:creationId xmlns:a16="http://schemas.microsoft.com/office/drawing/2014/main" id="{9C22D7D2-2BF5-4C64-A909-B002684396E0}"/>
               </a:ext>
             </a:extLst>
           </p:cNvPr>
@@ -3321,7 +3321,7 @@
           <p:cNvPr id="5" name="s11-identity">
             <a:extLst xmlns:a="http://schemas.openxmlformats.org/drawingml/2006/main">
               <a:ext uri="{FF2B5EF4-FFF2-40B4-BE49-F238E27FC236}">
-                <a16:creationId xmlns:a16="http://schemas.microsoft.com/office/drawing/2014/main" id="{BC6FFF90-AA96-4F04-ABC3-B6D76D56C1E5}"/>
+                <a16:creationId xmlns:a16="http://schemas.microsoft.com/office/drawing/2014/main" id="{80DC5FC4-CA1C-41CF-A8A8-D56CC3D62A2F}"/>
               </a:ext>
             </a:extLst>
           </p:cNvPr>
@@ -3379,7 +3379,7 @@
           <p:cNvPr id="6" name="practice-circle-0">
             <a:extLst xmlns:a="http://schemas.openxmlformats.org/drawingml/2006/main">
               <a:ext uri="{FF2B5EF4-FFF2-40B4-BE49-F238E27FC236}">
-                <a16:creationId xmlns:a16="http://schemas.microsoft.com/office/drawing/2014/main" id="{7796E756-4F3E-44C9-9713-751CA7C55D5D}"/>
+                <a16:creationId xmlns:a16="http://schemas.microsoft.com/office/drawing/2014/main" id="{7435A786-4436-481F-A758-6723A8C296DF}"/>
               </a:ext>
             </a:extLst>
           </p:cNvPr>
@@ -3412,7 +3412,7 @@
           <p:cNvPr id="7" name="practice-number-0">
             <a:extLst xmlns:a="http://schemas.openxmlformats.org/drawingml/2006/main">
               <a:ext uri="{FF2B5EF4-FFF2-40B4-BE49-F238E27FC236}">
-                <a16:creationId xmlns:a16="http://schemas.microsoft.com/office/drawing/2014/main" id="{1D74B6DE-0BBB-40D1-934E-2B729623470F}"/>
+                <a16:creationId xmlns:a16="http://schemas.microsoft.com/office/drawing/2014/main" id="{09920787-7655-4D92-965E-4EEE9465C77C}"/>
               </a:ext>
             </a:extLst>
           </p:cNvPr>
@@ -3470,7 +3470,7 @@
           <p:cNvPr id="8" name="practice-item-0">
             <a:extLst xmlns:a="http://schemas.openxmlformats.org/drawingml/2006/main">
               <a:ext uri="{FF2B5EF4-FFF2-40B4-BE49-F238E27FC236}">
-                <a16:creationId xmlns:a16="http://schemas.microsoft.com/office/drawing/2014/main" id="{284474A1-70A9-46C8-B64D-91E91F3F01BF}"/>
+                <a16:creationId xmlns:a16="http://schemas.microsoft.com/office/drawing/2014/main" id="{022C29DF-187C-4F37-AEA5-6CA808293E25}"/>
               </a:ext>
             </a:extLst>
           </p:cNvPr>
@@ -3534,7 +3534,7 @@
           <p:cNvPr id="9" name="practice-connector-0">
             <a:extLst xmlns:a="http://schemas.openxmlformats.org/drawingml/2006/main">
               <a:ext uri="{FF2B5EF4-FFF2-40B4-BE49-F238E27FC236}">
-                <a16:creationId xmlns:a16="http://schemas.microsoft.com/office/drawing/2014/main" id="{BBB9BBDA-85E0-4401-8704-3EDA9450D2B6}"/>
+                <a16:creationId xmlns:a16="http://schemas.microsoft.com/office/drawing/2014/main" id="{5E49AF2C-58E9-406A-BAC0-1041B1E48114}"/>
               </a:ext>
             </a:extLst>
           </p:cNvPr>
@@ -3565,7 +3565,7 @@
           <p:cNvPr id="10" name="practice-circle-1">
             <a:extLst xmlns:a="http://schemas.openxmlformats.org/drawingml/2006/main">
               <a:ext uri="{FF2B5EF4-FFF2-40B4-BE49-F238E27FC236}">
-                <a16:creationId xmlns:a16="http://schemas.microsoft.com/office/drawing/2014/main" id="{A512BD07-C2E6-424E-A223-A411C39DFE7C}"/>
+                <a16:creationId xmlns:a16="http://schemas.microsoft.com/office/drawing/2014/main" id="{9630AE8D-A648-42FE-9B3F-D35062886C9B}"/>
               </a:ext>
             </a:extLst>
           </p:cNvPr>
@@ -3598,7 +3598,7 @@
           <p:cNvPr id="11" name="practice-number-1">
             <a:extLst xmlns:a="http://schemas.openxmlformats.org/drawingml/2006/main">
               <a:ext uri="{FF2B5EF4-FFF2-40B4-BE49-F238E27FC236}">
-                <a16:creationId xmlns:a16="http://schemas.microsoft.com/office/drawing/2014/main" id="{488B4641-6D02-4441-AE6D-A1D5089E9C15}"/>
+                <a16:creationId xmlns:a16="http://schemas.microsoft.com/office/drawing/2014/main" id="{E3D60D98-DB00-4A4A-B14B-8492230C73F9}"/>
               </a:ext>
             </a:extLst>
           </p:cNvPr>
@@ -3656,7 +3656,7 @@
           <p:cNvPr id="12" name="practice-item-1">
             <a:extLst xmlns:a="http://schemas.openxmlformats.org/drawingml/2006/main">
               <a:ext uri="{FF2B5EF4-FFF2-40B4-BE49-F238E27FC236}">
-                <a16:creationId xmlns:a16="http://schemas.microsoft.com/office/drawing/2014/main" id="{E404B4B3-41F7-4111-9AFD-1B66E0D59569}"/>
+                <a16:creationId xmlns:a16="http://schemas.microsoft.com/office/drawing/2014/main" id="{68600FB8-457D-4E8D-A113-A4B42C34A259}"/>
               </a:ext>
             </a:extLst>
           </p:cNvPr>
@@ -3720,7 +3720,7 @@
           <p:cNvPr id="13" name="practice-connector-1">
             <a:extLst xmlns:a="http://schemas.openxmlformats.org/drawingml/2006/main">
               <a:ext uri="{FF2B5EF4-FFF2-40B4-BE49-F238E27FC236}">
-                <a16:creationId xmlns:a16="http://schemas.microsoft.com/office/drawing/2014/main" id="{31F21779-1FD3-4D25-985F-FC71BE606EEF}"/>
+                <a16:creationId xmlns:a16="http://schemas.microsoft.com/office/drawing/2014/main" id="{E76D10A4-9713-4E4A-B082-C5B24EB1866E}"/>
               </a:ext>
             </a:extLst>
           </p:cNvPr>
@@ -3751,7 +3751,7 @@
           <p:cNvPr id="14" name="practice-circle-2">
             <a:extLst xmlns:a="http://schemas.openxmlformats.org/drawingml/2006/main">
               <a:ext uri="{FF2B5EF4-FFF2-40B4-BE49-F238E27FC236}">
-                <a16:creationId xmlns:a16="http://schemas.microsoft.com/office/drawing/2014/main" id="{A238C429-003A-4E7E-81F4-CC469A49B0BD}"/>
+                <a16:creationId xmlns:a16="http://schemas.microsoft.com/office/drawing/2014/main" id="{CB1B72F4-0034-4E0F-9786-CE10F69AB81F}"/>
               </a:ext>
             </a:extLst>
           </p:cNvPr>
@@ -3784,7 +3784,7 @@
           <p:cNvPr id="15" name="practice-number-2">
             <a:extLst xmlns:a="http://schemas.openxmlformats.org/drawingml/2006/main">
               <a:ext uri="{FF2B5EF4-FFF2-40B4-BE49-F238E27FC236}">
-                <a16:creationId xmlns:a16="http://schemas.microsoft.com/office/drawing/2014/main" id="{40555A57-DE5A-4132-8063-2D56F3EF178F}"/>
+                <a16:creationId xmlns:a16="http://schemas.microsoft.com/office/drawing/2014/main" id="{733ED1EC-1023-41BC-BA13-836309626483}"/>
               </a:ext>
             </a:extLst>
           </p:cNvPr>
@@ -3842,7 +3842,7 @@
           <p:cNvPr id="16" name="practice-item-2">
             <a:extLst xmlns:a="http://schemas.openxmlformats.org/drawingml/2006/main">
               <a:ext uri="{FF2B5EF4-FFF2-40B4-BE49-F238E27FC236}">
-                <a16:creationId xmlns:a16="http://schemas.microsoft.com/office/drawing/2014/main" id="{44E4B866-49B3-4D8A-AAA8-251532D20C64}"/>
+                <a16:creationId xmlns:a16="http://schemas.microsoft.com/office/drawing/2014/main" id="{7D34B33C-298E-433C-928C-D22A983D13B9}"/>
               </a:ext>
             </a:extLst>
           </p:cNvPr>
@@ -3904,7 +3904,7 @@
     </p:spTree>
     <p:extLst>
       <p:ext uri="{BB962C8B-B14F-4D97-AF65-F5344CB8AC3E}">
-        <p14:creationId xmlns:p14="http://schemas.microsoft.com/office/powerpoint/2010/main" val="1055524155"/>
+        <p14:creationId xmlns:p14="http://schemas.microsoft.com/office/powerpoint/2010/main" val="949462445"/>
       </p:ext>
     </p:extLst>
   </p:cSld>
@@ -3935,7 +3935,7 @@
           <p:cNvPr id="1" name="s12-rule">
             <a:extLst xmlns:a="http://schemas.openxmlformats.org/drawingml/2006/main">
               <a:ext uri="{FF2B5EF4-FFF2-40B4-BE49-F238E27FC236}">
-                <a16:creationId xmlns:a16="http://schemas.microsoft.com/office/drawing/2014/main" id="{B89BF93D-6EC4-4896-9F03-9C11D4458095}"/>
+                <a16:creationId xmlns:a16="http://schemas.microsoft.com/office/drawing/2014/main" id="{B36BB0F1-7344-494D-A6B3-71DCEA17D48C}"/>
               </a:ext>
             </a:extLst>
           </p:cNvPr>
@@ -3968,7 +3968,7 @@
           <p:cNvPr id="2" name="s12-eyebrow">
             <a:extLst xmlns:a="http://schemas.openxmlformats.org/drawingml/2006/main">
               <a:ext uri="{FF2B5EF4-FFF2-40B4-BE49-F238E27FC236}">
-                <a16:creationId xmlns:a16="http://schemas.microsoft.com/office/drawing/2014/main" id="{711CF3EB-B234-481D-A81B-E47081AFB977}"/>
+                <a16:creationId xmlns:a16="http://schemas.microsoft.com/office/drawing/2014/main" id="{7BEF0B51-355C-4975-9387-4AB441CC1E83}"/>
               </a:ext>
             </a:extLst>
           </p:cNvPr>
@@ -4026,7 +4026,7 @@
           <p:cNvPr id="3" name="s12-title">
             <a:extLst xmlns:a="http://schemas.openxmlformats.org/drawingml/2006/main">
               <a:ext uri="{FF2B5EF4-FFF2-40B4-BE49-F238E27FC236}">
-                <a16:creationId xmlns:a16="http://schemas.microsoft.com/office/drawing/2014/main" id="{C3E03820-E3E7-4995-A13A-D02A8EDE911B}"/>
+                <a16:creationId xmlns:a16="http://schemas.microsoft.com/office/drawing/2014/main" id="{5C759DF4-B0AB-4514-802A-0E716400C630}"/>
               </a:ext>
             </a:extLst>
           </p:cNvPr>
@@ -4084,7 +4084,7 @@
           <p:cNvPr id="4" name="s12-footer">
             <a:extLst xmlns:a="http://schemas.openxmlformats.org/drawingml/2006/main">
               <a:ext uri="{FF2B5EF4-FFF2-40B4-BE49-F238E27FC236}">
-                <a16:creationId xmlns:a16="http://schemas.microsoft.com/office/drawing/2014/main" id="{1940A635-1E47-4E7C-A303-BA44DC75B86F}"/>
+                <a16:creationId xmlns:a16="http://schemas.microsoft.com/office/drawing/2014/main" id="{8C9AE1B3-8DF5-4195-962D-619B8C03F1F0}"/>
               </a:ext>
             </a:extLst>
           </p:cNvPr>
@@ -4115,7 +4115,7 @@
           <p:cNvPr id="5" name="s12-identity">
             <a:extLst xmlns:a="http://schemas.openxmlformats.org/drawingml/2006/main">
               <a:ext uri="{FF2B5EF4-FFF2-40B4-BE49-F238E27FC236}">
-                <a16:creationId xmlns:a16="http://schemas.microsoft.com/office/drawing/2014/main" id="{8805EAB5-5892-4ECE-B803-4B87282EC46F}"/>
+                <a16:creationId xmlns:a16="http://schemas.microsoft.com/office/drawing/2014/main" id="{A7C8D6D7-1D88-4564-8345-70317F9998D7}"/>
               </a:ext>
             </a:extLst>
           </p:cNvPr>
@@ -4173,7 +4173,7 @@
           <p:cNvPr id="6" name="recap-circle-0">
             <a:extLst xmlns:a="http://schemas.openxmlformats.org/drawingml/2006/main">
               <a:ext uri="{FF2B5EF4-FFF2-40B4-BE49-F238E27FC236}">
-                <a16:creationId xmlns:a16="http://schemas.microsoft.com/office/drawing/2014/main" id="{7B6BD92C-5C04-44DA-94BD-2C6DBBDD1A30}"/>
+                <a16:creationId xmlns:a16="http://schemas.microsoft.com/office/drawing/2014/main" id="{5E87C9AC-36C3-4AB1-A088-1920ED0C51F0}"/>
               </a:ext>
             </a:extLst>
           </p:cNvPr>
@@ -4206,7 +4206,7 @@
           <p:cNvPr id="7" name="recap-number-0">
             <a:extLst xmlns:a="http://schemas.openxmlformats.org/drawingml/2006/main">
               <a:ext uri="{FF2B5EF4-FFF2-40B4-BE49-F238E27FC236}">
-                <a16:creationId xmlns:a16="http://schemas.microsoft.com/office/drawing/2014/main" id="{D1A67BEA-FD74-48FF-8E4A-4A9855FC7C05}"/>
+                <a16:creationId xmlns:a16="http://schemas.microsoft.com/office/drawing/2014/main" id="{8BD3D193-4F8E-4E75-9E6F-977126E23143}"/>
               </a:ext>
             </a:extLst>
           </p:cNvPr>
@@ -4264,7 +4264,7 @@
           <p:cNvPr id="8" name="recap-item-0">
             <a:extLst xmlns:a="http://schemas.openxmlformats.org/drawingml/2006/main">
               <a:ext uri="{FF2B5EF4-FFF2-40B4-BE49-F238E27FC236}">
-                <a16:creationId xmlns:a16="http://schemas.microsoft.com/office/drawing/2014/main" id="{594AE429-A856-452A-85DF-B79674D52D52}"/>
+                <a16:creationId xmlns:a16="http://schemas.microsoft.com/office/drawing/2014/main" id="{AC098690-6782-4C1C-8926-1192AC32D78D}"/>
               </a:ext>
             </a:extLst>
           </p:cNvPr>
@@ -4328,7 +4328,7 @@
           <p:cNvPr id="9" name="recap-connector-0">
             <a:extLst xmlns:a="http://schemas.openxmlformats.org/drawingml/2006/main">
               <a:ext uri="{FF2B5EF4-FFF2-40B4-BE49-F238E27FC236}">
-                <a16:creationId xmlns:a16="http://schemas.microsoft.com/office/drawing/2014/main" id="{84F7970C-E057-4857-B4BC-82FBD1FFC7F4}"/>
+                <a16:creationId xmlns:a16="http://schemas.microsoft.com/office/drawing/2014/main" id="{D6EF948E-BF0B-42A5-86FD-760996DDCA7B}"/>
               </a:ext>
             </a:extLst>
           </p:cNvPr>
@@ -4359,7 +4359,7 @@
           <p:cNvPr id="10" name="recap-circle-1">
             <a:extLst xmlns:a="http://schemas.openxmlformats.org/drawingml/2006/main">
               <a:ext uri="{FF2B5EF4-FFF2-40B4-BE49-F238E27FC236}">
-                <a16:creationId xmlns:a16="http://schemas.microsoft.com/office/drawing/2014/main" id="{950CB2EC-C2AA-439D-AEBE-02A9B7144EBE}"/>
+                <a16:creationId xmlns:a16="http://schemas.microsoft.com/office/drawing/2014/main" id="{76142CEC-2D75-4D19-8A8F-B4BF2C626AB0}"/>
               </a:ext>
             </a:extLst>
           </p:cNvPr>
@@ -4392,7 +4392,7 @@
           <p:cNvPr id="11" name="recap-number-1">
             <a:extLst xmlns:a="http://schemas.openxmlformats.org/drawingml/2006/main">
               <a:ext uri="{FF2B5EF4-FFF2-40B4-BE49-F238E27FC236}">
-                <a16:creationId xmlns:a16="http://schemas.microsoft.com/office/drawing/2014/main" id="{9CAD36F8-4DCE-4F29-8AE6-4FEAC63F5B99}"/>
+                <a16:creationId xmlns:a16="http://schemas.microsoft.com/office/drawing/2014/main" id="{88E39C10-B18C-48DA-9EE6-E4471DB4B9E2}"/>
               </a:ext>
             </a:extLst>
           </p:cNvPr>
@@ -4450,7 +4450,7 @@
           <p:cNvPr id="12" name="recap-item-1">
             <a:extLst xmlns:a="http://schemas.openxmlformats.org/drawingml/2006/main">
               <a:ext uri="{FF2B5EF4-FFF2-40B4-BE49-F238E27FC236}">
-                <a16:creationId xmlns:a16="http://schemas.microsoft.com/office/drawing/2014/main" id="{DF869685-92A4-4455-9322-1AF4DCCB31B3}"/>
+                <a16:creationId xmlns:a16="http://schemas.microsoft.com/office/drawing/2014/main" id="{6728E3EB-7D68-4270-B096-65FF16CEB155}"/>
               </a:ext>
             </a:extLst>
           </p:cNvPr>
@@ -4514,7 +4514,7 @@
           <p:cNvPr id="13" name="recap-connector-1">
             <a:extLst xmlns:a="http://schemas.openxmlformats.org/drawingml/2006/main">
               <a:ext uri="{FF2B5EF4-FFF2-40B4-BE49-F238E27FC236}">
-                <a16:creationId xmlns:a16="http://schemas.microsoft.com/office/drawing/2014/main" id="{12BFA7BA-B570-4934-973D-D2EF1AA034CF}"/>
+                <a16:creationId xmlns:a16="http://schemas.microsoft.com/office/drawing/2014/main" id="{50278E47-C07A-4DEB-9802-D78A2871112B}"/>
               </a:ext>
             </a:extLst>
           </p:cNvPr>
@@ -4545,7 +4545,7 @@
           <p:cNvPr id="14" name="recap-circle-2">
             <a:extLst xmlns:a="http://schemas.openxmlformats.org/drawingml/2006/main">
               <a:ext uri="{FF2B5EF4-FFF2-40B4-BE49-F238E27FC236}">
-                <a16:creationId xmlns:a16="http://schemas.microsoft.com/office/drawing/2014/main" id="{67ADAE38-8F47-4133-BDCD-5E418CC465C9}"/>
+                <a16:creationId xmlns:a16="http://schemas.microsoft.com/office/drawing/2014/main" id="{27021ABE-72ED-4933-AD5F-E50FCD218BF5}"/>
               </a:ext>
             </a:extLst>
           </p:cNvPr>
@@ -4578,7 +4578,7 @@
           <p:cNvPr id="15" name="recap-number-2">
             <a:extLst xmlns:a="http://schemas.openxmlformats.org/drawingml/2006/main">
               <a:ext uri="{FF2B5EF4-FFF2-40B4-BE49-F238E27FC236}">
-                <a16:creationId xmlns:a16="http://schemas.microsoft.com/office/drawing/2014/main" id="{5E012FEE-A9B3-41CE-9CE1-96876EE01020}"/>
+                <a16:creationId xmlns:a16="http://schemas.microsoft.com/office/drawing/2014/main" id="{1B5DA9E6-4D8D-42E6-9384-A71FD10785C9}"/>
               </a:ext>
             </a:extLst>
           </p:cNvPr>
@@ -4636,7 +4636,7 @@
           <p:cNvPr id="16" name="recap-item-2">
             <a:extLst xmlns:a="http://schemas.openxmlformats.org/drawingml/2006/main">
               <a:ext uri="{FF2B5EF4-FFF2-40B4-BE49-F238E27FC236}">
-                <a16:creationId xmlns:a16="http://schemas.microsoft.com/office/drawing/2014/main" id="{164CD4A8-AD0A-4CBC-A940-D99AB4544317}"/>
+                <a16:creationId xmlns:a16="http://schemas.microsoft.com/office/drawing/2014/main" id="{F0B32E5E-4356-465E-9F7E-3E7938C24B46}"/>
               </a:ext>
             </a:extLst>
           </p:cNvPr>
@@ -4698,7 +4698,7 @@
     </p:spTree>
     <p:extLst>
       <p:ext uri="{BB962C8B-B14F-4D97-AF65-F5344CB8AC3E}">
-        <p14:creationId xmlns:p14="http://schemas.microsoft.com/office/powerpoint/2010/main" val="521714611"/>
+        <p14:creationId xmlns:p14="http://schemas.microsoft.com/office/powerpoint/2010/main" val="426299291"/>
       </p:ext>
     </p:extLst>
   </p:cSld>
@@ -4729,7 +4729,7 @@
           <p:cNvPr id="1" name="s13-rule">
             <a:extLst xmlns:a="http://schemas.openxmlformats.org/drawingml/2006/main">
               <a:ext uri="{FF2B5EF4-FFF2-40B4-BE49-F238E27FC236}">
-                <a16:creationId xmlns:a16="http://schemas.microsoft.com/office/drawing/2014/main" id="{C2A561B6-4BA3-47A1-B077-038EF79ADFD7}"/>
+                <a16:creationId xmlns:a16="http://schemas.microsoft.com/office/drawing/2014/main" id="{EB2C2FB6-0295-456B-8DBB-2C37469B43CA}"/>
               </a:ext>
             </a:extLst>
           </p:cNvPr>
@@ -4762,7 +4762,7 @@
           <p:cNvPr id="2" name="s13-eyebrow">
             <a:extLst xmlns:a="http://schemas.openxmlformats.org/drawingml/2006/main">
               <a:ext uri="{FF2B5EF4-FFF2-40B4-BE49-F238E27FC236}">
-                <a16:creationId xmlns:a16="http://schemas.microsoft.com/office/drawing/2014/main" id="{8EE29890-3343-4B4A-98D7-10F6176E4811}"/>
+                <a16:creationId xmlns:a16="http://schemas.microsoft.com/office/drawing/2014/main" id="{5B00B3F1-EB7A-491E-94C4-C37D5AEA7D6F}"/>
               </a:ext>
             </a:extLst>
           </p:cNvPr>
@@ -4820,7 +4820,7 @@
           <p:cNvPr id="3" name="s13-title">
             <a:extLst xmlns:a="http://schemas.openxmlformats.org/drawingml/2006/main">
               <a:ext uri="{FF2B5EF4-FFF2-40B4-BE49-F238E27FC236}">
-                <a16:creationId xmlns:a16="http://schemas.microsoft.com/office/drawing/2014/main" id="{FCF9920D-DA4F-4C24-8A41-FD9C9CDBE1F6}"/>
+                <a16:creationId xmlns:a16="http://schemas.microsoft.com/office/drawing/2014/main" id="{CF1A1D9C-6862-40AD-987C-54C6D1E65765}"/>
               </a:ext>
             </a:extLst>
           </p:cNvPr>
@@ -4878,7 +4878,7 @@
           <p:cNvPr id="4" name="s13-footer">
             <a:extLst xmlns:a="http://schemas.openxmlformats.org/drawingml/2006/main">
               <a:ext uri="{FF2B5EF4-FFF2-40B4-BE49-F238E27FC236}">
-                <a16:creationId xmlns:a16="http://schemas.microsoft.com/office/drawing/2014/main" id="{6181C450-770C-4B46-952D-77540837EA90}"/>
+                <a16:creationId xmlns:a16="http://schemas.microsoft.com/office/drawing/2014/main" id="{6E4C297A-7B8A-48DC-9F61-BEC48ED09F95}"/>
               </a:ext>
             </a:extLst>
           </p:cNvPr>
@@ -4909,7 +4909,7 @@
           <p:cNvPr id="5" name="s13-identity">
             <a:extLst xmlns:a="http://schemas.openxmlformats.org/drawingml/2006/main">
               <a:ext uri="{FF2B5EF4-FFF2-40B4-BE49-F238E27FC236}">
-                <a16:creationId xmlns:a16="http://schemas.microsoft.com/office/drawing/2014/main" id="{5FBFB5B2-92D2-493F-BAE8-34D40387EEE8}"/>
+                <a16:creationId xmlns:a16="http://schemas.microsoft.com/office/drawing/2014/main" id="{F9D15D64-3474-4B64-AF64-42873500521F}"/>
               </a:ext>
             </a:extLst>
           </p:cNvPr>
@@ -4967,7 +4967,7 @@
           <p:cNvPr id="6" name="source-0">
             <a:extLst xmlns:a="http://schemas.openxmlformats.org/drawingml/2006/main">
               <a:ext uri="{FF2B5EF4-FFF2-40B4-BE49-F238E27FC236}">
-                <a16:creationId xmlns:a16="http://schemas.microsoft.com/office/drawing/2014/main" id="{EDC80A9D-60CD-404E-8888-6D326DDC9191}"/>
+                <a16:creationId xmlns:a16="http://schemas.microsoft.com/office/drawing/2014/main" id="{1C4D9CAD-BDFA-4B01-8661-B6B68B40993C}"/>
               </a:ext>
             </a:extLst>
           </p:cNvPr>
@@ -5031,7 +5031,7 @@
           <p:cNvPr id="7" name="source-1">
             <a:extLst xmlns:a="http://schemas.openxmlformats.org/drawingml/2006/main">
               <a:ext uri="{FF2B5EF4-FFF2-40B4-BE49-F238E27FC236}">
-                <a16:creationId xmlns:a16="http://schemas.microsoft.com/office/drawing/2014/main" id="{C4A7F756-4B4A-4A50-8B92-221546459141}"/>
+                <a16:creationId xmlns:a16="http://schemas.microsoft.com/office/drawing/2014/main" id="{1959EF68-4A44-4493-9341-D0EE73BD87EB}"/>
               </a:ext>
             </a:extLst>
           </p:cNvPr>
@@ -5095,7 +5095,7 @@
           <p:cNvPr id="8" name="source-2">
             <a:extLst xmlns:a="http://schemas.openxmlformats.org/drawingml/2006/main">
               <a:ext uri="{FF2B5EF4-FFF2-40B4-BE49-F238E27FC236}">
-                <a16:creationId xmlns:a16="http://schemas.microsoft.com/office/drawing/2014/main" id="{7A52A203-A8BA-4D92-BEC6-063ED40E2A2F}"/>
+                <a16:creationId xmlns:a16="http://schemas.microsoft.com/office/drawing/2014/main" id="{84D294F8-DF78-4ACA-BB57-089145BECA90}"/>
               </a:ext>
             </a:extLst>
           </p:cNvPr>
@@ -5159,7 +5159,7 @@
           <p:cNvPr id="9" name="source-3">
             <a:extLst xmlns:a="http://schemas.openxmlformats.org/drawingml/2006/main">
               <a:ext uri="{FF2B5EF4-FFF2-40B4-BE49-F238E27FC236}">
-                <a16:creationId xmlns:a16="http://schemas.microsoft.com/office/drawing/2014/main" id="{AB89420C-0D5C-46C1-A8F2-8BBE42702B2D}"/>
+                <a16:creationId xmlns:a16="http://schemas.microsoft.com/office/drawing/2014/main" id="{A24EFD4E-9CAC-4E04-AEBD-BEA3C832F816}"/>
               </a:ext>
             </a:extLst>
           </p:cNvPr>
@@ -5223,7 +5223,7 @@
           <p:cNvPr id="10" name="s13-takeaway-rule">
             <a:extLst xmlns:a="http://schemas.openxmlformats.org/drawingml/2006/main">
               <a:ext uri="{FF2B5EF4-FFF2-40B4-BE49-F238E27FC236}">
-                <a16:creationId xmlns:a16="http://schemas.microsoft.com/office/drawing/2014/main" id="{C7F173BC-8D29-4B62-BF0D-065232D70ED6}"/>
+                <a16:creationId xmlns:a16="http://schemas.microsoft.com/office/drawing/2014/main" id="{33BA89FA-03B5-4647-866E-4AC7BEC3F4F3}"/>
               </a:ext>
             </a:extLst>
           </p:cNvPr>
@@ -5256,7 +5256,7 @@
           <p:cNvPr id="11" name="s13-takeaway">
             <a:extLst xmlns:a="http://schemas.openxmlformats.org/drawingml/2006/main">
               <a:ext uri="{FF2B5EF4-FFF2-40B4-BE49-F238E27FC236}">
-                <a16:creationId xmlns:a16="http://schemas.microsoft.com/office/drawing/2014/main" id="{0EE4AAD2-79D2-4733-BEF8-5201852B8E2B}"/>
+                <a16:creationId xmlns:a16="http://schemas.microsoft.com/office/drawing/2014/main" id="{36EF36DA-427C-49FF-A2E8-BA7344863923}"/>
               </a:ext>
             </a:extLst>
           </p:cNvPr>
@@ -5281,7 +5281,7 @@
         </p:spPr>
         <p:txBody>
           <a:bodyPr xmlns:a="http://schemas.openxmlformats.org/drawingml/2006/main" lIns="0" tIns="0" rIns="0" bIns="0" anchor="ctr">
-            <a:normAutofit fontScale="95911"/>
+            <a:normAutofit fontScale="100000"/>
           </a:bodyPr>
           <a:lstStyle xmlns:a="http://schemas.openxmlformats.org/drawingml/2006/main"/>
           <a:p xmlns:a="http://schemas.openxmlformats.org/drawingml/2006/main">
@@ -5304,7 +5304,7 @@
                 <a:ea typeface="PingFang SC"/>
                 <a:cs typeface="PingFang SC"/>
               </a:rPr>
-              <a:t>课程精编页用于讲授主线；播放器中的“原课件”模式保留团队 PowerPoint 精选页、真实图片和可播放视频。</a:t>
+              <a:t>课程正文与幻灯片共享同一知识主线，图片和视频用于帮助理解本节概念与案例。</a:t>
             </a:r>
           </a:p>
         </p:txBody>
@@ -5312,7 +5312,7 @@
     </p:spTree>
     <p:extLst>
       <p:ext uri="{BB962C8B-B14F-4D97-AF65-F5344CB8AC3E}">
-        <p14:creationId xmlns:p14="http://schemas.microsoft.com/office/powerpoint/2010/main" val="538842492"/>
+        <p14:creationId xmlns:p14="http://schemas.microsoft.com/office/powerpoint/2010/main" val="27875905"/>
       </p:ext>
     </p:extLst>
   </p:cSld>
@@ -5343,7 +5343,7 @@
           <p:cNvPr id="1" name="s2-rule">
             <a:extLst xmlns:a="http://schemas.openxmlformats.org/drawingml/2006/main">
               <a:ext uri="{FF2B5EF4-FFF2-40B4-BE49-F238E27FC236}">
-                <a16:creationId xmlns:a16="http://schemas.microsoft.com/office/drawing/2014/main" id="{0548851F-A81D-462B-8F09-A561A4757A88}"/>
+                <a16:creationId xmlns:a16="http://schemas.microsoft.com/office/drawing/2014/main" id="{1BE68B46-53B0-4899-875F-46A490FA44B2}"/>
               </a:ext>
             </a:extLst>
           </p:cNvPr>
@@ -5376,7 +5376,7 @@
           <p:cNvPr id="2" name="s2-eyebrow">
             <a:extLst xmlns:a="http://schemas.openxmlformats.org/drawingml/2006/main">
               <a:ext uri="{FF2B5EF4-FFF2-40B4-BE49-F238E27FC236}">
-                <a16:creationId xmlns:a16="http://schemas.microsoft.com/office/drawing/2014/main" id="{8D8C21DA-683A-4507-B9F4-758B037653DC}"/>
+                <a16:creationId xmlns:a16="http://schemas.microsoft.com/office/drawing/2014/main" id="{42495ED0-AC8B-47F1-8D9D-0FB299FCA519}"/>
               </a:ext>
             </a:extLst>
           </p:cNvPr>
@@ -5434,7 +5434,7 @@
           <p:cNvPr id="3" name="s2-title">
             <a:extLst xmlns:a="http://schemas.openxmlformats.org/drawingml/2006/main">
               <a:ext uri="{FF2B5EF4-FFF2-40B4-BE49-F238E27FC236}">
-                <a16:creationId xmlns:a16="http://schemas.microsoft.com/office/drawing/2014/main" id="{322CAA00-8655-4DE5-8766-BBE6586C81BC}"/>
+                <a16:creationId xmlns:a16="http://schemas.microsoft.com/office/drawing/2014/main" id="{16164DED-8713-4519-85C8-899462E67BC9}"/>
               </a:ext>
             </a:extLst>
           </p:cNvPr>
@@ -5492,7 +5492,7 @@
           <p:cNvPr id="4" name="s2-footer">
             <a:extLst xmlns:a="http://schemas.openxmlformats.org/drawingml/2006/main">
               <a:ext uri="{FF2B5EF4-FFF2-40B4-BE49-F238E27FC236}">
-                <a16:creationId xmlns:a16="http://schemas.microsoft.com/office/drawing/2014/main" id="{6194E8AC-4D86-44CF-97F4-C2E23CCD4FC2}"/>
+                <a16:creationId xmlns:a16="http://schemas.microsoft.com/office/drawing/2014/main" id="{20E379F0-79CF-4FC3-AC04-D80B1D90430C}"/>
               </a:ext>
             </a:extLst>
           </p:cNvPr>
@@ -5523,7 +5523,7 @@
           <p:cNvPr id="5" name="s2-identity">
             <a:extLst xmlns:a="http://schemas.openxmlformats.org/drawingml/2006/main">
               <a:ext uri="{FF2B5EF4-FFF2-40B4-BE49-F238E27FC236}">
-                <a16:creationId xmlns:a16="http://schemas.microsoft.com/office/drawing/2014/main" id="{A23FE737-4704-4D32-92FD-0DE7F2590DC2}"/>
+                <a16:creationId xmlns:a16="http://schemas.microsoft.com/office/drawing/2014/main" id="{4F662053-AC63-42D3-92A0-552DBEBCE5F1}"/>
               </a:ext>
             </a:extLst>
           </p:cNvPr>
@@ -5581,7 +5581,7 @@
           <p:cNvPr id="6" name="objective-1">
             <a:extLst xmlns:a="http://schemas.openxmlformats.org/drawingml/2006/main">
               <a:ext uri="{FF2B5EF4-FFF2-40B4-BE49-F238E27FC236}">
-                <a16:creationId xmlns:a16="http://schemas.microsoft.com/office/drawing/2014/main" id="{487830A9-45B9-4E40-9150-778D81CB9F7E}"/>
+                <a16:creationId xmlns:a16="http://schemas.microsoft.com/office/drawing/2014/main" id="{7F51D5CD-385D-49A8-B367-534CB373543B}"/>
               </a:ext>
             </a:extLst>
           </p:cNvPr>
@@ -5668,7 +5668,7 @@
           <p:cNvPr id="7" name="objective-2">
             <a:extLst xmlns:a="http://schemas.openxmlformats.org/drawingml/2006/main">
               <a:ext uri="{FF2B5EF4-FFF2-40B4-BE49-F238E27FC236}">
-                <a16:creationId xmlns:a16="http://schemas.microsoft.com/office/drawing/2014/main" id="{19C328BC-ECBC-453A-A57E-BE618435B6DE}"/>
+                <a16:creationId xmlns:a16="http://schemas.microsoft.com/office/drawing/2014/main" id="{88B9B1D8-0161-47F5-BAD8-92419F49FD2A}"/>
               </a:ext>
             </a:extLst>
           </p:cNvPr>
@@ -5755,7 +5755,7 @@
           <p:cNvPr id="8" name="objective-3">
             <a:extLst xmlns:a="http://schemas.openxmlformats.org/drawingml/2006/main">
               <a:ext uri="{FF2B5EF4-FFF2-40B4-BE49-F238E27FC236}">
-                <a16:creationId xmlns:a16="http://schemas.microsoft.com/office/drawing/2014/main" id="{9E7F9E6D-1865-4D45-85BF-8BA39E43548C}"/>
+                <a16:creationId xmlns:a16="http://schemas.microsoft.com/office/drawing/2014/main" id="{5FE7CDA5-B643-4C4F-9FD6-2AC989222853}"/>
               </a:ext>
             </a:extLst>
           </p:cNvPr>
@@ -5842,7 +5842,7 @@
           <p:cNvPr id="9" name="objective-4">
             <a:extLst xmlns:a="http://schemas.openxmlformats.org/drawingml/2006/main">
               <a:ext uri="{FF2B5EF4-FFF2-40B4-BE49-F238E27FC236}">
-                <a16:creationId xmlns:a16="http://schemas.microsoft.com/office/drawing/2014/main" id="{577F1869-983D-4B80-B768-334972AE9DFD}"/>
+                <a16:creationId xmlns:a16="http://schemas.microsoft.com/office/drawing/2014/main" id="{8AAA7B31-90EB-4B03-84A1-88C6C765B237}"/>
               </a:ext>
             </a:extLst>
           </p:cNvPr>
@@ -5927,7 +5927,7 @@
     </p:spTree>
     <p:extLst>
       <p:ext uri="{BB962C8B-B14F-4D97-AF65-F5344CB8AC3E}">
-        <p14:creationId xmlns:p14="http://schemas.microsoft.com/office/powerpoint/2010/main" val="975319337"/>
+        <p14:creationId xmlns:p14="http://schemas.microsoft.com/office/powerpoint/2010/main" val="1366578969"/>
       </p:ext>
     </p:extLst>
   </p:cSld>
@@ -5958,7 +5958,7 @@
           <p:cNvPr id="1" name="s3-rule">
             <a:extLst xmlns:a="http://schemas.openxmlformats.org/drawingml/2006/main">
               <a:ext uri="{FF2B5EF4-FFF2-40B4-BE49-F238E27FC236}">
-                <a16:creationId xmlns:a16="http://schemas.microsoft.com/office/drawing/2014/main" id="{89F78DCB-564A-4396-9242-B713FD0D2A47}"/>
+                <a16:creationId xmlns:a16="http://schemas.microsoft.com/office/drawing/2014/main" id="{CA3D6A27-2D97-4D87-B3D8-FE199BD2923A}"/>
               </a:ext>
             </a:extLst>
           </p:cNvPr>
@@ -5991,7 +5991,7 @@
           <p:cNvPr id="2" name="s3-eyebrow">
             <a:extLst xmlns:a="http://schemas.openxmlformats.org/drawingml/2006/main">
               <a:ext uri="{FF2B5EF4-FFF2-40B4-BE49-F238E27FC236}">
-                <a16:creationId xmlns:a16="http://schemas.microsoft.com/office/drawing/2014/main" id="{08688BBA-9211-4049-B061-BA509FAA6665}"/>
+                <a16:creationId xmlns:a16="http://schemas.microsoft.com/office/drawing/2014/main" id="{9D9DF124-E7AA-4DE0-85C6-81B24CD7D59E}"/>
               </a:ext>
             </a:extLst>
           </p:cNvPr>
@@ -6049,7 +6049,7 @@
           <p:cNvPr id="3" name="s3-title">
             <a:extLst xmlns:a="http://schemas.openxmlformats.org/drawingml/2006/main">
               <a:ext uri="{FF2B5EF4-FFF2-40B4-BE49-F238E27FC236}">
-                <a16:creationId xmlns:a16="http://schemas.microsoft.com/office/drawing/2014/main" id="{7600D2D2-9274-466A-B071-FA6DC461EB12}"/>
+                <a16:creationId xmlns:a16="http://schemas.microsoft.com/office/drawing/2014/main" id="{81D1BAAA-D9E0-4505-BC3F-619DB19BD943}"/>
               </a:ext>
             </a:extLst>
           </p:cNvPr>
@@ -6107,7 +6107,7 @@
           <p:cNvPr id="4" name="s3-footer">
             <a:extLst xmlns:a="http://schemas.openxmlformats.org/drawingml/2006/main">
               <a:ext uri="{FF2B5EF4-FFF2-40B4-BE49-F238E27FC236}">
-                <a16:creationId xmlns:a16="http://schemas.microsoft.com/office/drawing/2014/main" id="{D27FC8C7-E00B-4AFF-B7B2-704A77E88DA9}"/>
+                <a16:creationId xmlns:a16="http://schemas.microsoft.com/office/drawing/2014/main" id="{8979810F-CA03-4A97-8912-BF05A4A847DC}"/>
               </a:ext>
             </a:extLst>
           </p:cNvPr>
@@ -6138,7 +6138,7 @@
           <p:cNvPr id="5" name="s3-identity">
             <a:extLst xmlns:a="http://schemas.openxmlformats.org/drawingml/2006/main">
               <a:ext uri="{FF2B5EF4-FFF2-40B4-BE49-F238E27FC236}">
-                <a16:creationId xmlns:a16="http://schemas.microsoft.com/office/drawing/2014/main" id="{120B0B7F-6C3C-4C28-950A-2FDEAC9FC685}"/>
+                <a16:creationId xmlns:a16="http://schemas.microsoft.com/office/drawing/2014/main" id="{518BDF61-7B59-48F2-A3D6-98D5A19045FF}"/>
               </a:ext>
             </a:extLst>
           </p:cNvPr>
@@ -6196,7 +6196,7 @@
           <p:cNvPr id="6" name="core-no-0">
             <a:extLst xmlns:a="http://schemas.openxmlformats.org/drawingml/2006/main">
               <a:ext uri="{FF2B5EF4-FFF2-40B4-BE49-F238E27FC236}">
-                <a16:creationId xmlns:a16="http://schemas.microsoft.com/office/drawing/2014/main" id="{968980C1-FB68-4CE0-9C20-DC8A225021AF}"/>
+                <a16:creationId xmlns:a16="http://schemas.microsoft.com/office/drawing/2014/main" id="{063A6D1E-79CA-48D9-9C01-4F289E8A9964}"/>
               </a:ext>
             </a:extLst>
           </p:cNvPr>
@@ -6254,7 +6254,7 @@
           <p:cNvPr id="7" name="core-label-0">
             <a:extLst xmlns:a="http://schemas.openxmlformats.org/drawingml/2006/main">
               <a:ext uri="{FF2B5EF4-FFF2-40B4-BE49-F238E27FC236}">
-                <a16:creationId xmlns:a16="http://schemas.microsoft.com/office/drawing/2014/main" id="{6A8C401A-63FE-49B4-BD4F-3E60845AF634}"/>
+                <a16:creationId xmlns:a16="http://schemas.microsoft.com/office/drawing/2014/main" id="{FBE62E64-A43B-4EA0-85B2-F77AC6D692B2}"/>
               </a:ext>
             </a:extLst>
           </p:cNvPr>
@@ -6312,7 +6312,7 @@
           <p:cNvPr id="8" name="core-body-0">
             <a:extLst xmlns:a="http://schemas.openxmlformats.org/drawingml/2006/main">
               <a:ext uri="{FF2B5EF4-FFF2-40B4-BE49-F238E27FC236}">
-                <a16:creationId xmlns:a16="http://schemas.microsoft.com/office/drawing/2014/main" id="{8DC69874-13DB-453B-BAAB-30E56F1F0FB1}"/>
+                <a16:creationId xmlns:a16="http://schemas.microsoft.com/office/drawing/2014/main" id="{EF616B08-A092-49C8-957E-202D1BA75308}"/>
               </a:ext>
             </a:extLst>
           </p:cNvPr>
@@ -6376,7 +6376,7 @@
           <p:cNvPr id="9" name="core-no-1">
             <a:extLst xmlns:a="http://schemas.openxmlformats.org/drawingml/2006/main">
               <a:ext uri="{FF2B5EF4-FFF2-40B4-BE49-F238E27FC236}">
-                <a16:creationId xmlns:a16="http://schemas.microsoft.com/office/drawing/2014/main" id="{3641169C-D30E-4705-8C97-C180E9A55A8E}"/>
+                <a16:creationId xmlns:a16="http://schemas.microsoft.com/office/drawing/2014/main" id="{025584AE-0028-4B13-A133-9802C5C64CAE}"/>
               </a:ext>
             </a:extLst>
           </p:cNvPr>
@@ -6434,7 +6434,7 @@
           <p:cNvPr id="10" name="core-body-1">
             <a:extLst xmlns:a="http://schemas.openxmlformats.org/drawingml/2006/main">
               <a:ext uri="{FF2B5EF4-FFF2-40B4-BE49-F238E27FC236}">
-                <a16:creationId xmlns:a16="http://schemas.microsoft.com/office/drawing/2014/main" id="{E4878E2A-D166-4F60-81EC-25BBA31DF32C}"/>
+                <a16:creationId xmlns:a16="http://schemas.microsoft.com/office/drawing/2014/main" id="{E950416E-B863-4DE7-885D-1F261C77E144}"/>
               </a:ext>
             </a:extLst>
           </p:cNvPr>
@@ -6498,7 +6498,7 @@
           <p:cNvPr id="11" name="s3-takeaway-rule">
             <a:extLst xmlns:a="http://schemas.openxmlformats.org/drawingml/2006/main">
               <a:ext uri="{FF2B5EF4-FFF2-40B4-BE49-F238E27FC236}">
-                <a16:creationId xmlns:a16="http://schemas.microsoft.com/office/drawing/2014/main" id="{0610A459-8F0F-4C36-B5D6-777C46885DA8}"/>
+                <a16:creationId xmlns:a16="http://schemas.microsoft.com/office/drawing/2014/main" id="{4C4CEA0E-DD25-4112-ACB3-C01D8E0F0832}"/>
               </a:ext>
             </a:extLst>
           </p:cNvPr>
@@ -6531,7 +6531,7 @@
           <p:cNvPr id="12" name="s3-takeaway">
             <a:extLst xmlns:a="http://schemas.openxmlformats.org/drawingml/2006/main">
               <a:ext uri="{FF2B5EF4-FFF2-40B4-BE49-F238E27FC236}">
-                <a16:creationId xmlns:a16="http://schemas.microsoft.com/office/drawing/2014/main" id="{7BA5144C-F0D0-49BC-8C79-10498594073F}"/>
+                <a16:creationId xmlns:a16="http://schemas.microsoft.com/office/drawing/2014/main" id="{1E94E9A8-F687-441F-8D1E-DFFD5CE0C556}"/>
               </a:ext>
             </a:extLst>
           </p:cNvPr>
@@ -6587,7 +6587,7 @@
     </p:spTree>
     <p:extLst>
       <p:ext uri="{BB962C8B-B14F-4D97-AF65-F5344CB8AC3E}">
-        <p14:creationId xmlns:p14="http://schemas.microsoft.com/office/powerpoint/2010/main" val="2141806245"/>
+        <p14:creationId xmlns:p14="http://schemas.microsoft.com/office/powerpoint/2010/main" val="1892918928"/>
       </p:ext>
     </p:extLst>
   </p:cSld>
@@ -6618,7 +6618,7 @@
           <p:cNvPr id="1" name="s4-rule">
             <a:extLst xmlns:a="http://schemas.openxmlformats.org/drawingml/2006/main">
               <a:ext uri="{FF2B5EF4-FFF2-40B4-BE49-F238E27FC236}">
-                <a16:creationId xmlns:a16="http://schemas.microsoft.com/office/drawing/2014/main" id="{1DEB1145-1CBF-4F38-82CF-5FFB750405EC}"/>
+                <a16:creationId xmlns:a16="http://schemas.microsoft.com/office/drawing/2014/main" id="{9D299747-48D2-429B-9523-92F3A45FEBF2}"/>
               </a:ext>
             </a:extLst>
           </p:cNvPr>
@@ -6651,7 +6651,7 @@
           <p:cNvPr id="2" name="s4-eyebrow">
             <a:extLst xmlns:a="http://schemas.openxmlformats.org/drawingml/2006/main">
               <a:ext uri="{FF2B5EF4-FFF2-40B4-BE49-F238E27FC236}">
-                <a16:creationId xmlns:a16="http://schemas.microsoft.com/office/drawing/2014/main" id="{6D209EF8-9405-47BE-A7E6-B84919D62456}"/>
+                <a16:creationId xmlns:a16="http://schemas.microsoft.com/office/drawing/2014/main" id="{B43F170E-9FC5-4C3F-B230-B4B356BFDBED}"/>
               </a:ext>
             </a:extLst>
           </p:cNvPr>
@@ -6709,7 +6709,7 @@
           <p:cNvPr id="3" name="s4-title">
             <a:extLst xmlns:a="http://schemas.openxmlformats.org/drawingml/2006/main">
               <a:ext uri="{FF2B5EF4-FFF2-40B4-BE49-F238E27FC236}">
-                <a16:creationId xmlns:a16="http://schemas.microsoft.com/office/drawing/2014/main" id="{5F38D56F-7D0A-4FB2-BB1F-18666D7731C5}"/>
+                <a16:creationId xmlns:a16="http://schemas.microsoft.com/office/drawing/2014/main" id="{95DF9E81-7F9E-40FA-A806-99A70AE2A3A9}"/>
               </a:ext>
             </a:extLst>
           </p:cNvPr>
@@ -6767,7 +6767,7 @@
           <p:cNvPr id="4" name="s4-footer">
             <a:extLst xmlns:a="http://schemas.openxmlformats.org/drawingml/2006/main">
               <a:ext uri="{FF2B5EF4-FFF2-40B4-BE49-F238E27FC236}">
-                <a16:creationId xmlns:a16="http://schemas.microsoft.com/office/drawing/2014/main" id="{8F5F8684-621F-4D89-A3D6-05B04082A274}"/>
+                <a16:creationId xmlns:a16="http://schemas.microsoft.com/office/drawing/2014/main" id="{246C7613-C38A-41A7-AC69-B5962CB168F9}"/>
               </a:ext>
             </a:extLst>
           </p:cNvPr>
@@ -6798,7 +6798,7 @@
           <p:cNvPr id="5" name="s4-identity">
             <a:extLst xmlns:a="http://schemas.openxmlformats.org/drawingml/2006/main">
               <a:ext uri="{FF2B5EF4-FFF2-40B4-BE49-F238E27FC236}">
-                <a16:creationId xmlns:a16="http://schemas.microsoft.com/office/drawing/2014/main" id="{4FD12D06-A64E-448A-B1C9-EB44440651EB}"/>
+                <a16:creationId xmlns:a16="http://schemas.microsoft.com/office/drawing/2014/main" id="{B7A6EFFE-781A-4C27-8BC0-C101F1188BC3}"/>
               </a:ext>
             </a:extLst>
           </p:cNvPr>
@@ -6856,7 +6856,7 @@
           <p:cNvPr id="6" name="core-no-0">
             <a:extLst xmlns:a="http://schemas.openxmlformats.org/drawingml/2006/main">
               <a:ext uri="{FF2B5EF4-FFF2-40B4-BE49-F238E27FC236}">
-                <a16:creationId xmlns:a16="http://schemas.microsoft.com/office/drawing/2014/main" id="{4FB5C7AE-9A28-40AB-9774-4CE41B2FBAE3}"/>
+                <a16:creationId xmlns:a16="http://schemas.microsoft.com/office/drawing/2014/main" id="{ABB3E222-21EA-4174-9F03-E29B3A519A4A}"/>
               </a:ext>
             </a:extLst>
           </p:cNvPr>
@@ -6914,7 +6914,7 @@
           <p:cNvPr id="7" name="core-label-0">
             <a:extLst xmlns:a="http://schemas.openxmlformats.org/drawingml/2006/main">
               <a:ext uri="{FF2B5EF4-FFF2-40B4-BE49-F238E27FC236}">
-                <a16:creationId xmlns:a16="http://schemas.microsoft.com/office/drawing/2014/main" id="{02BDB138-1812-4B26-9A1F-B7FBFCD00A00}"/>
+                <a16:creationId xmlns:a16="http://schemas.microsoft.com/office/drawing/2014/main" id="{4204E8C7-2C89-4587-9A23-094BBD803FB8}"/>
               </a:ext>
             </a:extLst>
           </p:cNvPr>
@@ -6972,7 +6972,7 @@
           <p:cNvPr id="8" name="core-body-0">
             <a:extLst xmlns:a="http://schemas.openxmlformats.org/drawingml/2006/main">
               <a:ext uri="{FF2B5EF4-FFF2-40B4-BE49-F238E27FC236}">
-                <a16:creationId xmlns:a16="http://schemas.microsoft.com/office/drawing/2014/main" id="{68E58914-787F-4234-B3E5-D00DEC44690C}"/>
+                <a16:creationId xmlns:a16="http://schemas.microsoft.com/office/drawing/2014/main" id="{483BBAC7-A663-4AC1-B10C-036946BA12B2}"/>
               </a:ext>
             </a:extLst>
           </p:cNvPr>
@@ -7036,7 +7036,7 @@
           <p:cNvPr id="9" name="core-no-1">
             <a:extLst xmlns:a="http://schemas.openxmlformats.org/drawingml/2006/main">
               <a:ext uri="{FF2B5EF4-FFF2-40B4-BE49-F238E27FC236}">
-                <a16:creationId xmlns:a16="http://schemas.microsoft.com/office/drawing/2014/main" id="{E469A710-9B6A-4999-AAE3-3941D7EABFDE}"/>
+                <a16:creationId xmlns:a16="http://schemas.microsoft.com/office/drawing/2014/main" id="{2CFCAC34-5E55-4AAC-843B-94A9079E4384}"/>
               </a:ext>
             </a:extLst>
           </p:cNvPr>
@@ -7094,7 +7094,7 @@
           <p:cNvPr id="10" name="core-body-1">
             <a:extLst xmlns:a="http://schemas.openxmlformats.org/drawingml/2006/main">
               <a:ext uri="{FF2B5EF4-FFF2-40B4-BE49-F238E27FC236}">
-                <a16:creationId xmlns:a16="http://schemas.microsoft.com/office/drawing/2014/main" id="{1EDD4959-9551-472F-AD03-CBDB63649224}"/>
+                <a16:creationId xmlns:a16="http://schemas.microsoft.com/office/drawing/2014/main" id="{998B2453-DF95-4031-9ED2-680AB91410B8}"/>
               </a:ext>
             </a:extLst>
           </p:cNvPr>
@@ -7158,7 +7158,7 @@
           <p:cNvPr id="11" name="s4-takeaway-rule">
             <a:extLst xmlns:a="http://schemas.openxmlformats.org/drawingml/2006/main">
               <a:ext uri="{FF2B5EF4-FFF2-40B4-BE49-F238E27FC236}">
-                <a16:creationId xmlns:a16="http://schemas.microsoft.com/office/drawing/2014/main" id="{E9A55846-AE6B-412B-99E4-AA244382423B}"/>
+                <a16:creationId xmlns:a16="http://schemas.microsoft.com/office/drawing/2014/main" id="{AD2CA505-55FF-4143-9F64-5B560EAC3DD7}"/>
               </a:ext>
             </a:extLst>
           </p:cNvPr>
@@ -7191,7 +7191,7 @@
           <p:cNvPr id="12" name="s4-takeaway">
             <a:extLst xmlns:a="http://schemas.openxmlformats.org/drawingml/2006/main">
               <a:ext uri="{FF2B5EF4-FFF2-40B4-BE49-F238E27FC236}">
-                <a16:creationId xmlns:a16="http://schemas.microsoft.com/office/drawing/2014/main" id="{1B1E0C4A-DDEA-4022-8E0D-227257BEF2E2}"/>
+                <a16:creationId xmlns:a16="http://schemas.microsoft.com/office/drawing/2014/main" id="{2770DB7E-9D4B-4228-BC3C-DE8B374254E8}"/>
               </a:ext>
             </a:extLst>
           </p:cNvPr>
@@ -7247,7 +7247,7 @@
     </p:spTree>
     <p:extLst>
       <p:ext uri="{BB962C8B-B14F-4D97-AF65-F5344CB8AC3E}">
-        <p14:creationId xmlns:p14="http://schemas.microsoft.com/office/powerpoint/2010/main" val="98935678"/>
+        <p14:creationId xmlns:p14="http://schemas.microsoft.com/office/powerpoint/2010/main" val="1679571833"/>
       </p:ext>
     </p:extLst>
   </p:cSld>
@@ -7278,7 +7278,7 @@
           <p:cNvPr id="1" name="s5-rule">
             <a:extLst xmlns:a="http://schemas.openxmlformats.org/drawingml/2006/main">
               <a:ext uri="{FF2B5EF4-FFF2-40B4-BE49-F238E27FC236}">
-                <a16:creationId xmlns:a16="http://schemas.microsoft.com/office/drawing/2014/main" id="{D3DC6940-E4D9-4561-90E2-7C3FCB127B4F}"/>
+                <a16:creationId xmlns:a16="http://schemas.microsoft.com/office/drawing/2014/main" id="{A886AD6E-0D94-4564-932F-F5909CAEE7E8}"/>
               </a:ext>
             </a:extLst>
           </p:cNvPr>
@@ -7311,7 +7311,7 @@
           <p:cNvPr id="2" name="s5-eyebrow">
             <a:extLst xmlns:a="http://schemas.openxmlformats.org/drawingml/2006/main">
               <a:ext uri="{FF2B5EF4-FFF2-40B4-BE49-F238E27FC236}">
-                <a16:creationId xmlns:a16="http://schemas.microsoft.com/office/drawing/2014/main" id="{384E1A62-1CB6-47B6-9EC3-5F534D336730}"/>
+                <a16:creationId xmlns:a16="http://schemas.microsoft.com/office/drawing/2014/main" id="{D621F3A1-D6FF-426C-8FF9-A65AB7F5128B}"/>
               </a:ext>
             </a:extLst>
           </p:cNvPr>
@@ -7369,7 +7369,7 @@
           <p:cNvPr id="3" name="s5-title">
             <a:extLst xmlns:a="http://schemas.openxmlformats.org/drawingml/2006/main">
               <a:ext uri="{FF2B5EF4-FFF2-40B4-BE49-F238E27FC236}">
-                <a16:creationId xmlns:a16="http://schemas.microsoft.com/office/drawing/2014/main" id="{90BFA100-EF06-40C5-AAC4-E335CCC13A23}"/>
+                <a16:creationId xmlns:a16="http://schemas.microsoft.com/office/drawing/2014/main" id="{4183B708-39A9-414E-9EC6-5771D1DB5A53}"/>
               </a:ext>
             </a:extLst>
           </p:cNvPr>
@@ -7427,7 +7427,7 @@
           <p:cNvPr id="4" name="s5-footer">
             <a:extLst xmlns:a="http://schemas.openxmlformats.org/drawingml/2006/main">
               <a:ext uri="{FF2B5EF4-FFF2-40B4-BE49-F238E27FC236}">
-                <a16:creationId xmlns:a16="http://schemas.microsoft.com/office/drawing/2014/main" id="{652C903B-5B3C-4A02-846E-8DF7A97CE89A}"/>
+                <a16:creationId xmlns:a16="http://schemas.microsoft.com/office/drawing/2014/main" id="{606FAB4F-50DC-41C7-945D-264BB0D5C48D}"/>
               </a:ext>
             </a:extLst>
           </p:cNvPr>
@@ -7458,7 +7458,7 @@
           <p:cNvPr id="5" name="s5-identity">
             <a:extLst xmlns:a="http://schemas.openxmlformats.org/drawingml/2006/main">
               <a:ext uri="{FF2B5EF4-FFF2-40B4-BE49-F238E27FC236}">
-                <a16:creationId xmlns:a16="http://schemas.microsoft.com/office/drawing/2014/main" id="{BBFE3492-78BF-464A-81F3-EAFD66837AB5}"/>
+                <a16:creationId xmlns:a16="http://schemas.microsoft.com/office/drawing/2014/main" id="{1A1FE06F-BF32-4F1B-A4D5-2968EC130AE1}"/>
               </a:ext>
             </a:extLst>
           </p:cNvPr>
@@ -7516,7 +7516,7 @@
           <p:cNvPr id="6" name="core-no-0">
             <a:extLst xmlns:a="http://schemas.openxmlformats.org/drawingml/2006/main">
               <a:ext uri="{FF2B5EF4-FFF2-40B4-BE49-F238E27FC236}">
-                <a16:creationId xmlns:a16="http://schemas.microsoft.com/office/drawing/2014/main" id="{57036919-DAC7-4E59-9804-D3BEB7837FB5}"/>
+                <a16:creationId xmlns:a16="http://schemas.microsoft.com/office/drawing/2014/main" id="{FB68294E-4A71-498D-929F-1FDA4F77217F}"/>
               </a:ext>
             </a:extLst>
           </p:cNvPr>
@@ -7574,7 +7574,7 @@
           <p:cNvPr id="7" name="core-label-0">
             <a:extLst xmlns:a="http://schemas.openxmlformats.org/drawingml/2006/main">
               <a:ext uri="{FF2B5EF4-FFF2-40B4-BE49-F238E27FC236}">
-                <a16:creationId xmlns:a16="http://schemas.microsoft.com/office/drawing/2014/main" id="{8B7DECCD-8B5B-460F-B50B-EAC9DC5FF6E3}"/>
+                <a16:creationId xmlns:a16="http://schemas.microsoft.com/office/drawing/2014/main" id="{3755A89F-C7A5-4A3E-9276-B7E1CF61B7F1}"/>
               </a:ext>
             </a:extLst>
           </p:cNvPr>
@@ -7632,7 +7632,7 @@
           <p:cNvPr id="8" name="core-body-0">
             <a:extLst xmlns:a="http://schemas.openxmlformats.org/drawingml/2006/main">
               <a:ext uri="{FF2B5EF4-FFF2-40B4-BE49-F238E27FC236}">
-                <a16:creationId xmlns:a16="http://schemas.microsoft.com/office/drawing/2014/main" id="{E8E77A50-7373-4DD9-A2A4-D635C9284398}"/>
+                <a16:creationId xmlns:a16="http://schemas.microsoft.com/office/drawing/2014/main" id="{BDCE9A39-9BCA-4AEB-A317-423C506A35FD}"/>
               </a:ext>
             </a:extLst>
           </p:cNvPr>
@@ -7696,7 +7696,7 @@
           <p:cNvPr id="9" name="core-no-1">
             <a:extLst xmlns:a="http://schemas.openxmlformats.org/drawingml/2006/main">
               <a:ext uri="{FF2B5EF4-FFF2-40B4-BE49-F238E27FC236}">
-                <a16:creationId xmlns:a16="http://schemas.microsoft.com/office/drawing/2014/main" id="{4594FB73-CB24-44E9-93CF-3E4B21F60406}"/>
+                <a16:creationId xmlns:a16="http://schemas.microsoft.com/office/drawing/2014/main" id="{B57BB263-EB5F-4C9B-B2DE-81196F703AAA}"/>
               </a:ext>
             </a:extLst>
           </p:cNvPr>
@@ -7754,7 +7754,7 @@
           <p:cNvPr id="10" name="core-body-1">
             <a:extLst xmlns:a="http://schemas.openxmlformats.org/drawingml/2006/main">
               <a:ext uri="{FF2B5EF4-FFF2-40B4-BE49-F238E27FC236}">
-                <a16:creationId xmlns:a16="http://schemas.microsoft.com/office/drawing/2014/main" id="{D330C9B7-CF30-490D-A782-4D6A7F449DA7}"/>
+                <a16:creationId xmlns:a16="http://schemas.microsoft.com/office/drawing/2014/main" id="{F38EFE0A-F8D9-42D9-B040-BA16BB9BB337}"/>
               </a:ext>
             </a:extLst>
           </p:cNvPr>
@@ -7818,7 +7818,7 @@
           <p:cNvPr id="11" name="core-no-2">
             <a:extLst xmlns:a="http://schemas.openxmlformats.org/drawingml/2006/main">
               <a:ext uri="{FF2B5EF4-FFF2-40B4-BE49-F238E27FC236}">
-                <a16:creationId xmlns:a16="http://schemas.microsoft.com/office/drawing/2014/main" id="{9A8B1AC2-B475-42DD-9F3D-9EEFA392FCDA}"/>
+                <a16:creationId xmlns:a16="http://schemas.microsoft.com/office/drawing/2014/main" id="{508BEF67-CF98-45F8-8E5A-1F82E0E17961}"/>
               </a:ext>
             </a:extLst>
           </p:cNvPr>
@@ -7876,7 +7876,7 @@
           <p:cNvPr id="12" name="core-body-2">
             <a:extLst xmlns:a="http://schemas.openxmlformats.org/drawingml/2006/main">
               <a:ext uri="{FF2B5EF4-FFF2-40B4-BE49-F238E27FC236}">
-                <a16:creationId xmlns:a16="http://schemas.microsoft.com/office/drawing/2014/main" id="{01F3A46F-E433-4580-8BAB-A71E28D04ECD}"/>
+                <a16:creationId xmlns:a16="http://schemas.microsoft.com/office/drawing/2014/main" id="{191A75B1-3849-4E06-A81C-3B8ACC50BCB3}"/>
               </a:ext>
             </a:extLst>
           </p:cNvPr>
@@ -7940,7 +7940,7 @@
           <p:cNvPr id="13" name="s5-takeaway-rule">
             <a:extLst xmlns:a="http://schemas.openxmlformats.org/drawingml/2006/main">
               <a:ext uri="{FF2B5EF4-FFF2-40B4-BE49-F238E27FC236}">
-                <a16:creationId xmlns:a16="http://schemas.microsoft.com/office/drawing/2014/main" id="{F5CDF90F-D5D1-4823-80E9-E64D3D124720}"/>
+                <a16:creationId xmlns:a16="http://schemas.microsoft.com/office/drawing/2014/main" id="{62BD4833-6360-4549-B19A-E51BEBAC2821}"/>
               </a:ext>
             </a:extLst>
           </p:cNvPr>
@@ -7973,7 +7973,7 @@
           <p:cNvPr id="14" name="s5-takeaway">
             <a:extLst xmlns:a="http://schemas.openxmlformats.org/drawingml/2006/main">
               <a:ext uri="{FF2B5EF4-FFF2-40B4-BE49-F238E27FC236}">
-                <a16:creationId xmlns:a16="http://schemas.microsoft.com/office/drawing/2014/main" id="{FC7CC3C3-B798-4860-AB34-B16FBE285BEF}"/>
+                <a16:creationId xmlns:a16="http://schemas.microsoft.com/office/drawing/2014/main" id="{E1C4D8AE-0383-4423-8485-414A57078D8F}"/>
               </a:ext>
             </a:extLst>
           </p:cNvPr>
@@ -8029,7 +8029,7 @@
     </p:spTree>
     <p:extLst>
       <p:ext uri="{BB962C8B-B14F-4D97-AF65-F5344CB8AC3E}">
-        <p14:creationId xmlns:p14="http://schemas.microsoft.com/office/powerpoint/2010/main" val="553362354"/>
+        <p14:creationId xmlns:p14="http://schemas.microsoft.com/office/powerpoint/2010/main" val="857797247"/>
       </p:ext>
     </p:extLst>
   </p:cSld>
@@ -8060,7 +8060,7 @@
           <p:cNvPr id="1" name="s6-rule">
             <a:extLst xmlns:a="http://schemas.openxmlformats.org/drawingml/2006/main">
               <a:ext uri="{FF2B5EF4-FFF2-40B4-BE49-F238E27FC236}">
-                <a16:creationId xmlns:a16="http://schemas.microsoft.com/office/drawing/2014/main" id="{B7C623CF-5CF1-4339-9BBF-653F81593116}"/>
+                <a16:creationId xmlns:a16="http://schemas.microsoft.com/office/drawing/2014/main" id="{F1226B72-041F-4ED3-BB52-04501DE041F7}"/>
               </a:ext>
             </a:extLst>
           </p:cNvPr>
@@ -8093,7 +8093,7 @@
           <p:cNvPr id="2" name="s6-eyebrow">
             <a:extLst xmlns:a="http://schemas.openxmlformats.org/drawingml/2006/main">
               <a:ext uri="{FF2B5EF4-FFF2-40B4-BE49-F238E27FC236}">
-                <a16:creationId xmlns:a16="http://schemas.microsoft.com/office/drawing/2014/main" id="{B3F2F033-432E-4E35-8960-097689251251}"/>
+                <a16:creationId xmlns:a16="http://schemas.microsoft.com/office/drawing/2014/main" id="{6812F875-3125-4206-BE57-6E00D8B3EF5A}"/>
               </a:ext>
             </a:extLst>
           </p:cNvPr>
@@ -8151,7 +8151,7 @@
           <p:cNvPr id="3" name="s6-title">
             <a:extLst xmlns:a="http://schemas.openxmlformats.org/drawingml/2006/main">
               <a:ext uri="{FF2B5EF4-FFF2-40B4-BE49-F238E27FC236}">
-                <a16:creationId xmlns:a16="http://schemas.microsoft.com/office/drawing/2014/main" id="{6584C980-594D-4261-A1E4-C025F8909AE2}"/>
+                <a16:creationId xmlns:a16="http://schemas.microsoft.com/office/drawing/2014/main" id="{41E1789A-FCF9-423B-BCDF-6330F13E0AA8}"/>
               </a:ext>
             </a:extLst>
           </p:cNvPr>
@@ -8209,7 +8209,7 @@
           <p:cNvPr id="4" name="s6-footer">
             <a:extLst xmlns:a="http://schemas.openxmlformats.org/drawingml/2006/main">
               <a:ext uri="{FF2B5EF4-FFF2-40B4-BE49-F238E27FC236}">
-                <a16:creationId xmlns:a16="http://schemas.microsoft.com/office/drawing/2014/main" id="{1B5D09E1-B1FE-4475-B6C5-125033275984}"/>
+                <a16:creationId xmlns:a16="http://schemas.microsoft.com/office/drawing/2014/main" id="{67E47852-8C44-40DC-9CE9-7EE886FE1DDE}"/>
               </a:ext>
             </a:extLst>
           </p:cNvPr>
@@ -8240,7 +8240,7 @@
           <p:cNvPr id="5" name="s6-identity">
             <a:extLst xmlns:a="http://schemas.openxmlformats.org/drawingml/2006/main">
               <a:ext uri="{FF2B5EF4-FFF2-40B4-BE49-F238E27FC236}">
-                <a16:creationId xmlns:a16="http://schemas.microsoft.com/office/drawing/2014/main" id="{46A7FDF2-BE67-47FD-A64E-6C174F1BBF5A}"/>
+                <a16:creationId xmlns:a16="http://schemas.microsoft.com/office/drawing/2014/main" id="{D8B2F5C1-FD1E-4649-9825-77175DE5F2A7}"/>
               </a:ext>
             </a:extLst>
           </p:cNvPr>
@@ -8298,7 +8298,7 @@
           <p:cNvPr id="6" name="core-no-0">
             <a:extLst xmlns:a="http://schemas.openxmlformats.org/drawingml/2006/main">
               <a:ext uri="{FF2B5EF4-FFF2-40B4-BE49-F238E27FC236}">
-                <a16:creationId xmlns:a16="http://schemas.microsoft.com/office/drawing/2014/main" id="{3E4F414F-3170-48F9-9C93-6546DE4BFA61}"/>
+                <a16:creationId xmlns:a16="http://schemas.microsoft.com/office/drawing/2014/main" id="{25472644-54D4-4A27-BB8E-2E3C6FE91785}"/>
               </a:ext>
             </a:extLst>
           </p:cNvPr>
@@ -8356,7 +8356,7 @@
           <p:cNvPr id="7" name="core-label-0">
             <a:extLst xmlns:a="http://schemas.openxmlformats.org/drawingml/2006/main">
               <a:ext uri="{FF2B5EF4-FFF2-40B4-BE49-F238E27FC236}">
-                <a16:creationId xmlns:a16="http://schemas.microsoft.com/office/drawing/2014/main" id="{7A4DAAF8-C9CC-4C55-B38B-6C5BD15D6C04}"/>
+                <a16:creationId xmlns:a16="http://schemas.microsoft.com/office/drawing/2014/main" id="{E63D59DA-2F70-4139-AE09-C150F24F397E}"/>
               </a:ext>
             </a:extLst>
           </p:cNvPr>
@@ -8414,7 +8414,7 @@
           <p:cNvPr id="8" name="core-body-0">
             <a:extLst xmlns:a="http://schemas.openxmlformats.org/drawingml/2006/main">
               <a:ext uri="{FF2B5EF4-FFF2-40B4-BE49-F238E27FC236}">
-                <a16:creationId xmlns:a16="http://schemas.microsoft.com/office/drawing/2014/main" id="{BADECAD0-CE45-4C5A-9245-42C16832AA8F}"/>
+                <a16:creationId xmlns:a16="http://schemas.microsoft.com/office/drawing/2014/main" id="{C997F654-8ABD-4403-A982-B82AA3342ECC}"/>
               </a:ext>
             </a:extLst>
           </p:cNvPr>
@@ -8478,7 +8478,7 @@
           <p:cNvPr id="9" name="core-no-1">
             <a:extLst xmlns:a="http://schemas.openxmlformats.org/drawingml/2006/main">
               <a:ext uri="{FF2B5EF4-FFF2-40B4-BE49-F238E27FC236}">
-                <a16:creationId xmlns:a16="http://schemas.microsoft.com/office/drawing/2014/main" id="{DB9A4C0A-4E01-4F9D-82F2-B0B50A2C7677}"/>
+                <a16:creationId xmlns:a16="http://schemas.microsoft.com/office/drawing/2014/main" id="{D8C35073-C372-44A2-BFB9-AB534A9562FB}"/>
               </a:ext>
             </a:extLst>
           </p:cNvPr>
@@ -8536,7 +8536,7 @@
           <p:cNvPr id="10" name="core-body-1">
             <a:extLst xmlns:a="http://schemas.openxmlformats.org/drawingml/2006/main">
               <a:ext uri="{FF2B5EF4-FFF2-40B4-BE49-F238E27FC236}">
-                <a16:creationId xmlns:a16="http://schemas.microsoft.com/office/drawing/2014/main" id="{127E7179-908B-4ACF-A9B6-99E6F3426C4E}"/>
+                <a16:creationId xmlns:a16="http://schemas.microsoft.com/office/drawing/2014/main" id="{F8E994B1-101B-42CE-B5D2-384EC2E889EC}"/>
               </a:ext>
             </a:extLst>
           </p:cNvPr>
@@ -8600,7 +8600,7 @@
           <p:cNvPr id="11" name="s6-takeaway-rule">
             <a:extLst xmlns:a="http://schemas.openxmlformats.org/drawingml/2006/main">
               <a:ext uri="{FF2B5EF4-FFF2-40B4-BE49-F238E27FC236}">
-                <a16:creationId xmlns:a16="http://schemas.microsoft.com/office/drawing/2014/main" id="{AF69B4AC-F52E-4B02-B8AB-B1F28E9FFE11}"/>
+                <a16:creationId xmlns:a16="http://schemas.microsoft.com/office/drawing/2014/main" id="{082B1907-4E29-4F38-8E46-94C6C0BFC68A}"/>
               </a:ext>
             </a:extLst>
           </p:cNvPr>
@@ -8633,7 +8633,7 @@
           <p:cNvPr id="12" name="s6-takeaway">
             <a:extLst xmlns:a="http://schemas.openxmlformats.org/drawingml/2006/main">
               <a:ext uri="{FF2B5EF4-FFF2-40B4-BE49-F238E27FC236}">
-                <a16:creationId xmlns:a16="http://schemas.microsoft.com/office/drawing/2014/main" id="{CBC4DB9D-6A56-44CD-ABB8-25162003392B}"/>
+                <a16:creationId xmlns:a16="http://schemas.microsoft.com/office/drawing/2014/main" id="{7B31BED9-38A6-41CE-92F4-24446BEA360A}"/>
               </a:ext>
             </a:extLst>
           </p:cNvPr>
@@ -8689,7 +8689,7 @@
     </p:spTree>
     <p:extLst>
       <p:ext uri="{BB962C8B-B14F-4D97-AF65-F5344CB8AC3E}">
-        <p14:creationId xmlns:p14="http://schemas.microsoft.com/office/powerpoint/2010/main" val="247285912"/>
+        <p14:creationId xmlns:p14="http://schemas.microsoft.com/office/powerpoint/2010/main" val="28820835"/>
       </p:ext>
     </p:extLst>
   </p:cSld>
@@ -8720,7 +8720,7 @@
           <p:cNvPr id="1" name="s7-rule">
             <a:extLst xmlns:a="http://schemas.openxmlformats.org/drawingml/2006/main">
               <a:ext uri="{FF2B5EF4-FFF2-40B4-BE49-F238E27FC236}">
-                <a16:creationId xmlns:a16="http://schemas.microsoft.com/office/drawing/2014/main" id="{5EFAF569-2E40-4FE2-8811-0F85876A6DBF}"/>
+                <a16:creationId xmlns:a16="http://schemas.microsoft.com/office/drawing/2014/main" id="{9E80B193-2C70-43AC-9662-F110334D5312}"/>
               </a:ext>
             </a:extLst>
           </p:cNvPr>
@@ -8753,7 +8753,7 @@
           <p:cNvPr id="2" name="s7-eyebrow">
             <a:extLst xmlns:a="http://schemas.openxmlformats.org/drawingml/2006/main">
               <a:ext uri="{FF2B5EF4-FFF2-40B4-BE49-F238E27FC236}">
-                <a16:creationId xmlns:a16="http://schemas.microsoft.com/office/drawing/2014/main" id="{7D4F48E3-C77F-4343-BD32-E996415C092A}"/>
+                <a16:creationId xmlns:a16="http://schemas.microsoft.com/office/drawing/2014/main" id="{97A1CD10-A9CE-4BF4-8CA4-ADF7F04260BF}"/>
               </a:ext>
             </a:extLst>
           </p:cNvPr>
@@ -8811,7 +8811,7 @@
           <p:cNvPr id="3" name="s7-title">
             <a:extLst xmlns:a="http://schemas.openxmlformats.org/drawingml/2006/main">
               <a:ext uri="{FF2B5EF4-FFF2-40B4-BE49-F238E27FC236}">
-                <a16:creationId xmlns:a16="http://schemas.microsoft.com/office/drawing/2014/main" id="{EB16EB4E-7F87-411B-978E-509A05D244F8}"/>
+                <a16:creationId xmlns:a16="http://schemas.microsoft.com/office/drawing/2014/main" id="{DCFBE3D8-4A06-4ECA-B3DB-2587193260BA}"/>
               </a:ext>
             </a:extLst>
           </p:cNvPr>
@@ -8869,7 +8869,7 @@
           <p:cNvPr id="4" name="s7-footer">
             <a:extLst xmlns:a="http://schemas.openxmlformats.org/drawingml/2006/main">
               <a:ext uri="{FF2B5EF4-FFF2-40B4-BE49-F238E27FC236}">
-                <a16:creationId xmlns:a16="http://schemas.microsoft.com/office/drawing/2014/main" id="{5AF2479F-C714-4900-AB25-DA18B3C7FAE0}"/>
+                <a16:creationId xmlns:a16="http://schemas.microsoft.com/office/drawing/2014/main" id="{03BBC823-E733-4C43-97AF-8726EEFF8157}"/>
               </a:ext>
             </a:extLst>
           </p:cNvPr>
@@ -8900,7 +8900,7 @@
           <p:cNvPr id="5" name="s7-identity">
             <a:extLst xmlns:a="http://schemas.openxmlformats.org/drawingml/2006/main">
               <a:ext uri="{FF2B5EF4-FFF2-40B4-BE49-F238E27FC236}">
-                <a16:creationId xmlns:a16="http://schemas.microsoft.com/office/drawing/2014/main" id="{8EFEDD63-3748-4ED9-A65E-50E93C5C37AC}"/>
+                <a16:creationId xmlns:a16="http://schemas.microsoft.com/office/drawing/2014/main" id="{F42B13D0-82EE-4505-8B73-76BEF9220E0B}"/>
               </a:ext>
             </a:extLst>
           </p:cNvPr>
@@ -8958,7 +8958,7 @@
           <p:cNvPr id="6" name="core-no-0">
             <a:extLst xmlns:a="http://schemas.openxmlformats.org/drawingml/2006/main">
               <a:ext uri="{FF2B5EF4-FFF2-40B4-BE49-F238E27FC236}">
-                <a16:creationId xmlns:a16="http://schemas.microsoft.com/office/drawing/2014/main" id="{792BAA8B-CA29-4D42-A871-0E06856B2984}"/>
+                <a16:creationId xmlns:a16="http://schemas.microsoft.com/office/drawing/2014/main" id="{3B063500-D7D1-44DE-B163-9295C90EF76C}"/>
               </a:ext>
             </a:extLst>
           </p:cNvPr>
@@ -9016,7 +9016,7 @@
           <p:cNvPr id="7" name="core-label-0">
             <a:extLst xmlns:a="http://schemas.openxmlformats.org/drawingml/2006/main">
               <a:ext uri="{FF2B5EF4-FFF2-40B4-BE49-F238E27FC236}">
-                <a16:creationId xmlns:a16="http://schemas.microsoft.com/office/drawing/2014/main" id="{D6CADCDF-5319-4120-A264-98851381C13A}"/>
+                <a16:creationId xmlns:a16="http://schemas.microsoft.com/office/drawing/2014/main" id="{AC075288-47CF-48F7-B42E-B730C009E05B}"/>
               </a:ext>
             </a:extLst>
           </p:cNvPr>
@@ -9074,7 +9074,7 @@
           <p:cNvPr id="8" name="core-body-0">
             <a:extLst xmlns:a="http://schemas.openxmlformats.org/drawingml/2006/main">
               <a:ext uri="{FF2B5EF4-FFF2-40B4-BE49-F238E27FC236}">
-                <a16:creationId xmlns:a16="http://schemas.microsoft.com/office/drawing/2014/main" id="{7AC3B98D-8D2E-46DB-94EC-DEAFEEFB081D}"/>
+                <a16:creationId xmlns:a16="http://schemas.microsoft.com/office/drawing/2014/main" id="{30D8DCCD-A778-4BB7-A674-0BA0729BCC3E}"/>
               </a:ext>
             </a:extLst>
           </p:cNvPr>
@@ -9138,7 +9138,7 @@
           <p:cNvPr id="9" name="core-no-1">
             <a:extLst xmlns:a="http://schemas.openxmlformats.org/drawingml/2006/main">
               <a:ext uri="{FF2B5EF4-FFF2-40B4-BE49-F238E27FC236}">
-                <a16:creationId xmlns:a16="http://schemas.microsoft.com/office/drawing/2014/main" id="{052F6BEE-B4ED-4AA7-8A6D-3BB408DDF77B}"/>
+                <a16:creationId xmlns:a16="http://schemas.microsoft.com/office/drawing/2014/main" id="{0A79F08D-2075-4A7A-8308-3482D46669D6}"/>
               </a:ext>
             </a:extLst>
           </p:cNvPr>
@@ -9196,7 +9196,7 @@
           <p:cNvPr id="10" name="core-body-1">
             <a:extLst xmlns:a="http://schemas.openxmlformats.org/drawingml/2006/main">
               <a:ext uri="{FF2B5EF4-FFF2-40B4-BE49-F238E27FC236}">
-                <a16:creationId xmlns:a16="http://schemas.microsoft.com/office/drawing/2014/main" id="{C8C671A7-CA92-4630-863C-04366B0A6310}"/>
+                <a16:creationId xmlns:a16="http://schemas.microsoft.com/office/drawing/2014/main" id="{9774E534-B7CE-4241-AE9A-79C4C9CF21B3}"/>
               </a:ext>
             </a:extLst>
           </p:cNvPr>
@@ -9260,7 +9260,7 @@
           <p:cNvPr id="11" name="s7-takeaway-rule">
             <a:extLst xmlns:a="http://schemas.openxmlformats.org/drawingml/2006/main">
               <a:ext uri="{FF2B5EF4-FFF2-40B4-BE49-F238E27FC236}">
-                <a16:creationId xmlns:a16="http://schemas.microsoft.com/office/drawing/2014/main" id="{DB12887F-D171-4A7C-94CF-A2ACBBBFBA0F}"/>
+                <a16:creationId xmlns:a16="http://schemas.microsoft.com/office/drawing/2014/main" id="{D2537874-4563-49BA-87E1-C393EED1A35B}"/>
               </a:ext>
             </a:extLst>
           </p:cNvPr>
@@ -9293,7 +9293,7 @@
           <p:cNvPr id="12" name="s7-takeaway">
             <a:extLst xmlns:a="http://schemas.openxmlformats.org/drawingml/2006/main">
               <a:ext uri="{FF2B5EF4-FFF2-40B4-BE49-F238E27FC236}">
-                <a16:creationId xmlns:a16="http://schemas.microsoft.com/office/drawing/2014/main" id="{DD9C3D6A-A403-493D-8044-0B35187E815B}"/>
+                <a16:creationId xmlns:a16="http://schemas.microsoft.com/office/drawing/2014/main" id="{9CBC8C86-32B2-4394-90B5-0F8988ED1D1C}"/>
               </a:ext>
             </a:extLst>
           </p:cNvPr>
@@ -9349,7 +9349,7 @@
     </p:spTree>
     <p:extLst>
       <p:ext uri="{BB962C8B-B14F-4D97-AF65-F5344CB8AC3E}">
-        <p14:creationId xmlns:p14="http://schemas.microsoft.com/office/powerpoint/2010/main" val="1325812801"/>
+        <p14:creationId xmlns:p14="http://schemas.microsoft.com/office/powerpoint/2010/main" val="1021409827"/>
       </p:ext>
     </p:extLst>
   </p:cSld>
@@ -9380,7 +9380,7 @@
           <p:cNvPr id="1" name="s8-rule">
             <a:extLst xmlns:a="http://schemas.openxmlformats.org/drawingml/2006/main">
               <a:ext uri="{FF2B5EF4-FFF2-40B4-BE49-F238E27FC236}">
-                <a16:creationId xmlns:a16="http://schemas.microsoft.com/office/drawing/2014/main" id="{BED04DF3-892D-44E1-989E-FD0ABC1AA950}"/>
+                <a16:creationId xmlns:a16="http://schemas.microsoft.com/office/drawing/2014/main" id="{84422DFF-CCF6-416B-88C6-93BBC053752D}"/>
               </a:ext>
             </a:extLst>
           </p:cNvPr>
@@ -9413,7 +9413,7 @@
           <p:cNvPr id="2" name="s8-eyebrow">
             <a:extLst xmlns:a="http://schemas.openxmlformats.org/drawingml/2006/main">
               <a:ext uri="{FF2B5EF4-FFF2-40B4-BE49-F238E27FC236}">
-                <a16:creationId xmlns:a16="http://schemas.microsoft.com/office/drawing/2014/main" id="{7A88C10C-531A-40F0-992F-411B6D7DD842}"/>
+                <a16:creationId xmlns:a16="http://schemas.microsoft.com/office/drawing/2014/main" id="{1F33C49F-68C2-4DC4-A6F0-8159875B9074}"/>
               </a:ext>
             </a:extLst>
           </p:cNvPr>
@@ -9471,7 +9471,7 @@
           <p:cNvPr id="3" name="s8-title">
             <a:extLst xmlns:a="http://schemas.openxmlformats.org/drawingml/2006/main">
               <a:ext uri="{FF2B5EF4-FFF2-40B4-BE49-F238E27FC236}">
-                <a16:creationId xmlns:a16="http://schemas.microsoft.com/office/drawing/2014/main" id="{24D4F147-8E8C-477B-ABC2-BBF065C24944}"/>
+                <a16:creationId xmlns:a16="http://schemas.microsoft.com/office/drawing/2014/main" id="{9EBB0953-83A7-447F-BB6E-CF9825202AAD}"/>
               </a:ext>
             </a:extLst>
           </p:cNvPr>
@@ -9529,7 +9529,7 @@
           <p:cNvPr id="4" name="s8-footer">
             <a:extLst xmlns:a="http://schemas.openxmlformats.org/drawingml/2006/main">
               <a:ext uri="{FF2B5EF4-FFF2-40B4-BE49-F238E27FC236}">
-                <a16:creationId xmlns:a16="http://schemas.microsoft.com/office/drawing/2014/main" id="{1EDE59A4-FD1A-41FC-831B-F67FDF3498DB}"/>
+                <a16:creationId xmlns:a16="http://schemas.microsoft.com/office/drawing/2014/main" id="{C4ADBCC9-43B6-41E4-9A88-ABC367D67FF7}"/>
               </a:ext>
             </a:extLst>
           </p:cNvPr>
@@ -9560,7 +9560,7 @@
           <p:cNvPr id="5" name="s8-identity">
             <a:extLst xmlns:a="http://schemas.openxmlformats.org/drawingml/2006/main">
               <a:ext uri="{FF2B5EF4-FFF2-40B4-BE49-F238E27FC236}">
-                <a16:creationId xmlns:a16="http://schemas.microsoft.com/office/drawing/2014/main" id="{9ED9E36F-6233-4636-B13E-1C224A98A739}"/>
+                <a16:creationId xmlns:a16="http://schemas.microsoft.com/office/drawing/2014/main" id="{BB2E0375-DE7F-41F1-81FD-8241627E53B4}"/>
               </a:ext>
             </a:extLst>
           </p:cNvPr>
@@ -9618,7 +9618,7 @@
           <p:cNvPr id="6" name="core-no-0">
             <a:extLst xmlns:a="http://schemas.openxmlformats.org/drawingml/2006/main">
               <a:ext uri="{FF2B5EF4-FFF2-40B4-BE49-F238E27FC236}">
-                <a16:creationId xmlns:a16="http://schemas.microsoft.com/office/drawing/2014/main" id="{1F76C501-DD6B-4A65-9F66-48F67F9EB281}"/>
+                <a16:creationId xmlns:a16="http://schemas.microsoft.com/office/drawing/2014/main" id="{FCFDA59C-5ED2-429D-B2D2-52EAE4231B81}"/>
               </a:ext>
             </a:extLst>
           </p:cNvPr>
@@ -9676,7 +9676,7 @@
           <p:cNvPr id="7" name="core-label-0">
             <a:extLst xmlns:a="http://schemas.openxmlformats.org/drawingml/2006/main">
               <a:ext uri="{FF2B5EF4-FFF2-40B4-BE49-F238E27FC236}">
-                <a16:creationId xmlns:a16="http://schemas.microsoft.com/office/drawing/2014/main" id="{B0757CEB-0F88-4CCE-9C08-04CCAF2F09AB}"/>
+                <a16:creationId xmlns:a16="http://schemas.microsoft.com/office/drawing/2014/main" id="{D614D8EC-7B1D-4A20-8C68-6958A4F973BB}"/>
               </a:ext>
             </a:extLst>
           </p:cNvPr>
@@ -9734,7 +9734,7 @@
           <p:cNvPr id="8" name="core-body-0">
             <a:extLst xmlns:a="http://schemas.openxmlformats.org/drawingml/2006/main">
               <a:ext uri="{FF2B5EF4-FFF2-40B4-BE49-F238E27FC236}">
-                <a16:creationId xmlns:a16="http://schemas.microsoft.com/office/drawing/2014/main" id="{539ABF19-FE2B-466E-8382-6671CC361FF1}"/>
+                <a16:creationId xmlns:a16="http://schemas.microsoft.com/office/drawing/2014/main" id="{2EAF5EC6-47C7-4398-A4C8-100730F19BD1}"/>
               </a:ext>
             </a:extLst>
           </p:cNvPr>
@@ -9798,7 +9798,7 @@
           <p:cNvPr id="9" name="s8-takeaway-rule">
             <a:extLst xmlns:a="http://schemas.openxmlformats.org/drawingml/2006/main">
               <a:ext uri="{FF2B5EF4-FFF2-40B4-BE49-F238E27FC236}">
-                <a16:creationId xmlns:a16="http://schemas.microsoft.com/office/drawing/2014/main" id="{664218B8-9437-4FC4-B155-CD0712336C98}"/>
+                <a16:creationId xmlns:a16="http://schemas.microsoft.com/office/drawing/2014/main" id="{83DCA925-B329-410A-A562-BD780510F57D}"/>
               </a:ext>
             </a:extLst>
           </p:cNvPr>
@@ -9831,7 +9831,7 @@
           <p:cNvPr id="10" name="s8-takeaway">
             <a:extLst xmlns:a="http://schemas.openxmlformats.org/drawingml/2006/main">
               <a:ext uri="{FF2B5EF4-FFF2-40B4-BE49-F238E27FC236}">
-                <a16:creationId xmlns:a16="http://schemas.microsoft.com/office/drawing/2014/main" id="{AA8AB400-A74B-492E-A13E-44F5465668DC}"/>
+                <a16:creationId xmlns:a16="http://schemas.microsoft.com/office/drawing/2014/main" id="{0E212B20-6023-48BE-AEC7-59D2275067AA}"/>
               </a:ext>
             </a:extLst>
           </p:cNvPr>
@@ -9887,7 +9887,7 @@
     </p:spTree>
     <p:extLst>
       <p:ext uri="{BB962C8B-B14F-4D97-AF65-F5344CB8AC3E}">
-        <p14:creationId xmlns:p14="http://schemas.microsoft.com/office/powerpoint/2010/main" val="1839236316"/>
+        <p14:creationId xmlns:p14="http://schemas.microsoft.com/office/powerpoint/2010/main" val="1824822174"/>
       </p:ext>
     </p:extLst>
   </p:cSld>
@@ -9918,7 +9918,7 @@
           <p:cNvPr id="1" name="s9-rule">
             <a:extLst xmlns:a="http://schemas.openxmlformats.org/drawingml/2006/main">
               <a:ext uri="{FF2B5EF4-FFF2-40B4-BE49-F238E27FC236}">
-                <a16:creationId xmlns:a16="http://schemas.microsoft.com/office/drawing/2014/main" id="{22EAD110-C6FC-4493-A8EF-CC0B98CCEE25}"/>
+                <a16:creationId xmlns:a16="http://schemas.microsoft.com/office/drawing/2014/main" id="{A0743E4A-56DB-4DF5-9C08-CADE5D8B1265}"/>
               </a:ext>
             </a:extLst>
           </p:cNvPr>
@@ -9951,7 +9951,7 @@
           <p:cNvPr id="2" name="s9-eyebrow">
             <a:extLst xmlns:a="http://schemas.openxmlformats.org/drawingml/2006/main">
               <a:ext uri="{FF2B5EF4-FFF2-40B4-BE49-F238E27FC236}">
-                <a16:creationId xmlns:a16="http://schemas.microsoft.com/office/drawing/2014/main" id="{906B52A8-43F6-4B8F-8D25-AE4FAED619AE}"/>
+                <a16:creationId xmlns:a16="http://schemas.microsoft.com/office/drawing/2014/main" id="{29CD6CB2-8C95-40B0-B094-24C9D416A935}"/>
               </a:ext>
             </a:extLst>
           </p:cNvPr>
@@ -10009,7 +10009,7 @@
           <p:cNvPr id="3" name="s9-title">
             <a:extLst xmlns:a="http://schemas.openxmlformats.org/drawingml/2006/main">
               <a:ext uri="{FF2B5EF4-FFF2-40B4-BE49-F238E27FC236}">
-                <a16:creationId xmlns:a16="http://schemas.microsoft.com/office/drawing/2014/main" id="{4370CC4F-5F50-40B0-8611-70CD7F5250EE}"/>
+                <a16:creationId xmlns:a16="http://schemas.microsoft.com/office/drawing/2014/main" id="{904EDF4F-93E1-4AC6-A685-0125624CCB9C}"/>
               </a:ext>
             </a:extLst>
           </p:cNvPr>
@@ -10067,7 +10067,7 @@
           <p:cNvPr id="4" name="s9-footer">
             <a:extLst xmlns:a="http://schemas.openxmlformats.org/drawingml/2006/main">
               <a:ext uri="{FF2B5EF4-FFF2-40B4-BE49-F238E27FC236}">
-                <a16:creationId xmlns:a16="http://schemas.microsoft.com/office/drawing/2014/main" id="{FBFE360A-FE60-4742-A472-689204BF5B4A}"/>
+                <a16:creationId xmlns:a16="http://schemas.microsoft.com/office/drawing/2014/main" id="{F283DE6E-666C-44F0-952E-0E910D901B23}"/>
               </a:ext>
             </a:extLst>
           </p:cNvPr>
@@ -10098,7 +10098,7 @@
           <p:cNvPr id="5" name="s9-identity">
             <a:extLst xmlns:a="http://schemas.openxmlformats.org/drawingml/2006/main">
               <a:ext uri="{FF2B5EF4-FFF2-40B4-BE49-F238E27FC236}">
-                <a16:creationId xmlns:a16="http://schemas.microsoft.com/office/drawing/2014/main" id="{1CE246F5-F55B-4342-9F70-9676EC8D6341}"/>
+                <a16:creationId xmlns:a16="http://schemas.microsoft.com/office/drawing/2014/main" id="{2F613567-5998-423A-AB94-6B0263563500}"/>
               </a:ext>
             </a:extLst>
           </p:cNvPr>
@@ -10156,7 +10156,7 @@
           <p:cNvPr id="6" name="core-no-0">
             <a:extLst xmlns:a="http://schemas.openxmlformats.org/drawingml/2006/main">
               <a:ext uri="{FF2B5EF4-FFF2-40B4-BE49-F238E27FC236}">
-                <a16:creationId xmlns:a16="http://schemas.microsoft.com/office/drawing/2014/main" id="{A20E0541-BD18-4DED-B166-AF0020C4BCC9}"/>
+                <a16:creationId xmlns:a16="http://schemas.microsoft.com/office/drawing/2014/main" id="{05482F01-C33F-4E4C-96FB-5405A58DACD6}"/>
               </a:ext>
             </a:extLst>
           </p:cNvPr>
@@ -10214,7 +10214,7 @@
           <p:cNvPr id="7" name="core-label-0">
             <a:extLst xmlns:a="http://schemas.openxmlformats.org/drawingml/2006/main">
               <a:ext uri="{FF2B5EF4-FFF2-40B4-BE49-F238E27FC236}">
-                <a16:creationId xmlns:a16="http://schemas.microsoft.com/office/drawing/2014/main" id="{FC58D60F-253F-4468-B9F4-6BDB8FD91B9E}"/>
+                <a16:creationId xmlns:a16="http://schemas.microsoft.com/office/drawing/2014/main" id="{EC3707EA-B5C7-4633-9825-E76204983832}"/>
               </a:ext>
             </a:extLst>
           </p:cNvPr>
@@ -10272,7 +10272,7 @@
           <p:cNvPr id="8" name="core-body-0">
             <a:extLst xmlns:a="http://schemas.openxmlformats.org/drawingml/2006/main">
               <a:ext uri="{FF2B5EF4-FFF2-40B4-BE49-F238E27FC236}">
-                <a16:creationId xmlns:a16="http://schemas.microsoft.com/office/drawing/2014/main" id="{CBEFAC4D-F7D5-4987-BD83-DFCF9240C09E}"/>
+                <a16:creationId xmlns:a16="http://schemas.microsoft.com/office/drawing/2014/main" id="{853221E9-F4DF-47CC-A8B4-98417F721D48}"/>
               </a:ext>
             </a:extLst>
           </p:cNvPr>
@@ -10336,7 +10336,7 @@
           <p:cNvPr id="9" name="s9-takeaway-rule">
             <a:extLst xmlns:a="http://schemas.openxmlformats.org/drawingml/2006/main">
               <a:ext uri="{FF2B5EF4-FFF2-40B4-BE49-F238E27FC236}">
-                <a16:creationId xmlns:a16="http://schemas.microsoft.com/office/drawing/2014/main" id="{D95E68DE-948A-4BF5-9854-25DF123A87B6}"/>
+                <a16:creationId xmlns:a16="http://schemas.microsoft.com/office/drawing/2014/main" id="{657E7DBC-C859-43C7-95BA-BA9C329F8B52}"/>
               </a:ext>
             </a:extLst>
           </p:cNvPr>
@@ -10369,7 +10369,7 @@
           <p:cNvPr id="10" name="s9-takeaway">
             <a:extLst xmlns:a="http://schemas.openxmlformats.org/drawingml/2006/main">
               <a:ext uri="{FF2B5EF4-FFF2-40B4-BE49-F238E27FC236}">
-                <a16:creationId xmlns:a16="http://schemas.microsoft.com/office/drawing/2014/main" id="{4879DF1B-8968-4539-AF84-145F4F66B18E}"/>
+                <a16:creationId xmlns:a16="http://schemas.microsoft.com/office/drawing/2014/main" id="{570073E6-D2BD-476D-92C6-BE202914C938}"/>
               </a:ext>
             </a:extLst>
           </p:cNvPr>
@@ -10425,7 +10425,7 @@
     </p:spTree>
     <p:extLst>
       <p:ext uri="{BB962C8B-B14F-4D97-AF65-F5344CB8AC3E}">
-        <p14:creationId xmlns:p14="http://schemas.microsoft.com/office/powerpoint/2010/main" val="1628521347"/>
+        <p14:creationId xmlns:p14="http://schemas.microsoft.com/office/powerpoint/2010/main" val="1666618458"/>
       </p:ext>
     </p:extLst>
   </p:cSld>
